--- a/downloads/presentations/modules/lesson-53-data-quality-engineering-for-ai.pptx
+++ b/downloads/presentations/modules/lesson-53-data-quality-engineering-for-ai.pptx
@@ -25,9 +25,11 @@
     <p:sldId id="273" r:id="rId19"/>
     <p:sldId id="274" r:id="rId20"/>
     <p:sldId id="275" r:id="rId21"/>
+    <p:sldId id="276" r:id="rId22"/>
+    <p:sldId id="277" r:id="rId23"/>
   </p:sldIdLst>
   <p:notesMasterIdLst>
-    <p:notesMasterId r:id="rId22"/>
+    <p:notesMasterId r:id="rId24"/>
   </p:notesMasterIdLst>
   <p:sldSz cx="12192000" cy="6858000"/>
   <p:notesSz cx="6858000" cy="12192000"/>
@@ -610,10 +612,9 @@
           <a:p>
             <a:r>
               <a:rPr lang="en-US" dirty="0"/>
-              <a:t>Risks, Failure Modes, and Guardrails
-Confident output from weak data. AI may produce polished outputs from incomplete or biased data. Guardrails include uncertainty labeling, source review, and limits on use.
-Fitness-for-use mismatch. Data suitable for one purpose may be unsafe for another. Guardrails include use-case-specific quality criteria and approval conditions.
-Unmonitored drift. Data patterns may change after deployment. Guardrails include drift indicators, periodic review, and retraining or recalibration triggers.</a:t>
+              <a:t>Public Health Example
+A health department may use AI to identify cases needing rapid follow-up. If demographic fields are missing more often for some populations, the model may be less reliable for those groups. If the data feed from certain clinics is delayed, the prioritization queue may reflect reporting timeliness rather than true need. A data quality review can reveal these issues before the tool is deployed.
+A community health assessment team may use AI to summarize survey comments and administrative data. If survey responses are not representative of residents with limited English proficiency, unstable housing, disability, or limited internet access, the AI-generated themes may miss important community needs. Data quality engineering should include equity and representativeness review.</a:t>
             </a:r>
             <a:endParaRPr lang="en-US" dirty="0"/>
           </a:p>
@@ -701,8 +702,10 @@
           <a:p>
             <a:r>
               <a:rPr lang="en-US" dirty="0"/>
-              <a:t>Risks, Failure Modes, and Guardrails
-Equity blind spots. Missingness and underrepresentation may affect some groups more than others. Guardrails include subgroup review, community context, and documentation of limitations.</a:t>
+              <a:t>Technical Deep Dive
+Data quality engineering begins by defining required fields and acceptable thresholds for the intended use. For an AI-supported case triage workflow, required fields may include condition, lab evidence, onset date, specimen date, jurisdiction, age, pregnancy status, hospitalization, and contact information. The agency should decide which missing fields stop automated support, which trigger a warning, and which can be handled through human review.
+Quality measurement should include completeness, timeliness, validity, consistency, uniqueness, accuracy, and representativeness. Some dimensions can be measured automatically. Others require program knowledge, source review, or comparison to external benchmarks. Data quality should not be treated as a one-time predeployment activity. It should be monitored throughout the AI lifecycle.
+Documentation is essential. A data quality plan should describe known limitations, review thresholds, monitoring frequency, responsible owners, escalation criteria, and decisions about acceptable use. When data quality is insufficient, the correct response may be to restrict the use case, add human review, improve the data pipeline, delay deployment, or avoid AI use for that workflow.</a:t>
             </a:r>
             <a:endParaRPr lang="en-US" dirty="0"/>
           </a:p>
@@ -790,8 +793,10 @@
           <a:p>
             <a:r>
               <a:rPr lang="en-US" dirty="0"/>
-              <a:t>Application to AI-Supported Workflows
-Generative AI may summarize datasets or records, but the output must reflect missingness and uncertainty. Predictive analytics depend heavily on feature quality, label quality, and representative training data. NLP may be affected by language variation, abbreviations, and documentation practices. RAG depends on document quality, metadata, and currency. Agentic AI should be blocked from acting automatically when required data are missing or quality thresholds are not met.</a:t>
+              <a:t>Risks, Failure Modes, and Guardrails
+Confident output from weak data. AI may produce polished outputs from incomplete or biased data. Guardrails include uncertainty labeling, source review, and limits on use.
+Fitness-for-use mismatch. Data suitable for one purpose may be unsafe for another. Guardrails include use-case-specific quality criteria and approval conditions.
+Unmonitored drift. Data patterns may change after deployment. Guardrails include drift indicators, periodic review, and retraining or recalibration triggers.</a:t>
             </a:r>
             <a:endParaRPr lang="en-US" dirty="0"/>
           </a:p>
@@ -879,10 +884,8 @@
           <a:p>
             <a:r>
               <a:rPr lang="en-US" dirty="0"/>
-              <a:t>Reflection Questions
-Which data quality problems most often affect your program area?
-Which missing fields would make an AI output unsafe or unreliable?
-Which populations or settings may be underrepresented in the data?</a:t>
+              <a:t>Risks, Failure Modes, and Guardrails
+Equity blind spots. Missingness and underrepresentation may affect some groups more than others. Guardrails include subgroup review, community context, and documentation of limitations.</a:t>
             </a:r>
             <a:endParaRPr lang="en-US" dirty="0"/>
           </a:p>
@@ -970,9 +973,8 @@
           <a:p>
             <a:r>
               <a:rPr lang="en-US" dirty="0"/>
-              <a:t>Reflection Questions
-How would staff detect data drift?
-Who has authority to pause or limit AI use when data quality is insufficient?</a:t>
+              <a:t>Application to AI-Supported Workflows
+Generative AI may summarize datasets or records, but the output must reflect missingness and uncertainty. Predictive analytics depend heavily on feature quality, label quality, and representative training data. NLP may be affected by language variation, abbreviations, and documentation practices. RAG depends on document quality, metadata, and currency. Agentic AI should be blocked from acting automatically when required data are missing or quality thresholds are not met.</a:t>
             </a:r>
             <a:endParaRPr lang="en-US" dirty="0"/>
           </a:p>
@@ -1060,8 +1062,10 @@
           <a:p>
             <a:r>
               <a:rPr lang="en-US" dirty="0"/>
-              <a:t>Practical Exercise
-Create a data quality review plan for one AI-supported workflow. Include the use case, required fields, quality dimensions, thresholds or review rules, known limitations, equity concerns, drift monitoring, documentation expectations, and escalation criteria.</a:t>
+              <a:t>Reflection Questions
+Which data quality problems most often affect your program area?
+Which missing fields would make an AI output unsafe or unreliable?
+Which populations or settings may be underrepresented in the data?</a:t>
             </a:r>
             <a:endParaRPr lang="en-US" dirty="0"/>
           </a:p>
@@ -1149,10 +1153,9 @@
           <a:p>
             <a:r>
               <a:rPr lang="en-US" dirty="0"/>
-              <a:t>Expected Artifact or Evidence
-Data quality review plan
-Data quality checklist
-Thresholds or review criteria</a:t>
+              <a:t>Reflection Questions
+How would staff detect data drift?
+Who has authority to pause or limit AI use when data quality is insufficient?</a:t>
             </a:r>
             <a:endParaRPr lang="en-US" dirty="0"/>
           </a:p>
@@ -1240,8 +1243,8 @@
           <a:p>
             <a:r>
               <a:rPr lang="en-US" dirty="0"/>
-              <a:t>Expected Artifact or Evidence
-Known limitations statement</a:t>
+              <a:t>Practical Exercise
+Create a data quality review plan for one AI-supported workflow. Include the use case, required fields, quality dimensions, thresholds or review rules, known limitations, equity concerns, drift monitoring, documentation expectations, and escalation criteria.</a:t>
             </a:r>
             <a:endParaRPr lang="en-US" dirty="0"/>
           </a:p>
@@ -1329,11 +1332,10 @@
           <a:p>
             <a:r>
               <a:rPr lang="en-US" dirty="0"/>
-              <a:t>Expected Assignment
+              <a:t>Expected Artifact or Evidence
 Data quality review plan
 Data quality checklist
-Thresholds or review criteria
-Known limitations statement</a:t>
+Thresholds or review criteria</a:t>
             </a:r>
             <a:endParaRPr lang="en-US" dirty="0"/>
           </a:p>
@@ -1421,12 +1423,8 @@
           <a:p>
             <a:r>
               <a:rPr lang="en-US" dirty="0"/>
-              <a:t>Knowledge Check
-1. What does fitness for use mean?
-2. Why can poor data quality be dangerous in AI-supported workflows?
-3. What is data drift?
-4. Which item belongs in a data quality review plan?
-5. When should an AI use case be paused or limited?</a:t>
+              <a:t>Expected Artifact or Evidence
+Known limitations statement</a:t>
             </a:r>
             <a:endParaRPr lang="en-US" dirty="0"/>
           </a:p>
@@ -1606,11 +1604,11 @@
           <a:p>
             <a:r>
               <a:rPr lang="en-US" dirty="0"/>
-              <a:t>References and Resources
-CDC surveillance and data quality resources
-CDC Public Health Data Strategy: https://www.cdc.gov/public-health-data-strategy/php/about/index.html
-NIST AI Risk Management Framework: https://www.nist.gov/itl/ai-risk-management-framework
-Agency data governance policies</a:t>
+              <a:t>Expected Assignment
+Data quality review plan
+Data quality checklist
+Thresholds or review criteria
+Known limitations statement</a:t>
             </a:r>
             <a:endParaRPr lang="en-US" dirty="0"/>
           </a:p>
@@ -1634,6 +1632,191 @@
             <a:fld id="{F7021451-1387-4CA6-816F-3879F97B5CBC}" type="slidenum">
               <a:rPr lang="en-US"/>
               <a:t>20</a:t>
+            </a:fld>
+            <a:endParaRPr lang="en-US"/>
+          </a:p>
+        </p:txBody>
+      </p:sp>
+    </p:spTree>
+    <p:extLst>
+      <p:ext uri="{BB962C8B-B14F-4D97-AF65-F5344CB8AC3E}">
+        <p14:creationId xmlns:p14="http://schemas.microsoft.com/office/powerpoint/2010/main" val="1024086991"/>
+      </p:ext>
+    </p:extLst>
+  </p:cSld>
+  <p:clrMapOvr>
+    <a:masterClrMapping/>
+  </p:clrMapOvr>
+</p:notes>
+</file>
+
+<file path=ppt/notesSlides/notesSlide21.xml><?xml version="1.0" encoding="utf-8"?>
+<p:notes xmlns:a="http://schemas.openxmlformats.org/drawingml/2006/main" xmlns:r="http://schemas.openxmlformats.org/officeDocument/2006/relationships" xmlns:p="http://schemas.openxmlformats.org/presentationml/2006/main">
+  <p:cSld>
+    <p:spTree>
+      <p:nvGrpSpPr>
+        <p:cNvPr id="1" name=""/>
+        <p:cNvGrpSpPr/>
+        <p:nvPr/>
+      </p:nvGrpSpPr>
+      <p:grpSpPr>
+        <a:xfrm>
+          <a:off x="0" y="0"/>
+          <a:ext cx="0" cy="0"/>
+          <a:chOff x="0" y="0"/>
+          <a:chExt cx="0" cy="0"/>
+        </a:xfrm>
+      </p:grpSpPr>
+      <p:sp>
+        <p:nvSpPr>
+          <p:cNvPr id="2" name="Slide Image Placeholder 1"/>
+          <p:cNvSpPr>
+            <a:spLocks noGrp="1" noRot="1" noChangeAspect="1"/>
+          </p:cNvSpPr>
+          <p:nvPr>
+            <p:ph type="sldImg"/>
+          </p:nvPr>
+        </p:nvSpPr>
+        <p:spPr/>
+      </p:sp>
+      <p:sp>
+        <p:nvSpPr>
+          <p:cNvPr id="3" name="Notes Placeholder 2"/>
+          <p:cNvSpPr>
+            <a:spLocks noGrp="1"/>
+          </p:cNvSpPr>
+          <p:nvPr>
+            <p:ph type="body" idx="1"/>
+          </p:nvPr>
+        </p:nvSpPr>
+        <p:spPr/>
+        <p:txBody>
+          <a:bodyPr/>
+          <a:lstStyle/>
+          <a:p>
+            <a:r>
+              <a:rPr lang="en-US" dirty="0"/>
+              <a:t>Knowledge Check
+1. What does fitness for use mean?
+2. Why can poor data quality be dangerous in AI-supported workflows?
+3. What is data drift?
+4. Which item belongs in a data quality review plan?
+5. When should an AI use case be paused or limited?</a:t>
+            </a:r>
+            <a:endParaRPr lang="en-US" dirty="0"/>
+          </a:p>
+        </p:txBody>
+      </p:sp>
+      <p:sp>
+        <p:nvSpPr>
+          <p:cNvPr id="4" name="Slide Number Placeholder 3"/>
+          <p:cNvSpPr>
+            <a:spLocks noGrp="1"/>
+          </p:cNvSpPr>
+          <p:nvPr>
+            <p:ph type="sldNum" sz="quarter" idx="10"/>
+          </p:nvPr>
+        </p:nvSpPr>
+        <p:spPr/>
+        <p:txBody>
+          <a:bodyPr/>
+          <a:lstStyle/>
+          <a:p>
+            <a:fld id="{F7021451-1387-4CA6-816F-3879F97B5CBC}" type="slidenum">
+              <a:rPr lang="en-US"/>
+              <a:t>21</a:t>
+            </a:fld>
+            <a:endParaRPr lang="en-US"/>
+          </a:p>
+        </p:txBody>
+      </p:sp>
+    </p:spTree>
+    <p:extLst>
+      <p:ext uri="{BB962C8B-B14F-4D97-AF65-F5344CB8AC3E}">
+        <p14:creationId xmlns:p14="http://schemas.microsoft.com/office/powerpoint/2010/main" val="1024086991"/>
+      </p:ext>
+    </p:extLst>
+  </p:cSld>
+  <p:clrMapOvr>
+    <a:masterClrMapping/>
+  </p:clrMapOvr>
+</p:notes>
+</file>
+
+<file path=ppt/notesSlides/notesSlide22.xml><?xml version="1.0" encoding="utf-8"?>
+<p:notes xmlns:a="http://schemas.openxmlformats.org/drawingml/2006/main" xmlns:r="http://schemas.openxmlformats.org/officeDocument/2006/relationships" xmlns:p="http://schemas.openxmlformats.org/presentationml/2006/main">
+  <p:cSld>
+    <p:spTree>
+      <p:nvGrpSpPr>
+        <p:cNvPr id="1" name=""/>
+        <p:cNvGrpSpPr/>
+        <p:nvPr/>
+      </p:nvGrpSpPr>
+      <p:grpSpPr>
+        <a:xfrm>
+          <a:off x="0" y="0"/>
+          <a:ext cx="0" cy="0"/>
+          <a:chOff x="0" y="0"/>
+          <a:chExt cx="0" cy="0"/>
+        </a:xfrm>
+      </p:grpSpPr>
+      <p:sp>
+        <p:nvSpPr>
+          <p:cNvPr id="2" name="Slide Image Placeholder 1"/>
+          <p:cNvSpPr>
+            <a:spLocks noGrp="1" noRot="1" noChangeAspect="1"/>
+          </p:cNvSpPr>
+          <p:nvPr>
+            <p:ph type="sldImg"/>
+          </p:nvPr>
+        </p:nvSpPr>
+        <p:spPr/>
+      </p:sp>
+      <p:sp>
+        <p:nvSpPr>
+          <p:cNvPr id="3" name="Notes Placeholder 2"/>
+          <p:cNvSpPr>
+            <a:spLocks noGrp="1"/>
+          </p:cNvSpPr>
+          <p:nvPr>
+            <p:ph type="body" idx="1"/>
+          </p:nvPr>
+        </p:nvSpPr>
+        <p:spPr/>
+        <p:txBody>
+          <a:bodyPr/>
+          <a:lstStyle/>
+          <a:p>
+            <a:r>
+              <a:rPr lang="en-US" dirty="0"/>
+              <a:t>References and Resources
+CDC surveillance and data quality resources
+CDC Public Health Data Strategy: https://www.cdc.gov/public-health-data-strategy/php/about/index.html
+NIST AI Risk Management Framework: https://www.nist.gov/itl/ai-risk-management-framework
+Agency data governance policies</a:t>
+            </a:r>
+            <a:endParaRPr lang="en-US" dirty="0"/>
+          </a:p>
+        </p:txBody>
+      </p:sp>
+      <p:sp>
+        <p:nvSpPr>
+          <p:cNvPr id="4" name="Slide Number Placeholder 3"/>
+          <p:cNvSpPr>
+            <a:spLocks noGrp="1"/>
+          </p:cNvSpPr>
+          <p:nvPr>
+            <p:ph type="sldNum" sz="quarter" idx="10"/>
+          </p:nvPr>
+        </p:nvSpPr>
+        <p:spPr/>
+        <p:txBody>
+          <a:bodyPr/>
+          <a:lstStyle/>
+          <a:p>
+            <a:fld id="{F7021451-1387-4CA6-816F-3879F97B5CBC}" type="slidenum">
+              <a:rPr lang="en-US"/>
+              <a:t>22</a:t>
             </a:fld>
             <a:endParaRPr lang="en-US"/>
           </a:p>
@@ -1698,12 +1881,11 @@
           <a:p>
             <a:r>
               <a:rPr lang="en-US" dirty="0"/>
-              <a:t>Learning Objectives
-Identify major data quality dimensions relevant to public health AI.
-Explain the difference between general data quality and fitness for a specific use.
-Assess how missingness, timeliness, duplication, coding variation, and representativeness affect AI outputs.
-Define quality thresholds, review rules, and escalation criteria for a workflow.
-Produce a data quality review plan for an AI-supported use case.</a:t>
+              <a:t>Related Playbook Plays
+Play 11: Build and Deploy AI Solutions - This lesson informs Play 11 by helping learners connect the lesson topic to build and deploy ai solutions work in the AI Playbook.
+Play 7: Prioritize Use Cases - This lesson informs Play 7 by helping learners connect the lesson topic to prioritize use cases work in the AI Playbook sequence.
+Play 1: Vision &amp; Guardrails - This lesson informs Play 1 by helping learners connect the lesson topic to vision &amp; guardrails work in the AI Playbook sequence.
+Play 2: Readiness Assessment - This lesson informs Play 2 by helping learners connect the lesson topic to readiness assessment work in the AI Playbook sequence.</a:t>
             </a:r>
             <a:endParaRPr lang="en-US" dirty="0"/>
           </a:p>
@@ -1791,8 +1973,13 @@
           <a:p>
             <a:r>
               <a:rPr lang="en-US" dirty="0"/>
-              <a:t>Module Overview
-Data quality engineering is the practical work of defining, measuring, improving, and monitoring data quality so that data are fit for use. In public health AI, data quality is not a background concern. It directly affects whether AI outputs are accurate, equitable, timely, and safe enough to support public health work.</a:t>
+              <a:t>Related Toolkit Resources
+Tool 3: Equity Impact Assessment Checklist (Checklist) - Use this tool to complete or strengthen the practical exercise for the module using fictional, de-identified, or generalized.
+Tool 4: AI Policy Landscape Scan (Worksheet) - Use AI Policy Landscape Scan to translate this lesson into a documented public health AI planning, governance, implementation,.
+Tool 5: AI Environmental and Resource Impact Review (Checklist) - Use AI Environmental and Resource Impact Review to translate this lesson into a documented public health AI planning,.
+Tool 6: Human-Centered AI Decision Rule Checklist (Checklist) - Use Human-Centered AI Decision Rule Checklist to translate this lesson into a documented public health AI planning, governance,.
+Tool 8: AI Project Charter (Planning) - Use AI Project Charter to translate this lesson into a documented public health AI planning, governance, implementation, or.
+Tool 9: Data Quality Assessment Checklist (Checklist) - Use this tool to complete or strengthen the practical exercise for the module using fictional, de-identified, or generalized.</a:t>
             </a:r>
             <a:endParaRPr lang="en-US" dirty="0"/>
           </a:p>
@@ -1880,10 +2067,12 @@
           <a:p>
             <a:r>
               <a:rPr lang="en-US" dirty="0"/>
-              <a:t>Why This Topic Matters for Public Health AI
-AI systems can create a false sense of precision when they produce polished outputs from weak data. A summary may sound authoritative even when key fields are missing. A risk score may look objective even when the data underrepresent communities with limited healthcare access. A classification model may appear efficient while encoding historical reporting patterns. Data quality engineering helps agencies identify these problems before they become operational decisions.
-Public health data quality should always be evaluated in relation to the intended use. A dataset may be adequate for annual descriptive reporting but inadequate for real-time triage. A field may be useful for aggregate trends but too incomplete for individual-level decision support. Fitness for use is therefore a public health judgment as well as a technical assessment.
-Data quality review also supports trust. Staff are more likely to use AI responsibly when they understand the limitations of the data behind the output. Leaders and communities are more likely to trust AI-supported workflows when limitations, uncertainty, and safeguards are documented.</a:t>
+              <a:t>Learning Objectives
+Identify major data quality dimensions relevant to public health AI.
+Explain the difference between general data quality and fitness for a specific use.
+Assess how missingness, timeliness, duplication, coding variation, and representativeness affect AI outputs.
+Define quality thresholds, review rules, and escalation criteria for a workflow.
+Produce a data quality review plan for an AI-supported use case.</a:t>
             </a:r>
             <a:endParaRPr lang="en-US" dirty="0"/>
           </a:p>
@@ -1971,10 +2160,8 @@
           <a:p>
             <a:r>
               <a:rPr lang="en-US" dirty="0"/>
-              <a:t>Core Concepts
-Completeness. Completeness refers to whether required data fields are present. Missing fields may affect case classification, risk prediction, subgroup analysis, and outreach planning.
-Timeliness. Timeliness refers to whether data are available quickly enough for the intended use. Delayed data may be acceptable for retrospective analysis but unsafe for urgent response.
-Validity. Validity refers to whether values follow expected formats, ranges, and rules. Invalid dates, codes, units, or categories can undermine AI performance.</a:t>
+              <a:t>Module Overview
+Data quality engineering is the practical work of defining, measuring, improving, and monitoring data quality so that data are fit for use. In public health AI, data quality is not a background concern. It directly affects whether AI outputs are accurate, equitable, timely, and safe enough to support public health work.</a:t>
             </a:r>
             <a:endParaRPr lang="en-US" dirty="0"/>
           </a:p>
@@ -2062,9 +2249,10 @@
           <a:p>
             <a:r>
               <a:rPr lang="en-US" dirty="0"/>
-              <a:t>Core Concepts
-Representativeness. Representativeness refers to whether data reflect the population, events, or settings relevant to the use case. Underrepresentation can produce biased or incomplete AI outputs.
-Data drift. Data drift is a change in data patterns over time. Drift can occur when reporting partners, testing practices, disease patterns, coding rules, or community behaviors change.</a:t>
+              <a:t>Why This Topic Matters for Public Health AI
+AI systems can create a false sense of precision when they produce polished outputs from weak data. A summary may sound authoritative even when key fields are missing. A risk score may look objective even when the data underrepresent communities with limited healthcare access. A classification model may appear efficient while encoding historical reporting patterns. Data quality engineering helps agencies identify these problems before they become operational decisions.
+Public health data quality should always be evaluated in relation to the intended use. A dataset may be adequate for annual descriptive reporting but inadequate for real-time triage. A field may be useful for aggregate trends but too incomplete for individual-level decision support. Fitness for use is therefore a public health judgment as well as a technical assessment.
+Data quality review also supports trust. Staff are more likely to use AI responsibly when they understand the limitations of the data behind the output. Leaders and communities are more likely to trust AI-supported workflows when limitations, uncertainty, and safeguards are documented.</a:t>
             </a:r>
             <a:endParaRPr lang="en-US" dirty="0"/>
           </a:p>
@@ -2152,9 +2340,10 @@
           <a:p>
             <a:r>
               <a:rPr lang="en-US" dirty="0"/>
-              <a:t>Public Health Example
-A health department may use AI to identify cases needing rapid follow-up. If demographic fields are missing more often for some populations, the model may be less reliable for those groups. If the data feed from certain clinics is delayed, the prioritization queue may reflect reporting timeliness rather than true need. A data quality review can reveal these issues before the tool is deployed.
-A community health assessment team may use AI to summarize survey comments and administrative data. If survey responses are not representative of residents with limited English proficiency, unstable housing, disability, or limited internet access, the AI-generated themes may miss important community needs. Data quality engineering should include equity and representativeness review.</a:t>
+              <a:t>Core Concepts
+Completeness. Completeness refers to whether required data fields are present. Missing fields may affect case classification, risk prediction, subgroup analysis, and outreach planning.
+Timeliness. Timeliness refers to whether data are available quickly enough for the intended use. Delayed data may be acceptable for retrospective analysis but unsafe for urgent response.
+Validity. Validity refers to whether values follow expected formats, ranges, and rules. Invalid dates, codes, units, or categories can undermine AI performance.</a:t>
             </a:r>
             <a:endParaRPr lang="en-US" dirty="0"/>
           </a:p>
@@ -2242,10 +2431,9 @@
           <a:p>
             <a:r>
               <a:rPr lang="en-US" dirty="0"/>
-              <a:t>Technical Deep Dive
-Data quality engineering begins by defining required fields and acceptable thresholds for the intended use. For an AI-supported case triage workflow, required fields may include condition, lab evidence, onset date, specimen date, jurisdiction, age, pregnancy status, hospitalization, and contact information. The agency should decide which missing fields stop automated support, which trigger a warning, and which can be handled through human review.
-Quality measurement should include completeness, timeliness, validity, consistency, uniqueness, accuracy, and representativeness. Some dimensions can be measured automatically. Others require program knowledge, source review, or comparison to external benchmarks. Data quality should not be treated as a one-time predeployment activity. It should be monitored throughout the AI lifecycle.
-Documentation is essential. A data quality plan should describe known limitations, review thresholds, monitoring frequency, responsible owners, escalation criteria, and decisions about acceptable use. When data quality is insufficient, the correct response may be to restrict the use case, add human review, improve the data pipeline, delay deployment, or avoid AI use for that workflow.</a:t>
+              <a:t>Core Concepts
+Representativeness. Representativeness refers to whether data reflect the population, events, or settings relevant to the use case. Underrepresentation can produce biased or incomplete AI outputs.
+Data drift. Data drift is a change in data patterns over time. Drift can occur when reporting partners, testing practices, disease patterns, coding rules, or community behaviors change.</a:t>
             </a:r>
             <a:endParaRPr lang="en-US" dirty="0"/>
           </a:p>
@@ -2868,7 +3056,32 @@
       </p:sp>
       <p:sp>
         <p:nvSpPr>
-          <p:cNvPr id="3" name="Text 1"/>
+          <p:cNvPr id="3" name="Shape 1"/>
+          <p:cNvSpPr/>
+          <p:nvPr/>
+        </p:nvSpPr>
+        <p:spPr>
+          <a:xfrm>
+            <a:off x="0" y="164592"/>
+            <a:ext cx="146304" cy="6693408"/>
+          </a:xfrm>
+          <a:prstGeom prst="rect">
+            <a:avLst/>
+          </a:prstGeom>
+          <a:solidFill>
+            <a:srgbClr val="2F8A28"/>
+          </a:solidFill>
+          <a:ln w="12700">
+            <a:solidFill>
+              <a:srgbClr val="2F8A28"/>
+            </a:solidFill>
+            <a:prstDash val="solid"/>
+          </a:ln>
+        </p:spPr>
+      </p:sp>
+      <p:sp>
+        <p:nvSpPr>
+          <p:cNvPr id="4" name="Text 2"/>
           <p:cNvSpPr/>
           <p:nvPr/>
         </p:nvSpPr>
@@ -2907,7 +3120,7 @@
       </p:sp>
       <p:sp>
         <p:nvSpPr>
-          <p:cNvPr id="4" name="Text 2"/>
+          <p:cNvPr id="5" name="Text 3"/>
           <p:cNvSpPr/>
           <p:nvPr/>
         </p:nvSpPr>
@@ -2946,7 +3159,7 @@
       </p:sp>
       <p:sp>
         <p:nvSpPr>
-          <p:cNvPr id="5" name="Text 3"/>
+          <p:cNvPr id="6" name="Text 4"/>
           <p:cNvSpPr/>
           <p:nvPr/>
         </p:nvSpPr>
@@ -2985,13 +3198,77 @@
       </p:sp>
       <p:sp>
         <p:nvSpPr>
-          <p:cNvPr id="6" name="Text 4"/>
+          <p:cNvPr id="7" name="Shape 5"/>
           <p:cNvSpPr/>
           <p:nvPr/>
         </p:nvSpPr>
         <p:spPr>
           <a:xfrm>
             <a:off x="640080" y="658368"/>
+            <a:ext cx="420624" cy="420624"/>
+          </a:xfrm>
+          <a:prstGeom prst="ellipse">
+            <a:avLst/>
+          </a:prstGeom>
+          <a:solidFill>
+            <a:srgbClr val="0068B7"/>
+          </a:solidFill>
+          <a:ln w="12700">
+            <a:solidFill>
+              <a:srgbClr val="0068B7"/>
+            </a:solidFill>
+            <a:prstDash val="solid"/>
+          </a:ln>
+        </p:spPr>
+      </p:sp>
+      <p:sp>
+        <p:nvSpPr>
+          <p:cNvPr id="8" name="Text 6"/>
+          <p:cNvSpPr/>
+          <p:nvPr/>
+        </p:nvSpPr>
+        <p:spPr>
+          <a:xfrm>
+            <a:off x="640080" y="731520"/>
+            <a:ext cx="420624" cy="164592"/>
+          </a:xfrm>
+          <a:prstGeom prst="rect">
+            <a:avLst/>
+          </a:prstGeom>
+          <a:noFill/>
+          <a:ln/>
+        </p:spPr>
+        <p:txBody>
+          <a:bodyPr wrap="square" lIns="0" tIns="0" rIns="0" bIns="0" rtlCol="0" anchor="ctr"/>
+          <a:lstStyle/>
+          <a:p>
+            <a:pPr algn="ctr" indent="0" marL="0">
+              <a:buNone/>
+            </a:pPr>
+            <a:r>
+              <a:rPr lang="en-US" sz="1100" b="1" dirty="0">
+                <a:solidFill>
+                  <a:srgbClr val="FFFFFF"/>
+                </a:solidFill>
+                <a:latin typeface="Aptos" pitchFamily="34" charset="0"/>
+                <a:ea typeface="Aptos" pitchFamily="34" charset="-122"/>
+                <a:cs typeface="Aptos" pitchFamily="34" charset="-120"/>
+              </a:rPr>
+              <a:t>5</a:t>
+            </a:r>
+            <a:endParaRPr lang="en-US" sz="1100" dirty="0"/>
+          </a:p>
+        </p:txBody>
+      </p:sp>
+      <p:sp>
+        <p:nvSpPr>
+          <p:cNvPr id="9" name="Text 7"/>
+          <p:cNvSpPr/>
+          <p:nvPr/>
+        </p:nvSpPr>
+        <p:spPr>
+          <a:xfrm>
+            <a:off x="640080" y="621792"/>
             <a:ext cx="10881360" cy="566928"/>
           </a:xfrm>
           <a:prstGeom prst="rect">
@@ -3018,7 +3295,7 @@
                 <a:ea typeface="Aptos Display" pitchFamily="34" charset="-122"/>
                 <a:cs typeface="Aptos Display" pitchFamily="34" charset="-120"/>
               </a:rPr>
-              <a:t>Risks, Failure Modes, and Guardrails</a:t>
+              <a:t>Public Health Example</a:t>
             </a:r>
             <a:endParaRPr lang="en-US" sz="2700" dirty="0"/>
           </a:p>
@@ -3026,32 +3303,178 @@
       </p:sp>
       <p:sp>
         <p:nvSpPr>
-          <p:cNvPr id="7" name="Text 5"/>
-          <p:cNvSpPr/>
-          <p:nvPr/>
-        </p:nvSpPr>
-        <p:spPr>
-          <a:xfrm>
-            <a:off x="822960" y="1325880"/>
-            <a:ext cx="10378440" cy="4800600"/>
-          </a:xfrm>
-          <a:prstGeom prst="rect">
-            <a:avLst/>
-          </a:prstGeom>
-          <a:noFill/>
-          <a:ln/>
-        </p:spPr>
-        <p:txBody>
-          <a:bodyPr wrap="square" lIns="1016" tIns="1016" rIns="1016" bIns="1016" rtlCol="0" anchor="t">
+          <p:cNvPr id="10" name="Text 8"/>
+          <p:cNvSpPr/>
+          <p:nvPr/>
+        </p:nvSpPr>
+        <p:spPr>
+          <a:xfrm>
+            <a:off x="868680" y="1417320"/>
+            <a:ext cx="6675120" cy="4434840"/>
+          </a:xfrm>
+          <a:prstGeom prst="rect">
+            <a:avLst/>
+          </a:prstGeom>
+          <a:noFill/>
+          <a:ln/>
+        </p:spPr>
+        <p:txBody>
+          <a:bodyPr wrap="square" lIns="635" tIns="635" rIns="635" bIns="635" rtlCol="0" anchor="t">
             <a:normAutofit/>
           </a:bodyPr>
           <a:lstStyle/>
           <a:p>
+            <a:r>
+              <a:rPr lang="en-US" sz="1700" dirty="0">
+                <a:solidFill>
+                  <a:srgbClr val="17364A"/>
+                </a:solidFill>
+                <a:latin typeface="Aptos" pitchFamily="34" charset="0"/>
+                <a:ea typeface="Aptos" pitchFamily="34" charset="-122"/>
+                <a:cs typeface="Aptos" pitchFamily="34" charset="-120"/>
+              </a:rPr>
+              <a:t>A health department may use AI to identify cases needing rapid follow-up.</a:t>
+            </a:r>
+            <a:endParaRPr lang="en-US" sz="1700" dirty="0"/>
+          </a:p>
+          <a:p>
+            <a:r>
+              <a:rPr lang="en-US" sz="1700" dirty="0">
+                <a:solidFill>
+                  <a:srgbClr val="17364A"/>
+                </a:solidFill>
+                <a:latin typeface="Aptos" pitchFamily="34" charset="0"/>
+                <a:ea typeface="Aptos" pitchFamily="34" charset="-122"/>
+                <a:cs typeface="Aptos" pitchFamily="34" charset="-120"/>
+              </a:rPr>
+              <a:t>If demographic fields are missing more often for some populations, the model may be less reliable for those groups.</a:t>
+            </a:r>
+            <a:endParaRPr lang="en-US" sz="1700" dirty="0"/>
+          </a:p>
+          <a:p>
+            <a:r>
+              <a:rPr lang="en-US" sz="1700" dirty="0">
+                <a:solidFill>
+                  <a:srgbClr val="17364A"/>
+                </a:solidFill>
+                <a:latin typeface="Aptos" pitchFamily="34" charset="0"/>
+                <a:ea typeface="Aptos" pitchFamily="34" charset="-122"/>
+                <a:cs typeface="Aptos" pitchFamily="34" charset="-120"/>
+              </a:rPr>
+              <a:t>If the data feed from certain clinics is delayed, the prioritization queue may reflect reporting timeliness rather than.</a:t>
+            </a:r>
+            <a:endParaRPr lang="en-US" sz="1700" dirty="0"/>
+          </a:p>
+          <a:p>
+            <a:r>
+              <a:rPr lang="en-US" sz="1700" dirty="0">
+                <a:solidFill>
+                  <a:srgbClr val="17364A"/>
+                </a:solidFill>
+                <a:latin typeface="Aptos" pitchFamily="34" charset="0"/>
+                <a:ea typeface="Aptos" pitchFamily="34" charset="-122"/>
+                <a:cs typeface="Aptos" pitchFamily="34" charset="-120"/>
+              </a:rPr>
+              <a:t>A data quality review can reveal these issues before the tool is deployed.</a:t>
+            </a:r>
+            <a:endParaRPr lang="en-US" sz="1700" dirty="0"/>
+          </a:p>
+        </p:txBody>
+      </p:sp>
+      <p:sp>
+        <p:nvSpPr>
+          <p:cNvPr id="11" name="Shape 9"/>
+          <p:cNvSpPr/>
+          <p:nvPr/>
+        </p:nvSpPr>
+        <p:spPr>
+          <a:xfrm>
+            <a:off x="7909560" y="1417320"/>
+            <a:ext cx="3154680" cy="1828800"/>
+          </a:xfrm>
+          <a:prstGeom prst="roundRect">
+            <a:avLst>
+              <a:gd name="adj" fmla="val 6000"/>
+            </a:avLst>
+          </a:prstGeom>
+          <a:solidFill>
+            <a:srgbClr val="EEF8ED"/>
+          </a:solidFill>
+          <a:ln w="12700">
+            <a:solidFill>
+              <a:srgbClr val="B9D7E6"/>
+            </a:solidFill>
+            <a:prstDash val="solid"/>
+          </a:ln>
+        </p:spPr>
+      </p:sp>
+      <p:sp>
+        <p:nvSpPr>
+          <p:cNvPr id="12" name="Text 10"/>
+          <p:cNvSpPr/>
+          <p:nvPr/>
+        </p:nvSpPr>
+        <p:spPr>
+          <a:xfrm>
+            <a:off x="8074152" y="1563624"/>
+            <a:ext cx="2825496" cy="201168"/>
+          </a:xfrm>
+          <a:prstGeom prst="rect">
+            <a:avLst/>
+          </a:prstGeom>
+          <a:noFill/>
+          <a:ln/>
+        </p:spPr>
+        <p:txBody>
+          <a:bodyPr wrap="square" lIns="0" tIns="0" rIns="0" bIns="0" rtlCol="0" anchor="ctr"/>
+          <a:lstStyle/>
+          <a:p>
             <a:pPr indent="0" marL="0">
               <a:buNone/>
             </a:pPr>
             <a:r>
-              <a:rPr lang="en-US" sz="1420" dirty="0">
+              <a:rPr lang="en-US" sz="950" b="1" dirty="0">
+                <a:solidFill>
+                  <a:srgbClr val="0068B7"/>
+                </a:solidFill>
+                <a:latin typeface="Aptos" pitchFamily="34" charset="0"/>
+                <a:ea typeface="Aptos" pitchFamily="34" charset="-122"/>
+                <a:cs typeface="Aptos" pitchFamily="34" charset="-120"/>
+              </a:rPr>
+              <a:t>Key idea</a:t>
+            </a:r>
+            <a:endParaRPr lang="en-US" sz="950" dirty="0"/>
+          </a:p>
+        </p:txBody>
+      </p:sp>
+      <p:sp>
+        <p:nvSpPr>
+          <p:cNvPr id="13" name="Text 11"/>
+          <p:cNvSpPr/>
+          <p:nvPr/>
+        </p:nvSpPr>
+        <p:spPr>
+          <a:xfrm>
+            <a:off x="8074152" y="1856232"/>
+            <a:ext cx="2825496" cy="1261872"/>
+          </a:xfrm>
+          <a:prstGeom prst="rect">
+            <a:avLst/>
+          </a:prstGeom>
+          <a:noFill/>
+          <a:ln/>
+        </p:spPr>
+        <p:txBody>
+          <a:bodyPr wrap="square" lIns="0" tIns="0" rIns="0" bIns="0" rtlCol="0" anchor="t">
+            <a:normAutofit/>
+          </a:bodyPr>
+          <a:lstStyle/>
+          <a:p>
+            <a:pPr indent="0" marL="0">
+              <a:buNone/>
+            </a:pPr>
+            <a:r>
+              <a:rPr lang="en-US" sz="1250" dirty="0">
                 <a:solidFill>
                   <a:srgbClr val="17364A"/>
                 </a:solidFill>
@@ -3059,9 +3482,116 @@
                 <a:ea typeface="Aptos" pitchFamily="34" charset="-122"/>
                 <a:cs typeface="Aptos" pitchFamily="34" charset="-120"/>
               </a:rPr>
-              <a:t>Confident output from weak data. AI may produce polished outputs from incomplete or biased data. Guardrails include uncertainty labeling, source review, and limits on use. Fitness-for-use mismatch. Data suitable for one purpose may be unsafe for another. Guardrails include use-case-specific quality criteria and approval conditions. Unmonitored drift. Data patterns may change after deployment. Guardrails include drift indicators, periodic review, and retraining or recalibration triggers.</a:t>
-            </a:r>
-            <a:endParaRPr lang="en-US" sz="1420" dirty="0"/>
+              <a:t>A health department may use AI to identify cases needing rapid follow-up.</a:t>
+            </a:r>
+            <a:endParaRPr lang="en-US" sz="1250" dirty="0"/>
+          </a:p>
+        </p:txBody>
+      </p:sp>
+      <p:sp>
+        <p:nvSpPr>
+          <p:cNvPr id="14" name="Shape 12"/>
+          <p:cNvSpPr/>
+          <p:nvPr/>
+        </p:nvSpPr>
+        <p:spPr>
+          <a:xfrm>
+            <a:off x="7909560" y="3520440"/>
+            <a:ext cx="3154680" cy="1737360"/>
+          </a:xfrm>
+          <a:prstGeom prst="roundRect">
+            <a:avLst>
+              <a:gd name="adj" fmla="val 6316"/>
+            </a:avLst>
+          </a:prstGeom>
+          <a:solidFill>
+            <a:srgbClr val="EAF6F8"/>
+          </a:solidFill>
+          <a:ln w="12700">
+            <a:solidFill>
+              <a:srgbClr val="B9D7E6"/>
+            </a:solidFill>
+            <a:prstDash val="solid"/>
+          </a:ln>
+        </p:spPr>
+      </p:sp>
+      <p:sp>
+        <p:nvSpPr>
+          <p:cNvPr id="15" name="Text 13"/>
+          <p:cNvSpPr/>
+          <p:nvPr/>
+        </p:nvSpPr>
+        <p:spPr>
+          <a:xfrm>
+            <a:off x="8074152" y="3666744"/>
+            <a:ext cx="2825496" cy="201168"/>
+          </a:xfrm>
+          <a:prstGeom prst="rect">
+            <a:avLst/>
+          </a:prstGeom>
+          <a:noFill/>
+          <a:ln/>
+        </p:spPr>
+        <p:txBody>
+          <a:bodyPr wrap="square" lIns="0" tIns="0" rIns="0" bIns="0" rtlCol="0" anchor="ctr"/>
+          <a:lstStyle/>
+          <a:p>
+            <a:pPr indent="0" marL="0">
+              <a:buNone/>
+            </a:pPr>
+            <a:r>
+              <a:rPr lang="en-US" sz="950" b="1" dirty="0">
+                <a:solidFill>
+                  <a:srgbClr val="0068B7"/>
+                </a:solidFill>
+                <a:latin typeface="Aptos" pitchFamily="34" charset="0"/>
+                <a:ea typeface="Aptos" pitchFamily="34" charset="-122"/>
+                <a:cs typeface="Aptos" pitchFamily="34" charset="-120"/>
+              </a:rPr>
+              <a:t>Use this for</a:t>
+            </a:r>
+            <a:endParaRPr lang="en-US" sz="950" dirty="0"/>
+          </a:p>
+        </p:txBody>
+      </p:sp>
+      <p:sp>
+        <p:nvSpPr>
+          <p:cNvPr id="16" name="Text 14"/>
+          <p:cNvSpPr/>
+          <p:nvPr/>
+        </p:nvSpPr>
+        <p:spPr>
+          <a:xfrm>
+            <a:off x="8074152" y="3959352"/>
+            <a:ext cx="2825496" cy="1170432"/>
+          </a:xfrm>
+          <a:prstGeom prst="rect">
+            <a:avLst/>
+          </a:prstGeom>
+          <a:noFill/>
+          <a:ln/>
+        </p:spPr>
+        <p:txBody>
+          <a:bodyPr wrap="square" lIns="0" tIns="0" rIns="0" bIns="0" rtlCol="0" anchor="t">
+            <a:normAutofit/>
+          </a:bodyPr>
+          <a:lstStyle/>
+          <a:p>
+            <a:pPr indent="0" marL="0">
+              <a:buNone/>
+            </a:pPr>
+            <a:r>
+              <a:rPr lang="en-US" sz="1250" dirty="0">
+                <a:solidFill>
+                  <a:srgbClr val="17364A"/>
+                </a:solidFill>
+                <a:latin typeface="Aptos" pitchFamily="34" charset="0"/>
+                <a:ea typeface="Aptos" pitchFamily="34" charset="-122"/>
+                <a:cs typeface="Aptos" pitchFamily="34" charset="-120"/>
+              </a:rPr>
+              <a:t>Connect the concept to public health decisions, safeguards, documentation, or implementation work.</a:t>
+            </a:r>
+            <a:endParaRPr lang="en-US" sz="1250" dirty="0"/>
           </a:p>
         </p:txBody>
       </p:sp>
@@ -3124,7 +3654,32 @@
       </p:sp>
       <p:sp>
         <p:nvSpPr>
-          <p:cNvPr id="3" name="Text 1"/>
+          <p:cNvPr id="3" name="Shape 1"/>
+          <p:cNvSpPr/>
+          <p:nvPr/>
+        </p:nvSpPr>
+        <p:spPr>
+          <a:xfrm>
+            <a:off x="0" y="164592"/>
+            <a:ext cx="146304" cy="6693408"/>
+          </a:xfrm>
+          <a:prstGeom prst="rect">
+            <a:avLst/>
+          </a:prstGeom>
+          <a:solidFill>
+            <a:srgbClr val="2F8A28"/>
+          </a:solidFill>
+          <a:ln w="12700">
+            <a:solidFill>
+              <a:srgbClr val="2F8A28"/>
+            </a:solidFill>
+            <a:prstDash val="solid"/>
+          </a:ln>
+        </p:spPr>
+      </p:sp>
+      <p:sp>
+        <p:nvSpPr>
+          <p:cNvPr id="4" name="Text 2"/>
           <p:cNvSpPr/>
           <p:nvPr/>
         </p:nvSpPr>
@@ -3163,7 +3718,7 @@
       </p:sp>
       <p:sp>
         <p:nvSpPr>
-          <p:cNvPr id="4" name="Text 2"/>
+          <p:cNvPr id="5" name="Text 3"/>
           <p:cNvSpPr/>
           <p:nvPr/>
         </p:nvSpPr>
@@ -3202,7 +3757,7 @@
       </p:sp>
       <p:sp>
         <p:nvSpPr>
-          <p:cNvPr id="5" name="Text 3"/>
+          <p:cNvPr id="6" name="Text 4"/>
           <p:cNvSpPr/>
           <p:nvPr/>
         </p:nvSpPr>
@@ -3241,13 +3796,77 @@
       </p:sp>
       <p:sp>
         <p:nvSpPr>
-          <p:cNvPr id="6" name="Text 4"/>
+          <p:cNvPr id="7" name="Shape 5"/>
           <p:cNvSpPr/>
           <p:nvPr/>
         </p:nvSpPr>
         <p:spPr>
           <a:xfrm>
             <a:off x="640080" y="658368"/>
+            <a:ext cx="420624" cy="420624"/>
+          </a:xfrm>
+          <a:prstGeom prst="ellipse">
+            <a:avLst/>
+          </a:prstGeom>
+          <a:solidFill>
+            <a:srgbClr val="0068B7"/>
+          </a:solidFill>
+          <a:ln w="12700">
+            <a:solidFill>
+              <a:srgbClr val="0068B7"/>
+            </a:solidFill>
+            <a:prstDash val="solid"/>
+          </a:ln>
+        </p:spPr>
+      </p:sp>
+      <p:sp>
+        <p:nvSpPr>
+          <p:cNvPr id="8" name="Text 6"/>
+          <p:cNvSpPr/>
+          <p:nvPr/>
+        </p:nvSpPr>
+        <p:spPr>
+          <a:xfrm>
+            <a:off x="640080" y="731520"/>
+            <a:ext cx="420624" cy="164592"/>
+          </a:xfrm>
+          <a:prstGeom prst="rect">
+            <a:avLst/>
+          </a:prstGeom>
+          <a:noFill/>
+          <a:ln/>
+        </p:spPr>
+        <p:txBody>
+          <a:bodyPr wrap="square" lIns="0" tIns="0" rIns="0" bIns="0" rtlCol="0" anchor="ctr"/>
+          <a:lstStyle/>
+          <a:p>
+            <a:pPr algn="ctr" indent="0" marL="0">
+              <a:buNone/>
+            </a:pPr>
+            <a:r>
+              <a:rPr lang="en-US" sz="1100" b="1" dirty="0">
+                <a:solidFill>
+                  <a:srgbClr val="FFFFFF"/>
+                </a:solidFill>
+                <a:latin typeface="Aptos" pitchFamily="34" charset="0"/>
+                <a:ea typeface="Aptos" pitchFamily="34" charset="-122"/>
+                <a:cs typeface="Aptos" pitchFamily="34" charset="-120"/>
+              </a:rPr>
+              <a:t>6</a:t>
+            </a:r>
+            <a:endParaRPr lang="en-US" sz="1100" dirty="0"/>
+          </a:p>
+        </p:txBody>
+      </p:sp>
+      <p:sp>
+        <p:nvSpPr>
+          <p:cNvPr id="9" name="Text 7"/>
+          <p:cNvSpPr/>
+          <p:nvPr/>
+        </p:nvSpPr>
+        <p:spPr>
+          <a:xfrm>
+            <a:off x="640080" y="621792"/>
             <a:ext cx="10881360" cy="566928"/>
           </a:xfrm>
           <a:prstGeom prst="rect">
@@ -3274,7 +3893,7 @@
                 <a:ea typeface="Aptos Display" pitchFamily="34" charset="-122"/>
                 <a:cs typeface="Aptos Display" pitchFamily="34" charset="-120"/>
               </a:rPr>
-              <a:t>Risks, Failure Modes, and Guardrails Continued</a:t>
+              <a:t>Technical Deep Dive</a:t>
             </a:r>
             <a:endParaRPr lang="en-US" sz="2700" dirty="0"/>
           </a:p>
@@ -3282,32 +3901,178 @@
       </p:sp>
       <p:sp>
         <p:nvSpPr>
-          <p:cNvPr id="7" name="Text 5"/>
-          <p:cNvSpPr/>
-          <p:nvPr/>
-        </p:nvSpPr>
-        <p:spPr>
-          <a:xfrm>
-            <a:off x="822960" y="1325880"/>
-            <a:ext cx="10378440" cy="4800600"/>
-          </a:xfrm>
-          <a:prstGeom prst="rect">
-            <a:avLst/>
-          </a:prstGeom>
-          <a:noFill/>
-          <a:ln/>
-        </p:spPr>
-        <p:txBody>
-          <a:bodyPr wrap="square" lIns="1016" tIns="1016" rIns="1016" bIns="1016" rtlCol="0" anchor="t">
+          <p:cNvPr id="10" name="Text 8"/>
+          <p:cNvSpPr/>
+          <p:nvPr/>
+        </p:nvSpPr>
+        <p:spPr>
+          <a:xfrm>
+            <a:off x="868680" y="1417320"/>
+            <a:ext cx="6675120" cy="4434840"/>
+          </a:xfrm>
+          <a:prstGeom prst="rect">
+            <a:avLst/>
+          </a:prstGeom>
+          <a:noFill/>
+          <a:ln/>
+        </p:spPr>
+        <p:txBody>
+          <a:bodyPr wrap="square" lIns="635" tIns="635" rIns="635" bIns="635" rtlCol="0" anchor="t">
             <a:normAutofit/>
           </a:bodyPr>
           <a:lstStyle/>
           <a:p>
+            <a:r>
+              <a:rPr lang="en-US" sz="1700" dirty="0">
+                <a:solidFill>
+                  <a:srgbClr val="17364A"/>
+                </a:solidFill>
+                <a:latin typeface="Aptos" pitchFamily="34" charset="0"/>
+                <a:ea typeface="Aptos" pitchFamily="34" charset="-122"/>
+                <a:cs typeface="Aptos" pitchFamily="34" charset="-120"/>
+              </a:rPr>
+              <a:t>Data quality engineering begins by defining required fields and acceptable thresholds for the intended use.</a:t>
+            </a:r>
+            <a:endParaRPr lang="en-US" sz="1700" dirty="0"/>
+          </a:p>
+          <a:p>
+            <a:r>
+              <a:rPr lang="en-US" sz="1700" dirty="0">
+                <a:solidFill>
+                  <a:srgbClr val="17364A"/>
+                </a:solidFill>
+                <a:latin typeface="Aptos" pitchFamily="34" charset="0"/>
+                <a:ea typeface="Aptos" pitchFamily="34" charset="-122"/>
+                <a:cs typeface="Aptos" pitchFamily="34" charset="-120"/>
+              </a:rPr>
+              <a:t>For an AI-supported case triage workflow, required fields may include condition, lab evidence, onset date, specimen date,.</a:t>
+            </a:r>
+            <a:endParaRPr lang="en-US" sz="1700" dirty="0"/>
+          </a:p>
+          <a:p>
+            <a:r>
+              <a:rPr lang="en-US" sz="1700" dirty="0">
+                <a:solidFill>
+                  <a:srgbClr val="17364A"/>
+                </a:solidFill>
+                <a:latin typeface="Aptos" pitchFamily="34" charset="0"/>
+                <a:ea typeface="Aptos" pitchFamily="34" charset="-122"/>
+                <a:cs typeface="Aptos" pitchFamily="34" charset="-120"/>
+              </a:rPr>
+              <a:t>The agency should decide which missing fields stop automated support, which trigger a warning, and which can be handled.</a:t>
+            </a:r>
+            <a:endParaRPr lang="en-US" sz="1700" dirty="0"/>
+          </a:p>
+          <a:p>
+            <a:r>
+              <a:rPr lang="en-US" sz="1700" dirty="0">
+                <a:solidFill>
+                  <a:srgbClr val="17364A"/>
+                </a:solidFill>
+                <a:latin typeface="Aptos" pitchFamily="34" charset="0"/>
+                <a:ea typeface="Aptos" pitchFamily="34" charset="-122"/>
+                <a:cs typeface="Aptos" pitchFamily="34" charset="-120"/>
+              </a:rPr>
+              <a:t>Quality measurement should include completeness, timeliness, validity, consistency, uniqueness, accuracy, and.</a:t>
+            </a:r>
+            <a:endParaRPr lang="en-US" sz="1700" dirty="0"/>
+          </a:p>
+        </p:txBody>
+      </p:sp>
+      <p:sp>
+        <p:nvSpPr>
+          <p:cNvPr id="11" name="Shape 9"/>
+          <p:cNvSpPr/>
+          <p:nvPr/>
+        </p:nvSpPr>
+        <p:spPr>
+          <a:xfrm>
+            <a:off x="7909560" y="1417320"/>
+            <a:ext cx="3154680" cy="1828800"/>
+          </a:xfrm>
+          <a:prstGeom prst="roundRect">
+            <a:avLst>
+              <a:gd name="adj" fmla="val 6000"/>
+            </a:avLst>
+          </a:prstGeom>
+          <a:solidFill>
+            <a:srgbClr val="EEF8ED"/>
+          </a:solidFill>
+          <a:ln w="12700">
+            <a:solidFill>
+              <a:srgbClr val="B9D7E6"/>
+            </a:solidFill>
+            <a:prstDash val="solid"/>
+          </a:ln>
+        </p:spPr>
+      </p:sp>
+      <p:sp>
+        <p:nvSpPr>
+          <p:cNvPr id="12" name="Text 10"/>
+          <p:cNvSpPr/>
+          <p:nvPr/>
+        </p:nvSpPr>
+        <p:spPr>
+          <a:xfrm>
+            <a:off x="8074152" y="1563624"/>
+            <a:ext cx="2825496" cy="201168"/>
+          </a:xfrm>
+          <a:prstGeom prst="rect">
+            <a:avLst/>
+          </a:prstGeom>
+          <a:noFill/>
+          <a:ln/>
+        </p:spPr>
+        <p:txBody>
+          <a:bodyPr wrap="square" lIns="0" tIns="0" rIns="0" bIns="0" rtlCol="0" anchor="ctr"/>
+          <a:lstStyle/>
+          <a:p>
             <a:pPr indent="0" marL="0">
               <a:buNone/>
             </a:pPr>
             <a:r>
-              <a:rPr lang="en-US" sz="1420" dirty="0">
+              <a:rPr lang="en-US" sz="950" b="1" dirty="0">
+                <a:solidFill>
+                  <a:srgbClr val="0068B7"/>
+                </a:solidFill>
+                <a:latin typeface="Aptos" pitchFamily="34" charset="0"/>
+                <a:ea typeface="Aptos" pitchFamily="34" charset="-122"/>
+                <a:cs typeface="Aptos" pitchFamily="34" charset="-120"/>
+              </a:rPr>
+              <a:t>Key idea</a:t>
+            </a:r>
+            <a:endParaRPr lang="en-US" sz="950" dirty="0"/>
+          </a:p>
+        </p:txBody>
+      </p:sp>
+      <p:sp>
+        <p:nvSpPr>
+          <p:cNvPr id="13" name="Text 11"/>
+          <p:cNvSpPr/>
+          <p:nvPr/>
+        </p:nvSpPr>
+        <p:spPr>
+          <a:xfrm>
+            <a:off x="8074152" y="1856232"/>
+            <a:ext cx="2825496" cy="1261872"/>
+          </a:xfrm>
+          <a:prstGeom prst="rect">
+            <a:avLst/>
+          </a:prstGeom>
+          <a:noFill/>
+          <a:ln/>
+        </p:spPr>
+        <p:txBody>
+          <a:bodyPr wrap="square" lIns="0" tIns="0" rIns="0" bIns="0" rtlCol="0" anchor="t">
+            <a:normAutofit/>
+          </a:bodyPr>
+          <a:lstStyle/>
+          <a:p>
+            <a:pPr indent="0" marL="0">
+              <a:buNone/>
+            </a:pPr>
+            <a:r>
+              <a:rPr lang="en-US" sz="1250" dirty="0">
                 <a:solidFill>
                   <a:srgbClr val="17364A"/>
                 </a:solidFill>
@@ -3315,9 +4080,116 @@
                 <a:ea typeface="Aptos" pitchFamily="34" charset="-122"/>
                 <a:cs typeface="Aptos" pitchFamily="34" charset="-120"/>
               </a:rPr>
-              <a:t>Equity blind spots. Missingness and underrepresentation may affect some groups more than others. Guardrails include subgroup review, community context, and documentation of limitations.</a:t>
-            </a:r>
-            <a:endParaRPr lang="en-US" sz="1420" dirty="0"/>
+              <a:t>Data quality engineering begins by defining required fields and acceptable thresholds for the intended use.</a:t>
+            </a:r>
+            <a:endParaRPr lang="en-US" sz="1250" dirty="0"/>
+          </a:p>
+        </p:txBody>
+      </p:sp>
+      <p:sp>
+        <p:nvSpPr>
+          <p:cNvPr id="14" name="Shape 12"/>
+          <p:cNvSpPr/>
+          <p:nvPr/>
+        </p:nvSpPr>
+        <p:spPr>
+          <a:xfrm>
+            <a:off x="7909560" y="3520440"/>
+            <a:ext cx="3154680" cy="1737360"/>
+          </a:xfrm>
+          <a:prstGeom prst="roundRect">
+            <a:avLst>
+              <a:gd name="adj" fmla="val 6316"/>
+            </a:avLst>
+          </a:prstGeom>
+          <a:solidFill>
+            <a:srgbClr val="EAF6F8"/>
+          </a:solidFill>
+          <a:ln w="12700">
+            <a:solidFill>
+              <a:srgbClr val="B9D7E6"/>
+            </a:solidFill>
+            <a:prstDash val="solid"/>
+          </a:ln>
+        </p:spPr>
+      </p:sp>
+      <p:sp>
+        <p:nvSpPr>
+          <p:cNvPr id="15" name="Text 13"/>
+          <p:cNvSpPr/>
+          <p:nvPr/>
+        </p:nvSpPr>
+        <p:spPr>
+          <a:xfrm>
+            <a:off x="8074152" y="3666744"/>
+            <a:ext cx="2825496" cy="201168"/>
+          </a:xfrm>
+          <a:prstGeom prst="rect">
+            <a:avLst/>
+          </a:prstGeom>
+          <a:noFill/>
+          <a:ln/>
+        </p:spPr>
+        <p:txBody>
+          <a:bodyPr wrap="square" lIns="0" tIns="0" rIns="0" bIns="0" rtlCol="0" anchor="ctr"/>
+          <a:lstStyle/>
+          <a:p>
+            <a:pPr indent="0" marL="0">
+              <a:buNone/>
+            </a:pPr>
+            <a:r>
+              <a:rPr lang="en-US" sz="950" b="1" dirty="0">
+                <a:solidFill>
+                  <a:srgbClr val="0068B7"/>
+                </a:solidFill>
+                <a:latin typeface="Aptos" pitchFamily="34" charset="0"/>
+                <a:ea typeface="Aptos" pitchFamily="34" charset="-122"/>
+                <a:cs typeface="Aptos" pitchFamily="34" charset="-120"/>
+              </a:rPr>
+              <a:t>Use this for</a:t>
+            </a:r>
+            <a:endParaRPr lang="en-US" sz="950" dirty="0"/>
+          </a:p>
+        </p:txBody>
+      </p:sp>
+      <p:sp>
+        <p:nvSpPr>
+          <p:cNvPr id="16" name="Text 14"/>
+          <p:cNvSpPr/>
+          <p:nvPr/>
+        </p:nvSpPr>
+        <p:spPr>
+          <a:xfrm>
+            <a:off x="8074152" y="3959352"/>
+            <a:ext cx="2825496" cy="1170432"/>
+          </a:xfrm>
+          <a:prstGeom prst="rect">
+            <a:avLst/>
+          </a:prstGeom>
+          <a:noFill/>
+          <a:ln/>
+        </p:spPr>
+        <p:txBody>
+          <a:bodyPr wrap="square" lIns="0" tIns="0" rIns="0" bIns="0" rtlCol="0" anchor="t">
+            <a:normAutofit/>
+          </a:bodyPr>
+          <a:lstStyle/>
+          <a:p>
+            <a:pPr indent="0" marL="0">
+              <a:buNone/>
+            </a:pPr>
+            <a:r>
+              <a:rPr lang="en-US" sz="1250" dirty="0">
+                <a:solidFill>
+                  <a:srgbClr val="17364A"/>
+                </a:solidFill>
+                <a:latin typeface="Aptos" pitchFamily="34" charset="0"/>
+                <a:ea typeface="Aptos" pitchFamily="34" charset="-122"/>
+                <a:cs typeface="Aptos" pitchFamily="34" charset="-120"/>
+              </a:rPr>
+              <a:t>Connect the concept to public health decisions, safeguards, documentation, or implementation work.</a:t>
+            </a:r>
+            <a:endParaRPr lang="en-US" sz="1250" dirty="0"/>
           </a:p>
         </p:txBody>
       </p:sp>
@@ -3380,7 +4252,32 @@
       </p:sp>
       <p:sp>
         <p:nvSpPr>
-          <p:cNvPr id="3" name="Text 1"/>
+          <p:cNvPr id="3" name="Shape 1"/>
+          <p:cNvSpPr/>
+          <p:nvPr/>
+        </p:nvSpPr>
+        <p:spPr>
+          <a:xfrm>
+            <a:off x="0" y="164592"/>
+            <a:ext cx="146304" cy="6693408"/>
+          </a:xfrm>
+          <a:prstGeom prst="rect">
+            <a:avLst/>
+          </a:prstGeom>
+          <a:solidFill>
+            <a:srgbClr val="2F8A28"/>
+          </a:solidFill>
+          <a:ln w="12700">
+            <a:solidFill>
+              <a:srgbClr val="2F8A28"/>
+            </a:solidFill>
+            <a:prstDash val="solid"/>
+          </a:ln>
+        </p:spPr>
+      </p:sp>
+      <p:sp>
+        <p:nvSpPr>
+          <p:cNvPr id="4" name="Text 2"/>
           <p:cNvSpPr/>
           <p:nvPr/>
         </p:nvSpPr>
@@ -3419,7 +4316,7 @@
       </p:sp>
       <p:sp>
         <p:nvSpPr>
-          <p:cNvPr id="4" name="Text 2"/>
+          <p:cNvPr id="5" name="Text 3"/>
           <p:cNvSpPr/>
           <p:nvPr/>
         </p:nvSpPr>
@@ -3458,7 +4355,7 @@
       </p:sp>
       <p:sp>
         <p:nvSpPr>
-          <p:cNvPr id="5" name="Text 3"/>
+          <p:cNvPr id="6" name="Text 4"/>
           <p:cNvSpPr/>
           <p:nvPr/>
         </p:nvSpPr>
@@ -3497,13 +4394,77 @@
       </p:sp>
       <p:sp>
         <p:nvSpPr>
-          <p:cNvPr id="6" name="Text 4"/>
+          <p:cNvPr id="7" name="Shape 5"/>
           <p:cNvSpPr/>
           <p:nvPr/>
         </p:nvSpPr>
         <p:spPr>
           <a:xfrm>
             <a:off x="640080" y="658368"/>
+            <a:ext cx="420624" cy="420624"/>
+          </a:xfrm>
+          <a:prstGeom prst="ellipse">
+            <a:avLst/>
+          </a:prstGeom>
+          <a:solidFill>
+            <a:srgbClr val="0068B7"/>
+          </a:solidFill>
+          <a:ln w="12700">
+            <a:solidFill>
+              <a:srgbClr val="0068B7"/>
+            </a:solidFill>
+            <a:prstDash val="solid"/>
+          </a:ln>
+        </p:spPr>
+      </p:sp>
+      <p:sp>
+        <p:nvSpPr>
+          <p:cNvPr id="8" name="Text 6"/>
+          <p:cNvSpPr/>
+          <p:nvPr/>
+        </p:nvSpPr>
+        <p:spPr>
+          <a:xfrm>
+            <a:off x="640080" y="731520"/>
+            <a:ext cx="420624" cy="164592"/>
+          </a:xfrm>
+          <a:prstGeom prst="rect">
+            <a:avLst/>
+          </a:prstGeom>
+          <a:noFill/>
+          <a:ln/>
+        </p:spPr>
+        <p:txBody>
+          <a:bodyPr wrap="square" lIns="0" tIns="0" rIns="0" bIns="0" rtlCol="0" anchor="ctr"/>
+          <a:lstStyle/>
+          <a:p>
+            <a:pPr algn="ctr" indent="0" marL="0">
+              <a:buNone/>
+            </a:pPr>
+            <a:r>
+              <a:rPr lang="en-US" sz="1100" b="1" dirty="0">
+                <a:solidFill>
+                  <a:srgbClr val="FFFFFF"/>
+                </a:solidFill>
+                <a:latin typeface="Aptos" pitchFamily="34" charset="0"/>
+                <a:ea typeface="Aptos" pitchFamily="34" charset="-122"/>
+                <a:cs typeface="Aptos" pitchFamily="34" charset="-120"/>
+              </a:rPr>
+              <a:t>7</a:t>
+            </a:r>
+            <a:endParaRPr lang="en-US" sz="1100" dirty="0"/>
+          </a:p>
+        </p:txBody>
+      </p:sp>
+      <p:sp>
+        <p:nvSpPr>
+          <p:cNvPr id="9" name="Text 7"/>
+          <p:cNvSpPr/>
+          <p:nvPr/>
+        </p:nvSpPr>
+        <p:spPr>
+          <a:xfrm>
+            <a:off x="640080" y="621792"/>
             <a:ext cx="10881360" cy="566928"/>
           </a:xfrm>
           <a:prstGeom prst="rect">
@@ -3530,7 +4491,7 @@
                 <a:ea typeface="Aptos Display" pitchFamily="34" charset="-122"/>
                 <a:cs typeface="Aptos Display" pitchFamily="34" charset="-120"/>
               </a:rPr>
-              <a:t>Application to AI-Supported Workflows</a:t>
+              <a:t>Risks, Failure Modes, and Guardrails</a:t>
             </a:r>
             <a:endParaRPr lang="en-US" sz="2700" dirty="0"/>
           </a:p>
@@ -3538,32 +4499,178 @@
       </p:sp>
       <p:sp>
         <p:nvSpPr>
-          <p:cNvPr id="7" name="Text 5"/>
-          <p:cNvSpPr/>
-          <p:nvPr/>
-        </p:nvSpPr>
-        <p:spPr>
-          <a:xfrm>
-            <a:off x="822960" y="1325880"/>
-            <a:ext cx="10378440" cy="4800600"/>
-          </a:xfrm>
-          <a:prstGeom prst="rect">
-            <a:avLst/>
-          </a:prstGeom>
-          <a:noFill/>
-          <a:ln/>
-        </p:spPr>
-        <p:txBody>
-          <a:bodyPr wrap="square" lIns="1016" tIns="1016" rIns="1016" bIns="1016" rtlCol="0" anchor="t">
+          <p:cNvPr id="10" name="Text 8"/>
+          <p:cNvSpPr/>
+          <p:nvPr/>
+        </p:nvSpPr>
+        <p:spPr>
+          <a:xfrm>
+            <a:off x="868680" y="1417320"/>
+            <a:ext cx="6675120" cy="4434840"/>
+          </a:xfrm>
+          <a:prstGeom prst="rect">
+            <a:avLst/>
+          </a:prstGeom>
+          <a:noFill/>
+          <a:ln/>
+        </p:spPr>
+        <p:txBody>
+          <a:bodyPr wrap="square" lIns="635" tIns="635" rIns="635" bIns="635" rtlCol="0" anchor="t">
             <a:normAutofit/>
           </a:bodyPr>
           <a:lstStyle/>
           <a:p>
+            <a:r>
+              <a:rPr lang="en-US" sz="1700" dirty="0">
+                <a:solidFill>
+                  <a:srgbClr val="17364A"/>
+                </a:solidFill>
+                <a:latin typeface="Aptos" pitchFamily="34" charset="0"/>
+                <a:ea typeface="Aptos" pitchFamily="34" charset="-122"/>
+                <a:cs typeface="Aptos" pitchFamily="34" charset="-120"/>
+              </a:rPr>
+              <a:t>Confident output from weak data.</a:t>
+            </a:r>
+            <a:endParaRPr lang="en-US" sz="1700" dirty="0"/>
+          </a:p>
+          <a:p>
+            <a:r>
+              <a:rPr lang="en-US" sz="1700" dirty="0">
+                <a:solidFill>
+                  <a:srgbClr val="17364A"/>
+                </a:solidFill>
+                <a:latin typeface="Aptos" pitchFamily="34" charset="0"/>
+                <a:ea typeface="Aptos" pitchFamily="34" charset="-122"/>
+                <a:cs typeface="Aptos" pitchFamily="34" charset="-120"/>
+              </a:rPr>
+              <a:t>AI may produce polished outputs from incomplete or biased data.</a:t>
+            </a:r>
+            <a:endParaRPr lang="en-US" sz="1700" dirty="0"/>
+          </a:p>
+          <a:p>
+            <a:r>
+              <a:rPr lang="en-US" sz="1700" dirty="0">
+                <a:solidFill>
+                  <a:srgbClr val="17364A"/>
+                </a:solidFill>
+                <a:latin typeface="Aptos" pitchFamily="34" charset="0"/>
+                <a:ea typeface="Aptos" pitchFamily="34" charset="-122"/>
+                <a:cs typeface="Aptos" pitchFamily="34" charset="-120"/>
+              </a:rPr>
+              <a:t>Guardrails include uncertainty labeling, source review, and limits on use.</a:t>
+            </a:r>
+            <a:endParaRPr lang="en-US" sz="1700" dirty="0"/>
+          </a:p>
+          <a:p>
+            <a:r>
+              <a:rPr lang="en-US" sz="1700" dirty="0">
+                <a:solidFill>
+                  <a:srgbClr val="17364A"/>
+                </a:solidFill>
+                <a:latin typeface="Aptos" pitchFamily="34" charset="0"/>
+                <a:ea typeface="Aptos" pitchFamily="34" charset="-122"/>
+                <a:cs typeface="Aptos" pitchFamily="34" charset="-120"/>
+              </a:rPr>
+              <a:t>Fitness-for-use mismatch.</a:t>
+            </a:r>
+            <a:endParaRPr lang="en-US" sz="1700" dirty="0"/>
+          </a:p>
+        </p:txBody>
+      </p:sp>
+      <p:sp>
+        <p:nvSpPr>
+          <p:cNvPr id="11" name="Shape 9"/>
+          <p:cNvSpPr/>
+          <p:nvPr/>
+        </p:nvSpPr>
+        <p:spPr>
+          <a:xfrm>
+            <a:off x="7909560" y="1417320"/>
+            <a:ext cx="3154680" cy="1828800"/>
+          </a:xfrm>
+          <a:prstGeom prst="roundRect">
+            <a:avLst>
+              <a:gd name="adj" fmla="val 6000"/>
+            </a:avLst>
+          </a:prstGeom>
+          <a:solidFill>
+            <a:srgbClr val="EEF8ED"/>
+          </a:solidFill>
+          <a:ln w="12700">
+            <a:solidFill>
+              <a:srgbClr val="B9D7E6"/>
+            </a:solidFill>
+            <a:prstDash val="solid"/>
+          </a:ln>
+        </p:spPr>
+      </p:sp>
+      <p:sp>
+        <p:nvSpPr>
+          <p:cNvPr id="12" name="Text 10"/>
+          <p:cNvSpPr/>
+          <p:nvPr/>
+        </p:nvSpPr>
+        <p:spPr>
+          <a:xfrm>
+            <a:off x="8074152" y="1563624"/>
+            <a:ext cx="2825496" cy="201168"/>
+          </a:xfrm>
+          <a:prstGeom prst="rect">
+            <a:avLst/>
+          </a:prstGeom>
+          <a:noFill/>
+          <a:ln/>
+        </p:spPr>
+        <p:txBody>
+          <a:bodyPr wrap="square" lIns="0" tIns="0" rIns="0" bIns="0" rtlCol="0" anchor="ctr"/>
+          <a:lstStyle/>
+          <a:p>
             <a:pPr indent="0" marL="0">
               <a:buNone/>
             </a:pPr>
             <a:r>
-              <a:rPr lang="en-US" sz="1420" dirty="0">
+              <a:rPr lang="en-US" sz="950" b="1" dirty="0">
+                <a:solidFill>
+                  <a:srgbClr val="0068B7"/>
+                </a:solidFill>
+                <a:latin typeface="Aptos" pitchFamily="34" charset="0"/>
+                <a:ea typeface="Aptos" pitchFamily="34" charset="-122"/>
+                <a:cs typeface="Aptos" pitchFamily="34" charset="-120"/>
+              </a:rPr>
+              <a:t>Key idea</a:t>
+            </a:r>
+            <a:endParaRPr lang="en-US" sz="950" dirty="0"/>
+          </a:p>
+        </p:txBody>
+      </p:sp>
+      <p:sp>
+        <p:nvSpPr>
+          <p:cNvPr id="13" name="Text 11"/>
+          <p:cNvSpPr/>
+          <p:nvPr/>
+        </p:nvSpPr>
+        <p:spPr>
+          <a:xfrm>
+            <a:off x="8074152" y="1856232"/>
+            <a:ext cx="2825496" cy="1261872"/>
+          </a:xfrm>
+          <a:prstGeom prst="rect">
+            <a:avLst/>
+          </a:prstGeom>
+          <a:noFill/>
+          <a:ln/>
+        </p:spPr>
+        <p:txBody>
+          <a:bodyPr wrap="square" lIns="0" tIns="0" rIns="0" bIns="0" rtlCol="0" anchor="t">
+            <a:normAutofit/>
+          </a:bodyPr>
+          <a:lstStyle/>
+          <a:p>
+            <a:pPr indent="0" marL="0">
+              <a:buNone/>
+            </a:pPr>
+            <a:r>
+              <a:rPr lang="en-US" sz="1250" dirty="0">
                 <a:solidFill>
                   <a:srgbClr val="17364A"/>
                 </a:solidFill>
@@ -3571,9 +4678,116 @@
                 <a:ea typeface="Aptos" pitchFamily="34" charset="-122"/>
                 <a:cs typeface="Aptos" pitchFamily="34" charset="-120"/>
               </a:rPr>
-              <a:t>Generative AI may summarize datasets or records, but the output must reflect missingness and uncertainty. Predictive analytics depend heavily on feature quality, label quality, and representative training data. NLP may be affected by language variation, abbreviations, and documentation practices. RAG depends on document quality, metadata, and currency. Agentic AI should be blocked from acting automatically when required data are missing or quality thresholds are not met.</a:t>
-            </a:r>
-            <a:endParaRPr lang="en-US" sz="1420" dirty="0"/>
+              <a:t>Confident output from weak data.</a:t>
+            </a:r>
+            <a:endParaRPr lang="en-US" sz="1250" dirty="0"/>
+          </a:p>
+        </p:txBody>
+      </p:sp>
+      <p:sp>
+        <p:nvSpPr>
+          <p:cNvPr id="14" name="Shape 12"/>
+          <p:cNvSpPr/>
+          <p:nvPr/>
+        </p:nvSpPr>
+        <p:spPr>
+          <a:xfrm>
+            <a:off x="7909560" y="3520440"/>
+            <a:ext cx="3154680" cy="1737360"/>
+          </a:xfrm>
+          <a:prstGeom prst="roundRect">
+            <a:avLst>
+              <a:gd name="adj" fmla="val 6316"/>
+            </a:avLst>
+          </a:prstGeom>
+          <a:solidFill>
+            <a:srgbClr val="EAF6F8"/>
+          </a:solidFill>
+          <a:ln w="12700">
+            <a:solidFill>
+              <a:srgbClr val="B9D7E6"/>
+            </a:solidFill>
+            <a:prstDash val="solid"/>
+          </a:ln>
+        </p:spPr>
+      </p:sp>
+      <p:sp>
+        <p:nvSpPr>
+          <p:cNvPr id="15" name="Text 13"/>
+          <p:cNvSpPr/>
+          <p:nvPr/>
+        </p:nvSpPr>
+        <p:spPr>
+          <a:xfrm>
+            <a:off x="8074152" y="3666744"/>
+            <a:ext cx="2825496" cy="201168"/>
+          </a:xfrm>
+          <a:prstGeom prst="rect">
+            <a:avLst/>
+          </a:prstGeom>
+          <a:noFill/>
+          <a:ln/>
+        </p:spPr>
+        <p:txBody>
+          <a:bodyPr wrap="square" lIns="0" tIns="0" rIns="0" bIns="0" rtlCol="0" anchor="ctr"/>
+          <a:lstStyle/>
+          <a:p>
+            <a:pPr indent="0" marL="0">
+              <a:buNone/>
+            </a:pPr>
+            <a:r>
+              <a:rPr lang="en-US" sz="950" b="1" dirty="0">
+                <a:solidFill>
+                  <a:srgbClr val="0068B7"/>
+                </a:solidFill>
+                <a:latin typeface="Aptos" pitchFamily="34" charset="0"/>
+                <a:ea typeface="Aptos" pitchFamily="34" charset="-122"/>
+                <a:cs typeface="Aptos" pitchFamily="34" charset="-120"/>
+              </a:rPr>
+              <a:t>Use this for</a:t>
+            </a:r>
+            <a:endParaRPr lang="en-US" sz="950" dirty="0"/>
+          </a:p>
+        </p:txBody>
+      </p:sp>
+      <p:sp>
+        <p:nvSpPr>
+          <p:cNvPr id="16" name="Text 14"/>
+          <p:cNvSpPr/>
+          <p:nvPr/>
+        </p:nvSpPr>
+        <p:spPr>
+          <a:xfrm>
+            <a:off x="8074152" y="3959352"/>
+            <a:ext cx="2825496" cy="1170432"/>
+          </a:xfrm>
+          <a:prstGeom prst="rect">
+            <a:avLst/>
+          </a:prstGeom>
+          <a:noFill/>
+          <a:ln/>
+        </p:spPr>
+        <p:txBody>
+          <a:bodyPr wrap="square" lIns="0" tIns="0" rIns="0" bIns="0" rtlCol="0" anchor="t">
+            <a:normAutofit/>
+          </a:bodyPr>
+          <a:lstStyle/>
+          <a:p>
+            <a:pPr indent="0" marL="0">
+              <a:buNone/>
+            </a:pPr>
+            <a:r>
+              <a:rPr lang="en-US" sz="1250" dirty="0">
+                <a:solidFill>
+                  <a:srgbClr val="17364A"/>
+                </a:solidFill>
+                <a:latin typeface="Aptos" pitchFamily="34" charset="0"/>
+                <a:ea typeface="Aptos" pitchFamily="34" charset="-122"/>
+                <a:cs typeface="Aptos" pitchFamily="34" charset="-120"/>
+              </a:rPr>
+              <a:t>Connect the concept to public health decisions, safeguards, documentation, or implementation work.</a:t>
+            </a:r>
+            <a:endParaRPr lang="en-US" sz="1250" dirty="0"/>
           </a:p>
         </p:txBody>
       </p:sp>
@@ -3636,7 +4850,32 @@
       </p:sp>
       <p:sp>
         <p:nvSpPr>
-          <p:cNvPr id="3" name="Text 1"/>
+          <p:cNvPr id="3" name="Shape 1"/>
+          <p:cNvSpPr/>
+          <p:nvPr/>
+        </p:nvSpPr>
+        <p:spPr>
+          <a:xfrm>
+            <a:off x="0" y="164592"/>
+            <a:ext cx="146304" cy="6693408"/>
+          </a:xfrm>
+          <a:prstGeom prst="rect">
+            <a:avLst/>
+          </a:prstGeom>
+          <a:solidFill>
+            <a:srgbClr val="2F8A28"/>
+          </a:solidFill>
+          <a:ln w="12700">
+            <a:solidFill>
+              <a:srgbClr val="2F8A28"/>
+            </a:solidFill>
+            <a:prstDash val="solid"/>
+          </a:ln>
+        </p:spPr>
+      </p:sp>
+      <p:sp>
+        <p:nvSpPr>
+          <p:cNvPr id="4" name="Text 2"/>
           <p:cNvSpPr/>
           <p:nvPr/>
         </p:nvSpPr>
@@ -3675,7 +4914,7 @@
       </p:sp>
       <p:sp>
         <p:nvSpPr>
-          <p:cNvPr id="4" name="Text 2"/>
+          <p:cNvPr id="5" name="Text 3"/>
           <p:cNvSpPr/>
           <p:nvPr/>
         </p:nvSpPr>
@@ -3714,7 +4953,7 @@
       </p:sp>
       <p:sp>
         <p:nvSpPr>
-          <p:cNvPr id="5" name="Text 3"/>
+          <p:cNvPr id="6" name="Text 4"/>
           <p:cNvSpPr/>
           <p:nvPr/>
         </p:nvSpPr>
@@ -3753,7 +4992,7 @@
       </p:sp>
       <p:sp>
         <p:nvSpPr>
-          <p:cNvPr id="6" name="Text 4"/>
+          <p:cNvPr id="7" name="Text 5"/>
           <p:cNvSpPr/>
           <p:nvPr/>
         </p:nvSpPr>
@@ -3786,7 +5025,7 @@
                 <a:ea typeface="Aptos Display" pitchFamily="34" charset="-122"/>
                 <a:cs typeface="Aptos Display" pitchFamily="34" charset="-120"/>
               </a:rPr>
-              <a:t>Reflection Questions</a:t>
+              <a:t>Risks, Failure Modes, and Guardrails Continued</a:t>
             </a:r>
             <a:endParaRPr lang="en-US" sz="2700" dirty="0"/>
           </a:p>
@@ -3794,32 +5033,164 @@
       </p:sp>
       <p:sp>
         <p:nvSpPr>
-          <p:cNvPr id="7" name="Text 5"/>
-          <p:cNvSpPr/>
-          <p:nvPr/>
-        </p:nvSpPr>
-        <p:spPr>
-          <a:xfrm>
-            <a:off x="822960" y="1325880"/>
-            <a:ext cx="10378440" cy="4800600"/>
-          </a:xfrm>
-          <a:prstGeom prst="rect">
-            <a:avLst/>
-          </a:prstGeom>
-          <a:noFill/>
-          <a:ln/>
-        </p:spPr>
-        <p:txBody>
-          <a:bodyPr wrap="square" lIns="1016" tIns="1016" rIns="1016" bIns="1016" rtlCol="0" anchor="t">
+          <p:cNvPr id="8" name="Text 6"/>
+          <p:cNvSpPr/>
+          <p:nvPr/>
+        </p:nvSpPr>
+        <p:spPr>
+          <a:xfrm>
+            <a:off x="868680" y="1417320"/>
+            <a:ext cx="6675120" cy="4434840"/>
+          </a:xfrm>
+          <a:prstGeom prst="rect">
+            <a:avLst/>
+          </a:prstGeom>
+          <a:noFill/>
+          <a:ln/>
+        </p:spPr>
+        <p:txBody>
+          <a:bodyPr wrap="square" lIns="635" tIns="635" rIns="635" bIns="635" rtlCol="0" anchor="t">
             <a:normAutofit/>
           </a:bodyPr>
           <a:lstStyle/>
           <a:p>
+            <a:r>
+              <a:rPr lang="en-US" sz="1700" dirty="0">
+                <a:solidFill>
+                  <a:srgbClr val="17364A"/>
+                </a:solidFill>
+                <a:latin typeface="Aptos" pitchFamily="34" charset="0"/>
+                <a:ea typeface="Aptos" pitchFamily="34" charset="-122"/>
+                <a:cs typeface="Aptos" pitchFamily="34" charset="-120"/>
+              </a:rPr>
+              <a:t>Equity blind spots.</a:t>
+            </a:r>
+            <a:endParaRPr lang="en-US" sz="1700" dirty="0"/>
+          </a:p>
+          <a:p>
+            <a:r>
+              <a:rPr lang="en-US" sz="1700" dirty="0">
+                <a:solidFill>
+                  <a:srgbClr val="17364A"/>
+                </a:solidFill>
+                <a:latin typeface="Aptos" pitchFamily="34" charset="0"/>
+                <a:ea typeface="Aptos" pitchFamily="34" charset="-122"/>
+                <a:cs typeface="Aptos" pitchFamily="34" charset="-120"/>
+              </a:rPr>
+              <a:t>Missingness and underrepresentation may affect some groups more than others.</a:t>
+            </a:r>
+            <a:endParaRPr lang="en-US" sz="1700" dirty="0"/>
+          </a:p>
+          <a:p>
+            <a:r>
+              <a:rPr lang="en-US" sz="1700" dirty="0">
+                <a:solidFill>
+                  <a:srgbClr val="17364A"/>
+                </a:solidFill>
+                <a:latin typeface="Aptos" pitchFamily="34" charset="0"/>
+                <a:ea typeface="Aptos" pitchFamily="34" charset="-122"/>
+                <a:cs typeface="Aptos" pitchFamily="34" charset="-120"/>
+              </a:rPr>
+              <a:t>Guardrails include subgroup review, community context, and documentation of limitations.</a:t>
+            </a:r>
+            <a:endParaRPr lang="en-US" sz="1700" dirty="0"/>
+          </a:p>
+        </p:txBody>
+      </p:sp>
+      <p:sp>
+        <p:nvSpPr>
+          <p:cNvPr id="9" name="Shape 7"/>
+          <p:cNvSpPr/>
+          <p:nvPr/>
+        </p:nvSpPr>
+        <p:spPr>
+          <a:xfrm>
+            <a:off x="7909560" y="1417320"/>
+            <a:ext cx="3154680" cy="1828800"/>
+          </a:xfrm>
+          <a:prstGeom prst="roundRect">
+            <a:avLst>
+              <a:gd name="adj" fmla="val 6000"/>
+            </a:avLst>
+          </a:prstGeom>
+          <a:solidFill>
+            <a:srgbClr val="EEF8ED"/>
+          </a:solidFill>
+          <a:ln w="12700">
+            <a:solidFill>
+              <a:srgbClr val="B9D7E6"/>
+            </a:solidFill>
+            <a:prstDash val="solid"/>
+          </a:ln>
+        </p:spPr>
+      </p:sp>
+      <p:sp>
+        <p:nvSpPr>
+          <p:cNvPr id="10" name="Text 8"/>
+          <p:cNvSpPr/>
+          <p:nvPr/>
+        </p:nvSpPr>
+        <p:spPr>
+          <a:xfrm>
+            <a:off x="8074152" y="1563624"/>
+            <a:ext cx="2825496" cy="201168"/>
+          </a:xfrm>
+          <a:prstGeom prst="rect">
+            <a:avLst/>
+          </a:prstGeom>
+          <a:noFill/>
+          <a:ln/>
+        </p:spPr>
+        <p:txBody>
+          <a:bodyPr wrap="square" lIns="0" tIns="0" rIns="0" bIns="0" rtlCol="0" anchor="ctr"/>
+          <a:lstStyle/>
+          <a:p>
             <a:pPr indent="0" marL="0">
               <a:buNone/>
             </a:pPr>
             <a:r>
-              <a:rPr lang="en-US" sz="1420" dirty="0">
+              <a:rPr lang="en-US" sz="950" b="1" dirty="0">
+                <a:solidFill>
+                  <a:srgbClr val="0068B7"/>
+                </a:solidFill>
+                <a:latin typeface="Aptos" pitchFamily="34" charset="0"/>
+                <a:ea typeface="Aptos" pitchFamily="34" charset="-122"/>
+                <a:cs typeface="Aptos" pitchFamily="34" charset="-120"/>
+              </a:rPr>
+              <a:t>Key idea</a:t>
+            </a:r>
+            <a:endParaRPr lang="en-US" sz="950" dirty="0"/>
+          </a:p>
+        </p:txBody>
+      </p:sp>
+      <p:sp>
+        <p:nvSpPr>
+          <p:cNvPr id="11" name="Text 9"/>
+          <p:cNvSpPr/>
+          <p:nvPr/>
+        </p:nvSpPr>
+        <p:spPr>
+          <a:xfrm>
+            <a:off x="8074152" y="1856232"/>
+            <a:ext cx="2825496" cy="1261872"/>
+          </a:xfrm>
+          <a:prstGeom prst="rect">
+            <a:avLst/>
+          </a:prstGeom>
+          <a:noFill/>
+          <a:ln/>
+        </p:spPr>
+        <p:txBody>
+          <a:bodyPr wrap="square" lIns="0" tIns="0" rIns="0" bIns="0" rtlCol="0" anchor="t">
+            <a:normAutofit/>
+          </a:bodyPr>
+          <a:lstStyle/>
+          <a:p>
+            <a:pPr indent="0" marL="0">
+              <a:buNone/>
+            </a:pPr>
+            <a:r>
+              <a:rPr lang="en-US" sz="1250" dirty="0">
                 <a:solidFill>
                   <a:srgbClr val="17364A"/>
                 </a:solidFill>
@@ -3827,9 +5198,116 @@
                 <a:ea typeface="Aptos" pitchFamily="34" charset="-122"/>
                 <a:cs typeface="Aptos" pitchFamily="34" charset="-120"/>
               </a:rPr>
-              <a:t>Which data quality problems most often affect your program area? Which missing fields would make an AI output unsafe or unreliable? Which populations or settings may be underrepresented in the data?</a:t>
-            </a:r>
-            <a:endParaRPr lang="en-US" sz="1420" dirty="0"/>
+              <a:t>Equity blind spots.</a:t>
+            </a:r>
+            <a:endParaRPr lang="en-US" sz="1250" dirty="0"/>
+          </a:p>
+        </p:txBody>
+      </p:sp>
+      <p:sp>
+        <p:nvSpPr>
+          <p:cNvPr id="12" name="Shape 10"/>
+          <p:cNvSpPr/>
+          <p:nvPr/>
+        </p:nvSpPr>
+        <p:spPr>
+          <a:xfrm>
+            <a:off x="7909560" y="3520440"/>
+            <a:ext cx="3154680" cy="1737360"/>
+          </a:xfrm>
+          <a:prstGeom prst="roundRect">
+            <a:avLst>
+              <a:gd name="adj" fmla="val 6316"/>
+            </a:avLst>
+          </a:prstGeom>
+          <a:solidFill>
+            <a:srgbClr val="EAF6F8"/>
+          </a:solidFill>
+          <a:ln w="12700">
+            <a:solidFill>
+              <a:srgbClr val="B9D7E6"/>
+            </a:solidFill>
+            <a:prstDash val="solid"/>
+          </a:ln>
+        </p:spPr>
+      </p:sp>
+      <p:sp>
+        <p:nvSpPr>
+          <p:cNvPr id="13" name="Text 11"/>
+          <p:cNvSpPr/>
+          <p:nvPr/>
+        </p:nvSpPr>
+        <p:spPr>
+          <a:xfrm>
+            <a:off x="8074152" y="3666744"/>
+            <a:ext cx="2825496" cy="201168"/>
+          </a:xfrm>
+          <a:prstGeom prst="rect">
+            <a:avLst/>
+          </a:prstGeom>
+          <a:noFill/>
+          <a:ln/>
+        </p:spPr>
+        <p:txBody>
+          <a:bodyPr wrap="square" lIns="0" tIns="0" rIns="0" bIns="0" rtlCol="0" anchor="ctr"/>
+          <a:lstStyle/>
+          <a:p>
+            <a:pPr indent="0" marL="0">
+              <a:buNone/>
+            </a:pPr>
+            <a:r>
+              <a:rPr lang="en-US" sz="950" b="1" dirty="0">
+                <a:solidFill>
+                  <a:srgbClr val="0068B7"/>
+                </a:solidFill>
+                <a:latin typeface="Aptos" pitchFamily="34" charset="0"/>
+                <a:ea typeface="Aptos" pitchFamily="34" charset="-122"/>
+                <a:cs typeface="Aptos" pitchFamily="34" charset="-120"/>
+              </a:rPr>
+              <a:t>Use this for</a:t>
+            </a:r>
+            <a:endParaRPr lang="en-US" sz="950" dirty="0"/>
+          </a:p>
+        </p:txBody>
+      </p:sp>
+      <p:sp>
+        <p:nvSpPr>
+          <p:cNvPr id="14" name="Text 12"/>
+          <p:cNvSpPr/>
+          <p:nvPr/>
+        </p:nvSpPr>
+        <p:spPr>
+          <a:xfrm>
+            <a:off x="8074152" y="3959352"/>
+            <a:ext cx="2825496" cy="1170432"/>
+          </a:xfrm>
+          <a:prstGeom prst="rect">
+            <a:avLst/>
+          </a:prstGeom>
+          <a:noFill/>
+          <a:ln/>
+        </p:spPr>
+        <p:txBody>
+          <a:bodyPr wrap="square" lIns="0" tIns="0" rIns="0" bIns="0" rtlCol="0" anchor="t">
+            <a:normAutofit/>
+          </a:bodyPr>
+          <a:lstStyle/>
+          <a:p>
+            <a:pPr indent="0" marL="0">
+              <a:buNone/>
+            </a:pPr>
+            <a:r>
+              <a:rPr lang="en-US" sz="1250" dirty="0">
+                <a:solidFill>
+                  <a:srgbClr val="17364A"/>
+                </a:solidFill>
+                <a:latin typeface="Aptos" pitchFamily="34" charset="0"/>
+                <a:ea typeface="Aptos" pitchFamily="34" charset="-122"/>
+                <a:cs typeface="Aptos" pitchFamily="34" charset="-120"/>
+              </a:rPr>
+              <a:t>Connect the concept to public health decisions, safeguards, documentation, or implementation work.</a:t>
+            </a:r>
+            <a:endParaRPr lang="en-US" sz="1250" dirty="0"/>
           </a:p>
         </p:txBody>
       </p:sp>
@@ -3892,7 +5370,32 @@
       </p:sp>
       <p:sp>
         <p:nvSpPr>
-          <p:cNvPr id="3" name="Text 1"/>
+          <p:cNvPr id="3" name="Shape 1"/>
+          <p:cNvSpPr/>
+          <p:nvPr/>
+        </p:nvSpPr>
+        <p:spPr>
+          <a:xfrm>
+            <a:off x="0" y="164592"/>
+            <a:ext cx="146304" cy="6693408"/>
+          </a:xfrm>
+          <a:prstGeom prst="rect">
+            <a:avLst/>
+          </a:prstGeom>
+          <a:solidFill>
+            <a:srgbClr val="2F8A28"/>
+          </a:solidFill>
+          <a:ln w="12700">
+            <a:solidFill>
+              <a:srgbClr val="2F8A28"/>
+            </a:solidFill>
+            <a:prstDash val="solid"/>
+          </a:ln>
+        </p:spPr>
+      </p:sp>
+      <p:sp>
+        <p:nvSpPr>
+          <p:cNvPr id="4" name="Text 2"/>
           <p:cNvSpPr/>
           <p:nvPr/>
         </p:nvSpPr>
@@ -3931,7 +5434,7 @@
       </p:sp>
       <p:sp>
         <p:nvSpPr>
-          <p:cNvPr id="4" name="Text 2"/>
+          <p:cNvPr id="5" name="Text 3"/>
           <p:cNvSpPr/>
           <p:nvPr/>
         </p:nvSpPr>
@@ -3970,7 +5473,7 @@
       </p:sp>
       <p:sp>
         <p:nvSpPr>
-          <p:cNvPr id="5" name="Text 3"/>
+          <p:cNvPr id="6" name="Text 4"/>
           <p:cNvSpPr/>
           <p:nvPr/>
         </p:nvSpPr>
@@ -4009,13 +5512,77 @@
       </p:sp>
       <p:sp>
         <p:nvSpPr>
-          <p:cNvPr id="6" name="Text 4"/>
+          <p:cNvPr id="7" name="Shape 5"/>
           <p:cNvSpPr/>
           <p:nvPr/>
         </p:nvSpPr>
         <p:spPr>
           <a:xfrm>
             <a:off x="640080" y="658368"/>
+            <a:ext cx="420624" cy="420624"/>
+          </a:xfrm>
+          <a:prstGeom prst="ellipse">
+            <a:avLst/>
+          </a:prstGeom>
+          <a:solidFill>
+            <a:srgbClr val="0068B7"/>
+          </a:solidFill>
+          <a:ln w="12700">
+            <a:solidFill>
+              <a:srgbClr val="0068B7"/>
+            </a:solidFill>
+            <a:prstDash val="solid"/>
+          </a:ln>
+        </p:spPr>
+      </p:sp>
+      <p:sp>
+        <p:nvSpPr>
+          <p:cNvPr id="8" name="Text 6"/>
+          <p:cNvSpPr/>
+          <p:nvPr/>
+        </p:nvSpPr>
+        <p:spPr>
+          <a:xfrm>
+            <a:off x="640080" y="731520"/>
+            <a:ext cx="420624" cy="164592"/>
+          </a:xfrm>
+          <a:prstGeom prst="rect">
+            <a:avLst/>
+          </a:prstGeom>
+          <a:noFill/>
+          <a:ln/>
+        </p:spPr>
+        <p:txBody>
+          <a:bodyPr wrap="square" lIns="0" tIns="0" rIns="0" bIns="0" rtlCol="0" anchor="ctr"/>
+          <a:lstStyle/>
+          <a:p>
+            <a:pPr algn="ctr" indent="0" marL="0">
+              <a:buNone/>
+            </a:pPr>
+            <a:r>
+              <a:rPr lang="en-US" sz="1100" b="1" dirty="0">
+                <a:solidFill>
+                  <a:srgbClr val="FFFFFF"/>
+                </a:solidFill>
+                <a:latin typeface="Aptos" pitchFamily="34" charset="0"/>
+                <a:ea typeface="Aptos" pitchFamily="34" charset="-122"/>
+                <a:cs typeface="Aptos" pitchFamily="34" charset="-120"/>
+              </a:rPr>
+              <a:t>8</a:t>
+            </a:r>
+            <a:endParaRPr lang="en-US" sz="1100" dirty="0"/>
+          </a:p>
+        </p:txBody>
+      </p:sp>
+      <p:sp>
+        <p:nvSpPr>
+          <p:cNvPr id="9" name="Text 7"/>
+          <p:cNvSpPr/>
+          <p:nvPr/>
+        </p:nvSpPr>
+        <p:spPr>
+          <a:xfrm>
+            <a:off x="640080" y="621792"/>
             <a:ext cx="10881360" cy="566928"/>
           </a:xfrm>
           <a:prstGeom prst="rect">
@@ -4042,7 +5609,7 @@
                 <a:ea typeface="Aptos Display" pitchFamily="34" charset="-122"/>
                 <a:cs typeface="Aptos Display" pitchFamily="34" charset="-120"/>
               </a:rPr>
-              <a:t>Reflection Questions Continued</a:t>
+              <a:t>Application to AI-Supported Workflows</a:t>
             </a:r>
             <a:endParaRPr lang="en-US" sz="2700" dirty="0"/>
           </a:p>
@@ -4050,32 +5617,178 @@
       </p:sp>
       <p:sp>
         <p:nvSpPr>
-          <p:cNvPr id="7" name="Text 5"/>
-          <p:cNvSpPr/>
-          <p:nvPr/>
-        </p:nvSpPr>
-        <p:spPr>
-          <a:xfrm>
-            <a:off x="822960" y="1325880"/>
-            <a:ext cx="10378440" cy="4800600"/>
-          </a:xfrm>
-          <a:prstGeom prst="rect">
-            <a:avLst/>
-          </a:prstGeom>
-          <a:noFill/>
-          <a:ln/>
-        </p:spPr>
-        <p:txBody>
-          <a:bodyPr wrap="square" lIns="1016" tIns="1016" rIns="1016" bIns="1016" rtlCol="0" anchor="t">
+          <p:cNvPr id="10" name="Text 8"/>
+          <p:cNvSpPr/>
+          <p:nvPr/>
+        </p:nvSpPr>
+        <p:spPr>
+          <a:xfrm>
+            <a:off x="868680" y="1417320"/>
+            <a:ext cx="6675120" cy="4434840"/>
+          </a:xfrm>
+          <a:prstGeom prst="rect">
+            <a:avLst/>
+          </a:prstGeom>
+          <a:noFill/>
+          <a:ln/>
+        </p:spPr>
+        <p:txBody>
+          <a:bodyPr wrap="square" lIns="635" tIns="635" rIns="635" bIns="635" rtlCol="0" anchor="t">
             <a:normAutofit/>
           </a:bodyPr>
           <a:lstStyle/>
           <a:p>
+            <a:r>
+              <a:rPr lang="en-US" sz="1700" dirty="0">
+                <a:solidFill>
+                  <a:srgbClr val="17364A"/>
+                </a:solidFill>
+                <a:latin typeface="Aptos" pitchFamily="34" charset="0"/>
+                <a:ea typeface="Aptos" pitchFamily="34" charset="-122"/>
+                <a:cs typeface="Aptos" pitchFamily="34" charset="-120"/>
+              </a:rPr>
+              <a:t>Generative AI may summarize datasets or records, but the output must reflect missingness and uncertainty.</a:t>
+            </a:r>
+            <a:endParaRPr lang="en-US" sz="1700" dirty="0"/>
+          </a:p>
+          <a:p>
+            <a:r>
+              <a:rPr lang="en-US" sz="1700" dirty="0">
+                <a:solidFill>
+                  <a:srgbClr val="17364A"/>
+                </a:solidFill>
+                <a:latin typeface="Aptos" pitchFamily="34" charset="0"/>
+                <a:ea typeface="Aptos" pitchFamily="34" charset="-122"/>
+                <a:cs typeface="Aptos" pitchFamily="34" charset="-120"/>
+              </a:rPr>
+              <a:t>Predictive analytics depend heavily on feature quality, label quality, and representative training data.</a:t>
+            </a:r>
+            <a:endParaRPr lang="en-US" sz="1700" dirty="0"/>
+          </a:p>
+          <a:p>
+            <a:r>
+              <a:rPr lang="en-US" sz="1700" dirty="0">
+                <a:solidFill>
+                  <a:srgbClr val="17364A"/>
+                </a:solidFill>
+                <a:latin typeface="Aptos" pitchFamily="34" charset="0"/>
+                <a:ea typeface="Aptos" pitchFamily="34" charset="-122"/>
+                <a:cs typeface="Aptos" pitchFamily="34" charset="-120"/>
+              </a:rPr>
+              <a:t>NLP may be affected by language variation, abbreviations, and documentation practices.</a:t>
+            </a:r>
+            <a:endParaRPr lang="en-US" sz="1700" dirty="0"/>
+          </a:p>
+          <a:p>
+            <a:r>
+              <a:rPr lang="en-US" sz="1700" dirty="0">
+                <a:solidFill>
+                  <a:srgbClr val="17364A"/>
+                </a:solidFill>
+                <a:latin typeface="Aptos" pitchFamily="34" charset="0"/>
+                <a:ea typeface="Aptos" pitchFamily="34" charset="-122"/>
+                <a:cs typeface="Aptos" pitchFamily="34" charset="-120"/>
+              </a:rPr>
+              <a:t>RAG depends on document quality, metadata, and currency.</a:t>
+            </a:r>
+            <a:endParaRPr lang="en-US" sz="1700" dirty="0"/>
+          </a:p>
+        </p:txBody>
+      </p:sp>
+      <p:sp>
+        <p:nvSpPr>
+          <p:cNvPr id="11" name="Shape 9"/>
+          <p:cNvSpPr/>
+          <p:nvPr/>
+        </p:nvSpPr>
+        <p:spPr>
+          <a:xfrm>
+            <a:off x="7909560" y="1417320"/>
+            <a:ext cx="3154680" cy="1828800"/>
+          </a:xfrm>
+          <a:prstGeom prst="roundRect">
+            <a:avLst>
+              <a:gd name="adj" fmla="val 6000"/>
+            </a:avLst>
+          </a:prstGeom>
+          <a:solidFill>
+            <a:srgbClr val="EEF8ED"/>
+          </a:solidFill>
+          <a:ln w="12700">
+            <a:solidFill>
+              <a:srgbClr val="B9D7E6"/>
+            </a:solidFill>
+            <a:prstDash val="solid"/>
+          </a:ln>
+        </p:spPr>
+      </p:sp>
+      <p:sp>
+        <p:nvSpPr>
+          <p:cNvPr id="12" name="Text 10"/>
+          <p:cNvSpPr/>
+          <p:nvPr/>
+        </p:nvSpPr>
+        <p:spPr>
+          <a:xfrm>
+            <a:off x="8074152" y="1563624"/>
+            <a:ext cx="2825496" cy="201168"/>
+          </a:xfrm>
+          <a:prstGeom prst="rect">
+            <a:avLst/>
+          </a:prstGeom>
+          <a:noFill/>
+          <a:ln/>
+        </p:spPr>
+        <p:txBody>
+          <a:bodyPr wrap="square" lIns="0" tIns="0" rIns="0" bIns="0" rtlCol="0" anchor="ctr"/>
+          <a:lstStyle/>
+          <a:p>
             <a:pPr indent="0" marL="0">
               <a:buNone/>
             </a:pPr>
             <a:r>
-              <a:rPr lang="en-US" sz="1420" dirty="0">
+              <a:rPr lang="en-US" sz="950" b="1" dirty="0">
+                <a:solidFill>
+                  <a:srgbClr val="0068B7"/>
+                </a:solidFill>
+                <a:latin typeface="Aptos" pitchFamily="34" charset="0"/>
+                <a:ea typeface="Aptos" pitchFamily="34" charset="-122"/>
+                <a:cs typeface="Aptos" pitchFamily="34" charset="-120"/>
+              </a:rPr>
+              <a:t>Key idea</a:t>
+            </a:r>
+            <a:endParaRPr lang="en-US" sz="950" dirty="0"/>
+          </a:p>
+        </p:txBody>
+      </p:sp>
+      <p:sp>
+        <p:nvSpPr>
+          <p:cNvPr id="13" name="Text 11"/>
+          <p:cNvSpPr/>
+          <p:nvPr/>
+        </p:nvSpPr>
+        <p:spPr>
+          <a:xfrm>
+            <a:off x="8074152" y="1856232"/>
+            <a:ext cx="2825496" cy="1261872"/>
+          </a:xfrm>
+          <a:prstGeom prst="rect">
+            <a:avLst/>
+          </a:prstGeom>
+          <a:noFill/>
+          <a:ln/>
+        </p:spPr>
+        <p:txBody>
+          <a:bodyPr wrap="square" lIns="0" tIns="0" rIns="0" bIns="0" rtlCol="0" anchor="t">
+            <a:normAutofit/>
+          </a:bodyPr>
+          <a:lstStyle/>
+          <a:p>
+            <a:pPr indent="0" marL="0">
+              <a:buNone/>
+            </a:pPr>
+            <a:r>
+              <a:rPr lang="en-US" sz="1250" dirty="0">
                 <a:solidFill>
                   <a:srgbClr val="17364A"/>
                 </a:solidFill>
@@ -4083,9 +5796,116 @@
                 <a:ea typeface="Aptos" pitchFamily="34" charset="-122"/>
                 <a:cs typeface="Aptos" pitchFamily="34" charset="-120"/>
               </a:rPr>
-              <a:t>How would staff detect data drift? Who has authority to pause or limit AI use when data quality is insufficient?</a:t>
-            </a:r>
-            <a:endParaRPr lang="en-US" sz="1420" dirty="0"/>
+              <a:t>Generative AI may summarize datasets or records, but the output must reflect missingness and uncertainty.</a:t>
+            </a:r>
+            <a:endParaRPr lang="en-US" sz="1250" dirty="0"/>
+          </a:p>
+        </p:txBody>
+      </p:sp>
+      <p:sp>
+        <p:nvSpPr>
+          <p:cNvPr id="14" name="Shape 12"/>
+          <p:cNvSpPr/>
+          <p:nvPr/>
+        </p:nvSpPr>
+        <p:spPr>
+          <a:xfrm>
+            <a:off x="7909560" y="3520440"/>
+            <a:ext cx="3154680" cy="1737360"/>
+          </a:xfrm>
+          <a:prstGeom prst="roundRect">
+            <a:avLst>
+              <a:gd name="adj" fmla="val 6316"/>
+            </a:avLst>
+          </a:prstGeom>
+          <a:solidFill>
+            <a:srgbClr val="EAF6F8"/>
+          </a:solidFill>
+          <a:ln w="12700">
+            <a:solidFill>
+              <a:srgbClr val="B9D7E6"/>
+            </a:solidFill>
+            <a:prstDash val="solid"/>
+          </a:ln>
+        </p:spPr>
+      </p:sp>
+      <p:sp>
+        <p:nvSpPr>
+          <p:cNvPr id="15" name="Text 13"/>
+          <p:cNvSpPr/>
+          <p:nvPr/>
+        </p:nvSpPr>
+        <p:spPr>
+          <a:xfrm>
+            <a:off x="8074152" y="3666744"/>
+            <a:ext cx="2825496" cy="201168"/>
+          </a:xfrm>
+          <a:prstGeom prst="rect">
+            <a:avLst/>
+          </a:prstGeom>
+          <a:noFill/>
+          <a:ln/>
+        </p:spPr>
+        <p:txBody>
+          <a:bodyPr wrap="square" lIns="0" tIns="0" rIns="0" bIns="0" rtlCol="0" anchor="ctr"/>
+          <a:lstStyle/>
+          <a:p>
+            <a:pPr indent="0" marL="0">
+              <a:buNone/>
+            </a:pPr>
+            <a:r>
+              <a:rPr lang="en-US" sz="950" b="1" dirty="0">
+                <a:solidFill>
+                  <a:srgbClr val="0068B7"/>
+                </a:solidFill>
+                <a:latin typeface="Aptos" pitchFamily="34" charset="0"/>
+                <a:ea typeface="Aptos" pitchFamily="34" charset="-122"/>
+                <a:cs typeface="Aptos" pitchFamily="34" charset="-120"/>
+              </a:rPr>
+              <a:t>Use this for</a:t>
+            </a:r>
+            <a:endParaRPr lang="en-US" sz="950" dirty="0"/>
+          </a:p>
+        </p:txBody>
+      </p:sp>
+      <p:sp>
+        <p:nvSpPr>
+          <p:cNvPr id="16" name="Text 14"/>
+          <p:cNvSpPr/>
+          <p:nvPr/>
+        </p:nvSpPr>
+        <p:spPr>
+          <a:xfrm>
+            <a:off x="8074152" y="3959352"/>
+            <a:ext cx="2825496" cy="1170432"/>
+          </a:xfrm>
+          <a:prstGeom prst="rect">
+            <a:avLst/>
+          </a:prstGeom>
+          <a:noFill/>
+          <a:ln/>
+        </p:spPr>
+        <p:txBody>
+          <a:bodyPr wrap="square" lIns="0" tIns="0" rIns="0" bIns="0" rtlCol="0" anchor="t">
+            <a:normAutofit/>
+          </a:bodyPr>
+          <a:lstStyle/>
+          <a:p>
+            <a:pPr indent="0" marL="0">
+              <a:buNone/>
+            </a:pPr>
+            <a:r>
+              <a:rPr lang="en-US" sz="1250" dirty="0">
+                <a:solidFill>
+                  <a:srgbClr val="17364A"/>
+                </a:solidFill>
+                <a:latin typeface="Aptos" pitchFamily="34" charset="0"/>
+                <a:ea typeface="Aptos" pitchFamily="34" charset="-122"/>
+                <a:cs typeface="Aptos" pitchFamily="34" charset="-120"/>
+              </a:rPr>
+              <a:t>Connect the concept to public health decisions, safeguards, documentation, or implementation work.</a:t>
+            </a:r>
+            <a:endParaRPr lang="en-US" sz="1250" dirty="0"/>
           </a:p>
         </p:txBody>
       </p:sp>
@@ -4148,7 +5968,32 @@
       </p:sp>
       <p:sp>
         <p:nvSpPr>
-          <p:cNvPr id="3" name="Text 1"/>
+          <p:cNvPr id="3" name="Shape 1"/>
+          <p:cNvSpPr/>
+          <p:nvPr/>
+        </p:nvSpPr>
+        <p:spPr>
+          <a:xfrm>
+            <a:off x="0" y="164592"/>
+            <a:ext cx="146304" cy="6693408"/>
+          </a:xfrm>
+          <a:prstGeom prst="rect">
+            <a:avLst/>
+          </a:prstGeom>
+          <a:solidFill>
+            <a:srgbClr val="2F8A28"/>
+          </a:solidFill>
+          <a:ln w="12700">
+            <a:solidFill>
+              <a:srgbClr val="2F8A28"/>
+            </a:solidFill>
+            <a:prstDash val="solid"/>
+          </a:ln>
+        </p:spPr>
+      </p:sp>
+      <p:sp>
+        <p:nvSpPr>
+          <p:cNvPr id="4" name="Text 2"/>
           <p:cNvSpPr/>
           <p:nvPr/>
         </p:nvSpPr>
@@ -4187,7 +6032,7 @@
       </p:sp>
       <p:sp>
         <p:nvSpPr>
-          <p:cNvPr id="4" name="Text 2"/>
+          <p:cNvPr id="5" name="Text 3"/>
           <p:cNvSpPr/>
           <p:nvPr/>
         </p:nvSpPr>
@@ -4226,7 +6071,7 @@
       </p:sp>
       <p:sp>
         <p:nvSpPr>
-          <p:cNvPr id="5" name="Text 3"/>
+          <p:cNvPr id="6" name="Text 4"/>
           <p:cNvSpPr/>
           <p:nvPr/>
         </p:nvSpPr>
@@ -4265,13 +6110,77 @@
       </p:sp>
       <p:sp>
         <p:nvSpPr>
-          <p:cNvPr id="6" name="Text 4"/>
+          <p:cNvPr id="7" name="Shape 5"/>
           <p:cNvSpPr/>
           <p:nvPr/>
         </p:nvSpPr>
         <p:spPr>
           <a:xfrm>
             <a:off x="640080" y="658368"/>
+            <a:ext cx="420624" cy="420624"/>
+          </a:xfrm>
+          <a:prstGeom prst="ellipse">
+            <a:avLst/>
+          </a:prstGeom>
+          <a:solidFill>
+            <a:srgbClr val="0068B7"/>
+          </a:solidFill>
+          <a:ln w="12700">
+            <a:solidFill>
+              <a:srgbClr val="0068B7"/>
+            </a:solidFill>
+            <a:prstDash val="solid"/>
+          </a:ln>
+        </p:spPr>
+      </p:sp>
+      <p:sp>
+        <p:nvSpPr>
+          <p:cNvPr id="8" name="Text 6"/>
+          <p:cNvSpPr/>
+          <p:nvPr/>
+        </p:nvSpPr>
+        <p:spPr>
+          <a:xfrm>
+            <a:off x="640080" y="731520"/>
+            <a:ext cx="420624" cy="164592"/>
+          </a:xfrm>
+          <a:prstGeom prst="rect">
+            <a:avLst/>
+          </a:prstGeom>
+          <a:noFill/>
+          <a:ln/>
+        </p:spPr>
+        <p:txBody>
+          <a:bodyPr wrap="square" lIns="0" tIns="0" rIns="0" bIns="0" rtlCol="0" anchor="ctr"/>
+          <a:lstStyle/>
+          <a:p>
+            <a:pPr algn="ctr" indent="0" marL="0">
+              <a:buNone/>
+            </a:pPr>
+            <a:r>
+              <a:rPr lang="en-US" sz="1100" b="1" dirty="0">
+                <a:solidFill>
+                  <a:srgbClr val="FFFFFF"/>
+                </a:solidFill>
+                <a:latin typeface="Aptos" pitchFamily="34" charset="0"/>
+                <a:ea typeface="Aptos" pitchFamily="34" charset="-122"/>
+                <a:cs typeface="Aptos" pitchFamily="34" charset="-120"/>
+              </a:rPr>
+              <a:t>9</a:t>
+            </a:r>
+            <a:endParaRPr lang="en-US" sz="1100" dirty="0"/>
+          </a:p>
+        </p:txBody>
+      </p:sp>
+      <p:sp>
+        <p:nvSpPr>
+          <p:cNvPr id="9" name="Text 7"/>
+          <p:cNvSpPr/>
+          <p:nvPr/>
+        </p:nvSpPr>
+        <p:spPr>
+          <a:xfrm>
+            <a:off x="640080" y="621792"/>
             <a:ext cx="10881360" cy="566928"/>
           </a:xfrm>
           <a:prstGeom prst="rect">
@@ -4298,7 +6207,7 @@
                 <a:ea typeface="Aptos Display" pitchFamily="34" charset="-122"/>
                 <a:cs typeface="Aptos Display" pitchFamily="34" charset="-120"/>
               </a:rPr>
-              <a:t>Practical Exercise</a:t>
+              <a:t>Reflection Questions</a:t>
             </a:r>
             <a:endParaRPr lang="en-US" sz="2700" dirty="0"/>
           </a:p>
@@ -4306,32 +6215,164 @@
       </p:sp>
       <p:sp>
         <p:nvSpPr>
-          <p:cNvPr id="7" name="Text 5"/>
-          <p:cNvSpPr/>
-          <p:nvPr/>
-        </p:nvSpPr>
-        <p:spPr>
-          <a:xfrm>
-            <a:off x="822960" y="1325880"/>
-            <a:ext cx="10378440" cy="4800600"/>
-          </a:xfrm>
-          <a:prstGeom prst="rect">
-            <a:avLst/>
-          </a:prstGeom>
-          <a:noFill/>
-          <a:ln/>
-        </p:spPr>
-        <p:txBody>
-          <a:bodyPr wrap="square" lIns="1016" tIns="1016" rIns="1016" bIns="1016" rtlCol="0" anchor="t">
+          <p:cNvPr id="10" name="Text 8"/>
+          <p:cNvSpPr/>
+          <p:nvPr/>
+        </p:nvSpPr>
+        <p:spPr>
+          <a:xfrm>
+            <a:off x="868680" y="1417320"/>
+            <a:ext cx="6675120" cy="4434840"/>
+          </a:xfrm>
+          <a:prstGeom prst="rect">
+            <a:avLst/>
+          </a:prstGeom>
+          <a:noFill/>
+          <a:ln/>
+        </p:spPr>
+        <p:txBody>
+          <a:bodyPr wrap="square" lIns="635" tIns="635" rIns="635" bIns="635" rtlCol="0" anchor="t">
             <a:normAutofit/>
           </a:bodyPr>
           <a:lstStyle/>
           <a:p>
+            <a:r>
+              <a:rPr lang="en-US" sz="1700" dirty="0">
+                <a:solidFill>
+                  <a:srgbClr val="17364A"/>
+                </a:solidFill>
+                <a:latin typeface="Aptos" pitchFamily="34" charset="0"/>
+                <a:ea typeface="Aptos" pitchFamily="34" charset="-122"/>
+                <a:cs typeface="Aptos" pitchFamily="34" charset="-120"/>
+              </a:rPr>
+              <a:t>Which data quality problems most often affect your program area?</a:t>
+            </a:r>
+            <a:endParaRPr lang="en-US" sz="1700" dirty="0"/>
+          </a:p>
+          <a:p>
+            <a:r>
+              <a:rPr lang="en-US" sz="1700" dirty="0">
+                <a:solidFill>
+                  <a:srgbClr val="17364A"/>
+                </a:solidFill>
+                <a:latin typeface="Aptos" pitchFamily="34" charset="0"/>
+                <a:ea typeface="Aptos" pitchFamily="34" charset="-122"/>
+                <a:cs typeface="Aptos" pitchFamily="34" charset="-120"/>
+              </a:rPr>
+              <a:t>Which missing fields would make an AI output unsafe or unreliable?</a:t>
+            </a:r>
+            <a:endParaRPr lang="en-US" sz="1700" dirty="0"/>
+          </a:p>
+          <a:p>
+            <a:r>
+              <a:rPr lang="en-US" sz="1700" dirty="0">
+                <a:solidFill>
+                  <a:srgbClr val="17364A"/>
+                </a:solidFill>
+                <a:latin typeface="Aptos" pitchFamily="34" charset="0"/>
+                <a:ea typeface="Aptos" pitchFamily="34" charset="-122"/>
+                <a:cs typeface="Aptos" pitchFamily="34" charset="-120"/>
+              </a:rPr>
+              <a:t>Which populations or settings may be underrepresented in the data?</a:t>
+            </a:r>
+            <a:endParaRPr lang="en-US" sz="1700" dirty="0"/>
+          </a:p>
+        </p:txBody>
+      </p:sp>
+      <p:sp>
+        <p:nvSpPr>
+          <p:cNvPr id="11" name="Shape 9"/>
+          <p:cNvSpPr/>
+          <p:nvPr/>
+        </p:nvSpPr>
+        <p:spPr>
+          <a:xfrm>
+            <a:off x="7909560" y="1417320"/>
+            <a:ext cx="3154680" cy="1828800"/>
+          </a:xfrm>
+          <a:prstGeom prst="roundRect">
+            <a:avLst>
+              <a:gd name="adj" fmla="val 6000"/>
+            </a:avLst>
+          </a:prstGeom>
+          <a:solidFill>
+            <a:srgbClr val="EEF8ED"/>
+          </a:solidFill>
+          <a:ln w="12700">
+            <a:solidFill>
+              <a:srgbClr val="B9D7E6"/>
+            </a:solidFill>
+            <a:prstDash val="solid"/>
+          </a:ln>
+        </p:spPr>
+      </p:sp>
+      <p:sp>
+        <p:nvSpPr>
+          <p:cNvPr id="12" name="Text 10"/>
+          <p:cNvSpPr/>
+          <p:nvPr/>
+        </p:nvSpPr>
+        <p:spPr>
+          <a:xfrm>
+            <a:off x="8074152" y="1563624"/>
+            <a:ext cx="2825496" cy="201168"/>
+          </a:xfrm>
+          <a:prstGeom prst="rect">
+            <a:avLst/>
+          </a:prstGeom>
+          <a:noFill/>
+          <a:ln/>
+        </p:spPr>
+        <p:txBody>
+          <a:bodyPr wrap="square" lIns="0" tIns="0" rIns="0" bIns="0" rtlCol="0" anchor="ctr"/>
+          <a:lstStyle/>
+          <a:p>
             <a:pPr indent="0" marL="0">
               <a:buNone/>
             </a:pPr>
             <a:r>
-              <a:rPr lang="en-US" sz="1420" dirty="0">
+              <a:rPr lang="en-US" sz="950" b="1" dirty="0">
+                <a:solidFill>
+                  <a:srgbClr val="0068B7"/>
+                </a:solidFill>
+                <a:latin typeface="Aptos" pitchFamily="34" charset="0"/>
+                <a:ea typeface="Aptos" pitchFamily="34" charset="-122"/>
+                <a:cs typeface="Aptos" pitchFamily="34" charset="-120"/>
+              </a:rPr>
+              <a:t>Key idea</a:t>
+            </a:r>
+            <a:endParaRPr lang="en-US" sz="950" dirty="0"/>
+          </a:p>
+        </p:txBody>
+      </p:sp>
+      <p:sp>
+        <p:nvSpPr>
+          <p:cNvPr id="13" name="Text 11"/>
+          <p:cNvSpPr/>
+          <p:nvPr/>
+        </p:nvSpPr>
+        <p:spPr>
+          <a:xfrm>
+            <a:off x="8074152" y="1856232"/>
+            <a:ext cx="2825496" cy="1261872"/>
+          </a:xfrm>
+          <a:prstGeom prst="rect">
+            <a:avLst/>
+          </a:prstGeom>
+          <a:noFill/>
+          <a:ln/>
+        </p:spPr>
+        <p:txBody>
+          <a:bodyPr wrap="square" lIns="0" tIns="0" rIns="0" bIns="0" rtlCol="0" anchor="t">
+            <a:normAutofit/>
+          </a:bodyPr>
+          <a:lstStyle/>
+          <a:p>
+            <a:pPr indent="0" marL="0">
+              <a:buNone/>
+            </a:pPr>
+            <a:r>
+              <a:rPr lang="en-US" sz="1250" dirty="0">
                 <a:solidFill>
                   <a:srgbClr val="17364A"/>
                 </a:solidFill>
@@ -4339,9 +6380,116 @@
                 <a:ea typeface="Aptos" pitchFamily="34" charset="-122"/>
                 <a:cs typeface="Aptos" pitchFamily="34" charset="-120"/>
               </a:rPr>
-              <a:t>Create a data quality review plan for one AI-supported workflow. Include the use case, required fields, quality dimensions, thresholds or review rules, known limitations, equity concerns, drift monitoring, documentation expectations, and escalation criteria.</a:t>
-            </a:r>
-            <a:endParaRPr lang="en-US" sz="1420" dirty="0"/>
+              <a:t>Which data quality problems most often affect your program area?</a:t>
+            </a:r>
+            <a:endParaRPr lang="en-US" sz="1250" dirty="0"/>
+          </a:p>
+        </p:txBody>
+      </p:sp>
+      <p:sp>
+        <p:nvSpPr>
+          <p:cNvPr id="14" name="Shape 12"/>
+          <p:cNvSpPr/>
+          <p:nvPr/>
+        </p:nvSpPr>
+        <p:spPr>
+          <a:xfrm>
+            <a:off x="7909560" y="3520440"/>
+            <a:ext cx="3154680" cy="1737360"/>
+          </a:xfrm>
+          <a:prstGeom prst="roundRect">
+            <a:avLst>
+              <a:gd name="adj" fmla="val 6316"/>
+            </a:avLst>
+          </a:prstGeom>
+          <a:solidFill>
+            <a:srgbClr val="EAF6F8"/>
+          </a:solidFill>
+          <a:ln w="12700">
+            <a:solidFill>
+              <a:srgbClr val="B9D7E6"/>
+            </a:solidFill>
+            <a:prstDash val="solid"/>
+          </a:ln>
+        </p:spPr>
+      </p:sp>
+      <p:sp>
+        <p:nvSpPr>
+          <p:cNvPr id="15" name="Text 13"/>
+          <p:cNvSpPr/>
+          <p:nvPr/>
+        </p:nvSpPr>
+        <p:spPr>
+          <a:xfrm>
+            <a:off x="8074152" y="3666744"/>
+            <a:ext cx="2825496" cy="201168"/>
+          </a:xfrm>
+          <a:prstGeom prst="rect">
+            <a:avLst/>
+          </a:prstGeom>
+          <a:noFill/>
+          <a:ln/>
+        </p:spPr>
+        <p:txBody>
+          <a:bodyPr wrap="square" lIns="0" tIns="0" rIns="0" bIns="0" rtlCol="0" anchor="ctr"/>
+          <a:lstStyle/>
+          <a:p>
+            <a:pPr indent="0" marL="0">
+              <a:buNone/>
+            </a:pPr>
+            <a:r>
+              <a:rPr lang="en-US" sz="950" b="1" dirty="0">
+                <a:solidFill>
+                  <a:srgbClr val="0068B7"/>
+                </a:solidFill>
+                <a:latin typeface="Aptos" pitchFamily="34" charset="0"/>
+                <a:ea typeface="Aptos" pitchFamily="34" charset="-122"/>
+                <a:cs typeface="Aptos" pitchFamily="34" charset="-120"/>
+              </a:rPr>
+              <a:t>Use this for</a:t>
+            </a:r>
+            <a:endParaRPr lang="en-US" sz="950" dirty="0"/>
+          </a:p>
+        </p:txBody>
+      </p:sp>
+      <p:sp>
+        <p:nvSpPr>
+          <p:cNvPr id="16" name="Text 14"/>
+          <p:cNvSpPr/>
+          <p:nvPr/>
+        </p:nvSpPr>
+        <p:spPr>
+          <a:xfrm>
+            <a:off x="8074152" y="3959352"/>
+            <a:ext cx="2825496" cy="1170432"/>
+          </a:xfrm>
+          <a:prstGeom prst="rect">
+            <a:avLst/>
+          </a:prstGeom>
+          <a:noFill/>
+          <a:ln/>
+        </p:spPr>
+        <p:txBody>
+          <a:bodyPr wrap="square" lIns="0" tIns="0" rIns="0" bIns="0" rtlCol="0" anchor="t">
+            <a:normAutofit/>
+          </a:bodyPr>
+          <a:lstStyle/>
+          <a:p>
+            <a:pPr indent="0" marL="0">
+              <a:buNone/>
+            </a:pPr>
+            <a:r>
+              <a:rPr lang="en-US" sz="1250" dirty="0">
+                <a:solidFill>
+                  <a:srgbClr val="17364A"/>
+                </a:solidFill>
+                <a:latin typeface="Aptos" pitchFamily="34" charset="0"/>
+                <a:ea typeface="Aptos" pitchFamily="34" charset="-122"/>
+                <a:cs typeface="Aptos" pitchFamily="34" charset="-120"/>
+              </a:rPr>
+              <a:t>Connect the concept to public health decisions, safeguards, documentation, or implementation work.</a:t>
+            </a:r>
+            <a:endParaRPr lang="en-US" sz="1250" dirty="0"/>
           </a:p>
         </p:txBody>
       </p:sp>
@@ -4404,7 +6552,32 @@
       </p:sp>
       <p:sp>
         <p:nvSpPr>
-          <p:cNvPr id="3" name="Text 1"/>
+          <p:cNvPr id="3" name="Shape 1"/>
+          <p:cNvSpPr/>
+          <p:nvPr/>
+        </p:nvSpPr>
+        <p:spPr>
+          <a:xfrm>
+            <a:off x="0" y="164592"/>
+            <a:ext cx="146304" cy="6693408"/>
+          </a:xfrm>
+          <a:prstGeom prst="rect">
+            <a:avLst/>
+          </a:prstGeom>
+          <a:solidFill>
+            <a:srgbClr val="2F8A28"/>
+          </a:solidFill>
+          <a:ln w="12700">
+            <a:solidFill>
+              <a:srgbClr val="2F8A28"/>
+            </a:solidFill>
+            <a:prstDash val="solid"/>
+          </a:ln>
+        </p:spPr>
+      </p:sp>
+      <p:sp>
+        <p:nvSpPr>
+          <p:cNvPr id="4" name="Text 2"/>
           <p:cNvSpPr/>
           <p:nvPr/>
         </p:nvSpPr>
@@ -4443,7 +6616,7 @@
       </p:sp>
       <p:sp>
         <p:nvSpPr>
-          <p:cNvPr id="4" name="Text 2"/>
+          <p:cNvPr id="5" name="Text 3"/>
           <p:cNvSpPr/>
           <p:nvPr/>
         </p:nvSpPr>
@@ -4482,7 +6655,7 @@
       </p:sp>
       <p:sp>
         <p:nvSpPr>
-          <p:cNvPr id="5" name="Text 3"/>
+          <p:cNvPr id="6" name="Text 4"/>
           <p:cNvSpPr/>
           <p:nvPr/>
         </p:nvSpPr>
@@ -4521,7 +6694,7 @@
       </p:sp>
       <p:sp>
         <p:nvSpPr>
-          <p:cNvPr id="6" name="Text 4"/>
+          <p:cNvPr id="7" name="Text 5"/>
           <p:cNvSpPr/>
           <p:nvPr/>
         </p:nvSpPr>
@@ -4554,7 +6727,7 @@
                 <a:ea typeface="Aptos Display" pitchFamily="34" charset="-122"/>
                 <a:cs typeface="Aptos Display" pitchFamily="34" charset="-120"/>
               </a:rPr>
-              <a:t>Expected Artifact or Evidence</a:t>
+              <a:t>Reflection Questions Continued</a:t>
             </a:r>
             <a:endParaRPr lang="en-US" sz="2700" dirty="0"/>
           </a:p>
@@ -4562,32 +6735,150 @@
       </p:sp>
       <p:sp>
         <p:nvSpPr>
-          <p:cNvPr id="7" name="Text 5"/>
-          <p:cNvSpPr/>
-          <p:nvPr/>
-        </p:nvSpPr>
-        <p:spPr>
-          <a:xfrm>
-            <a:off x="822960" y="1325880"/>
-            <a:ext cx="10378440" cy="4800600"/>
-          </a:xfrm>
-          <a:prstGeom prst="rect">
-            <a:avLst/>
-          </a:prstGeom>
-          <a:noFill/>
-          <a:ln/>
-        </p:spPr>
-        <p:txBody>
-          <a:bodyPr wrap="square" lIns="1016" tIns="1016" rIns="1016" bIns="1016" rtlCol="0" anchor="t">
+          <p:cNvPr id="8" name="Text 6"/>
+          <p:cNvSpPr/>
+          <p:nvPr/>
+        </p:nvSpPr>
+        <p:spPr>
+          <a:xfrm>
+            <a:off x="868680" y="1417320"/>
+            <a:ext cx="6675120" cy="4434840"/>
+          </a:xfrm>
+          <a:prstGeom prst="rect">
+            <a:avLst/>
+          </a:prstGeom>
+          <a:noFill/>
+          <a:ln/>
+        </p:spPr>
+        <p:txBody>
+          <a:bodyPr wrap="square" lIns="635" tIns="635" rIns="635" bIns="635" rtlCol="0" anchor="t">
             <a:normAutofit/>
           </a:bodyPr>
           <a:lstStyle/>
           <a:p>
+            <a:r>
+              <a:rPr lang="en-US" sz="1700" dirty="0">
+                <a:solidFill>
+                  <a:srgbClr val="17364A"/>
+                </a:solidFill>
+                <a:latin typeface="Aptos" pitchFamily="34" charset="0"/>
+                <a:ea typeface="Aptos" pitchFamily="34" charset="-122"/>
+                <a:cs typeface="Aptos" pitchFamily="34" charset="-120"/>
+              </a:rPr>
+              <a:t>How would staff detect data drift?</a:t>
+            </a:r>
+            <a:endParaRPr lang="en-US" sz="1700" dirty="0"/>
+          </a:p>
+          <a:p>
+            <a:r>
+              <a:rPr lang="en-US" sz="1700" dirty="0">
+                <a:solidFill>
+                  <a:srgbClr val="17364A"/>
+                </a:solidFill>
+                <a:latin typeface="Aptos" pitchFamily="34" charset="0"/>
+                <a:ea typeface="Aptos" pitchFamily="34" charset="-122"/>
+                <a:cs typeface="Aptos" pitchFamily="34" charset="-120"/>
+              </a:rPr>
+              <a:t>Who has authority to pause or limit AI use when data quality is insufficient?</a:t>
+            </a:r>
+            <a:endParaRPr lang="en-US" sz="1700" dirty="0"/>
+          </a:p>
+        </p:txBody>
+      </p:sp>
+      <p:sp>
+        <p:nvSpPr>
+          <p:cNvPr id="9" name="Shape 7"/>
+          <p:cNvSpPr/>
+          <p:nvPr/>
+        </p:nvSpPr>
+        <p:spPr>
+          <a:xfrm>
+            <a:off x="7909560" y="1417320"/>
+            <a:ext cx="3154680" cy="1828800"/>
+          </a:xfrm>
+          <a:prstGeom prst="roundRect">
+            <a:avLst>
+              <a:gd name="adj" fmla="val 6000"/>
+            </a:avLst>
+          </a:prstGeom>
+          <a:solidFill>
+            <a:srgbClr val="EEF8ED"/>
+          </a:solidFill>
+          <a:ln w="12700">
+            <a:solidFill>
+              <a:srgbClr val="B9D7E6"/>
+            </a:solidFill>
+            <a:prstDash val="solid"/>
+          </a:ln>
+        </p:spPr>
+      </p:sp>
+      <p:sp>
+        <p:nvSpPr>
+          <p:cNvPr id="10" name="Text 8"/>
+          <p:cNvSpPr/>
+          <p:nvPr/>
+        </p:nvSpPr>
+        <p:spPr>
+          <a:xfrm>
+            <a:off x="8074152" y="1563624"/>
+            <a:ext cx="2825496" cy="201168"/>
+          </a:xfrm>
+          <a:prstGeom prst="rect">
+            <a:avLst/>
+          </a:prstGeom>
+          <a:noFill/>
+          <a:ln/>
+        </p:spPr>
+        <p:txBody>
+          <a:bodyPr wrap="square" lIns="0" tIns="0" rIns="0" bIns="0" rtlCol="0" anchor="ctr"/>
+          <a:lstStyle/>
+          <a:p>
             <a:pPr indent="0" marL="0">
               <a:buNone/>
             </a:pPr>
             <a:r>
-              <a:rPr lang="en-US" sz="1420" dirty="0">
+              <a:rPr lang="en-US" sz="950" b="1" dirty="0">
+                <a:solidFill>
+                  <a:srgbClr val="0068B7"/>
+                </a:solidFill>
+                <a:latin typeface="Aptos" pitchFamily="34" charset="0"/>
+                <a:ea typeface="Aptos" pitchFamily="34" charset="-122"/>
+                <a:cs typeface="Aptos" pitchFamily="34" charset="-120"/>
+              </a:rPr>
+              <a:t>Key idea</a:t>
+            </a:r>
+            <a:endParaRPr lang="en-US" sz="950" dirty="0"/>
+          </a:p>
+        </p:txBody>
+      </p:sp>
+      <p:sp>
+        <p:nvSpPr>
+          <p:cNvPr id="11" name="Text 9"/>
+          <p:cNvSpPr/>
+          <p:nvPr/>
+        </p:nvSpPr>
+        <p:spPr>
+          <a:xfrm>
+            <a:off x="8074152" y="1856232"/>
+            <a:ext cx="2825496" cy="1261872"/>
+          </a:xfrm>
+          <a:prstGeom prst="rect">
+            <a:avLst/>
+          </a:prstGeom>
+          <a:noFill/>
+          <a:ln/>
+        </p:spPr>
+        <p:txBody>
+          <a:bodyPr wrap="square" lIns="0" tIns="0" rIns="0" bIns="0" rtlCol="0" anchor="t">
+            <a:normAutofit/>
+          </a:bodyPr>
+          <a:lstStyle/>
+          <a:p>
+            <a:pPr indent="0" marL="0">
+              <a:buNone/>
+            </a:pPr>
+            <a:r>
+              <a:rPr lang="en-US" sz="1250" dirty="0">
                 <a:solidFill>
                   <a:srgbClr val="17364A"/>
                 </a:solidFill>
@@ -4595,9 +6886,116 @@
                 <a:ea typeface="Aptos" pitchFamily="34" charset="-122"/>
                 <a:cs typeface="Aptos" pitchFamily="34" charset="-120"/>
               </a:rPr>
-              <a:t>Data quality review plan Data quality checklist Thresholds or review criteria</a:t>
-            </a:r>
-            <a:endParaRPr lang="en-US" sz="1420" dirty="0"/>
+              <a:t>How would staff detect data drift?</a:t>
+            </a:r>
+            <a:endParaRPr lang="en-US" sz="1250" dirty="0"/>
+          </a:p>
+        </p:txBody>
+      </p:sp>
+      <p:sp>
+        <p:nvSpPr>
+          <p:cNvPr id="12" name="Shape 10"/>
+          <p:cNvSpPr/>
+          <p:nvPr/>
+        </p:nvSpPr>
+        <p:spPr>
+          <a:xfrm>
+            <a:off x="7909560" y="3520440"/>
+            <a:ext cx="3154680" cy="1737360"/>
+          </a:xfrm>
+          <a:prstGeom prst="roundRect">
+            <a:avLst>
+              <a:gd name="adj" fmla="val 6316"/>
+            </a:avLst>
+          </a:prstGeom>
+          <a:solidFill>
+            <a:srgbClr val="EAF6F8"/>
+          </a:solidFill>
+          <a:ln w="12700">
+            <a:solidFill>
+              <a:srgbClr val="B9D7E6"/>
+            </a:solidFill>
+            <a:prstDash val="solid"/>
+          </a:ln>
+        </p:spPr>
+      </p:sp>
+      <p:sp>
+        <p:nvSpPr>
+          <p:cNvPr id="13" name="Text 11"/>
+          <p:cNvSpPr/>
+          <p:nvPr/>
+        </p:nvSpPr>
+        <p:spPr>
+          <a:xfrm>
+            <a:off x="8074152" y="3666744"/>
+            <a:ext cx="2825496" cy="201168"/>
+          </a:xfrm>
+          <a:prstGeom prst="rect">
+            <a:avLst/>
+          </a:prstGeom>
+          <a:noFill/>
+          <a:ln/>
+        </p:spPr>
+        <p:txBody>
+          <a:bodyPr wrap="square" lIns="0" tIns="0" rIns="0" bIns="0" rtlCol="0" anchor="ctr"/>
+          <a:lstStyle/>
+          <a:p>
+            <a:pPr indent="0" marL="0">
+              <a:buNone/>
+            </a:pPr>
+            <a:r>
+              <a:rPr lang="en-US" sz="950" b="1" dirty="0">
+                <a:solidFill>
+                  <a:srgbClr val="0068B7"/>
+                </a:solidFill>
+                <a:latin typeface="Aptos" pitchFamily="34" charset="0"/>
+                <a:ea typeface="Aptos" pitchFamily="34" charset="-122"/>
+                <a:cs typeface="Aptos" pitchFamily="34" charset="-120"/>
+              </a:rPr>
+              <a:t>Use this for</a:t>
+            </a:r>
+            <a:endParaRPr lang="en-US" sz="950" dirty="0"/>
+          </a:p>
+        </p:txBody>
+      </p:sp>
+      <p:sp>
+        <p:nvSpPr>
+          <p:cNvPr id="14" name="Text 12"/>
+          <p:cNvSpPr/>
+          <p:nvPr/>
+        </p:nvSpPr>
+        <p:spPr>
+          <a:xfrm>
+            <a:off x="8074152" y="3959352"/>
+            <a:ext cx="2825496" cy="1170432"/>
+          </a:xfrm>
+          <a:prstGeom prst="rect">
+            <a:avLst/>
+          </a:prstGeom>
+          <a:noFill/>
+          <a:ln/>
+        </p:spPr>
+        <p:txBody>
+          <a:bodyPr wrap="square" lIns="0" tIns="0" rIns="0" bIns="0" rtlCol="0" anchor="t">
+            <a:normAutofit/>
+          </a:bodyPr>
+          <a:lstStyle/>
+          <a:p>
+            <a:pPr indent="0" marL="0">
+              <a:buNone/>
+            </a:pPr>
+            <a:r>
+              <a:rPr lang="en-US" sz="1250" dirty="0">
+                <a:solidFill>
+                  <a:srgbClr val="17364A"/>
+                </a:solidFill>
+                <a:latin typeface="Aptos" pitchFamily="34" charset="0"/>
+                <a:ea typeface="Aptos" pitchFamily="34" charset="-122"/>
+                <a:cs typeface="Aptos" pitchFamily="34" charset="-120"/>
+              </a:rPr>
+              <a:t>Connect the concept to public health decisions, safeguards, documentation, or implementation work.</a:t>
+            </a:r>
+            <a:endParaRPr lang="en-US" sz="1250" dirty="0"/>
           </a:p>
         </p:txBody>
       </p:sp>
@@ -4660,7 +7058,32 @@
       </p:sp>
       <p:sp>
         <p:nvSpPr>
-          <p:cNvPr id="3" name="Text 1"/>
+          <p:cNvPr id="3" name="Shape 1"/>
+          <p:cNvSpPr/>
+          <p:nvPr/>
+        </p:nvSpPr>
+        <p:spPr>
+          <a:xfrm>
+            <a:off x="0" y="164592"/>
+            <a:ext cx="146304" cy="6693408"/>
+          </a:xfrm>
+          <a:prstGeom prst="rect">
+            <a:avLst/>
+          </a:prstGeom>
+          <a:solidFill>
+            <a:srgbClr val="2F8A28"/>
+          </a:solidFill>
+          <a:ln w="12700">
+            <a:solidFill>
+              <a:srgbClr val="2F8A28"/>
+            </a:solidFill>
+            <a:prstDash val="solid"/>
+          </a:ln>
+        </p:spPr>
+      </p:sp>
+      <p:sp>
+        <p:nvSpPr>
+          <p:cNvPr id="4" name="Text 2"/>
           <p:cNvSpPr/>
           <p:nvPr/>
         </p:nvSpPr>
@@ -4699,7 +7122,7 @@
       </p:sp>
       <p:sp>
         <p:nvSpPr>
-          <p:cNvPr id="4" name="Text 2"/>
+          <p:cNvPr id="5" name="Text 3"/>
           <p:cNvSpPr/>
           <p:nvPr/>
         </p:nvSpPr>
@@ -4738,7 +7161,7 @@
       </p:sp>
       <p:sp>
         <p:nvSpPr>
-          <p:cNvPr id="5" name="Text 3"/>
+          <p:cNvPr id="6" name="Text 4"/>
           <p:cNvSpPr/>
           <p:nvPr/>
         </p:nvSpPr>
@@ -4777,13 +7200,77 @@
       </p:sp>
       <p:sp>
         <p:nvSpPr>
-          <p:cNvPr id="6" name="Text 4"/>
+          <p:cNvPr id="7" name="Shape 5"/>
           <p:cNvSpPr/>
           <p:nvPr/>
         </p:nvSpPr>
         <p:spPr>
           <a:xfrm>
             <a:off x="640080" y="658368"/>
+            <a:ext cx="420624" cy="420624"/>
+          </a:xfrm>
+          <a:prstGeom prst="ellipse">
+            <a:avLst/>
+          </a:prstGeom>
+          <a:solidFill>
+            <a:srgbClr val="0068B7"/>
+          </a:solidFill>
+          <a:ln w="12700">
+            <a:solidFill>
+              <a:srgbClr val="0068B7"/>
+            </a:solidFill>
+            <a:prstDash val="solid"/>
+          </a:ln>
+        </p:spPr>
+      </p:sp>
+      <p:sp>
+        <p:nvSpPr>
+          <p:cNvPr id="8" name="Text 6"/>
+          <p:cNvSpPr/>
+          <p:nvPr/>
+        </p:nvSpPr>
+        <p:spPr>
+          <a:xfrm>
+            <a:off x="640080" y="731520"/>
+            <a:ext cx="420624" cy="164592"/>
+          </a:xfrm>
+          <a:prstGeom prst="rect">
+            <a:avLst/>
+          </a:prstGeom>
+          <a:noFill/>
+          <a:ln/>
+        </p:spPr>
+        <p:txBody>
+          <a:bodyPr wrap="square" lIns="0" tIns="0" rIns="0" bIns="0" rtlCol="0" anchor="ctr"/>
+          <a:lstStyle/>
+          <a:p>
+            <a:pPr algn="ctr" indent="0" marL="0">
+              <a:buNone/>
+            </a:pPr>
+            <a:r>
+              <a:rPr lang="en-US" sz="1100" b="1" dirty="0">
+                <a:solidFill>
+                  <a:srgbClr val="FFFFFF"/>
+                </a:solidFill>
+                <a:latin typeface="Aptos" pitchFamily="34" charset="0"/>
+                <a:ea typeface="Aptos" pitchFamily="34" charset="-122"/>
+                <a:cs typeface="Aptos" pitchFamily="34" charset="-120"/>
+              </a:rPr>
+              <a:t>10</a:t>
+            </a:r>
+            <a:endParaRPr lang="en-US" sz="1100" dirty="0"/>
+          </a:p>
+        </p:txBody>
+      </p:sp>
+      <p:sp>
+        <p:nvSpPr>
+          <p:cNvPr id="9" name="Text 7"/>
+          <p:cNvSpPr/>
+          <p:nvPr/>
+        </p:nvSpPr>
+        <p:spPr>
+          <a:xfrm>
+            <a:off x="640080" y="621792"/>
             <a:ext cx="10881360" cy="566928"/>
           </a:xfrm>
           <a:prstGeom prst="rect">
@@ -4810,7 +7297,7 @@
                 <a:ea typeface="Aptos Display" pitchFamily="34" charset="-122"/>
                 <a:cs typeface="Aptos Display" pitchFamily="34" charset="-120"/>
               </a:rPr>
-              <a:t>Expected Artifact or Evidence Continued</a:t>
+              <a:t>Practical Exercise</a:t>
             </a:r>
             <a:endParaRPr lang="en-US" sz="2700" dirty="0"/>
           </a:p>
@@ -4818,32 +7305,150 @@
       </p:sp>
       <p:sp>
         <p:nvSpPr>
-          <p:cNvPr id="7" name="Text 5"/>
-          <p:cNvSpPr/>
-          <p:nvPr/>
-        </p:nvSpPr>
-        <p:spPr>
-          <a:xfrm>
-            <a:off x="822960" y="1325880"/>
-            <a:ext cx="10378440" cy="4800600"/>
-          </a:xfrm>
-          <a:prstGeom prst="rect">
-            <a:avLst/>
-          </a:prstGeom>
-          <a:noFill/>
-          <a:ln/>
-        </p:spPr>
-        <p:txBody>
-          <a:bodyPr wrap="square" lIns="1016" tIns="1016" rIns="1016" bIns="1016" rtlCol="0" anchor="t">
+          <p:cNvPr id="10" name="Text 8"/>
+          <p:cNvSpPr/>
+          <p:nvPr/>
+        </p:nvSpPr>
+        <p:spPr>
+          <a:xfrm>
+            <a:off x="868680" y="1417320"/>
+            <a:ext cx="6675120" cy="4434840"/>
+          </a:xfrm>
+          <a:prstGeom prst="rect">
+            <a:avLst/>
+          </a:prstGeom>
+          <a:noFill/>
+          <a:ln/>
+        </p:spPr>
+        <p:txBody>
+          <a:bodyPr wrap="square" lIns="635" tIns="635" rIns="635" bIns="635" rtlCol="0" anchor="t">
             <a:normAutofit/>
           </a:bodyPr>
           <a:lstStyle/>
           <a:p>
+            <a:r>
+              <a:rPr lang="en-US" sz="1700" dirty="0">
+                <a:solidFill>
+                  <a:srgbClr val="17364A"/>
+                </a:solidFill>
+                <a:latin typeface="Aptos" pitchFamily="34" charset="0"/>
+                <a:ea typeface="Aptos" pitchFamily="34" charset="-122"/>
+                <a:cs typeface="Aptos" pitchFamily="34" charset="-120"/>
+              </a:rPr>
+              <a:t>Create a data quality review plan for one AI-supported workflow.</a:t>
+            </a:r>
+            <a:endParaRPr lang="en-US" sz="1700" dirty="0"/>
+          </a:p>
+          <a:p>
+            <a:r>
+              <a:rPr lang="en-US" sz="1700" dirty="0">
+                <a:solidFill>
+                  <a:srgbClr val="17364A"/>
+                </a:solidFill>
+                <a:latin typeface="Aptos" pitchFamily="34" charset="0"/>
+                <a:ea typeface="Aptos" pitchFamily="34" charset="-122"/>
+                <a:cs typeface="Aptos" pitchFamily="34" charset="-120"/>
+              </a:rPr>
+              <a:t>Include the use case, required fields, quality dimensions, thresholds or review rules, known limitations, equity concerns,.</a:t>
+            </a:r>
+            <a:endParaRPr lang="en-US" sz="1700" dirty="0"/>
+          </a:p>
+        </p:txBody>
+      </p:sp>
+      <p:sp>
+        <p:nvSpPr>
+          <p:cNvPr id="11" name="Shape 9"/>
+          <p:cNvSpPr/>
+          <p:nvPr/>
+        </p:nvSpPr>
+        <p:spPr>
+          <a:xfrm>
+            <a:off x="7909560" y="1417320"/>
+            <a:ext cx="3154680" cy="1828800"/>
+          </a:xfrm>
+          <a:prstGeom prst="roundRect">
+            <a:avLst>
+              <a:gd name="adj" fmla="val 6000"/>
+            </a:avLst>
+          </a:prstGeom>
+          <a:solidFill>
+            <a:srgbClr val="EEF8ED"/>
+          </a:solidFill>
+          <a:ln w="12700">
+            <a:solidFill>
+              <a:srgbClr val="B9D7E6"/>
+            </a:solidFill>
+            <a:prstDash val="solid"/>
+          </a:ln>
+        </p:spPr>
+      </p:sp>
+      <p:sp>
+        <p:nvSpPr>
+          <p:cNvPr id="12" name="Text 10"/>
+          <p:cNvSpPr/>
+          <p:nvPr/>
+        </p:nvSpPr>
+        <p:spPr>
+          <a:xfrm>
+            <a:off x="8074152" y="1563624"/>
+            <a:ext cx="2825496" cy="201168"/>
+          </a:xfrm>
+          <a:prstGeom prst="rect">
+            <a:avLst/>
+          </a:prstGeom>
+          <a:noFill/>
+          <a:ln/>
+        </p:spPr>
+        <p:txBody>
+          <a:bodyPr wrap="square" lIns="0" tIns="0" rIns="0" bIns="0" rtlCol="0" anchor="ctr"/>
+          <a:lstStyle/>
+          <a:p>
             <a:pPr indent="0" marL="0">
               <a:buNone/>
             </a:pPr>
             <a:r>
-              <a:rPr lang="en-US" sz="1420" dirty="0">
+              <a:rPr lang="en-US" sz="950" b="1" dirty="0">
+                <a:solidFill>
+                  <a:srgbClr val="0068B7"/>
+                </a:solidFill>
+                <a:latin typeface="Aptos" pitchFamily="34" charset="0"/>
+                <a:ea typeface="Aptos" pitchFamily="34" charset="-122"/>
+                <a:cs typeface="Aptos" pitchFamily="34" charset="-120"/>
+              </a:rPr>
+              <a:t>Key idea</a:t>
+            </a:r>
+            <a:endParaRPr lang="en-US" sz="950" dirty="0"/>
+          </a:p>
+        </p:txBody>
+      </p:sp>
+      <p:sp>
+        <p:nvSpPr>
+          <p:cNvPr id="13" name="Text 11"/>
+          <p:cNvSpPr/>
+          <p:nvPr/>
+        </p:nvSpPr>
+        <p:spPr>
+          <a:xfrm>
+            <a:off x="8074152" y="1856232"/>
+            <a:ext cx="2825496" cy="1261872"/>
+          </a:xfrm>
+          <a:prstGeom prst="rect">
+            <a:avLst/>
+          </a:prstGeom>
+          <a:noFill/>
+          <a:ln/>
+        </p:spPr>
+        <p:txBody>
+          <a:bodyPr wrap="square" lIns="0" tIns="0" rIns="0" bIns="0" rtlCol="0" anchor="t">
+            <a:normAutofit/>
+          </a:bodyPr>
+          <a:lstStyle/>
+          <a:p>
+            <a:pPr indent="0" marL="0">
+              <a:buNone/>
+            </a:pPr>
+            <a:r>
+              <a:rPr lang="en-US" sz="1250" dirty="0">
                 <a:solidFill>
                   <a:srgbClr val="17364A"/>
                 </a:solidFill>
@@ -4851,9 +7456,116 @@
                 <a:ea typeface="Aptos" pitchFamily="34" charset="-122"/>
                 <a:cs typeface="Aptos" pitchFamily="34" charset="-120"/>
               </a:rPr>
-              <a:t>Known limitations statement</a:t>
-            </a:r>
-            <a:endParaRPr lang="en-US" sz="1420" dirty="0"/>
+              <a:t>Create a data quality review plan for one AI-supported workflow.</a:t>
+            </a:r>
+            <a:endParaRPr lang="en-US" sz="1250" dirty="0"/>
+          </a:p>
+        </p:txBody>
+      </p:sp>
+      <p:sp>
+        <p:nvSpPr>
+          <p:cNvPr id="14" name="Shape 12"/>
+          <p:cNvSpPr/>
+          <p:nvPr/>
+        </p:nvSpPr>
+        <p:spPr>
+          <a:xfrm>
+            <a:off x="7909560" y="3520440"/>
+            <a:ext cx="3154680" cy="1737360"/>
+          </a:xfrm>
+          <a:prstGeom prst="roundRect">
+            <a:avLst>
+              <a:gd name="adj" fmla="val 6316"/>
+            </a:avLst>
+          </a:prstGeom>
+          <a:solidFill>
+            <a:srgbClr val="EAF6F8"/>
+          </a:solidFill>
+          <a:ln w="12700">
+            <a:solidFill>
+              <a:srgbClr val="B9D7E6"/>
+            </a:solidFill>
+            <a:prstDash val="solid"/>
+          </a:ln>
+        </p:spPr>
+      </p:sp>
+      <p:sp>
+        <p:nvSpPr>
+          <p:cNvPr id="15" name="Text 13"/>
+          <p:cNvSpPr/>
+          <p:nvPr/>
+        </p:nvSpPr>
+        <p:spPr>
+          <a:xfrm>
+            <a:off x="8074152" y="3666744"/>
+            <a:ext cx="2825496" cy="201168"/>
+          </a:xfrm>
+          <a:prstGeom prst="rect">
+            <a:avLst/>
+          </a:prstGeom>
+          <a:noFill/>
+          <a:ln/>
+        </p:spPr>
+        <p:txBody>
+          <a:bodyPr wrap="square" lIns="0" tIns="0" rIns="0" bIns="0" rtlCol="0" anchor="ctr"/>
+          <a:lstStyle/>
+          <a:p>
+            <a:pPr indent="0" marL="0">
+              <a:buNone/>
+            </a:pPr>
+            <a:r>
+              <a:rPr lang="en-US" sz="950" b="1" dirty="0">
+                <a:solidFill>
+                  <a:srgbClr val="0068B7"/>
+                </a:solidFill>
+                <a:latin typeface="Aptos" pitchFamily="34" charset="0"/>
+                <a:ea typeface="Aptos" pitchFamily="34" charset="-122"/>
+                <a:cs typeface="Aptos" pitchFamily="34" charset="-120"/>
+              </a:rPr>
+              <a:t>Use this for</a:t>
+            </a:r>
+            <a:endParaRPr lang="en-US" sz="950" dirty="0"/>
+          </a:p>
+        </p:txBody>
+      </p:sp>
+      <p:sp>
+        <p:nvSpPr>
+          <p:cNvPr id="16" name="Text 14"/>
+          <p:cNvSpPr/>
+          <p:nvPr/>
+        </p:nvSpPr>
+        <p:spPr>
+          <a:xfrm>
+            <a:off x="8074152" y="3959352"/>
+            <a:ext cx="2825496" cy="1170432"/>
+          </a:xfrm>
+          <a:prstGeom prst="rect">
+            <a:avLst/>
+          </a:prstGeom>
+          <a:noFill/>
+          <a:ln/>
+        </p:spPr>
+        <p:txBody>
+          <a:bodyPr wrap="square" lIns="0" tIns="0" rIns="0" bIns="0" rtlCol="0" anchor="t">
+            <a:normAutofit/>
+          </a:bodyPr>
+          <a:lstStyle/>
+          <a:p>
+            <a:pPr indent="0" marL="0">
+              <a:buNone/>
+            </a:pPr>
+            <a:r>
+              <a:rPr lang="en-US" sz="1250" dirty="0">
+                <a:solidFill>
+                  <a:srgbClr val="17364A"/>
+                </a:solidFill>
+                <a:latin typeface="Aptos" pitchFamily="34" charset="0"/>
+                <a:ea typeface="Aptos" pitchFamily="34" charset="-122"/>
+                <a:cs typeface="Aptos" pitchFamily="34" charset="-120"/>
+              </a:rPr>
+              <a:t>Connect the concept to public health decisions, safeguards, documentation, or implementation work.</a:t>
+            </a:r>
+            <a:endParaRPr lang="en-US" sz="1250" dirty="0"/>
           </a:p>
         </p:txBody>
       </p:sp>
@@ -4916,7 +7628,32 @@
       </p:sp>
       <p:sp>
         <p:nvSpPr>
-          <p:cNvPr id="3" name="Text 1"/>
+          <p:cNvPr id="3" name="Shape 1"/>
+          <p:cNvSpPr/>
+          <p:nvPr/>
+        </p:nvSpPr>
+        <p:spPr>
+          <a:xfrm>
+            <a:off x="0" y="164592"/>
+            <a:ext cx="146304" cy="6693408"/>
+          </a:xfrm>
+          <a:prstGeom prst="rect">
+            <a:avLst/>
+          </a:prstGeom>
+          <a:solidFill>
+            <a:srgbClr val="2F8A28"/>
+          </a:solidFill>
+          <a:ln w="12700">
+            <a:solidFill>
+              <a:srgbClr val="2F8A28"/>
+            </a:solidFill>
+            <a:prstDash val="solid"/>
+          </a:ln>
+        </p:spPr>
+      </p:sp>
+      <p:sp>
+        <p:nvSpPr>
+          <p:cNvPr id="4" name="Text 2"/>
           <p:cNvSpPr/>
           <p:nvPr/>
         </p:nvSpPr>
@@ -4955,7 +7692,7 @@
       </p:sp>
       <p:sp>
         <p:nvSpPr>
-          <p:cNvPr id="4" name="Text 2"/>
+          <p:cNvPr id="5" name="Text 3"/>
           <p:cNvSpPr/>
           <p:nvPr/>
         </p:nvSpPr>
@@ -4994,7 +7731,7 @@
       </p:sp>
       <p:sp>
         <p:nvSpPr>
-          <p:cNvPr id="5" name="Text 3"/>
+          <p:cNvPr id="6" name="Text 4"/>
           <p:cNvSpPr/>
           <p:nvPr/>
         </p:nvSpPr>
@@ -5033,13 +7770,77 @@
       </p:sp>
       <p:sp>
         <p:nvSpPr>
-          <p:cNvPr id="6" name="Text 4"/>
+          <p:cNvPr id="7" name="Shape 5"/>
           <p:cNvSpPr/>
           <p:nvPr/>
         </p:nvSpPr>
         <p:spPr>
           <a:xfrm>
             <a:off x="640080" y="658368"/>
+            <a:ext cx="420624" cy="420624"/>
+          </a:xfrm>
+          <a:prstGeom prst="ellipse">
+            <a:avLst/>
+          </a:prstGeom>
+          <a:solidFill>
+            <a:srgbClr val="0068B7"/>
+          </a:solidFill>
+          <a:ln w="12700">
+            <a:solidFill>
+              <a:srgbClr val="0068B7"/>
+            </a:solidFill>
+            <a:prstDash val="solid"/>
+          </a:ln>
+        </p:spPr>
+      </p:sp>
+      <p:sp>
+        <p:nvSpPr>
+          <p:cNvPr id="8" name="Text 6"/>
+          <p:cNvSpPr/>
+          <p:nvPr/>
+        </p:nvSpPr>
+        <p:spPr>
+          <a:xfrm>
+            <a:off x="640080" y="731520"/>
+            <a:ext cx="420624" cy="164592"/>
+          </a:xfrm>
+          <a:prstGeom prst="rect">
+            <a:avLst/>
+          </a:prstGeom>
+          <a:noFill/>
+          <a:ln/>
+        </p:spPr>
+        <p:txBody>
+          <a:bodyPr wrap="square" lIns="0" tIns="0" rIns="0" bIns="0" rtlCol="0" anchor="ctr"/>
+          <a:lstStyle/>
+          <a:p>
+            <a:pPr algn="ctr" indent="0" marL="0">
+              <a:buNone/>
+            </a:pPr>
+            <a:r>
+              <a:rPr lang="en-US" sz="1100" b="1" dirty="0">
+                <a:solidFill>
+                  <a:srgbClr val="FFFFFF"/>
+                </a:solidFill>
+                <a:latin typeface="Aptos" pitchFamily="34" charset="0"/>
+                <a:ea typeface="Aptos" pitchFamily="34" charset="-122"/>
+                <a:cs typeface="Aptos" pitchFamily="34" charset="-120"/>
+              </a:rPr>
+              <a:t>11</a:t>
+            </a:r>
+            <a:endParaRPr lang="en-US" sz="1100" dirty="0"/>
+          </a:p>
+        </p:txBody>
+      </p:sp>
+      <p:sp>
+        <p:nvSpPr>
+          <p:cNvPr id="9" name="Text 7"/>
+          <p:cNvSpPr/>
+          <p:nvPr/>
+        </p:nvSpPr>
+        <p:spPr>
+          <a:xfrm>
+            <a:off x="640080" y="621792"/>
             <a:ext cx="10881360" cy="566928"/>
           </a:xfrm>
           <a:prstGeom prst="rect">
@@ -5066,7 +7867,7 @@
                 <a:ea typeface="Aptos Display" pitchFamily="34" charset="-122"/>
                 <a:cs typeface="Aptos Display" pitchFamily="34" charset="-120"/>
               </a:rPr>
-              <a:t>Expected Assignment</a:t>
+              <a:t>Expected Artifact or Evidence</a:t>
             </a:r>
             <a:endParaRPr lang="en-US" sz="2700" dirty="0"/>
           </a:p>
@@ -5074,14 +7875,14 @@
       </p:sp>
       <p:sp>
         <p:nvSpPr>
-          <p:cNvPr id="7" name="Text 5"/>
-          <p:cNvSpPr/>
-          <p:nvPr/>
-        </p:nvSpPr>
-        <p:spPr>
-          <a:xfrm>
-            <a:off x="822960" y="1325880"/>
-            <a:ext cx="10378440" cy="4800600"/>
+          <p:cNvPr id="10" name="Text 8"/>
+          <p:cNvSpPr/>
+          <p:nvPr/>
+        </p:nvSpPr>
+        <p:spPr>
+          <a:xfrm>
+            <a:off x="868680" y="1417320"/>
+            <a:ext cx="6675120" cy="4434840"/>
           </a:xfrm>
           <a:prstGeom prst="rect">
             <a:avLst/>
@@ -5096,7 +7897,7 @@
           <a:lstStyle/>
           <a:p>
             <a:r>
-              <a:rPr lang="en-US" sz="1450" dirty="0">
+              <a:rPr lang="en-US" sz="1700" dirty="0">
                 <a:solidFill>
                   <a:srgbClr val="17364A"/>
                 </a:solidFill>
@@ -5106,11 +7907,11 @@
               </a:rPr>
               <a:t>Data quality review plan</a:t>
             </a:r>
-            <a:endParaRPr lang="en-US" sz="1450" dirty="0"/>
-          </a:p>
-          <a:p>
-            <a:r>
-              <a:rPr lang="en-US" sz="1450" dirty="0">
+            <a:endParaRPr lang="en-US" sz="1700" dirty="0"/>
+          </a:p>
+          <a:p>
+            <a:r>
+              <a:rPr lang="en-US" sz="1700" dirty="0">
                 <a:solidFill>
                   <a:srgbClr val="17364A"/>
                 </a:solidFill>
@@ -5120,11 +7921,11 @@
               </a:rPr>
               <a:t>Data quality checklist</a:t>
             </a:r>
-            <a:endParaRPr lang="en-US" sz="1450" dirty="0"/>
-          </a:p>
-          <a:p>
-            <a:r>
-              <a:rPr lang="en-US" sz="1450" dirty="0">
+            <a:endParaRPr lang="en-US" sz="1700" dirty="0"/>
+          </a:p>
+          <a:p>
+            <a:r>
+              <a:rPr lang="en-US" sz="1700" dirty="0">
                 <a:solidFill>
                   <a:srgbClr val="17364A"/>
                 </a:solidFill>
@@ -5134,11 +7935,104 @@
               </a:rPr>
               <a:t>Thresholds or review criteria</a:t>
             </a:r>
-            <a:endParaRPr lang="en-US" sz="1450" dirty="0"/>
-          </a:p>
-          <a:p>
-            <a:r>
-              <a:rPr lang="en-US" sz="1450" dirty="0">
+            <a:endParaRPr lang="en-US" sz="1700" dirty="0"/>
+          </a:p>
+        </p:txBody>
+      </p:sp>
+      <p:sp>
+        <p:nvSpPr>
+          <p:cNvPr id="11" name="Shape 9"/>
+          <p:cNvSpPr/>
+          <p:nvPr/>
+        </p:nvSpPr>
+        <p:spPr>
+          <a:xfrm>
+            <a:off x="7909560" y="1417320"/>
+            <a:ext cx="3154680" cy="1828800"/>
+          </a:xfrm>
+          <a:prstGeom prst="roundRect">
+            <a:avLst>
+              <a:gd name="adj" fmla="val 6000"/>
+            </a:avLst>
+          </a:prstGeom>
+          <a:solidFill>
+            <a:srgbClr val="EEF8ED"/>
+          </a:solidFill>
+          <a:ln w="12700">
+            <a:solidFill>
+              <a:srgbClr val="B9D7E6"/>
+            </a:solidFill>
+            <a:prstDash val="solid"/>
+          </a:ln>
+        </p:spPr>
+      </p:sp>
+      <p:sp>
+        <p:nvSpPr>
+          <p:cNvPr id="12" name="Text 10"/>
+          <p:cNvSpPr/>
+          <p:nvPr/>
+        </p:nvSpPr>
+        <p:spPr>
+          <a:xfrm>
+            <a:off x="8074152" y="1563624"/>
+            <a:ext cx="2825496" cy="201168"/>
+          </a:xfrm>
+          <a:prstGeom prst="rect">
+            <a:avLst/>
+          </a:prstGeom>
+          <a:noFill/>
+          <a:ln/>
+        </p:spPr>
+        <p:txBody>
+          <a:bodyPr wrap="square" lIns="0" tIns="0" rIns="0" bIns="0" rtlCol="0" anchor="ctr"/>
+          <a:lstStyle/>
+          <a:p>
+            <a:pPr indent="0" marL="0">
+              <a:buNone/>
+            </a:pPr>
+            <a:r>
+              <a:rPr lang="en-US" sz="950" b="1" dirty="0">
+                <a:solidFill>
+                  <a:srgbClr val="0068B7"/>
+                </a:solidFill>
+                <a:latin typeface="Aptos" pitchFamily="34" charset="0"/>
+                <a:ea typeface="Aptos" pitchFamily="34" charset="-122"/>
+                <a:cs typeface="Aptos" pitchFamily="34" charset="-120"/>
+              </a:rPr>
+              <a:t>Key idea</a:t>
+            </a:r>
+            <a:endParaRPr lang="en-US" sz="950" dirty="0"/>
+          </a:p>
+        </p:txBody>
+      </p:sp>
+      <p:sp>
+        <p:nvSpPr>
+          <p:cNvPr id="13" name="Text 11"/>
+          <p:cNvSpPr/>
+          <p:nvPr/>
+        </p:nvSpPr>
+        <p:spPr>
+          <a:xfrm>
+            <a:off x="8074152" y="1856232"/>
+            <a:ext cx="2825496" cy="1261872"/>
+          </a:xfrm>
+          <a:prstGeom prst="rect">
+            <a:avLst/>
+          </a:prstGeom>
+          <a:noFill/>
+          <a:ln/>
+        </p:spPr>
+        <p:txBody>
+          <a:bodyPr wrap="square" lIns="0" tIns="0" rIns="0" bIns="0" rtlCol="0" anchor="t">
+            <a:normAutofit/>
+          </a:bodyPr>
+          <a:lstStyle/>
+          <a:p>
+            <a:pPr indent="0" marL="0">
+              <a:buNone/>
+            </a:pPr>
+            <a:r>
+              <a:rPr lang="en-US" sz="1250" dirty="0">
                 <a:solidFill>
                   <a:srgbClr val="17364A"/>
                 </a:solidFill>
@@ -5146,9 +8040,116 @@
                 <a:ea typeface="Aptos" pitchFamily="34" charset="-122"/>
                 <a:cs typeface="Aptos" pitchFamily="34" charset="-120"/>
               </a:rPr>
-              <a:t>Known limitations statement</a:t>
-            </a:r>
-            <a:endParaRPr lang="en-US" sz="1450" dirty="0"/>
+              <a:t>Data quality review plan</a:t>
+            </a:r>
+            <a:endParaRPr lang="en-US" sz="1250" dirty="0"/>
+          </a:p>
+        </p:txBody>
+      </p:sp>
+      <p:sp>
+        <p:nvSpPr>
+          <p:cNvPr id="14" name="Shape 12"/>
+          <p:cNvSpPr/>
+          <p:nvPr/>
+        </p:nvSpPr>
+        <p:spPr>
+          <a:xfrm>
+            <a:off x="7909560" y="3520440"/>
+            <a:ext cx="3154680" cy="1737360"/>
+          </a:xfrm>
+          <a:prstGeom prst="roundRect">
+            <a:avLst>
+              <a:gd name="adj" fmla="val 6316"/>
+            </a:avLst>
+          </a:prstGeom>
+          <a:solidFill>
+            <a:srgbClr val="EAF6F8"/>
+          </a:solidFill>
+          <a:ln w="12700">
+            <a:solidFill>
+              <a:srgbClr val="B9D7E6"/>
+            </a:solidFill>
+            <a:prstDash val="solid"/>
+          </a:ln>
+        </p:spPr>
+      </p:sp>
+      <p:sp>
+        <p:nvSpPr>
+          <p:cNvPr id="15" name="Text 13"/>
+          <p:cNvSpPr/>
+          <p:nvPr/>
+        </p:nvSpPr>
+        <p:spPr>
+          <a:xfrm>
+            <a:off x="8074152" y="3666744"/>
+            <a:ext cx="2825496" cy="201168"/>
+          </a:xfrm>
+          <a:prstGeom prst="rect">
+            <a:avLst/>
+          </a:prstGeom>
+          <a:noFill/>
+          <a:ln/>
+        </p:spPr>
+        <p:txBody>
+          <a:bodyPr wrap="square" lIns="0" tIns="0" rIns="0" bIns="0" rtlCol="0" anchor="ctr"/>
+          <a:lstStyle/>
+          <a:p>
+            <a:pPr indent="0" marL="0">
+              <a:buNone/>
+            </a:pPr>
+            <a:r>
+              <a:rPr lang="en-US" sz="950" b="1" dirty="0">
+                <a:solidFill>
+                  <a:srgbClr val="0068B7"/>
+                </a:solidFill>
+                <a:latin typeface="Aptos" pitchFamily="34" charset="0"/>
+                <a:ea typeface="Aptos" pitchFamily="34" charset="-122"/>
+                <a:cs typeface="Aptos" pitchFamily="34" charset="-120"/>
+              </a:rPr>
+              <a:t>Use this for</a:t>
+            </a:r>
+            <a:endParaRPr lang="en-US" sz="950" dirty="0"/>
+          </a:p>
+        </p:txBody>
+      </p:sp>
+      <p:sp>
+        <p:nvSpPr>
+          <p:cNvPr id="16" name="Text 14"/>
+          <p:cNvSpPr/>
+          <p:nvPr/>
+        </p:nvSpPr>
+        <p:spPr>
+          <a:xfrm>
+            <a:off x="8074152" y="3959352"/>
+            <a:ext cx="2825496" cy="1170432"/>
+          </a:xfrm>
+          <a:prstGeom prst="rect">
+            <a:avLst/>
+          </a:prstGeom>
+          <a:noFill/>
+          <a:ln/>
+        </p:spPr>
+        <p:txBody>
+          <a:bodyPr wrap="square" lIns="0" tIns="0" rIns="0" bIns="0" rtlCol="0" anchor="t">
+            <a:normAutofit/>
+          </a:bodyPr>
+          <a:lstStyle/>
+          <a:p>
+            <a:pPr indent="0" marL="0">
+              <a:buNone/>
+            </a:pPr>
+            <a:r>
+              <a:rPr lang="en-US" sz="1250" dirty="0">
+                <a:solidFill>
+                  <a:srgbClr val="17364A"/>
+                </a:solidFill>
+                <a:latin typeface="Aptos" pitchFamily="34" charset="0"/>
+                <a:ea typeface="Aptos" pitchFamily="34" charset="-122"/>
+                <a:cs typeface="Aptos" pitchFamily="34" charset="-120"/>
+              </a:rPr>
+              <a:t>Connect the concept to public health decisions, safeguards, documentation, or implementation work.</a:t>
+            </a:r>
+            <a:endParaRPr lang="en-US" sz="1250" dirty="0"/>
           </a:p>
         </p:txBody>
       </p:sp>
@@ -5211,7 +8212,32 @@
       </p:sp>
       <p:sp>
         <p:nvSpPr>
-          <p:cNvPr id="3" name="Text 1"/>
+          <p:cNvPr id="3" name="Shape 1"/>
+          <p:cNvSpPr/>
+          <p:nvPr/>
+        </p:nvSpPr>
+        <p:spPr>
+          <a:xfrm>
+            <a:off x="0" y="164592"/>
+            <a:ext cx="146304" cy="6693408"/>
+          </a:xfrm>
+          <a:prstGeom prst="rect">
+            <a:avLst/>
+          </a:prstGeom>
+          <a:solidFill>
+            <a:srgbClr val="2F8A28"/>
+          </a:solidFill>
+          <a:ln w="12700">
+            <a:solidFill>
+              <a:srgbClr val="2F8A28"/>
+            </a:solidFill>
+            <a:prstDash val="solid"/>
+          </a:ln>
+        </p:spPr>
+      </p:sp>
+      <p:sp>
+        <p:nvSpPr>
+          <p:cNvPr id="4" name="Text 2"/>
           <p:cNvSpPr/>
           <p:nvPr/>
         </p:nvSpPr>
@@ -5250,7 +8276,7 @@
       </p:sp>
       <p:sp>
         <p:nvSpPr>
-          <p:cNvPr id="4" name="Text 2"/>
+          <p:cNvPr id="5" name="Text 3"/>
           <p:cNvSpPr/>
           <p:nvPr/>
         </p:nvSpPr>
@@ -5289,7 +8315,7 @@
       </p:sp>
       <p:sp>
         <p:nvSpPr>
-          <p:cNvPr id="5" name="Text 3"/>
+          <p:cNvPr id="6" name="Text 4"/>
           <p:cNvSpPr/>
           <p:nvPr/>
         </p:nvSpPr>
@@ -5328,7 +8354,7 @@
       </p:sp>
       <p:sp>
         <p:nvSpPr>
-          <p:cNvPr id="6" name="Text 4"/>
+          <p:cNvPr id="7" name="Text 5"/>
           <p:cNvSpPr/>
           <p:nvPr/>
         </p:nvSpPr>
@@ -5361,7 +8387,7 @@
                 <a:ea typeface="Aptos Display" pitchFamily="34" charset="-122"/>
                 <a:cs typeface="Aptos Display" pitchFamily="34" charset="-120"/>
               </a:rPr>
-              <a:t>Knowledge Check</a:t>
+              <a:t>Expected Artifact or Evidence Continued</a:t>
             </a:r>
             <a:endParaRPr lang="en-US" sz="2700" dirty="0"/>
           </a:p>
@@ -5369,14 +8395,14 @@
       </p:sp>
       <p:sp>
         <p:nvSpPr>
-          <p:cNvPr id="7" name="Text 5"/>
-          <p:cNvSpPr/>
-          <p:nvPr/>
-        </p:nvSpPr>
-        <p:spPr>
-          <a:xfrm>
-            <a:off x="822960" y="1325880"/>
-            <a:ext cx="10378440" cy="4800600"/>
+          <p:cNvPr id="8" name="Text 6"/>
+          <p:cNvSpPr/>
+          <p:nvPr/>
+        </p:nvSpPr>
+        <p:spPr>
+          <a:xfrm>
+            <a:off x="868680" y="1417320"/>
+            <a:ext cx="6675120" cy="4434840"/>
           </a:xfrm>
           <a:prstGeom prst="rect">
             <a:avLst/>
@@ -5391,7 +8417,7 @@
           <a:lstStyle/>
           <a:p>
             <a:r>
-              <a:rPr lang="en-US" sz="1450" dirty="0">
+              <a:rPr lang="en-US" sz="1700" dirty="0">
                 <a:solidFill>
                   <a:srgbClr val="17364A"/>
                 </a:solidFill>
@@ -5399,13 +8425,106 @@
                 <a:ea typeface="Aptos" pitchFamily="34" charset="-122"/>
                 <a:cs typeface="Aptos" pitchFamily="34" charset="-120"/>
               </a:rPr>
-              <a:t>1. What does fitness for use mean?</a:t>
-            </a:r>
-            <a:endParaRPr lang="en-US" sz="1450" dirty="0"/>
-          </a:p>
-          <a:p>
-            <a:r>
-              <a:rPr lang="en-US" sz="1450" dirty="0">
+              <a:t>Known limitations statement</a:t>
+            </a:r>
+            <a:endParaRPr lang="en-US" sz="1700" dirty="0"/>
+          </a:p>
+        </p:txBody>
+      </p:sp>
+      <p:sp>
+        <p:nvSpPr>
+          <p:cNvPr id="9" name="Shape 7"/>
+          <p:cNvSpPr/>
+          <p:nvPr/>
+        </p:nvSpPr>
+        <p:spPr>
+          <a:xfrm>
+            <a:off x="7909560" y="1417320"/>
+            <a:ext cx="3154680" cy="1828800"/>
+          </a:xfrm>
+          <a:prstGeom prst="roundRect">
+            <a:avLst>
+              <a:gd name="adj" fmla="val 6000"/>
+            </a:avLst>
+          </a:prstGeom>
+          <a:solidFill>
+            <a:srgbClr val="EEF8ED"/>
+          </a:solidFill>
+          <a:ln w="12700">
+            <a:solidFill>
+              <a:srgbClr val="B9D7E6"/>
+            </a:solidFill>
+            <a:prstDash val="solid"/>
+          </a:ln>
+        </p:spPr>
+      </p:sp>
+      <p:sp>
+        <p:nvSpPr>
+          <p:cNvPr id="10" name="Text 8"/>
+          <p:cNvSpPr/>
+          <p:nvPr/>
+        </p:nvSpPr>
+        <p:spPr>
+          <a:xfrm>
+            <a:off x="8074152" y="1563624"/>
+            <a:ext cx="2825496" cy="201168"/>
+          </a:xfrm>
+          <a:prstGeom prst="rect">
+            <a:avLst/>
+          </a:prstGeom>
+          <a:noFill/>
+          <a:ln/>
+        </p:spPr>
+        <p:txBody>
+          <a:bodyPr wrap="square" lIns="0" tIns="0" rIns="0" bIns="0" rtlCol="0" anchor="ctr"/>
+          <a:lstStyle/>
+          <a:p>
+            <a:pPr indent="0" marL="0">
+              <a:buNone/>
+            </a:pPr>
+            <a:r>
+              <a:rPr lang="en-US" sz="950" b="1" dirty="0">
+                <a:solidFill>
+                  <a:srgbClr val="0068B7"/>
+                </a:solidFill>
+                <a:latin typeface="Aptos" pitchFamily="34" charset="0"/>
+                <a:ea typeface="Aptos" pitchFamily="34" charset="-122"/>
+                <a:cs typeface="Aptos" pitchFamily="34" charset="-120"/>
+              </a:rPr>
+              <a:t>Key idea</a:t>
+            </a:r>
+            <a:endParaRPr lang="en-US" sz="950" dirty="0"/>
+          </a:p>
+        </p:txBody>
+      </p:sp>
+      <p:sp>
+        <p:nvSpPr>
+          <p:cNvPr id="11" name="Text 9"/>
+          <p:cNvSpPr/>
+          <p:nvPr/>
+        </p:nvSpPr>
+        <p:spPr>
+          <a:xfrm>
+            <a:off x="8074152" y="1856232"/>
+            <a:ext cx="2825496" cy="1261872"/>
+          </a:xfrm>
+          <a:prstGeom prst="rect">
+            <a:avLst/>
+          </a:prstGeom>
+          <a:noFill/>
+          <a:ln/>
+        </p:spPr>
+        <p:txBody>
+          <a:bodyPr wrap="square" lIns="0" tIns="0" rIns="0" bIns="0" rtlCol="0" anchor="t">
+            <a:normAutofit/>
+          </a:bodyPr>
+          <a:lstStyle/>
+          <a:p>
+            <a:pPr indent="0" marL="0">
+              <a:buNone/>
+            </a:pPr>
+            <a:r>
+              <a:rPr lang="en-US" sz="1250" dirty="0">
                 <a:solidFill>
                   <a:srgbClr val="17364A"/>
                 </a:solidFill>
@@ -5413,13 +8532,106 @@
                 <a:ea typeface="Aptos" pitchFamily="34" charset="-122"/>
                 <a:cs typeface="Aptos" pitchFamily="34" charset="-120"/>
               </a:rPr>
-              <a:t>2. Why can poor data quality be dangerous in AI-supported workflows?</a:t>
-            </a:r>
-            <a:endParaRPr lang="en-US" sz="1450" dirty="0"/>
-          </a:p>
-          <a:p>
-            <a:r>
-              <a:rPr lang="en-US" sz="1450" dirty="0">
+              <a:t>Known limitations statement</a:t>
+            </a:r>
+            <a:endParaRPr lang="en-US" sz="1250" dirty="0"/>
+          </a:p>
+        </p:txBody>
+      </p:sp>
+      <p:sp>
+        <p:nvSpPr>
+          <p:cNvPr id="12" name="Shape 10"/>
+          <p:cNvSpPr/>
+          <p:nvPr/>
+        </p:nvSpPr>
+        <p:spPr>
+          <a:xfrm>
+            <a:off x="7909560" y="3520440"/>
+            <a:ext cx="3154680" cy="1737360"/>
+          </a:xfrm>
+          <a:prstGeom prst="roundRect">
+            <a:avLst>
+              <a:gd name="adj" fmla="val 6316"/>
+            </a:avLst>
+          </a:prstGeom>
+          <a:solidFill>
+            <a:srgbClr val="EAF6F8"/>
+          </a:solidFill>
+          <a:ln w="12700">
+            <a:solidFill>
+              <a:srgbClr val="B9D7E6"/>
+            </a:solidFill>
+            <a:prstDash val="solid"/>
+          </a:ln>
+        </p:spPr>
+      </p:sp>
+      <p:sp>
+        <p:nvSpPr>
+          <p:cNvPr id="13" name="Text 11"/>
+          <p:cNvSpPr/>
+          <p:nvPr/>
+        </p:nvSpPr>
+        <p:spPr>
+          <a:xfrm>
+            <a:off x="8074152" y="3666744"/>
+            <a:ext cx="2825496" cy="201168"/>
+          </a:xfrm>
+          <a:prstGeom prst="rect">
+            <a:avLst/>
+          </a:prstGeom>
+          <a:noFill/>
+          <a:ln/>
+        </p:spPr>
+        <p:txBody>
+          <a:bodyPr wrap="square" lIns="0" tIns="0" rIns="0" bIns="0" rtlCol="0" anchor="ctr"/>
+          <a:lstStyle/>
+          <a:p>
+            <a:pPr indent="0" marL="0">
+              <a:buNone/>
+            </a:pPr>
+            <a:r>
+              <a:rPr lang="en-US" sz="950" b="1" dirty="0">
+                <a:solidFill>
+                  <a:srgbClr val="0068B7"/>
+                </a:solidFill>
+                <a:latin typeface="Aptos" pitchFamily="34" charset="0"/>
+                <a:ea typeface="Aptos" pitchFamily="34" charset="-122"/>
+                <a:cs typeface="Aptos" pitchFamily="34" charset="-120"/>
+              </a:rPr>
+              <a:t>Use this for</a:t>
+            </a:r>
+            <a:endParaRPr lang="en-US" sz="950" dirty="0"/>
+          </a:p>
+        </p:txBody>
+      </p:sp>
+      <p:sp>
+        <p:nvSpPr>
+          <p:cNvPr id="14" name="Text 12"/>
+          <p:cNvSpPr/>
+          <p:nvPr/>
+        </p:nvSpPr>
+        <p:spPr>
+          <a:xfrm>
+            <a:off x="8074152" y="3959352"/>
+            <a:ext cx="2825496" cy="1170432"/>
+          </a:xfrm>
+          <a:prstGeom prst="rect">
+            <a:avLst/>
+          </a:prstGeom>
+          <a:noFill/>
+          <a:ln/>
+        </p:spPr>
+        <p:txBody>
+          <a:bodyPr wrap="square" lIns="0" tIns="0" rIns="0" bIns="0" rtlCol="0" anchor="t">
+            <a:normAutofit/>
+          </a:bodyPr>
+          <a:lstStyle/>
+          <a:p>
+            <a:pPr indent="0" marL="0">
+              <a:buNone/>
+            </a:pPr>
+            <a:r>
+              <a:rPr lang="en-US" sz="1250" dirty="0">
                 <a:solidFill>
                   <a:srgbClr val="17364A"/>
                 </a:solidFill>
@@ -5427,37 +8639,9 @@
                 <a:ea typeface="Aptos" pitchFamily="34" charset="-122"/>
                 <a:cs typeface="Aptos" pitchFamily="34" charset="-120"/>
               </a:rPr>
-              <a:t>3. What is data drift?</a:t>
-            </a:r>
-            <a:endParaRPr lang="en-US" sz="1450" dirty="0"/>
-          </a:p>
-          <a:p>
-            <a:r>
-              <a:rPr lang="en-US" sz="1450" dirty="0">
-                <a:solidFill>
-                  <a:srgbClr val="17364A"/>
-                </a:solidFill>
-                <a:latin typeface="Aptos" pitchFamily="34" charset="0"/>
-                <a:ea typeface="Aptos" pitchFamily="34" charset="-122"/>
-                <a:cs typeface="Aptos" pitchFamily="34" charset="-120"/>
-              </a:rPr>
-              <a:t>4. Which item belongs in a data quality review plan?</a:t>
-            </a:r>
-            <a:endParaRPr lang="en-US" sz="1450" dirty="0"/>
-          </a:p>
-          <a:p>
-            <a:r>
-              <a:rPr lang="en-US" sz="1450" dirty="0">
-                <a:solidFill>
-                  <a:srgbClr val="17364A"/>
-                </a:solidFill>
-                <a:latin typeface="Aptos" pitchFamily="34" charset="0"/>
-                <a:ea typeface="Aptos" pitchFamily="34" charset="-122"/>
-                <a:cs typeface="Aptos" pitchFamily="34" charset="-120"/>
-              </a:rPr>
-              <a:t>5. When should an AI use case be paused or limited?</a:t>
-            </a:r>
-            <a:endParaRPr lang="en-US" sz="1450" dirty="0"/>
+              <a:t>Connect the concept to public health decisions, safeguards, documentation, or implementation work.</a:t>
+            </a:r>
+            <a:endParaRPr lang="en-US" sz="1250" dirty="0"/>
           </a:p>
         </p:txBody>
       </p:sp>
@@ -5520,7 +8704,32 @@
       </p:sp>
       <p:sp>
         <p:nvSpPr>
-          <p:cNvPr id="3" name="Text 1"/>
+          <p:cNvPr id="3" name="Shape 1"/>
+          <p:cNvSpPr/>
+          <p:nvPr/>
+        </p:nvSpPr>
+        <p:spPr>
+          <a:xfrm>
+            <a:off x="0" y="164592"/>
+            <a:ext cx="146304" cy="6693408"/>
+          </a:xfrm>
+          <a:prstGeom prst="rect">
+            <a:avLst/>
+          </a:prstGeom>
+          <a:solidFill>
+            <a:srgbClr val="2F8A28"/>
+          </a:solidFill>
+          <a:ln w="12700">
+            <a:solidFill>
+              <a:srgbClr val="2F8A28"/>
+            </a:solidFill>
+            <a:prstDash val="solid"/>
+          </a:ln>
+        </p:spPr>
+      </p:sp>
+      <p:sp>
+        <p:nvSpPr>
+          <p:cNvPr id="4" name="Text 2"/>
           <p:cNvSpPr/>
           <p:nvPr/>
         </p:nvSpPr>
@@ -5559,7 +8768,7 @@
       </p:sp>
       <p:sp>
         <p:nvSpPr>
-          <p:cNvPr id="4" name="Text 2"/>
+          <p:cNvPr id="5" name="Text 3"/>
           <p:cNvSpPr/>
           <p:nvPr/>
         </p:nvSpPr>
@@ -5598,7 +8807,7 @@
       </p:sp>
       <p:sp>
         <p:nvSpPr>
-          <p:cNvPr id="5" name="Text 3"/>
+          <p:cNvPr id="6" name="Text 4"/>
           <p:cNvSpPr/>
           <p:nvPr/>
         </p:nvSpPr>
@@ -5637,7 +8846,7 @@
       </p:sp>
       <p:sp>
         <p:nvSpPr>
-          <p:cNvPr id="6" name="Text 4"/>
+          <p:cNvPr id="7" name="Text 5"/>
           <p:cNvSpPr/>
           <p:nvPr/>
         </p:nvSpPr>
@@ -5670,7 +8879,7 @@
                 <a:ea typeface="Aptos Display" pitchFamily="34" charset="-122"/>
                 <a:cs typeface="Aptos Display" pitchFamily="34" charset="-120"/>
               </a:rPr>
-              <a:t>Module Context</a:t>
+              <a:t>What this module helps you do</a:t>
             </a:r>
             <a:endParaRPr lang="en-US" sz="2700" dirty="0"/>
           </a:p>
@@ -5678,14 +8887,14 @@
       </p:sp>
       <p:sp>
         <p:nvSpPr>
-          <p:cNvPr id="7" name="Text 5"/>
-          <p:cNvSpPr/>
-          <p:nvPr/>
-        </p:nvSpPr>
-        <p:spPr>
-          <a:xfrm>
-            <a:off x="822960" y="1325880"/>
-            <a:ext cx="10378440" cy="1371600"/>
+          <p:cNvPr id="8" name="Text 6"/>
+          <p:cNvSpPr/>
+          <p:nvPr/>
+        </p:nvSpPr>
+        <p:spPr>
+          <a:xfrm>
+            <a:off x="868680" y="1417320"/>
+            <a:ext cx="6675120" cy="3291840"/>
           </a:xfrm>
           <a:prstGeom prst="rect">
             <a:avLst/>
@@ -5700,7 +8909,7 @@
           <a:lstStyle/>
           <a:p>
             <a:r>
-              <a:rPr lang="en-US" sz="1600" dirty="0">
+              <a:rPr lang="en-US" sz="1700" dirty="0">
                 <a:solidFill>
                   <a:srgbClr val="17364A"/>
                 </a:solidFill>
@@ -5708,13 +8917,13 @@
                 <a:ea typeface="Aptos" pitchFamily="34" charset="-122"/>
                 <a:cs typeface="Aptos" pitchFamily="34" charset="-120"/>
               </a:rPr>
-              <a:t>Level: applied/foundational</a:t>
-            </a:r>
-            <a:endParaRPr lang="en-US" sz="1600" dirty="0"/>
-          </a:p>
-          <a:p>
-            <a:r>
-              <a:rPr lang="en-US" sz="1600" dirty="0">
+              <a:t>Data quality engineering is the practical work of defining, measuring, improving, and monitoring data quality so that data are fit for use.</a:t>
+            </a:r>
+            <a:endParaRPr lang="en-US" sz="1700" dirty="0"/>
+          </a:p>
+          <a:p>
+            <a:r>
+              <a:rPr lang="en-US" sz="1700" dirty="0">
                 <a:solidFill>
                   <a:srgbClr val="17364A"/>
                 </a:solidFill>
@@ -5722,13 +8931,13 @@
                 <a:ea typeface="Aptos" pitchFamily="34" charset="-122"/>
                 <a:cs typeface="Aptos" pitchFamily="34" charset="-120"/>
               </a:rPr>
-              <a:t>Primary track: Operations and Data Quality Track</a:t>
-            </a:r>
-            <a:endParaRPr lang="en-US" sz="1600" dirty="0"/>
-          </a:p>
-          <a:p>
-            <a:r>
-              <a:rPr lang="en-US" sz="1600" dirty="0">
+              <a:t>In public health AI, data quality is not a background concern.</a:t>
+            </a:r>
+            <a:endParaRPr lang="en-US" sz="1700" dirty="0"/>
+          </a:p>
+          <a:p>
+            <a:r>
+              <a:rPr lang="en-US" sz="1700" dirty="0">
                 <a:solidFill>
                   <a:srgbClr val="17364A"/>
                 </a:solidFill>
@@ -5736,31 +8945,97 @@
                 <a:ea typeface="Aptos" pitchFamily="34" charset="-122"/>
                 <a:cs typeface="Aptos" pitchFamily="34" charset="-120"/>
               </a:rPr>
-              <a:t>Appears in tracks: technical-architecture</a:t>
-            </a:r>
-            <a:endParaRPr lang="en-US" sz="1600" dirty="0"/>
-          </a:p>
-        </p:txBody>
-      </p:sp>
-      <p:sp>
-        <p:nvSpPr>
-          <p:cNvPr id="8" name="Text 6"/>
-          <p:cNvSpPr/>
-          <p:nvPr/>
-        </p:nvSpPr>
-        <p:spPr>
-          <a:xfrm>
-            <a:off x="822960" y="2743200"/>
-            <a:ext cx="10378440" cy="2834640"/>
-          </a:xfrm>
-          <a:prstGeom prst="rect">
-            <a:avLst/>
-          </a:prstGeom>
-          <a:noFill/>
-          <a:ln/>
-        </p:spPr>
-        <p:txBody>
-          <a:bodyPr wrap="square" lIns="1016" tIns="1016" rIns="1016" bIns="1016" rtlCol="0" anchor="t">
+              <a:t>It directly affects whether AI outputs are accurate, equitable, timely, and safe enough to support public health work.</a:t>
+            </a:r>
+            <a:endParaRPr lang="en-US" sz="1700" dirty="0"/>
+          </a:p>
+        </p:txBody>
+      </p:sp>
+      <p:sp>
+        <p:nvSpPr>
+          <p:cNvPr id="9" name="Shape 7"/>
+          <p:cNvSpPr/>
+          <p:nvPr/>
+        </p:nvSpPr>
+        <p:spPr>
+          <a:xfrm>
+            <a:off x="7909560" y="1417320"/>
+            <a:ext cx="3154680" cy="1920240"/>
+          </a:xfrm>
+          <a:prstGeom prst="roundRect">
+            <a:avLst>
+              <a:gd name="adj" fmla="val 5714"/>
+            </a:avLst>
+          </a:prstGeom>
+          <a:solidFill>
+            <a:srgbClr val="EAF6F8"/>
+          </a:solidFill>
+          <a:ln w="12700">
+            <a:solidFill>
+              <a:srgbClr val="B9D7E6"/>
+            </a:solidFill>
+            <a:prstDash val="solid"/>
+          </a:ln>
+        </p:spPr>
+      </p:sp>
+      <p:sp>
+        <p:nvSpPr>
+          <p:cNvPr id="10" name="Text 8"/>
+          <p:cNvSpPr/>
+          <p:nvPr/>
+        </p:nvSpPr>
+        <p:spPr>
+          <a:xfrm>
+            <a:off x="8074152" y="1563624"/>
+            <a:ext cx="2825496" cy="201168"/>
+          </a:xfrm>
+          <a:prstGeom prst="rect">
+            <a:avLst/>
+          </a:prstGeom>
+          <a:noFill/>
+          <a:ln/>
+        </p:spPr>
+        <p:txBody>
+          <a:bodyPr wrap="square" lIns="0" tIns="0" rIns="0" bIns="0" rtlCol="0" anchor="ctr"/>
+          <a:lstStyle/>
+          <a:p>
+            <a:pPr indent="0" marL="0">
+              <a:buNone/>
+            </a:pPr>
+            <a:r>
+              <a:rPr lang="en-US" sz="950" b="1" dirty="0">
+                <a:solidFill>
+                  <a:srgbClr val="0068B7"/>
+                </a:solidFill>
+                <a:latin typeface="Aptos" pitchFamily="34" charset="0"/>
+                <a:ea typeface="Aptos" pitchFamily="34" charset="-122"/>
+                <a:cs typeface="Aptos" pitchFamily="34" charset="-120"/>
+              </a:rPr>
+              <a:t>Module details</a:t>
+            </a:r>
+            <a:endParaRPr lang="en-US" sz="950" dirty="0"/>
+          </a:p>
+        </p:txBody>
+      </p:sp>
+      <p:sp>
+        <p:nvSpPr>
+          <p:cNvPr id="11" name="Text 9"/>
+          <p:cNvSpPr/>
+          <p:nvPr/>
+        </p:nvSpPr>
+        <p:spPr>
+          <a:xfrm>
+            <a:off x="8074152" y="1856232"/>
+            <a:ext cx="2825496" cy="1353312"/>
+          </a:xfrm>
+          <a:prstGeom prst="rect">
+            <a:avLst/>
+          </a:prstGeom>
+          <a:noFill/>
+          <a:ln/>
+        </p:spPr>
+        <p:txBody>
+          <a:bodyPr wrap="square" lIns="0" tIns="0" rIns="0" bIns="0" rtlCol="0" anchor="t">
             <a:normAutofit/>
           </a:bodyPr>
           <a:lstStyle/>
@@ -5769,7 +9044,7 @@
               <a:buNone/>
             </a:pPr>
             <a:r>
-              <a:rPr lang="en-US" sz="1400" dirty="0">
+              <a:rPr lang="en-US" sz="1250" dirty="0">
                 <a:solidFill>
                   <a:srgbClr val="17364A"/>
                 </a:solidFill>
@@ -5777,9 +9052,150 @@
                 <a:ea typeface="Aptos" pitchFamily="34" charset="-122"/>
                 <a:cs typeface="Aptos" pitchFamily="34" charset="-120"/>
               </a:rPr>
-              <a:t>Data quality engineering is the practical work of defining, measuring, improving, and monitoring data quality so that data are fit for use. In public health AI, data quality is not a background concern. It directly affects whether AI outputs are accurate, equitable, timely, and safe enough to support public health work.</a:t>
-            </a:r>
-            <a:endParaRPr lang="en-US" sz="1400" dirty="0"/>
+              <a:t>Level: applied/foundational</a:t>
+            </a:r>
+            <a:endParaRPr lang="en-US" sz="1250" dirty="0"/>
+          </a:p>
+          <a:p>
+            <a:pPr indent="0" marL="0">
+              <a:buNone/>
+            </a:pPr>
+            <a:r>
+              <a:rPr lang="en-US" sz="1250" dirty="0">
+                <a:solidFill>
+                  <a:srgbClr val="17364A"/>
+                </a:solidFill>
+                <a:latin typeface="Aptos" pitchFamily="34" charset="0"/>
+                <a:ea typeface="Aptos" pitchFamily="34" charset="-122"/>
+                <a:cs typeface="Aptos" pitchFamily="34" charset="-120"/>
+              </a:rPr>
+              <a:t>Primary track: Operations and Data Quality Track</a:t>
+            </a:r>
+            <a:endParaRPr lang="en-US" sz="1250" dirty="0"/>
+          </a:p>
+          <a:p>
+            <a:pPr indent="0" marL="0">
+              <a:buNone/>
+            </a:pPr>
+            <a:r>
+              <a:rPr lang="en-US" sz="1250" dirty="0">
+                <a:solidFill>
+                  <a:srgbClr val="17364A"/>
+                </a:solidFill>
+                <a:latin typeface="Aptos" pitchFamily="34" charset="0"/>
+                <a:ea typeface="Aptos" pitchFamily="34" charset="-122"/>
+                <a:cs typeface="Aptos" pitchFamily="34" charset="-120"/>
+              </a:rPr>
+              <a:t>Appears in tracks: technical-architecture</a:t>
+            </a:r>
+            <a:endParaRPr lang="en-US" sz="1250" dirty="0"/>
+          </a:p>
+        </p:txBody>
+      </p:sp>
+      <p:sp>
+        <p:nvSpPr>
+          <p:cNvPr id="12" name="Shape 10"/>
+          <p:cNvSpPr/>
+          <p:nvPr/>
+        </p:nvSpPr>
+        <p:spPr>
+          <a:xfrm>
+            <a:off x="7909560" y="3611880"/>
+            <a:ext cx="3154680" cy="1783080"/>
+          </a:xfrm>
+          <a:prstGeom prst="roundRect">
+            <a:avLst>
+              <a:gd name="adj" fmla="val 6154"/>
+            </a:avLst>
+          </a:prstGeom>
+          <a:solidFill>
+            <a:srgbClr val="EEF8ED"/>
+          </a:solidFill>
+          <a:ln w="12700">
+            <a:solidFill>
+              <a:srgbClr val="B9D7E6"/>
+            </a:solidFill>
+            <a:prstDash val="solid"/>
+          </a:ln>
+        </p:spPr>
+      </p:sp>
+      <p:sp>
+        <p:nvSpPr>
+          <p:cNvPr id="13" name="Text 11"/>
+          <p:cNvSpPr/>
+          <p:nvPr/>
+        </p:nvSpPr>
+        <p:spPr>
+          <a:xfrm>
+            <a:off x="8074152" y="3758184"/>
+            <a:ext cx="2825496" cy="201168"/>
+          </a:xfrm>
+          <a:prstGeom prst="rect">
+            <a:avLst/>
+          </a:prstGeom>
+          <a:noFill/>
+          <a:ln/>
+        </p:spPr>
+        <p:txBody>
+          <a:bodyPr wrap="square" lIns="0" tIns="0" rIns="0" bIns="0" rtlCol="0" anchor="ctr"/>
+          <a:lstStyle/>
+          <a:p>
+            <a:pPr indent="0" marL="0">
+              <a:buNone/>
+            </a:pPr>
+            <a:r>
+              <a:rPr lang="en-US" sz="950" b="1" dirty="0">
+                <a:solidFill>
+                  <a:srgbClr val="0068B7"/>
+                </a:solidFill>
+                <a:latin typeface="Aptos" pitchFamily="34" charset="0"/>
+                <a:ea typeface="Aptos" pitchFamily="34" charset="-122"/>
+                <a:cs typeface="Aptos" pitchFamily="34" charset="-120"/>
+              </a:rPr>
+              <a:t>Learning approach</a:t>
+            </a:r>
+            <a:endParaRPr lang="en-US" sz="950" dirty="0"/>
+          </a:p>
+        </p:txBody>
+      </p:sp>
+      <p:sp>
+        <p:nvSpPr>
+          <p:cNvPr id="14" name="Text 12"/>
+          <p:cNvSpPr/>
+          <p:nvPr/>
+        </p:nvSpPr>
+        <p:spPr>
+          <a:xfrm>
+            <a:off x="8074152" y="4050792"/>
+            <a:ext cx="2825496" cy="1216152"/>
+          </a:xfrm>
+          <a:prstGeom prst="rect">
+            <a:avLst/>
+          </a:prstGeom>
+          <a:noFill/>
+          <a:ln/>
+        </p:spPr>
+        <p:txBody>
+          <a:bodyPr wrap="square" lIns="0" tIns="0" rIns="0" bIns="0" rtlCol="0" anchor="t">
+            <a:normAutofit/>
+          </a:bodyPr>
+          <a:lstStyle/>
+          <a:p>
+            <a:pPr indent="0" marL="0">
+              <a:buNone/>
+            </a:pPr>
+            <a:r>
+              <a:rPr lang="en-US" sz="1250" dirty="0">
+                <a:solidFill>
+                  <a:srgbClr val="17364A"/>
+                </a:solidFill>
+                <a:latin typeface="Aptos" pitchFamily="34" charset="0"/>
+                <a:ea typeface="Aptos" pitchFamily="34" charset="-122"/>
+                <a:cs typeface="Aptos" pitchFamily="34" charset="-120"/>
+              </a:rPr>
+              <a:t>Review the core ideas, complete the practical exercise, check your understanding, and use the related plays and tools to apply the lesson.</a:t>
+            </a:r>
+            <a:endParaRPr lang="en-US" sz="1250" dirty="0"/>
           </a:p>
         </p:txBody>
       </p:sp>
@@ -5842,7 +9258,32 @@
       </p:sp>
       <p:sp>
         <p:nvSpPr>
-          <p:cNvPr id="3" name="Text 1"/>
+          <p:cNvPr id="3" name="Shape 1"/>
+          <p:cNvSpPr/>
+          <p:nvPr/>
+        </p:nvSpPr>
+        <p:spPr>
+          <a:xfrm>
+            <a:off x="0" y="164592"/>
+            <a:ext cx="146304" cy="6693408"/>
+          </a:xfrm>
+          <a:prstGeom prst="rect">
+            <a:avLst/>
+          </a:prstGeom>
+          <a:solidFill>
+            <a:srgbClr val="2F8A28"/>
+          </a:solidFill>
+          <a:ln w="12700">
+            <a:solidFill>
+              <a:srgbClr val="2F8A28"/>
+            </a:solidFill>
+            <a:prstDash val="solid"/>
+          </a:ln>
+        </p:spPr>
+      </p:sp>
+      <p:sp>
+        <p:nvSpPr>
+          <p:cNvPr id="4" name="Text 2"/>
           <p:cNvSpPr/>
           <p:nvPr/>
         </p:nvSpPr>
@@ -5881,7 +9322,7 @@
       </p:sp>
       <p:sp>
         <p:nvSpPr>
-          <p:cNvPr id="4" name="Text 2"/>
+          <p:cNvPr id="5" name="Text 3"/>
           <p:cNvSpPr/>
           <p:nvPr/>
         </p:nvSpPr>
@@ -5920,7 +9361,7 @@
       </p:sp>
       <p:sp>
         <p:nvSpPr>
-          <p:cNvPr id="5" name="Text 3"/>
+          <p:cNvPr id="6" name="Text 4"/>
           <p:cNvSpPr/>
           <p:nvPr/>
         </p:nvSpPr>
@@ -5959,13 +9400,77 @@
       </p:sp>
       <p:sp>
         <p:nvSpPr>
-          <p:cNvPr id="6" name="Text 4"/>
+          <p:cNvPr id="7" name="Shape 5"/>
           <p:cNvSpPr/>
           <p:nvPr/>
         </p:nvSpPr>
         <p:spPr>
           <a:xfrm>
             <a:off x="640080" y="658368"/>
+            <a:ext cx="420624" cy="420624"/>
+          </a:xfrm>
+          <a:prstGeom prst="ellipse">
+            <a:avLst/>
+          </a:prstGeom>
+          <a:solidFill>
+            <a:srgbClr val="0068B7"/>
+          </a:solidFill>
+          <a:ln w="12700">
+            <a:solidFill>
+              <a:srgbClr val="0068B7"/>
+            </a:solidFill>
+            <a:prstDash val="solid"/>
+          </a:ln>
+        </p:spPr>
+      </p:sp>
+      <p:sp>
+        <p:nvSpPr>
+          <p:cNvPr id="8" name="Text 6"/>
+          <p:cNvSpPr/>
+          <p:nvPr/>
+        </p:nvSpPr>
+        <p:spPr>
+          <a:xfrm>
+            <a:off x="640080" y="731520"/>
+            <a:ext cx="420624" cy="164592"/>
+          </a:xfrm>
+          <a:prstGeom prst="rect">
+            <a:avLst/>
+          </a:prstGeom>
+          <a:noFill/>
+          <a:ln/>
+        </p:spPr>
+        <p:txBody>
+          <a:bodyPr wrap="square" lIns="0" tIns="0" rIns="0" bIns="0" rtlCol="0" anchor="ctr"/>
+          <a:lstStyle/>
+          <a:p>
+            <a:pPr algn="ctr" indent="0" marL="0">
+              <a:buNone/>
+            </a:pPr>
+            <a:r>
+              <a:rPr lang="en-US" sz="1100" b="1" dirty="0">
+                <a:solidFill>
+                  <a:srgbClr val="FFFFFF"/>
+                </a:solidFill>
+                <a:latin typeface="Aptos" pitchFamily="34" charset="0"/>
+                <a:ea typeface="Aptos" pitchFamily="34" charset="-122"/>
+                <a:cs typeface="Aptos" pitchFamily="34" charset="-120"/>
+              </a:rPr>
+              <a:t>12</a:t>
+            </a:r>
+            <a:endParaRPr lang="en-US" sz="1100" dirty="0"/>
+          </a:p>
+        </p:txBody>
+      </p:sp>
+      <p:sp>
+        <p:nvSpPr>
+          <p:cNvPr id="9" name="Text 7"/>
+          <p:cNvSpPr/>
+          <p:nvPr/>
+        </p:nvSpPr>
+        <p:spPr>
+          <a:xfrm>
+            <a:off x="640080" y="621792"/>
             <a:ext cx="10881360" cy="566928"/>
           </a:xfrm>
           <a:prstGeom prst="rect">
@@ -5992,7 +9497,7 @@
                 <a:ea typeface="Aptos Display" pitchFamily="34" charset="-122"/>
                 <a:cs typeface="Aptos Display" pitchFamily="34" charset="-120"/>
               </a:rPr>
-              <a:t>References and Resources</a:t>
+              <a:t>Expected Assignment</a:t>
             </a:r>
             <a:endParaRPr lang="en-US" sz="2700" dirty="0"/>
           </a:p>
@@ -6000,14 +9505,14 @@
       </p:sp>
       <p:sp>
         <p:nvSpPr>
-          <p:cNvPr id="7" name="Text 5"/>
-          <p:cNvSpPr/>
-          <p:nvPr/>
-        </p:nvSpPr>
-        <p:spPr>
-          <a:xfrm>
-            <a:off x="822960" y="1325880"/>
-            <a:ext cx="10378440" cy="4800600"/>
+          <p:cNvPr id="10" name="Text 8"/>
+          <p:cNvSpPr/>
+          <p:nvPr/>
+        </p:nvSpPr>
+        <p:spPr>
+          <a:xfrm>
+            <a:off x="868680" y="1417320"/>
+            <a:ext cx="6675120" cy="4434840"/>
           </a:xfrm>
           <a:prstGeom prst="rect">
             <a:avLst/>
@@ -6022,7 +9527,7 @@
           <a:lstStyle/>
           <a:p>
             <a:r>
-              <a:rPr lang="en-US" sz="1450" dirty="0">
+              <a:rPr lang="en-US" sz="1700" dirty="0">
                 <a:solidFill>
                   <a:srgbClr val="17364A"/>
                 </a:solidFill>
@@ -6030,13 +9535,1209 @@
                 <a:ea typeface="Aptos" pitchFamily="34" charset="-122"/>
                 <a:cs typeface="Aptos" pitchFamily="34" charset="-120"/>
               </a:rPr>
+              <a:t>Data quality review plan</a:t>
+            </a:r>
+            <a:endParaRPr lang="en-US" sz="1700" dirty="0"/>
+          </a:p>
+          <a:p>
+            <a:r>
+              <a:rPr lang="en-US" sz="1700" dirty="0">
+                <a:solidFill>
+                  <a:srgbClr val="17364A"/>
+                </a:solidFill>
+                <a:latin typeface="Aptos" pitchFamily="34" charset="0"/>
+                <a:ea typeface="Aptos" pitchFamily="34" charset="-122"/>
+                <a:cs typeface="Aptos" pitchFamily="34" charset="-120"/>
+              </a:rPr>
+              <a:t>Data quality checklist</a:t>
+            </a:r>
+            <a:endParaRPr lang="en-US" sz="1700" dirty="0"/>
+          </a:p>
+          <a:p>
+            <a:r>
+              <a:rPr lang="en-US" sz="1700" dirty="0">
+                <a:solidFill>
+                  <a:srgbClr val="17364A"/>
+                </a:solidFill>
+                <a:latin typeface="Aptos" pitchFamily="34" charset="0"/>
+                <a:ea typeface="Aptos" pitchFamily="34" charset="-122"/>
+                <a:cs typeface="Aptos" pitchFamily="34" charset="-120"/>
+              </a:rPr>
+              <a:t>Thresholds or review criteria</a:t>
+            </a:r>
+            <a:endParaRPr lang="en-US" sz="1700" dirty="0"/>
+          </a:p>
+          <a:p>
+            <a:r>
+              <a:rPr lang="en-US" sz="1700" dirty="0">
+                <a:solidFill>
+                  <a:srgbClr val="17364A"/>
+                </a:solidFill>
+                <a:latin typeface="Aptos" pitchFamily="34" charset="0"/>
+                <a:ea typeface="Aptos" pitchFamily="34" charset="-122"/>
+                <a:cs typeface="Aptos" pitchFamily="34" charset="-120"/>
+              </a:rPr>
+              <a:t>Known limitations statement</a:t>
+            </a:r>
+            <a:endParaRPr lang="en-US" sz="1700" dirty="0"/>
+          </a:p>
+        </p:txBody>
+      </p:sp>
+      <p:sp>
+        <p:nvSpPr>
+          <p:cNvPr id="11" name="Shape 9"/>
+          <p:cNvSpPr/>
+          <p:nvPr/>
+        </p:nvSpPr>
+        <p:spPr>
+          <a:xfrm>
+            <a:off x="7909560" y="1417320"/>
+            <a:ext cx="3154680" cy="1828800"/>
+          </a:xfrm>
+          <a:prstGeom prst="roundRect">
+            <a:avLst>
+              <a:gd name="adj" fmla="val 6000"/>
+            </a:avLst>
+          </a:prstGeom>
+          <a:solidFill>
+            <a:srgbClr val="EEF8ED"/>
+          </a:solidFill>
+          <a:ln w="12700">
+            <a:solidFill>
+              <a:srgbClr val="B9D7E6"/>
+            </a:solidFill>
+            <a:prstDash val="solid"/>
+          </a:ln>
+        </p:spPr>
+      </p:sp>
+      <p:sp>
+        <p:nvSpPr>
+          <p:cNvPr id="12" name="Text 10"/>
+          <p:cNvSpPr/>
+          <p:nvPr/>
+        </p:nvSpPr>
+        <p:spPr>
+          <a:xfrm>
+            <a:off x="8074152" y="1563624"/>
+            <a:ext cx="2825496" cy="201168"/>
+          </a:xfrm>
+          <a:prstGeom prst="rect">
+            <a:avLst/>
+          </a:prstGeom>
+          <a:noFill/>
+          <a:ln/>
+        </p:spPr>
+        <p:txBody>
+          <a:bodyPr wrap="square" lIns="0" tIns="0" rIns="0" bIns="0" rtlCol="0" anchor="ctr"/>
+          <a:lstStyle/>
+          <a:p>
+            <a:pPr indent="0" marL="0">
+              <a:buNone/>
+            </a:pPr>
+            <a:r>
+              <a:rPr lang="en-US" sz="950" b="1" dirty="0">
+                <a:solidFill>
+                  <a:srgbClr val="0068B7"/>
+                </a:solidFill>
+                <a:latin typeface="Aptos" pitchFamily="34" charset="0"/>
+                <a:ea typeface="Aptos" pitchFamily="34" charset="-122"/>
+                <a:cs typeface="Aptos" pitchFamily="34" charset="-120"/>
+              </a:rPr>
+              <a:t>Key idea</a:t>
+            </a:r>
+            <a:endParaRPr lang="en-US" sz="950" dirty="0"/>
+          </a:p>
+        </p:txBody>
+      </p:sp>
+      <p:sp>
+        <p:nvSpPr>
+          <p:cNvPr id="13" name="Text 11"/>
+          <p:cNvSpPr/>
+          <p:nvPr/>
+        </p:nvSpPr>
+        <p:spPr>
+          <a:xfrm>
+            <a:off x="8074152" y="1856232"/>
+            <a:ext cx="2825496" cy="1261872"/>
+          </a:xfrm>
+          <a:prstGeom prst="rect">
+            <a:avLst/>
+          </a:prstGeom>
+          <a:noFill/>
+          <a:ln/>
+        </p:spPr>
+        <p:txBody>
+          <a:bodyPr wrap="square" lIns="0" tIns="0" rIns="0" bIns="0" rtlCol="0" anchor="t">
+            <a:normAutofit/>
+          </a:bodyPr>
+          <a:lstStyle/>
+          <a:p>
+            <a:pPr indent="0" marL="0">
+              <a:buNone/>
+            </a:pPr>
+            <a:r>
+              <a:rPr lang="en-US" sz="1250" dirty="0">
+                <a:solidFill>
+                  <a:srgbClr val="17364A"/>
+                </a:solidFill>
+                <a:latin typeface="Aptos" pitchFamily="34" charset="0"/>
+                <a:ea typeface="Aptos" pitchFamily="34" charset="-122"/>
+                <a:cs typeface="Aptos" pitchFamily="34" charset="-120"/>
+              </a:rPr>
+              <a:t>Data quality review plan</a:t>
+            </a:r>
+            <a:endParaRPr lang="en-US" sz="1250" dirty="0"/>
+          </a:p>
+        </p:txBody>
+      </p:sp>
+      <p:sp>
+        <p:nvSpPr>
+          <p:cNvPr id="14" name="Shape 12"/>
+          <p:cNvSpPr/>
+          <p:nvPr/>
+        </p:nvSpPr>
+        <p:spPr>
+          <a:xfrm>
+            <a:off x="7909560" y="3520440"/>
+            <a:ext cx="3154680" cy="1737360"/>
+          </a:xfrm>
+          <a:prstGeom prst="roundRect">
+            <a:avLst>
+              <a:gd name="adj" fmla="val 6316"/>
+            </a:avLst>
+          </a:prstGeom>
+          <a:solidFill>
+            <a:srgbClr val="EAF6F8"/>
+          </a:solidFill>
+          <a:ln w="12700">
+            <a:solidFill>
+              <a:srgbClr val="B9D7E6"/>
+            </a:solidFill>
+            <a:prstDash val="solid"/>
+          </a:ln>
+        </p:spPr>
+      </p:sp>
+      <p:sp>
+        <p:nvSpPr>
+          <p:cNvPr id="15" name="Text 13"/>
+          <p:cNvSpPr/>
+          <p:nvPr/>
+        </p:nvSpPr>
+        <p:spPr>
+          <a:xfrm>
+            <a:off x="8074152" y="3666744"/>
+            <a:ext cx="2825496" cy="201168"/>
+          </a:xfrm>
+          <a:prstGeom prst="rect">
+            <a:avLst/>
+          </a:prstGeom>
+          <a:noFill/>
+          <a:ln/>
+        </p:spPr>
+        <p:txBody>
+          <a:bodyPr wrap="square" lIns="0" tIns="0" rIns="0" bIns="0" rtlCol="0" anchor="ctr"/>
+          <a:lstStyle/>
+          <a:p>
+            <a:pPr indent="0" marL="0">
+              <a:buNone/>
+            </a:pPr>
+            <a:r>
+              <a:rPr lang="en-US" sz="950" b="1" dirty="0">
+                <a:solidFill>
+                  <a:srgbClr val="0068B7"/>
+                </a:solidFill>
+                <a:latin typeface="Aptos" pitchFamily="34" charset="0"/>
+                <a:ea typeface="Aptos" pitchFamily="34" charset="-122"/>
+                <a:cs typeface="Aptos" pitchFamily="34" charset="-120"/>
+              </a:rPr>
+              <a:t>Use this for</a:t>
+            </a:r>
+            <a:endParaRPr lang="en-US" sz="950" dirty="0"/>
+          </a:p>
+        </p:txBody>
+      </p:sp>
+      <p:sp>
+        <p:nvSpPr>
+          <p:cNvPr id="16" name="Text 14"/>
+          <p:cNvSpPr/>
+          <p:nvPr/>
+        </p:nvSpPr>
+        <p:spPr>
+          <a:xfrm>
+            <a:off x="8074152" y="3959352"/>
+            <a:ext cx="2825496" cy="1170432"/>
+          </a:xfrm>
+          <a:prstGeom prst="rect">
+            <a:avLst/>
+          </a:prstGeom>
+          <a:noFill/>
+          <a:ln/>
+        </p:spPr>
+        <p:txBody>
+          <a:bodyPr wrap="square" lIns="0" tIns="0" rIns="0" bIns="0" rtlCol="0" anchor="t">
+            <a:normAutofit/>
+          </a:bodyPr>
+          <a:lstStyle/>
+          <a:p>
+            <a:pPr indent="0" marL="0">
+              <a:buNone/>
+            </a:pPr>
+            <a:r>
+              <a:rPr lang="en-US" sz="1250" dirty="0">
+                <a:solidFill>
+                  <a:srgbClr val="17364A"/>
+                </a:solidFill>
+                <a:latin typeface="Aptos" pitchFamily="34" charset="0"/>
+                <a:ea typeface="Aptos" pitchFamily="34" charset="-122"/>
+                <a:cs typeface="Aptos" pitchFamily="34" charset="-120"/>
+              </a:rPr>
+              <a:t>Connect the concept to public health decisions, safeguards, documentation, or implementation work.</a:t>
+            </a:r>
+            <a:endParaRPr lang="en-US" sz="1250" dirty="0"/>
+          </a:p>
+        </p:txBody>
+      </p:sp>
+    </p:spTree>
+  </p:cSld>
+  <p:clrMapOvr>
+    <a:masterClrMapping/>
+  </p:clrMapOvr>
+</p:sld>
+</file>
+
+<file path=ppt/slides/slide21.xml><?xml version="1.0" encoding="utf-8"?>
+<p:sld xmlns:a="http://schemas.openxmlformats.org/drawingml/2006/main" xmlns:r="http://schemas.openxmlformats.org/officeDocument/2006/relationships" xmlns:p="http://schemas.openxmlformats.org/presentationml/2006/main">
+  <p:cSld name="Slide 21">
+    <p:bg>
+      <p:bgPr>
+        <a:solidFill>
+          <a:srgbClr val="F7FBFD"/>
+        </a:solidFill>
+      </p:bgPr>
+    </p:bg>
+    <p:spTree>
+      <p:nvGrpSpPr>
+        <p:cNvPr id="1" name=""/>
+        <p:cNvGrpSpPr/>
+        <p:nvPr/>
+      </p:nvGrpSpPr>
+      <p:grpSpPr>
+        <a:xfrm>
+          <a:off x="0" y="0"/>
+          <a:ext cx="0" cy="0"/>
+          <a:chOff x="0" y="0"/>
+          <a:chExt cx="0" cy="0"/>
+        </a:xfrm>
+      </p:grpSpPr>
+      <p:sp>
+        <p:nvSpPr>
+          <p:cNvPr id="2" name="Shape 0"/>
+          <p:cNvSpPr/>
+          <p:nvPr/>
+        </p:nvSpPr>
+        <p:spPr>
+          <a:xfrm>
+            <a:off x="0" y="0"/>
+            <a:ext cx="12191695" cy="164592"/>
+          </a:xfrm>
+          <a:prstGeom prst="rect">
+            <a:avLst/>
+          </a:prstGeom>
+          <a:solidFill>
+            <a:srgbClr val="0068B7"/>
+          </a:solidFill>
+          <a:ln w="12700">
+            <a:solidFill>
+              <a:srgbClr val="0068B7"/>
+            </a:solidFill>
+            <a:prstDash val="solid"/>
+          </a:ln>
+        </p:spPr>
+      </p:sp>
+      <p:sp>
+        <p:nvSpPr>
+          <p:cNvPr id="3" name="Shape 1"/>
+          <p:cNvSpPr/>
+          <p:nvPr/>
+        </p:nvSpPr>
+        <p:spPr>
+          <a:xfrm>
+            <a:off x="0" y="164592"/>
+            <a:ext cx="146304" cy="6693408"/>
+          </a:xfrm>
+          <a:prstGeom prst="rect">
+            <a:avLst/>
+          </a:prstGeom>
+          <a:solidFill>
+            <a:srgbClr val="2F8A28"/>
+          </a:solidFill>
+          <a:ln w="12700">
+            <a:solidFill>
+              <a:srgbClr val="2F8A28"/>
+            </a:solidFill>
+            <a:prstDash val="solid"/>
+          </a:ln>
+        </p:spPr>
+      </p:sp>
+      <p:sp>
+        <p:nvSpPr>
+          <p:cNvPr id="4" name="Text 2"/>
+          <p:cNvSpPr/>
+          <p:nvPr/>
+        </p:nvSpPr>
+        <p:spPr>
+          <a:xfrm>
+            <a:off x="502920" y="292608"/>
+            <a:ext cx="10149840" cy="256032"/>
+          </a:xfrm>
+          <a:prstGeom prst="rect">
+            <a:avLst/>
+          </a:prstGeom>
+          <a:noFill/>
+          <a:ln/>
+        </p:spPr>
+        <p:txBody>
+          <a:bodyPr wrap="square" lIns="0" tIns="0" rIns="0" bIns="0" rtlCol="0" anchor="ctr"/>
+          <a:lstStyle/>
+          <a:p>
+            <a:pPr indent="0" marL="0">
+              <a:buNone/>
+            </a:pPr>
+            <a:r>
+              <a:rPr lang="en-US" sz="900" b="1" dirty="0">
+                <a:solidFill>
+                  <a:srgbClr val="5F7181"/>
+                </a:solidFill>
+                <a:latin typeface="Aptos" pitchFamily="34" charset="0"/>
+                <a:ea typeface="Aptos" pitchFamily="34" charset="-122"/>
+                <a:cs typeface="Aptos" pitchFamily="34" charset="-120"/>
+              </a:rPr>
+              <a:t>Data Quality Engineering for AI</a:t>
+            </a:r>
+            <a:endParaRPr lang="en-US" sz="900" dirty="0"/>
+          </a:p>
+        </p:txBody>
+      </p:sp>
+      <p:sp>
+        <p:nvSpPr>
+          <p:cNvPr id="5" name="Text 3"/>
+          <p:cNvSpPr/>
+          <p:nvPr/>
+        </p:nvSpPr>
+        <p:spPr>
+          <a:xfrm>
+            <a:off x="502920" y="6537960"/>
+            <a:ext cx="7772400" cy="201168"/>
+          </a:xfrm>
+          <a:prstGeom prst="rect">
+            <a:avLst/>
+          </a:prstGeom>
+          <a:noFill/>
+          <a:ln/>
+        </p:spPr>
+        <p:txBody>
+          <a:bodyPr wrap="square" lIns="0" tIns="0" rIns="0" bIns="0" rtlCol="0" anchor="ctr"/>
+          <a:lstStyle/>
+          <a:p>
+            <a:pPr indent="0" marL="0">
+              <a:buNone/>
+            </a:pPr>
+            <a:r>
+              <a:rPr lang="en-US" sz="800" dirty="0">
+                <a:solidFill>
+                  <a:srgbClr val="5F7181"/>
+                </a:solidFill>
+                <a:latin typeface="Aptos" pitchFamily="34" charset="0"/>
+                <a:ea typeface="Aptos" pitchFamily="34" charset="-122"/>
+                <a:cs typeface="Aptos" pitchFamily="34" charset="-120"/>
+              </a:rPr>
+              <a:t>AI Playbook and Toolkit for Public Health Departments</a:t>
+            </a:r>
+            <a:endParaRPr lang="en-US" sz="800" dirty="0"/>
+          </a:p>
+        </p:txBody>
+      </p:sp>
+      <p:sp>
+        <p:nvSpPr>
+          <p:cNvPr id="6" name="Text 4"/>
+          <p:cNvSpPr/>
+          <p:nvPr/>
+        </p:nvSpPr>
+        <p:spPr>
+          <a:xfrm>
+            <a:off x="9966960" y="6537960"/>
+            <a:ext cx="1645920" cy="201168"/>
+          </a:xfrm>
+          <a:prstGeom prst="rect">
+            <a:avLst/>
+          </a:prstGeom>
+          <a:noFill/>
+          <a:ln/>
+        </p:spPr>
+        <p:txBody>
+          <a:bodyPr wrap="square" lIns="0" tIns="0" rIns="0" bIns="0" rtlCol="0" anchor="ctr"/>
+          <a:lstStyle/>
+          <a:p>
+            <a:pPr algn="r" indent="0" marL="0">
+              <a:buNone/>
+            </a:pPr>
+            <a:r>
+              <a:rPr lang="en-US" sz="800" dirty="0">
+                <a:solidFill>
+                  <a:srgbClr val="5F7181"/>
+                </a:solidFill>
+                <a:latin typeface="Aptos" pitchFamily="34" charset="0"/>
+                <a:ea typeface="Aptos" pitchFamily="34" charset="-122"/>
+                <a:cs typeface="Aptos" pitchFamily="34" charset="-120"/>
+              </a:rPr>
+              <a:t>© Paula Soper</a:t>
+            </a:r>
+            <a:endParaRPr lang="en-US" sz="800" dirty="0"/>
+          </a:p>
+        </p:txBody>
+      </p:sp>
+      <p:sp>
+        <p:nvSpPr>
+          <p:cNvPr id="7" name="Shape 5"/>
+          <p:cNvSpPr/>
+          <p:nvPr/>
+        </p:nvSpPr>
+        <p:spPr>
+          <a:xfrm>
+            <a:off x="640080" y="658368"/>
+            <a:ext cx="420624" cy="420624"/>
+          </a:xfrm>
+          <a:prstGeom prst="ellipse">
+            <a:avLst/>
+          </a:prstGeom>
+          <a:solidFill>
+            <a:srgbClr val="0068B7"/>
+          </a:solidFill>
+          <a:ln w="12700">
+            <a:solidFill>
+              <a:srgbClr val="0068B7"/>
+            </a:solidFill>
+            <a:prstDash val="solid"/>
+          </a:ln>
+        </p:spPr>
+      </p:sp>
+      <p:sp>
+        <p:nvSpPr>
+          <p:cNvPr id="8" name="Text 6"/>
+          <p:cNvSpPr/>
+          <p:nvPr/>
+        </p:nvSpPr>
+        <p:spPr>
+          <a:xfrm>
+            <a:off x="640080" y="731520"/>
+            <a:ext cx="420624" cy="164592"/>
+          </a:xfrm>
+          <a:prstGeom prst="rect">
+            <a:avLst/>
+          </a:prstGeom>
+          <a:noFill/>
+          <a:ln/>
+        </p:spPr>
+        <p:txBody>
+          <a:bodyPr wrap="square" lIns="0" tIns="0" rIns="0" bIns="0" rtlCol="0" anchor="ctr"/>
+          <a:lstStyle/>
+          <a:p>
+            <a:pPr algn="ctr" indent="0" marL="0">
+              <a:buNone/>
+            </a:pPr>
+            <a:r>
+              <a:rPr lang="en-US" sz="1100" b="1" dirty="0">
+                <a:solidFill>
+                  <a:srgbClr val="FFFFFF"/>
+                </a:solidFill>
+                <a:latin typeface="Aptos" pitchFamily="34" charset="0"/>
+                <a:ea typeface="Aptos" pitchFamily="34" charset="-122"/>
+                <a:cs typeface="Aptos" pitchFamily="34" charset="-120"/>
+              </a:rPr>
+              <a:t>13</a:t>
+            </a:r>
+            <a:endParaRPr lang="en-US" sz="1100" dirty="0"/>
+          </a:p>
+        </p:txBody>
+      </p:sp>
+      <p:sp>
+        <p:nvSpPr>
+          <p:cNvPr id="9" name="Text 7"/>
+          <p:cNvSpPr/>
+          <p:nvPr/>
+        </p:nvSpPr>
+        <p:spPr>
+          <a:xfrm>
+            <a:off x="640080" y="621792"/>
+            <a:ext cx="10881360" cy="566928"/>
+          </a:xfrm>
+          <a:prstGeom prst="rect">
+            <a:avLst/>
+          </a:prstGeom>
+          <a:noFill/>
+          <a:ln/>
+        </p:spPr>
+        <p:txBody>
+          <a:bodyPr wrap="square" lIns="0" tIns="0" rIns="0" bIns="0" rtlCol="0" anchor="ctr">
+            <a:normAutofit/>
+          </a:bodyPr>
+          <a:lstStyle/>
+          <a:p>
+            <a:pPr indent="0" marL="0">
+              <a:buNone/>
+            </a:pPr>
+            <a:r>
+              <a:rPr lang="en-US" sz="2700" b="1" dirty="0">
+                <a:solidFill>
+                  <a:srgbClr val="003A63"/>
+                </a:solidFill>
+                <a:latin typeface="Aptos Display" pitchFamily="34" charset="0"/>
+                <a:ea typeface="Aptos Display" pitchFamily="34" charset="-122"/>
+                <a:cs typeface="Aptos Display" pitchFamily="34" charset="-120"/>
+              </a:rPr>
+              <a:t>Knowledge Check</a:t>
+            </a:r>
+            <a:endParaRPr lang="en-US" sz="2700" dirty="0"/>
+          </a:p>
+        </p:txBody>
+      </p:sp>
+      <p:sp>
+        <p:nvSpPr>
+          <p:cNvPr id="10" name="Text 8"/>
+          <p:cNvSpPr/>
+          <p:nvPr/>
+        </p:nvSpPr>
+        <p:spPr>
+          <a:xfrm>
+            <a:off x="868680" y="1417320"/>
+            <a:ext cx="6675120" cy="4434840"/>
+          </a:xfrm>
+          <a:prstGeom prst="rect">
+            <a:avLst/>
+          </a:prstGeom>
+          <a:noFill/>
+          <a:ln/>
+        </p:spPr>
+        <p:txBody>
+          <a:bodyPr wrap="square" lIns="635" tIns="635" rIns="635" bIns="635" rtlCol="0" anchor="t">
+            <a:normAutofit/>
+          </a:bodyPr>
+          <a:lstStyle/>
+          <a:p>
+            <a:r>
+              <a:rPr lang="en-US" sz="1700" dirty="0">
+                <a:solidFill>
+                  <a:srgbClr val="17364A"/>
+                </a:solidFill>
+                <a:latin typeface="Aptos" pitchFamily="34" charset="0"/>
+                <a:ea typeface="Aptos" pitchFamily="34" charset="-122"/>
+                <a:cs typeface="Aptos" pitchFamily="34" charset="-120"/>
+              </a:rPr>
+              <a:t>1. What does fitness for use mean?</a:t>
+            </a:r>
+            <a:endParaRPr lang="en-US" sz="1700" dirty="0"/>
+          </a:p>
+          <a:p>
+            <a:r>
+              <a:rPr lang="en-US" sz="1700" dirty="0">
+                <a:solidFill>
+                  <a:srgbClr val="17364A"/>
+                </a:solidFill>
+                <a:latin typeface="Aptos" pitchFamily="34" charset="0"/>
+                <a:ea typeface="Aptos" pitchFamily="34" charset="-122"/>
+                <a:cs typeface="Aptos" pitchFamily="34" charset="-120"/>
+              </a:rPr>
+              <a:t>2. Why can poor data quality be dangerous in AI-supported workflows?</a:t>
+            </a:r>
+            <a:endParaRPr lang="en-US" sz="1700" dirty="0"/>
+          </a:p>
+          <a:p>
+            <a:r>
+              <a:rPr lang="en-US" sz="1700" dirty="0">
+                <a:solidFill>
+                  <a:srgbClr val="17364A"/>
+                </a:solidFill>
+                <a:latin typeface="Aptos" pitchFamily="34" charset="0"/>
+                <a:ea typeface="Aptos" pitchFamily="34" charset="-122"/>
+                <a:cs typeface="Aptos" pitchFamily="34" charset="-120"/>
+              </a:rPr>
+              <a:t>3. What is data drift?</a:t>
+            </a:r>
+            <a:endParaRPr lang="en-US" sz="1700" dirty="0"/>
+          </a:p>
+          <a:p>
+            <a:r>
+              <a:rPr lang="en-US" sz="1700" dirty="0">
+                <a:solidFill>
+                  <a:srgbClr val="17364A"/>
+                </a:solidFill>
+                <a:latin typeface="Aptos" pitchFamily="34" charset="0"/>
+                <a:ea typeface="Aptos" pitchFamily="34" charset="-122"/>
+                <a:cs typeface="Aptos" pitchFamily="34" charset="-120"/>
+              </a:rPr>
+              <a:t>4. Which item belongs in a data quality review plan?</a:t>
+            </a:r>
+            <a:endParaRPr lang="en-US" sz="1700" dirty="0"/>
+          </a:p>
+        </p:txBody>
+      </p:sp>
+      <p:sp>
+        <p:nvSpPr>
+          <p:cNvPr id="11" name="Shape 9"/>
+          <p:cNvSpPr/>
+          <p:nvPr/>
+        </p:nvSpPr>
+        <p:spPr>
+          <a:xfrm>
+            <a:off x="7909560" y="1417320"/>
+            <a:ext cx="3154680" cy="1828800"/>
+          </a:xfrm>
+          <a:prstGeom prst="roundRect">
+            <a:avLst>
+              <a:gd name="adj" fmla="val 6000"/>
+            </a:avLst>
+          </a:prstGeom>
+          <a:solidFill>
+            <a:srgbClr val="EEF8ED"/>
+          </a:solidFill>
+          <a:ln w="12700">
+            <a:solidFill>
+              <a:srgbClr val="B9D7E6"/>
+            </a:solidFill>
+            <a:prstDash val="solid"/>
+          </a:ln>
+        </p:spPr>
+      </p:sp>
+      <p:sp>
+        <p:nvSpPr>
+          <p:cNvPr id="12" name="Text 10"/>
+          <p:cNvSpPr/>
+          <p:nvPr/>
+        </p:nvSpPr>
+        <p:spPr>
+          <a:xfrm>
+            <a:off x="8074152" y="1563624"/>
+            <a:ext cx="2825496" cy="201168"/>
+          </a:xfrm>
+          <a:prstGeom prst="rect">
+            <a:avLst/>
+          </a:prstGeom>
+          <a:noFill/>
+          <a:ln/>
+        </p:spPr>
+        <p:txBody>
+          <a:bodyPr wrap="square" lIns="0" tIns="0" rIns="0" bIns="0" rtlCol="0" anchor="ctr"/>
+          <a:lstStyle/>
+          <a:p>
+            <a:pPr indent="0" marL="0">
+              <a:buNone/>
+            </a:pPr>
+            <a:r>
+              <a:rPr lang="en-US" sz="950" b="1" dirty="0">
+                <a:solidFill>
+                  <a:srgbClr val="0068B7"/>
+                </a:solidFill>
+                <a:latin typeface="Aptos" pitchFamily="34" charset="0"/>
+                <a:ea typeface="Aptos" pitchFamily="34" charset="-122"/>
+                <a:cs typeface="Aptos" pitchFamily="34" charset="-120"/>
+              </a:rPr>
+              <a:t>Key idea</a:t>
+            </a:r>
+            <a:endParaRPr lang="en-US" sz="950" dirty="0"/>
+          </a:p>
+        </p:txBody>
+      </p:sp>
+      <p:sp>
+        <p:nvSpPr>
+          <p:cNvPr id="13" name="Text 11"/>
+          <p:cNvSpPr/>
+          <p:nvPr/>
+        </p:nvSpPr>
+        <p:spPr>
+          <a:xfrm>
+            <a:off x="8074152" y="1856232"/>
+            <a:ext cx="2825496" cy="1261872"/>
+          </a:xfrm>
+          <a:prstGeom prst="rect">
+            <a:avLst/>
+          </a:prstGeom>
+          <a:noFill/>
+          <a:ln/>
+        </p:spPr>
+        <p:txBody>
+          <a:bodyPr wrap="square" lIns="0" tIns="0" rIns="0" bIns="0" rtlCol="0" anchor="t">
+            <a:normAutofit/>
+          </a:bodyPr>
+          <a:lstStyle/>
+          <a:p>
+            <a:pPr indent="0" marL="0">
+              <a:buNone/>
+            </a:pPr>
+            <a:r>
+              <a:rPr lang="en-US" sz="1250" dirty="0">
+                <a:solidFill>
+                  <a:srgbClr val="17364A"/>
+                </a:solidFill>
+                <a:latin typeface="Aptos" pitchFamily="34" charset="0"/>
+                <a:ea typeface="Aptos" pitchFamily="34" charset="-122"/>
+                <a:cs typeface="Aptos" pitchFamily="34" charset="-120"/>
+              </a:rPr>
+              <a:t>1. What does fitness for use mean?</a:t>
+            </a:r>
+            <a:endParaRPr lang="en-US" sz="1250" dirty="0"/>
+          </a:p>
+        </p:txBody>
+      </p:sp>
+      <p:sp>
+        <p:nvSpPr>
+          <p:cNvPr id="14" name="Shape 12"/>
+          <p:cNvSpPr/>
+          <p:nvPr/>
+        </p:nvSpPr>
+        <p:spPr>
+          <a:xfrm>
+            <a:off x="7909560" y="3520440"/>
+            <a:ext cx="3154680" cy="1737360"/>
+          </a:xfrm>
+          <a:prstGeom prst="roundRect">
+            <a:avLst>
+              <a:gd name="adj" fmla="val 6316"/>
+            </a:avLst>
+          </a:prstGeom>
+          <a:solidFill>
+            <a:srgbClr val="EAF6F8"/>
+          </a:solidFill>
+          <a:ln w="12700">
+            <a:solidFill>
+              <a:srgbClr val="B9D7E6"/>
+            </a:solidFill>
+            <a:prstDash val="solid"/>
+          </a:ln>
+        </p:spPr>
+      </p:sp>
+      <p:sp>
+        <p:nvSpPr>
+          <p:cNvPr id="15" name="Text 13"/>
+          <p:cNvSpPr/>
+          <p:nvPr/>
+        </p:nvSpPr>
+        <p:spPr>
+          <a:xfrm>
+            <a:off x="8074152" y="3666744"/>
+            <a:ext cx="2825496" cy="201168"/>
+          </a:xfrm>
+          <a:prstGeom prst="rect">
+            <a:avLst/>
+          </a:prstGeom>
+          <a:noFill/>
+          <a:ln/>
+        </p:spPr>
+        <p:txBody>
+          <a:bodyPr wrap="square" lIns="0" tIns="0" rIns="0" bIns="0" rtlCol="0" anchor="ctr"/>
+          <a:lstStyle/>
+          <a:p>
+            <a:pPr indent="0" marL="0">
+              <a:buNone/>
+            </a:pPr>
+            <a:r>
+              <a:rPr lang="en-US" sz="950" b="1" dirty="0">
+                <a:solidFill>
+                  <a:srgbClr val="0068B7"/>
+                </a:solidFill>
+                <a:latin typeface="Aptos" pitchFamily="34" charset="0"/>
+                <a:ea typeface="Aptos" pitchFamily="34" charset="-122"/>
+                <a:cs typeface="Aptos" pitchFamily="34" charset="-120"/>
+              </a:rPr>
+              <a:t>Use this for</a:t>
+            </a:r>
+            <a:endParaRPr lang="en-US" sz="950" dirty="0"/>
+          </a:p>
+        </p:txBody>
+      </p:sp>
+      <p:sp>
+        <p:nvSpPr>
+          <p:cNvPr id="16" name="Text 14"/>
+          <p:cNvSpPr/>
+          <p:nvPr/>
+        </p:nvSpPr>
+        <p:spPr>
+          <a:xfrm>
+            <a:off x="8074152" y="3959352"/>
+            <a:ext cx="2825496" cy="1170432"/>
+          </a:xfrm>
+          <a:prstGeom prst="rect">
+            <a:avLst/>
+          </a:prstGeom>
+          <a:noFill/>
+          <a:ln/>
+        </p:spPr>
+        <p:txBody>
+          <a:bodyPr wrap="square" lIns="0" tIns="0" rIns="0" bIns="0" rtlCol="0" anchor="t">
+            <a:normAutofit/>
+          </a:bodyPr>
+          <a:lstStyle/>
+          <a:p>
+            <a:pPr indent="0" marL="0">
+              <a:buNone/>
+            </a:pPr>
+            <a:r>
+              <a:rPr lang="en-US" sz="1250" dirty="0">
+                <a:solidFill>
+                  <a:srgbClr val="17364A"/>
+                </a:solidFill>
+                <a:latin typeface="Aptos" pitchFamily="34" charset="0"/>
+                <a:ea typeface="Aptos" pitchFamily="34" charset="-122"/>
+                <a:cs typeface="Aptos" pitchFamily="34" charset="-120"/>
+              </a:rPr>
+              <a:t>Connect the concept to public health decisions, safeguards, documentation, or implementation work.</a:t>
+            </a:r>
+            <a:endParaRPr lang="en-US" sz="1250" dirty="0"/>
+          </a:p>
+        </p:txBody>
+      </p:sp>
+    </p:spTree>
+  </p:cSld>
+  <p:clrMapOvr>
+    <a:masterClrMapping/>
+  </p:clrMapOvr>
+</p:sld>
+</file>
+
+<file path=ppt/slides/slide22.xml><?xml version="1.0" encoding="utf-8"?>
+<p:sld xmlns:a="http://schemas.openxmlformats.org/drawingml/2006/main" xmlns:r="http://schemas.openxmlformats.org/officeDocument/2006/relationships" xmlns:p="http://schemas.openxmlformats.org/presentationml/2006/main">
+  <p:cSld name="Slide 22">
+    <p:bg>
+      <p:bgPr>
+        <a:solidFill>
+          <a:srgbClr val="F7FBFD"/>
+        </a:solidFill>
+      </p:bgPr>
+    </p:bg>
+    <p:spTree>
+      <p:nvGrpSpPr>
+        <p:cNvPr id="1" name=""/>
+        <p:cNvGrpSpPr/>
+        <p:nvPr/>
+      </p:nvGrpSpPr>
+      <p:grpSpPr>
+        <a:xfrm>
+          <a:off x="0" y="0"/>
+          <a:ext cx="0" cy="0"/>
+          <a:chOff x="0" y="0"/>
+          <a:chExt cx="0" cy="0"/>
+        </a:xfrm>
+      </p:grpSpPr>
+      <p:sp>
+        <p:nvSpPr>
+          <p:cNvPr id="2" name="Shape 0"/>
+          <p:cNvSpPr/>
+          <p:nvPr/>
+        </p:nvSpPr>
+        <p:spPr>
+          <a:xfrm>
+            <a:off x="0" y="0"/>
+            <a:ext cx="12191695" cy="164592"/>
+          </a:xfrm>
+          <a:prstGeom prst="rect">
+            <a:avLst/>
+          </a:prstGeom>
+          <a:solidFill>
+            <a:srgbClr val="0068B7"/>
+          </a:solidFill>
+          <a:ln w="12700">
+            <a:solidFill>
+              <a:srgbClr val="0068B7"/>
+            </a:solidFill>
+            <a:prstDash val="solid"/>
+          </a:ln>
+        </p:spPr>
+      </p:sp>
+      <p:sp>
+        <p:nvSpPr>
+          <p:cNvPr id="3" name="Shape 1"/>
+          <p:cNvSpPr/>
+          <p:nvPr/>
+        </p:nvSpPr>
+        <p:spPr>
+          <a:xfrm>
+            <a:off x="0" y="164592"/>
+            <a:ext cx="146304" cy="6693408"/>
+          </a:xfrm>
+          <a:prstGeom prst="rect">
+            <a:avLst/>
+          </a:prstGeom>
+          <a:solidFill>
+            <a:srgbClr val="2F8A28"/>
+          </a:solidFill>
+          <a:ln w="12700">
+            <a:solidFill>
+              <a:srgbClr val="2F8A28"/>
+            </a:solidFill>
+            <a:prstDash val="solid"/>
+          </a:ln>
+        </p:spPr>
+      </p:sp>
+      <p:sp>
+        <p:nvSpPr>
+          <p:cNvPr id="4" name="Text 2"/>
+          <p:cNvSpPr/>
+          <p:nvPr/>
+        </p:nvSpPr>
+        <p:spPr>
+          <a:xfrm>
+            <a:off x="502920" y="292608"/>
+            <a:ext cx="10149840" cy="256032"/>
+          </a:xfrm>
+          <a:prstGeom prst="rect">
+            <a:avLst/>
+          </a:prstGeom>
+          <a:noFill/>
+          <a:ln/>
+        </p:spPr>
+        <p:txBody>
+          <a:bodyPr wrap="square" lIns="0" tIns="0" rIns="0" bIns="0" rtlCol="0" anchor="ctr"/>
+          <a:lstStyle/>
+          <a:p>
+            <a:pPr indent="0" marL="0">
+              <a:buNone/>
+            </a:pPr>
+            <a:r>
+              <a:rPr lang="en-US" sz="900" b="1" dirty="0">
+                <a:solidFill>
+                  <a:srgbClr val="5F7181"/>
+                </a:solidFill>
+                <a:latin typeface="Aptos" pitchFamily="34" charset="0"/>
+                <a:ea typeface="Aptos" pitchFamily="34" charset="-122"/>
+                <a:cs typeface="Aptos" pitchFamily="34" charset="-120"/>
+              </a:rPr>
+              <a:t>Data Quality Engineering for AI</a:t>
+            </a:r>
+            <a:endParaRPr lang="en-US" sz="900" dirty="0"/>
+          </a:p>
+        </p:txBody>
+      </p:sp>
+      <p:sp>
+        <p:nvSpPr>
+          <p:cNvPr id="5" name="Text 3"/>
+          <p:cNvSpPr/>
+          <p:nvPr/>
+        </p:nvSpPr>
+        <p:spPr>
+          <a:xfrm>
+            <a:off x="502920" y="6537960"/>
+            <a:ext cx="7772400" cy="201168"/>
+          </a:xfrm>
+          <a:prstGeom prst="rect">
+            <a:avLst/>
+          </a:prstGeom>
+          <a:noFill/>
+          <a:ln/>
+        </p:spPr>
+        <p:txBody>
+          <a:bodyPr wrap="square" lIns="0" tIns="0" rIns="0" bIns="0" rtlCol="0" anchor="ctr"/>
+          <a:lstStyle/>
+          <a:p>
+            <a:pPr indent="0" marL="0">
+              <a:buNone/>
+            </a:pPr>
+            <a:r>
+              <a:rPr lang="en-US" sz="800" dirty="0">
+                <a:solidFill>
+                  <a:srgbClr val="5F7181"/>
+                </a:solidFill>
+                <a:latin typeface="Aptos" pitchFamily="34" charset="0"/>
+                <a:ea typeface="Aptos" pitchFamily="34" charset="-122"/>
+                <a:cs typeface="Aptos" pitchFamily="34" charset="-120"/>
+              </a:rPr>
+              <a:t>AI Playbook and Toolkit for Public Health Departments</a:t>
+            </a:r>
+            <a:endParaRPr lang="en-US" sz="800" dirty="0"/>
+          </a:p>
+        </p:txBody>
+      </p:sp>
+      <p:sp>
+        <p:nvSpPr>
+          <p:cNvPr id="6" name="Text 4"/>
+          <p:cNvSpPr/>
+          <p:nvPr/>
+        </p:nvSpPr>
+        <p:spPr>
+          <a:xfrm>
+            <a:off x="9966960" y="6537960"/>
+            <a:ext cx="1645920" cy="201168"/>
+          </a:xfrm>
+          <a:prstGeom prst="rect">
+            <a:avLst/>
+          </a:prstGeom>
+          <a:noFill/>
+          <a:ln/>
+        </p:spPr>
+        <p:txBody>
+          <a:bodyPr wrap="square" lIns="0" tIns="0" rIns="0" bIns="0" rtlCol="0" anchor="ctr"/>
+          <a:lstStyle/>
+          <a:p>
+            <a:pPr algn="r" indent="0" marL="0">
+              <a:buNone/>
+            </a:pPr>
+            <a:r>
+              <a:rPr lang="en-US" sz="800" dirty="0">
+                <a:solidFill>
+                  <a:srgbClr val="5F7181"/>
+                </a:solidFill>
+                <a:latin typeface="Aptos" pitchFamily="34" charset="0"/>
+                <a:ea typeface="Aptos" pitchFamily="34" charset="-122"/>
+                <a:cs typeface="Aptos" pitchFamily="34" charset="-120"/>
+              </a:rPr>
+              <a:t>© Paula Soper</a:t>
+            </a:r>
+            <a:endParaRPr lang="en-US" sz="800" dirty="0"/>
+          </a:p>
+        </p:txBody>
+      </p:sp>
+      <p:sp>
+        <p:nvSpPr>
+          <p:cNvPr id="7" name="Shape 5"/>
+          <p:cNvSpPr/>
+          <p:nvPr/>
+        </p:nvSpPr>
+        <p:spPr>
+          <a:xfrm>
+            <a:off x="640080" y="658368"/>
+            <a:ext cx="420624" cy="420624"/>
+          </a:xfrm>
+          <a:prstGeom prst="ellipse">
+            <a:avLst/>
+          </a:prstGeom>
+          <a:solidFill>
+            <a:srgbClr val="0068B7"/>
+          </a:solidFill>
+          <a:ln w="12700">
+            <a:solidFill>
+              <a:srgbClr val="0068B7"/>
+            </a:solidFill>
+            <a:prstDash val="solid"/>
+          </a:ln>
+        </p:spPr>
+      </p:sp>
+      <p:sp>
+        <p:nvSpPr>
+          <p:cNvPr id="8" name="Text 6"/>
+          <p:cNvSpPr/>
+          <p:nvPr/>
+        </p:nvSpPr>
+        <p:spPr>
+          <a:xfrm>
+            <a:off x="640080" y="731520"/>
+            <a:ext cx="420624" cy="164592"/>
+          </a:xfrm>
+          <a:prstGeom prst="rect">
+            <a:avLst/>
+          </a:prstGeom>
+          <a:noFill/>
+          <a:ln/>
+        </p:spPr>
+        <p:txBody>
+          <a:bodyPr wrap="square" lIns="0" tIns="0" rIns="0" bIns="0" rtlCol="0" anchor="ctr"/>
+          <a:lstStyle/>
+          <a:p>
+            <a:pPr algn="ctr" indent="0" marL="0">
+              <a:buNone/>
+            </a:pPr>
+            <a:r>
+              <a:rPr lang="en-US" sz="1100" b="1" dirty="0">
+                <a:solidFill>
+                  <a:srgbClr val="FFFFFF"/>
+                </a:solidFill>
+                <a:latin typeface="Aptos" pitchFamily="34" charset="0"/>
+                <a:ea typeface="Aptos" pitchFamily="34" charset="-122"/>
+                <a:cs typeface="Aptos" pitchFamily="34" charset="-120"/>
+              </a:rPr>
+              <a:t>14</a:t>
+            </a:r>
+            <a:endParaRPr lang="en-US" sz="1100" dirty="0"/>
+          </a:p>
+        </p:txBody>
+      </p:sp>
+      <p:sp>
+        <p:nvSpPr>
+          <p:cNvPr id="9" name="Text 7"/>
+          <p:cNvSpPr/>
+          <p:nvPr/>
+        </p:nvSpPr>
+        <p:spPr>
+          <a:xfrm>
+            <a:off x="640080" y="621792"/>
+            <a:ext cx="10881360" cy="566928"/>
+          </a:xfrm>
+          <a:prstGeom prst="rect">
+            <a:avLst/>
+          </a:prstGeom>
+          <a:noFill/>
+          <a:ln/>
+        </p:spPr>
+        <p:txBody>
+          <a:bodyPr wrap="square" lIns="0" tIns="0" rIns="0" bIns="0" rtlCol="0" anchor="ctr">
+            <a:normAutofit/>
+          </a:bodyPr>
+          <a:lstStyle/>
+          <a:p>
+            <a:pPr indent="0" marL="0">
+              <a:buNone/>
+            </a:pPr>
+            <a:r>
+              <a:rPr lang="en-US" sz="2700" b="1" dirty="0">
+                <a:solidFill>
+                  <a:srgbClr val="003A63"/>
+                </a:solidFill>
+                <a:latin typeface="Aptos Display" pitchFamily="34" charset="0"/>
+                <a:ea typeface="Aptos Display" pitchFamily="34" charset="-122"/>
+                <a:cs typeface="Aptos Display" pitchFamily="34" charset="-120"/>
+              </a:rPr>
+              <a:t>References and Resources</a:t>
+            </a:r>
+            <a:endParaRPr lang="en-US" sz="2700" dirty="0"/>
+          </a:p>
+        </p:txBody>
+      </p:sp>
+      <p:sp>
+        <p:nvSpPr>
+          <p:cNvPr id="10" name="Text 8"/>
+          <p:cNvSpPr/>
+          <p:nvPr/>
+        </p:nvSpPr>
+        <p:spPr>
+          <a:xfrm>
+            <a:off x="868680" y="1417320"/>
+            <a:ext cx="6675120" cy="4434840"/>
+          </a:xfrm>
+          <a:prstGeom prst="rect">
+            <a:avLst/>
+          </a:prstGeom>
+          <a:noFill/>
+          <a:ln/>
+        </p:spPr>
+        <p:txBody>
+          <a:bodyPr wrap="square" lIns="635" tIns="635" rIns="635" bIns="635" rtlCol="0" anchor="t">
+            <a:normAutofit/>
+          </a:bodyPr>
+          <a:lstStyle/>
+          <a:p>
+            <a:r>
+              <a:rPr lang="en-US" sz="1700" dirty="0">
+                <a:solidFill>
+                  <a:srgbClr val="17364A"/>
+                </a:solidFill>
+                <a:latin typeface="Aptos" pitchFamily="34" charset="0"/>
+                <a:ea typeface="Aptos" pitchFamily="34" charset="-122"/>
+                <a:cs typeface="Aptos" pitchFamily="34" charset="-120"/>
+              </a:rPr>
               <a:t>CDC surveillance and data quality resources</a:t>
             </a:r>
-            <a:endParaRPr lang="en-US" sz="1450" dirty="0"/>
-          </a:p>
-          <a:p>
-            <a:r>
-              <a:rPr lang="en-US" sz="1450" dirty="0">
+            <a:endParaRPr lang="en-US" sz="1700" dirty="0"/>
+          </a:p>
+          <a:p>
+            <a:r>
+              <a:rPr lang="en-US" sz="1700" dirty="0">
                 <a:solidFill>
                   <a:srgbClr val="17364A"/>
                 </a:solidFill>
@@ -6046,11 +10747,11 @@
               </a:rPr>
               <a:t>CDC Public Health Data Strategy: https://www.cdc.gov/public-health-data-strategy/php/about/index.html</a:t>
             </a:r>
-            <a:endParaRPr lang="en-US" sz="1450" dirty="0"/>
-          </a:p>
-          <a:p>
-            <a:r>
-              <a:rPr lang="en-US" sz="1450" dirty="0">
+            <a:endParaRPr lang="en-US" sz="1700" dirty="0"/>
+          </a:p>
+          <a:p>
+            <a:r>
+              <a:rPr lang="en-US" sz="1700" dirty="0">
                 <a:solidFill>
                   <a:srgbClr val="17364A"/>
                 </a:solidFill>
@@ -6060,11 +10761,11 @@
               </a:rPr>
               <a:t>NIST AI Risk Management Framework: https://www.nist.gov/itl/ai-risk-management-framework</a:t>
             </a:r>
-            <a:endParaRPr lang="en-US" sz="1450" dirty="0"/>
-          </a:p>
-          <a:p>
-            <a:r>
-              <a:rPr lang="en-US" sz="1450" dirty="0">
+            <a:endParaRPr lang="en-US" sz="1700" dirty="0"/>
+          </a:p>
+          <a:p>
+            <a:r>
+              <a:rPr lang="en-US" sz="1700" dirty="0">
                 <a:solidFill>
                   <a:srgbClr val="17364A"/>
                 </a:solidFill>
@@ -6074,7 +10775,221 @@
               </a:rPr>
               <a:t>Agency data governance policies</a:t>
             </a:r>
-            <a:endParaRPr lang="en-US" sz="1450" dirty="0"/>
+            <a:endParaRPr lang="en-US" sz="1700" dirty="0"/>
+          </a:p>
+        </p:txBody>
+      </p:sp>
+      <p:sp>
+        <p:nvSpPr>
+          <p:cNvPr id="11" name="Shape 9"/>
+          <p:cNvSpPr/>
+          <p:nvPr/>
+        </p:nvSpPr>
+        <p:spPr>
+          <a:xfrm>
+            <a:off x="7909560" y="1417320"/>
+            <a:ext cx="3154680" cy="1828800"/>
+          </a:xfrm>
+          <a:prstGeom prst="roundRect">
+            <a:avLst>
+              <a:gd name="adj" fmla="val 6000"/>
+            </a:avLst>
+          </a:prstGeom>
+          <a:solidFill>
+            <a:srgbClr val="EEF8ED"/>
+          </a:solidFill>
+          <a:ln w="12700">
+            <a:solidFill>
+              <a:srgbClr val="B9D7E6"/>
+            </a:solidFill>
+            <a:prstDash val="solid"/>
+          </a:ln>
+        </p:spPr>
+      </p:sp>
+      <p:sp>
+        <p:nvSpPr>
+          <p:cNvPr id="12" name="Text 10"/>
+          <p:cNvSpPr/>
+          <p:nvPr/>
+        </p:nvSpPr>
+        <p:spPr>
+          <a:xfrm>
+            <a:off x="8074152" y="1563624"/>
+            <a:ext cx="2825496" cy="201168"/>
+          </a:xfrm>
+          <a:prstGeom prst="rect">
+            <a:avLst/>
+          </a:prstGeom>
+          <a:noFill/>
+          <a:ln/>
+        </p:spPr>
+        <p:txBody>
+          <a:bodyPr wrap="square" lIns="0" tIns="0" rIns="0" bIns="0" rtlCol="0" anchor="ctr"/>
+          <a:lstStyle/>
+          <a:p>
+            <a:pPr indent="0" marL="0">
+              <a:buNone/>
+            </a:pPr>
+            <a:r>
+              <a:rPr lang="en-US" sz="950" b="1" dirty="0">
+                <a:solidFill>
+                  <a:srgbClr val="0068B7"/>
+                </a:solidFill>
+                <a:latin typeface="Aptos" pitchFamily="34" charset="0"/>
+                <a:ea typeface="Aptos" pitchFamily="34" charset="-122"/>
+                <a:cs typeface="Aptos" pitchFamily="34" charset="-120"/>
+              </a:rPr>
+              <a:t>Key idea</a:t>
+            </a:r>
+            <a:endParaRPr lang="en-US" sz="950" dirty="0"/>
+          </a:p>
+        </p:txBody>
+      </p:sp>
+      <p:sp>
+        <p:nvSpPr>
+          <p:cNvPr id="13" name="Text 11"/>
+          <p:cNvSpPr/>
+          <p:nvPr/>
+        </p:nvSpPr>
+        <p:spPr>
+          <a:xfrm>
+            <a:off x="8074152" y="1856232"/>
+            <a:ext cx="2825496" cy="1261872"/>
+          </a:xfrm>
+          <a:prstGeom prst="rect">
+            <a:avLst/>
+          </a:prstGeom>
+          <a:noFill/>
+          <a:ln/>
+        </p:spPr>
+        <p:txBody>
+          <a:bodyPr wrap="square" lIns="0" tIns="0" rIns="0" bIns="0" rtlCol="0" anchor="t">
+            <a:normAutofit/>
+          </a:bodyPr>
+          <a:lstStyle/>
+          <a:p>
+            <a:pPr indent="0" marL="0">
+              <a:buNone/>
+            </a:pPr>
+            <a:r>
+              <a:rPr lang="en-US" sz="1250" dirty="0">
+                <a:solidFill>
+                  <a:srgbClr val="17364A"/>
+                </a:solidFill>
+                <a:latin typeface="Aptos" pitchFamily="34" charset="0"/>
+                <a:ea typeface="Aptos" pitchFamily="34" charset="-122"/>
+                <a:cs typeface="Aptos" pitchFamily="34" charset="-120"/>
+              </a:rPr>
+              <a:t>CDC surveillance and data quality resources</a:t>
+            </a:r>
+            <a:endParaRPr lang="en-US" sz="1250" dirty="0"/>
+          </a:p>
+        </p:txBody>
+      </p:sp>
+      <p:sp>
+        <p:nvSpPr>
+          <p:cNvPr id="14" name="Shape 12"/>
+          <p:cNvSpPr/>
+          <p:nvPr/>
+        </p:nvSpPr>
+        <p:spPr>
+          <a:xfrm>
+            <a:off x="7909560" y="3520440"/>
+            <a:ext cx="3154680" cy="1737360"/>
+          </a:xfrm>
+          <a:prstGeom prst="roundRect">
+            <a:avLst>
+              <a:gd name="adj" fmla="val 6316"/>
+            </a:avLst>
+          </a:prstGeom>
+          <a:solidFill>
+            <a:srgbClr val="EAF6F8"/>
+          </a:solidFill>
+          <a:ln w="12700">
+            <a:solidFill>
+              <a:srgbClr val="B9D7E6"/>
+            </a:solidFill>
+            <a:prstDash val="solid"/>
+          </a:ln>
+        </p:spPr>
+      </p:sp>
+      <p:sp>
+        <p:nvSpPr>
+          <p:cNvPr id="15" name="Text 13"/>
+          <p:cNvSpPr/>
+          <p:nvPr/>
+        </p:nvSpPr>
+        <p:spPr>
+          <a:xfrm>
+            <a:off x="8074152" y="3666744"/>
+            <a:ext cx="2825496" cy="201168"/>
+          </a:xfrm>
+          <a:prstGeom prst="rect">
+            <a:avLst/>
+          </a:prstGeom>
+          <a:noFill/>
+          <a:ln/>
+        </p:spPr>
+        <p:txBody>
+          <a:bodyPr wrap="square" lIns="0" tIns="0" rIns="0" bIns="0" rtlCol="0" anchor="ctr"/>
+          <a:lstStyle/>
+          <a:p>
+            <a:pPr indent="0" marL="0">
+              <a:buNone/>
+            </a:pPr>
+            <a:r>
+              <a:rPr lang="en-US" sz="950" b="1" dirty="0">
+                <a:solidFill>
+                  <a:srgbClr val="0068B7"/>
+                </a:solidFill>
+                <a:latin typeface="Aptos" pitchFamily="34" charset="0"/>
+                <a:ea typeface="Aptos" pitchFamily="34" charset="-122"/>
+                <a:cs typeface="Aptos" pitchFamily="34" charset="-120"/>
+              </a:rPr>
+              <a:t>Use this for</a:t>
+            </a:r>
+            <a:endParaRPr lang="en-US" sz="950" dirty="0"/>
+          </a:p>
+        </p:txBody>
+      </p:sp>
+      <p:sp>
+        <p:nvSpPr>
+          <p:cNvPr id="16" name="Text 14"/>
+          <p:cNvSpPr/>
+          <p:nvPr/>
+        </p:nvSpPr>
+        <p:spPr>
+          <a:xfrm>
+            <a:off x="8074152" y="3959352"/>
+            <a:ext cx="2825496" cy="1170432"/>
+          </a:xfrm>
+          <a:prstGeom prst="rect">
+            <a:avLst/>
+          </a:prstGeom>
+          <a:noFill/>
+          <a:ln/>
+        </p:spPr>
+        <p:txBody>
+          <a:bodyPr wrap="square" lIns="0" tIns="0" rIns="0" bIns="0" rtlCol="0" anchor="t">
+            <a:normAutofit/>
+          </a:bodyPr>
+          <a:lstStyle/>
+          <a:p>
+            <a:pPr indent="0" marL="0">
+              <a:buNone/>
+            </a:pPr>
+            <a:r>
+              <a:rPr lang="en-US" sz="1250" dirty="0">
+                <a:solidFill>
+                  <a:srgbClr val="17364A"/>
+                </a:solidFill>
+                <a:latin typeface="Aptos" pitchFamily="34" charset="0"/>
+                <a:ea typeface="Aptos" pitchFamily="34" charset="-122"/>
+                <a:cs typeface="Aptos" pitchFamily="34" charset="-120"/>
+              </a:rPr>
+              <a:t>Connect the concept to public health decisions, safeguards, documentation, or implementation work.</a:t>
+            </a:r>
+            <a:endParaRPr lang="en-US" sz="1250" dirty="0"/>
           </a:p>
         </p:txBody>
       </p:sp>
@@ -6137,7 +11052,32 @@
       </p:sp>
       <p:sp>
         <p:nvSpPr>
-          <p:cNvPr id="3" name="Text 1"/>
+          <p:cNvPr id="3" name="Shape 1"/>
+          <p:cNvSpPr/>
+          <p:nvPr/>
+        </p:nvSpPr>
+        <p:spPr>
+          <a:xfrm>
+            <a:off x="0" y="164592"/>
+            <a:ext cx="146304" cy="6693408"/>
+          </a:xfrm>
+          <a:prstGeom prst="rect">
+            <a:avLst/>
+          </a:prstGeom>
+          <a:solidFill>
+            <a:srgbClr val="2F8A28"/>
+          </a:solidFill>
+          <a:ln w="12700">
+            <a:solidFill>
+              <a:srgbClr val="2F8A28"/>
+            </a:solidFill>
+            <a:prstDash val="solid"/>
+          </a:ln>
+        </p:spPr>
+      </p:sp>
+      <p:sp>
+        <p:nvSpPr>
+          <p:cNvPr id="4" name="Text 2"/>
           <p:cNvSpPr/>
           <p:nvPr/>
         </p:nvSpPr>
@@ -6176,7 +11116,7 @@
       </p:sp>
       <p:sp>
         <p:nvSpPr>
-          <p:cNvPr id="4" name="Text 2"/>
+          <p:cNvPr id="5" name="Text 3"/>
           <p:cNvSpPr/>
           <p:nvPr/>
         </p:nvSpPr>
@@ -6215,7 +11155,7 @@
       </p:sp>
       <p:sp>
         <p:nvSpPr>
-          <p:cNvPr id="5" name="Text 3"/>
+          <p:cNvPr id="6" name="Text 4"/>
           <p:cNvSpPr/>
           <p:nvPr/>
         </p:nvSpPr>
@@ -6254,7 +11194,7 @@
       </p:sp>
       <p:sp>
         <p:nvSpPr>
-          <p:cNvPr id="6" name="Text 4"/>
+          <p:cNvPr id="7" name="Text 5"/>
           <p:cNvSpPr/>
           <p:nvPr/>
         </p:nvSpPr>
@@ -6287,7 +11227,7 @@
                 <a:ea typeface="Aptos Display" pitchFamily="34" charset="-122"/>
                 <a:cs typeface="Aptos Display" pitchFamily="34" charset="-120"/>
               </a:rPr>
-              <a:t>Learning Objectives</a:t>
+              <a:t>How this module connects to the playbook</a:t>
             </a:r>
             <a:endParaRPr lang="en-US" sz="2700" dirty="0"/>
           </a:p>
@@ -6295,14 +11235,14 @@
       </p:sp>
       <p:sp>
         <p:nvSpPr>
-          <p:cNvPr id="7" name="Text 5"/>
-          <p:cNvSpPr/>
-          <p:nvPr/>
-        </p:nvSpPr>
-        <p:spPr>
-          <a:xfrm>
-            <a:off x="822960" y="1325880"/>
-            <a:ext cx="10378440" cy="4800600"/>
+          <p:cNvPr id="8" name="Text 6"/>
+          <p:cNvSpPr/>
+          <p:nvPr/>
+        </p:nvSpPr>
+        <p:spPr>
+          <a:xfrm>
+            <a:off x="868680" y="1417320"/>
+            <a:ext cx="6903720" cy="4480560"/>
           </a:xfrm>
           <a:prstGeom prst="rect">
             <a:avLst/>
@@ -6317,7 +11257,7 @@
           <a:lstStyle/>
           <a:p>
             <a:r>
-              <a:rPr lang="en-US" sz="1450" dirty="0">
+              <a:rPr lang="en-US" sz="1540" dirty="0">
                 <a:solidFill>
                   <a:srgbClr val="17364A"/>
                 </a:solidFill>
@@ -6325,13 +11265,13 @@
                 <a:ea typeface="Aptos" pitchFamily="34" charset="-122"/>
                 <a:cs typeface="Aptos" pitchFamily="34" charset="-120"/>
               </a:rPr>
-              <a:t>Identify major data quality dimensions relevant to public health AI.</a:t>
-            </a:r>
-            <a:endParaRPr lang="en-US" sz="1450" dirty="0"/>
-          </a:p>
-          <a:p>
-            <a:r>
-              <a:rPr lang="en-US" sz="1450" dirty="0">
+              <a:t>Play 11: Build and Deploy AI Solutions - This lesson informs Play 11 by helping learners connect the lesson topic to build and deploy.</a:t>
+            </a:r>
+            <a:endParaRPr lang="en-US" sz="1540" dirty="0"/>
+          </a:p>
+          <a:p>
+            <a:r>
+              <a:rPr lang="en-US" sz="1540" dirty="0">
                 <a:solidFill>
                   <a:srgbClr val="17364A"/>
                 </a:solidFill>
@@ -6339,13 +11279,13 @@
                 <a:ea typeface="Aptos" pitchFamily="34" charset="-122"/>
                 <a:cs typeface="Aptos" pitchFamily="34" charset="-120"/>
               </a:rPr>
-              <a:t>Explain the difference between general data quality and fitness for a specific use.</a:t>
-            </a:r>
-            <a:endParaRPr lang="en-US" sz="1450" dirty="0"/>
-          </a:p>
-          <a:p>
-            <a:r>
-              <a:rPr lang="en-US" sz="1450" dirty="0">
+              <a:t>Play 7: Prioritize Use Cases - This lesson informs Play 7 by helping learners connect the lesson topic to prioritize use cases work.</a:t>
+            </a:r>
+            <a:endParaRPr lang="en-US" sz="1540" dirty="0"/>
+          </a:p>
+          <a:p>
+            <a:r>
+              <a:rPr lang="en-US" sz="1540" dirty="0">
                 <a:solidFill>
                   <a:srgbClr val="17364A"/>
                 </a:solidFill>
@@ -6353,13 +11293,13 @@
                 <a:ea typeface="Aptos" pitchFamily="34" charset="-122"/>
                 <a:cs typeface="Aptos" pitchFamily="34" charset="-120"/>
               </a:rPr>
-              <a:t>Assess how missingness, timeliness, duplication, coding variation, and representativeness affect AI outputs.</a:t>
-            </a:r>
-            <a:endParaRPr lang="en-US" sz="1450" dirty="0"/>
-          </a:p>
-          <a:p>
-            <a:r>
-              <a:rPr lang="en-US" sz="1450" dirty="0">
+              <a:t>Play 1: Vision &amp; Guardrails - This lesson informs Play 1 by helping learners connect the lesson topic to vision &amp; guardrails work in.</a:t>
+            </a:r>
+            <a:endParaRPr lang="en-US" sz="1540" dirty="0"/>
+          </a:p>
+          <a:p>
+            <a:r>
+              <a:rPr lang="en-US" sz="1540" dirty="0">
                 <a:solidFill>
                   <a:srgbClr val="17364A"/>
                 </a:solidFill>
@@ -6367,13 +11307,106 @@
                 <a:ea typeface="Aptos" pitchFamily="34" charset="-122"/>
                 <a:cs typeface="Aptos" pitchFamily="34" charset="-120"/>
               </a:rPr>
-              <a:t>Define quality thresholds, review rules, and escalation criteria for a workflow.</a:t>
-            </a:r>
-            <a:endParaRPr lang="en-US" sz="1450" dirty="0"/>
-          </a:p>
-          <a:p>
-            <a:r>
-              <a:rPr lang="en-US" sz="1450" dirty="0">
+              <a:t>Play 2: Readiness Assessment - This lesson informs Play 2 by helping learners connect the lesson topic to readiness assessment work.</a:t>
+            </a:r>
+            <a:endParaRPr lang="en-US" sz="1540" dirty="0"/>
+          </a:p>
+        </p:txBody>
+      </p:sp>
+      <p:sp>
+        <p:nvSpPr>
+          <p:cNvPr id="9" name="Shape 7"/>
+          <p:cNvSpPr/>
+          <p:nvPr/>
+        </p:nvSpPr>
+        <p:spPr>
+          <a:xfrm>
+            <a:off x="8046720" y="1417320"/>
+            <a:ext cx="3063240" cy="2103120"/>
+          </a:xfrm>
+          <a:prstGeom prst="roundRect">
+            <a:avLst>
+              <a:gd name="adj" fmla="val 5217"/>
+            </a:avLst>
+          </a:prstGeom>
+          <a:solidFill>
+            <a:srgbClr val="EEF8ED"/>
+          </a:solidFill>
+          <a:ln w="12700">
+            <a:solidFill>
+              <a:srgbClr val="B9D7E6"/>
+            </a:solidFill>
+            <a:prstDash val="solid"/>
+          </a:ln>
+        </p:spPr>
+      </p:sp>
+      <p:sp>
+        <p:nvSpPr>
+          <p:cNvPr id="10" name="Text 8"/>
+          <p:cNvSpPr/>
+          <p:nvPr/>
+        </p:nvSpPr>
+        <p:spPr>
+          <a:xfrm>
+            <a:off x="8211312" y="1563624"/>
+            <a:ext cx="2734056" cy="201168"/>
+          </a:xfrm>
+          <a:prstGeom prst="rect">
+            <a:avLst/>
+          </a:prstGeom>
+          <a:noFill/>
+          <a:ln/>
+        </p:spPr>
+        <p:txBody>
+          <a:bodyPr wrap="square" lIns="0" tIns="0" rIns="0" bIns="0" rtlCol="0" anchor="ctr"/>
+          <a:lstStyle/>
+          <a:p>
+            <a:pPr indent="0" marL="0">
+              <a:buNone/>
+            </a:pPr>
+            <a:r>
+              <a:rPr lang="en-US" sz="950" b="1" dirty="0">
+                <a:solidFill>
+                  <a:srgbClr val="0068B7"/>
+                </a:solidFill>
+                <a:latin typeface="Aptos" pitchFamily="34" charset="0"/>
+                <a:ea typeface="Aptos" pitchFamily="34" charset="-122"/>
+                <a:cs typeface="Aptos" pitchFamily="34" charset="-120"/>
+              </a:rPr>
+              <a:t>Apply the lesson</a:t>
+            </a:r>
+            <a:endParaRPr lang="en-US" sz="950" dirty="0"/>
+          </a:p>
+        </p:txBody>
+      </p:sp>
+      <p:sp>
+        <p:nvSpPr>
+          <p:cNvPr id="11" name="Text 9"/>
+          <p:cNvSpPr/>
+          <p:nvPr/>
+        </p:nvSpPr>
+        <p:spPr>
+          <a:xfrm>
+            <a:off x="8211312" y="1856232"/>
+            <a:ext cx="2734056" cy="1536192"/>
+          </a:xfrm>
+          <a:prstGeom prst="rect">
+            <a:avLst/>
+          </a:prstGeom>
+          <a:noFill/>
+          <a:ln/>
+        </p:spPr>
+        <p:txBody>
+          <a:bodyPr wrap="square" lIns="0" tIns="0" rIns="0" bIns="0" rtlCol="0" anchor="t">
+            <a:normAutofit/>
+          </a:bodyPr>
+          <a:lstStyle/>
+          <a:p>
+            <a:pPr indent="0" marL="0">
+              <a:buNone/>
+            </a:pPr>
+            <a:r>
+              <a:rPr lang="en-US" sz="1250" dirty="0">
                 <a:solidFill>
                   <a:srgbClr val="17364A"/>
                 </a:solidFill>
@@ -6381,9 +11414,116 @@
                 <a:ea typeface="Aptos" pitchFamily="34" charset="-122"/>
                 <a:cs typeface="Aptos" pitchFamily="34" charset="-120"/>
               </a:rPr>
-              <a:t>Produce a data quality review plan for an AI-supported use case.</a:t>
-            </a:r>
-            <a:endParaRPr lang="en-US" sz="1450" dirty="0"/>
+              <a:t>Use the related plays to identify decisions, participants, timing, approvals, and documentation needed for responsible implementation.</a:t>
+            </a:r>
+            <a:endParaRPr lang="en-US" sz="1250" dirty="0"/>
+          </a:p>
+        </p:txBody>
+      </p:sp>
+      <p:sp>
+        <p:nvSpPr>
+          <p:cNvPr id="12" name="Shape 10"/>
+          <p:cNvSpPr/>
+          <p:nvPr/>
+        </p:nvSpPr>
+        <p:spPr>
+          <a:xfrm>
+            <a:off x="8046720" y="3794760"/>
+            <a:ext cx="3063240" cy="1508760"/>
+          </a:xfrm>
+          <a:prstGeom prst="roundRect">
+            <a:avLst>
+              <a:gd name="adj" fmla="val 7273"/>
+            </a:avLst>
+          </a:prstGeom>
+          <a:solidFill>
+            <a:srgbClr val="FFF4D9"/>
+          </a:solidFill>
+          <a:ln w="12700">
+            <a:solidFill>
+              <a:srgbClr val="B9D7E6"/>
+            </a:solidFill>
+            <a:prstDash val="solid"/>
+          </a:ln>
+        </p:spPr>
+      </p:sp>
+      <p:sp>
+        <p:nvSpPr>
+          <p:cNvPr id="13" name="Text 11"/>
+          <p:cNvSpPr/>
+          <p:nvPr/>
+        </p:nvSpPr>
+        <p:spPr>
+          <a:xfrm>
+            <a:off x="8211312" y="3941064"/>
+            <a:ext cx="2734056" cy="201168"/>
+          </a:xfrm>
+          <a:prstGeom prst="rect">
+            <a:avLst/>
+          </a:prstGeom>
+          <a:noFill/>
+          <a:ln/>
+        </p:spPr>
+        <p:txBody>
+          <a:bodyPr wrap="square" lIns="0" tIns="0" rIns="0" bIns="0" rtlCol="0" anchor="ctr"/>
+          <a:lstStyle/>
+          <a:p>
+            <a:pPr indent="0" marL="0">
+              <a:buNone/>
+            </a:pPr>
+            <a:r>
+              <a:rPr lang="en-US" sz="950" b="1" dirty="0">
+                <a:solidFill>
+                  <a:srgbClr val="0068B7"/>
+                </a:solidFill>
+                <a:latin typeface="Aptos" pitchFamily="34" charset="0"/>
+                <a:ea typeface="Aptos" pitchFamily="34" charset="-122"/>
+                <a:cs typeface="Aptos" pitchFamily="34" charset="-120"/>
+              </a:rPr>
+              <a:t>Keep in mind</a:t>
+            </a:r>
+            <a:endParaRPr lang="en-US" sz="950" dirty="0"/>
+          </a:p>
+        </p:txBody>
+      </p:sp>
+      <p:sp>
+        <p:nvSpPr>
+          <p:cNvPr id="14" name="Text 12"/>
+          <p:cNvSpPr/>
+          <p:nvPr/>
+        </p:nvSpPr>
+        <p:spPr>
+          <a:xfrm>
+            <a:off x="8211312" y="4233672"/>
+            <a:ext cx="2734056" cy="941832"/>
+          </a:xfrm>
+          <a:prstGeom prst="rect">
+            <a:avLst/>
+          </a:prstGeom>
+          <a:noFill/>
+          <a:ln/>
+        </p:spPr>
+        <p:txBody>
+          <a:bodyPr wrap="square" lIns="0" tIns="0" rIns="0" bIns="0" rtlCol="0" anchor="t">
+            <a:normAutofit/>
+          </a:bodyPr>
+          <a:lstStyle/>
+          <a:p>
+            <a:pPr indent="0" marL="0">
+              <a:buNone/>
+            </a:pPr>
+            <a:r>
+              <a:rPr lang="en-US" sz="1250" dirty="0">
+                <a:solidFill>
+                  <a:srgbClr val="17364A"/>
+                </a:solidFill>
+                <a:latin typeface="Aptos" pitchFamily="34" charset="0"/>
+                <a:ea typeface="Aptos" pitchFamily="34" charset="-122"/>
+                <a:cs typeface="Aptos" pitchFamily="34" charset="-120"/>
+              </a:rPr>
+              <a:t>The playbook connection helps turn training into agency work, not just individual knowledge.</a:t>
+            </a:r>
+            <a:endParaRPr lang="en-US" sz="1250" dirty="0"/>
           </a:p>
         </p:txBody>
       </p:sp>
@@ -6446,7 +11586,32 @@
       </p:sp>
       <p:sp>
         <p:nvSpPr>
-          <p:cNvPr id="3" name="Text 1"/>
+          <p:cNvPr id="3" name="Shape 1"/>
+          <p:cNvSpPr/>
+          <p:nvPr/>
+        </p:nvSpPr>
+        <p:spPr>
+          <a:xfrm>
+            <a:off x="0" y="164592"/>
+            <a:ext cx="146304" cy="6693408"/>
+          </a:xfrm>
+          <a:prstGeom prst="rect">
+            <a:avLst/>
+          </a:prstGeom>
+          <a:solidFill>
+            <a:srgbClr val="2F8A28"/>
+          </a:solidFill>
+          <a:ln w="12700">
+            <a:solidFill>
+              <a:srgbClr val="2F8A28"/>
+            </a:solidFill>
+            <a:prstDash val="solid"/>
+          </a:ln>
+        </p:spPr>
+      </p:sp>
+      <p:sp>
+        <p:nvSpPr>
+          <p:cNvPr id="4" name="Text 2"/>
           <p:cNvSpPr/>
           <p:nvPr/>
         </p:nvSpPr>
@@ -6485,7 +11650,7 @@
       </p:sp>
       <p:sp>
         <p:nvSpPr>
-          <p:cNvPr id="4" name="Text 2"/>
+          <p:cNvPr id="5" name="Text 3"/>
           <p:cNvSpPr/>
           <p:nvPr/>
         </p:nvSpPr>
@@ -6524,7 +11689,7 @@
       </p:sp>
       <p:sp>
         <p:nvSpPr>
-          <p:cNvPr id="5" name="Text 3"/>
+          <p:cNvPr id="6" name="Text 4"/>
           <p:cNvSpPr/>
           <p:nvPr/>
         </p:nvSpPr>
@@ -6563,7 +11728,7 @@
       </p:sp>
       <p:sp>
         <p:nvSpPr>
-          <p:cNvPr id="6" name="Text 4"/>
+          <p:cNvPr id="7" name="Text 5"/>
           <p:cNvSpPr/>
           <p:nvPr/>
         </p:nvSpPr>
@@ -6596,7 +11761,7 @@
                 <a:ea typeface="Aptos Display" pitchFamily="34" charset="-122"/>
                 <a:cs typeface="Aptos Display" pitchFamily="34" charset="-120"/>
               </a:rPr>
-              <a:t>Module Overview</a:t>
+              <a:t>Related toolkit resources</a:t>
             </a:r>
             <a:endParaRPr lang="en-US" sz="2700" dirty="0"/>
           </a:p>
@@ -6604,32 +11769,192 @@
       </p:sp>
       <p:sp>
         <p:nvSpPr>
-          <p:cNvPr id="7" name="Text 5"/>
-          <p:cNvSpPr/>
-          <p:nvPr/>
-        </p:nvSpPr>
-        <p:spPr>
-          <a:xfrm>
-            <a:off x="822960" y="1325880"/>
-            <a:ext cx="10378440" cy="4800600"/>
-          </a:xfrm>
-          <a:prstGeom prst="rect">
-            <a:avLst/>
-          </a:prstGeom>
-          <a:noFill/>
-          <a:ln/>
-        </p:spPr>
-        <p:txBody>
-          <a:bodyPr wrap="square" lIns="1016" tIns="1016" rIns="1016" bIns="1016" rtlCol="0" anchor="t">
+          <p:cNvPr id="8" name="Text 6"/>
+          <p:cNvSpPr/>
+          <p:nvPr/>
+        </p:nvSpPr>
+        <p:spPr>
+          <a:xfrm>
+            <a:off x="868680" y="1417320"/>
+            <a:ext cx="6903720" cy="4480560"/>
+          </a:xfrm>
+          <a:prstGeom prst="rect">
+            <a:avLst/>
+          </a:prstGeom>
+          <a:noFill/>
+          <a:ln/>
+        </p:spPr>
+        <p:txBody>
+          <a:bodyPr wrap="square" lIns="635" tIns="635" rIns="635" bIns="635" rtlCol="0" anchor="t">
             <a:normAutofit/>
           </a:bodyPr>
           <a:lstStyle/>
           <a:p>
+            <a:r>
+              <a:rPr lang="en-US" sz="1460" dirty="0">
+                <a:solidFill>
+                  <a:srgbClr val="17364A"/>
+                </a:solidFill>
+                <a:latin typeface="Aptos" pitchFamily="34" charset="0"/>
+                <a:ea typeface="Aptos" pitchFamily="34" charset="-122"/>
+                <a:cs typeface="Aptos" pitchFamily="34" charset="-120"/>
+              </a:rPr>
+              <a:t>Tool 3: Equity Impact Assessment Checklist (Checklist) - Use this tool to complete or strengthen the practical exercise for the.</a:t>
+            </a:r>
+            <a:endParaRPr lang="en-US" sz="1460" dirty="0"/>
+          </a:p>
+          <a:p>
+            <a:r>
+              <a:rPr lang="en-US" sz="1460" dirty="0">
+                <a:solidFill>
+                  <a:srgbClr val="17364A"/>
+                </a:solidFill>
+                <a:latin typeface="Aptos" pitchFamily="34" charset="0"/>
+                <a:ea typeface="Aptos" pitchFamily="34" charset="-122"/>
+                <a:cs typeface="Aptos" pitchFamily="34" charset="-120"/>
+              </a:rPr>
+              <a:t>Tool 4: AI Policy Landscape Scan (Worksheet) - Use AI Policy Landscape Scan to translate this lesson into a documented public health.</a:t>
+            </a:r>
+            <a:endParaRPr lang="en-US" sz="1460" dirty="0"/>
+          </a:p>
+          <a:p>
+            <a:r>
+              <a:rPr lang="en-US" sz="1460" dirty="0">
+                <a:solidFill>
+                  <a:srgbClr val="17364A"/>
+                </a:solidFill>
+                <a:latin typeface="Aptos" pitchFamily="34" charset="0"/>
+                <a:ea typeface="Aptos" pitchFamily="34" charset="-122"/>
+                <a:cs typeface="Aptos" pitchFamily="34" charset="-120"/>
+              </a:rPr>
+              <a:t>Tool 5: AI Environmental and Resource Impact Review (Checklist) - Use AI Environmental and Resource Impact Review to translate this.</a:t>
+            </a:r>
+            <a:endParaRPr lang="en-US" sz="1460" dirty="0"/>
+          </a:p>
+          <a:p>
+            <a:r>
+              <a:rPr lang="en-US" sz="1460" dirty="0">
+                <a:solidFill>
+                  <a:srgbClr val="17364A"/>
+                </a:solidFill>
+                <a:latin typeface="Aptos" pitchFamily="34" charset="0"/>
+                <a:ea typeface="Aptos" pitchFamily="34" charset="-122"/>
+                <a:cs typeface="Aptos" pitchFamily="34" charset="-120"/>
+              </a:rPr>
+              <a:t>Tool 6: Human-Centered AI Decision Rule Checklist (Checklist) - Use Human-Centered AI Decision Rule Checklist to translate this.</a:t>
+            </a:r>
+            <a:endParaRPr lang="en-US" sz="1460" dirty="0"/>
+          </a:p>
+          <a:p>
+            <a:r>
+              <a:rPr lang="en-US" sz="1460" dirty="0">
+                <a:solidFill>
+                  <a:srgbClr val="17364A"/>
+                </a:solidFill>
+                <a:latin typeface="Aptos" pitchFamily="34" charset="0"/>
+                <a:ea typeface="Aptos" pitchFamily="34" charset="-122"/>
+                <a:cs typeface="Aptos" pitchFamily="34" charset="-120"/>
+              </a:rPr>
+              <a:t>Tool 8: AI Project Charter (Planning) - Use AI Project Charter to translate this lesson into a documented public health AI planning,.</a:t>
+            </a:r>
+            <a:endParaRPr lang="en-US" sz="1460" dirty="0"/>
+          </a:p>
+        </p:txBody>
+      </p:sp>
+      <p:sp>
+        <p:nvSpPr>
+          <p:cNvPr id="9" name="Shape 7"/>
+          <p:cNvSpPr/>
+          <p:nvPr/>
+        </p:nvSpPr>
+        <p:spPr>
+          <a:xfrm>
+            <a:off x="8046720" y="1417320"/>
+            <a:ext cx="3063240" cy="2103120"/>
+          </a:xfrm>
+          <a:prstGeom prst="roundRect">
+            <a:avLst>
+              <a:gd name="adj" fmla="val 5217"/>
+            </a:avLst>
+          </a:prstGeom>
+          <a:solidFill>
+            <a:srgbClr val="EAF6F8"/>
+          </a:solidFill>
+          <a:ln w="12700">
+            <a:solidFill>
+              <a:srgbClr val="B9D7E6"/>
+            </a:solidFill>
+            <a:prstDash val="solid"/>
+          </a:ln>
+        </p:spPr>
+      </p:sp>
+      <p:sp>
+        <p:nvSpPr>
+          <p:cNvPr id="10" name="Text 8"/>
+          <p:cNvSpPr/>
+          <p:nvPr/>
+        </p:nvSpPr>
+        <p:spPr>
+          <a:xfrm>
+            <a:off x="8211312" y="1563624"/>
+            <a:ext cx="2734056" cy="201168"/>
+          </a:xfrm>
+          <a:prstGeom prst="rect">
+            <a:avLst/>
+          </a:prstGeom>
+          <a:noFill/>
+          <a:ln/>
+        </p:spPr>
+        <p:txBody>
+          <a:bodyPr wrap="square" lIns="0" tIns="0" rIns="0" bIns="0" rtlCol="0" anchor="ctr"/>
+          <a:lstStyle/>
+          <a:p>
             <a:pPr indent="0" marL="0">
               <a:buNone/>
             </a:pPr>
             <a:r>
-              <a:rPr lang="en-US" sz="1420" dirty="0">
+              <a:rPr lang="en-US" sz="950" b="1" dirty="0">
+                <a:solidFill>
+                  <a:srgbClr val="0068B7"/>
+                </a:solidFill>
+                <a:latin typeface="Aptos" pitchFamily="34" charset="0"/>
+                <a:ea typeface="Aptos" pitchFamily="34" charset="-122"/>
+                <a:cs typeface="Aptos" pitchFamily="34" charset="-120"/>
+              </a:rPr>
+              <a:t>Use the tools</a:t>
+            </a:r>
+            <a:endParaRPr lang="en-US" sz="950" dirty="0"/>
+          </a:p>
+        </p:txBody>
+      </p:sp>
+      <p:sp>
+        <p:nvSpPr>
+          <p:cNvPr id="11" name="Text 9"/>
+          <p:cNvSpPr/>
+          <p:nvPr/>
+        </p:nvSpPr>
+        <p:spPr>
+          <a:xfrm>
+            <a:off x="8211312" y="1856232"/>
+            <a:ext cx="2734056" cy="1536192"/>
+          </a:xfrm>
+          <a:prstGeom prst="rect">
+            <a:avLst/>
+          </a:prstGeom>
+          <a:noFill/>
+          <a:ln/>
+        </p:spPr>
+        <p:txBody>
+          <a:bodyPr wrap="square" lIns="0" tIns="0" rIns="0" bIns="0" rtlCol="0" anchor="t">
+            <a:normAutofit/>
+          </a:bodyPr>
+          <a:lstStyle/>
+          <a:p>
+            <a:pPr indent="0" marL="0">
+              <a:buNone/>
+            </a:pPr>
+            <a:r>
+              <a:rPr lang="en-US" sz="1250" dirty="0">
                 <a:solidFill>
                   <a:srgbClr val="17364A"/>
                 </a:solidFill>
@@ -6637,9 +11962,116 @@
                 <a:ea typeface="Aptos" pitchFamily="34" charset="-122"/>
                 <a:cs typeface="Aptos" pitchFamily="34" charset="-120"/>
               </a:rPr>
-              <a:t>Data quality engineering is the practical work of defining, measuring, improving, and monitoring data quality so that data are fit for use. In public health AI, data quality is not a background concern. It directly affects whether AI outputs are accurate, equitable, timely, and safe enough to support public health work.</a:t>
-            </a:r>
-            <a:endParaRPr lang="en-US" sz="1420" dirty="0"/>
+              <a:t>Use linked tools when your department needs a structured worksheet, template, checklist, review process, or documentation artifact.</a:t>
+            </a:r>
+            <a:endParaRPr lang="en-US" sz="1250" dirty="0"/>
+          </a:p>
+        </p:txBody>
+      </p:sp>
+      <p:sp>
+        <p:nvSpPr>
+          <p:cNvPr id="12" name="Shape 10"/>
+          <p:cNvSpPr/>
+          <p:nvPr/>
+        </p:nvSpPr>
+        <p:spPr>
+          <a:xfrm>
+            <a:off x="8046720" y="3794760"/>
+            <a:ext cx="3063240" cy="1508760"/>
+          </a:xfrm>
+          <a:prstGeom prst="roundRect">
+            <a:avLst>
+              <a:gd name="adj" fmla="val 7273"/>
+            </a:avLst>
+          </a:prstGeom>
+          <a:solidFill>
+            <a:srgbClr val="EEF8ED"/>
+          </a:solidFill>
+          <a:ln w="12700">
+            <a:solidFill>
+              <a:srgbClr val="B9D7E6"/>
+            </a:solidFill>
+            <a:prstDash val="solid"/>
+          </a:ln>
+        </p:spPr>
+      </p:sp>
+      <p:sp>
+        <p:nvSpPr>
+          <p:cNvPr id="13" name="Text 11"/>
+          <p:cNvSpPr/>
+          <p:nvPr/>
+        </p:nvSpPr>
+        <p:spPr>
+          <a:xfrm>
+            <a:off x="8211312" y="3941064"/>
+            <a:ext cx="2734056" cy="201168"/>
+          </a:xfrm>
+          <a:prstGeom prst="rect">
+            <a:avLst/>
+          </a:prstGeom>
+          <a:noFill/>
+          <a:ln/>
+        </p:spPr>
+        <p:txBody>
+          <a:bodyPr wrap="square" lIns="0" tIns="0" rIns="0" bIns="0" rtlCol="0" anchor="ctr"/>
+          <a:lstStyle/>
+          <a:p>
+            <a:pPr indent="0" marL="0">
+              <a:buNone/>
+            </a:pPr>
+            <a:r>
+              <a:rPr lang="en-US" sz="950" b="1" dirty="0">
+                <a:solidFill>
+                  <a:srgbClr val="0068B7"/>
+                </a:solidFill>
+                <a:latin typeface="Aptos" pitchFamily="34" charset="0"/>
+                <a:ea typeface="Aptos" pitchFamily="34" charset="-122"/>
+                <a:cs typeface="Aptos" pitchFamily="34" charset="-120"/>
+              </a:rPr>
+              <a:t>Avoid duplication</a:t>
+            </a:r>
+            <a:endParaRPr lang="en-US" sz="950" dirty="0"/>
+          </a:p>
+        </p:txBody>
+      </p:sp>
+      <p:sp>
+        <p:nvSpPr>
+          <p:cNvPr id="14" name="Text 12"/>
+          <p:cNvSpPr/>
+          <p:nvPr/>
+        </p:nvSpPr>
+        <p:spPr>
+          <a:xfrm>
+            <a:off x="8211312" y="4233672"/>
+            <a:ext cx="2734056" cy="941832"/>
+          </a:xfrm>
+          <a:prstGeom prst="rect">
+            <a:avLst/>
+          </a:prstGeom>
+          <a:noFill/>
+          <a:ln/>
+        </p:spPr>
+        <p:txBody>
+          <a:bodyPr wrap="square" lIns="0" tIns="0" rIns="0" bIns="0" rtlCol="0" anchor="t">
+            <a:normAutofit/>
+          </a:bodyPr>
+          <a:lstStyle/>
+          <a:p>
+            <a:pPr indent="0" marL="0">
+              <a:buNone/>
+            </a:pPr>
+            <a:r>
+              <a:rPr lang="en-US" sz="1250" dirty="0">
+                <a:solidFill>
+                  <a:srgbClr val="17364A"/>
+                </a:solidFill>
+                <a:latin typeface="Aptos" pitchFamily="34" charset="0"/>
+                <a:ea typeface="Aptos" pitchFamily="34" charset="-122"/>
+                <a:cs typeface="Aptos" pitchFamily="34" charset="-120"/>
+              </a:rPr>
+              <a:t>If your department already has a strong equivalent tool, adapt or use the existing process instead of recreating it.</a:t>
+            </a:r>
+            <a:endParaRPr lang="en-US" sz="1250" dirty="0"/>
           </a:p>
         </p:txBody>
       </p:sp>
@@ -6702,7 +12134,32 @@
       </p:sp>
       <p:sp>
         <p:nvSpPr>
-          <p:cNvPr id="3" name="Text 1"/>
+          <p:cNvPr id="3" name="Shape 1"/>
+          <p:cNvSpPr/>
+          <p:nvPr/>
+        </p:nvSpPr>
+        <p:spPr>
+          <a:xfrm>
+            <a:off x="0" y="164592"/>
+            <a:ext cx="146304" cy="6693408"/>
+          </a:xfrm>
+          <a:prstGeom prst="rect">
+            <a:avLst/>
+          </a:prstGeom>
+          <a:solidFill>
+            <a:srgbClr val="2F8A28"/>
+          </a:solidFill>
+          <a:ln w="12700">
+            <a:solidFill>
+              <a:srgbClr val="2F8A28"/>
+            </a:solidFill>
+            <a:prstDash val="solid"/>
+          </a:ln>
+        </p:spPr>
+      </p:sp>
+      <p:sp>
+        <p:nvSpPr>
+          <p:cNvPr id="4" name="Text 2"/>
           <p:cNvSpPr/>
           <p:nvPr/>
         </p:nvSpPr>
@@ -6741,7 +12198,7 @@
       </p:sp>
       <p:sp>
         <p:nvSpPr>
-          <p:cNvPr id="4" name="Text 2"/>
+          <p:cNvPr id="5" name="Text 3"/>
           <p:cNvSpPr/>
           <p:nvPr/>
         </p:nvSpPr>
@@ -6780,7 +12237,7 @@
       </p:sp>
       <p:sp>
         <p:nvSpPr>
-          <p:cNvPr id="5" name="Text 3"/>
+          <p:cNvPr id="6" name="Text 4"/>
           <p:cNvSpPr/>
           <p:nvPr/>
         </p:nvSpPr>
@@ -6819,13 +12276,77 @@
       </p:sp>
       <p:sp>
         <p:nvSpPr>
-          <p:cNvPr id="6" name="Text 4"/>
+          <p:cNvPr id="7" name="Shape 5"/>
           <p:cNvSpPr/>
           <p:nvPr/>
         </p:nvSpPr>
         <p:spPr>
           <a:xfrm>
             <a:off x="640080" y="658368"/>
+            <a:ext cx="420624" cy="420624"/>
+          </a:xfrm>
+          <a:prstGeom prst="ellipse">
+            <a:avLst/>
+          </a:prstGeom>
+          <a:solidFill>
+            <a:srgbClr val="0068B7"/>
+          </a:solidFill>
+          <a:ln w="12700">
+            <a:solidFill>
+              <a:srgbClr val="0068B7"/>
+            </a:solidFill>
+            <a:prstDash val="solid"/>
+          </a:ln>
+        </p:spPr>
+      </p:sp>
+      <p:sp>
+        <p:nvSpPr>
+          <p:cNvPr id="8" name="Text 6"/>
+          <p:cNvSpPr/>
+          <p:nvPr/>
+        </p:nvSpPr>
+        <p:spPr>
+          <a:xfrm>
+            <a:off x="640080" y="731520"/>
+            <a:ext cx="420624" cy="164592"/>
+          </a:xfrm>
+          <a:prstGeom prst="rect">
+            <a:avLst/>
+          </a:prstGeom>
+          <a:noFill/>
+          <a:ln/>
+        </p:spPr>
+        <p:txBody>
+          <a:bodyPr wrap="square" lIns="0" tIns="0" rIns="0" bIns="0" rtlCol="0" anchor="ctr"/>
+          <a:lstStyle/>
+          <a:p>
+            <a:pPr algn="ctr" indent="0" marL="0">
+              <a:buNone/>
+            </a:pPr>
+            <a:r>
+              <a:rPr lang="en-US" sz="1100" b="1" dirty="0">
+                <a:solidFill>
+                  <a:srgbClr val="FFFFFF"/>
+                </a:solidFill>
+                <a:latin typeface="Aptos" pitchFamily="34" charset="0"/>
+                <a:ea typeface="Aptos" pitchFamily="34" charset="-122"/>
+                <a:cs typeface="Aptos" pitchFamily="34" charset="-120"/>
+              </a:rPr>
+              <a:t>1</a:t>
+            </a:r>
+            <a:endParaRPr lang="en-US" sz="1100" dirty="0"/>
+          </a:p>
+        </p:txBody>
+      </p:sp>
+      <p:sp>
+        <p:nvSpPr>
+          <p:cNvPr id="9" name="Text 7"/>
+          <p:cNvSpPr/>
+          <p:nvPr/>
+        </p:nvSpPr>
+        <p:spPr>
+          <a:xfrm>
+            <a:off x="640080" y="621792"/>
             <a:ext cx="10881360" cy="566928"/>
           </a:xfrm>
           <a:prstGeom prst="rect">
@@ -6852,7 +12373,7 @@
                 <a:ea typeface="Aptos Display" pitchFamily="34" charset="-122"/>
                 <a:cs typeface="Aptos Display" pitchFamily="34" charset="-120"/>
               </a:rPr>
-              <a:t>Why This Topic Matters for Public Health AI</a:t>
+              <a:t>Learning Objectives</a:t>
             </a:r>
             <a:endParaRPr lang="en-US" sz="2700" dirty="0"/>
           </a:p>
@@ -6860,32 +12381,178 @@
       </p:sp>
       <p:sp>
         <p:nvSpPr>
-          <p:cNvPr id="7" name="Text 5"/>
-          <p:cNvSpPr/>
-          <p:nvPr/>
-        </p:nvSpPr>
-        <p:spPr>
-          <a:xfrm>
-            <a:off x="822960" y="1325880"/>
-            <a:ext cx="10378440" cy="4800600"/>
-          </a:xfrm>
-          <a:prstGeom prst="rect">
-            <a:avLst/>
-          </a:prstGeom>
-          <a:noFill/>
-          <a:ln/>
-        </p:spPr>
-        <p:txBody>
-          <a:bodyPr wrap="square" lIns="1016" tIns="1016" rIns="1016" bIns="1016" rtlCol="0" anchor="t">
+          <p:cNvPr id="10" name="Text 8"/>
+          <p:cNvSpPr/>
+          <p:nvPr/>
+        </p:nvSpPr>
+        <p:spPr>
+          <a:xfrm>
+            <a:off x="868680" y="1417320"/>
+            <a:ext cx="6675120" cy="4434840"/>
+          </a:xfrm>
+          <a:prstGeom prst="rect">
+            <a:avLst/>
+          </a:prstGeom>
+          <a:noFill/>
+          <a:ln/>
+        </p:spPr>
+        <p:txBody>
+          <a:bodyPr wrap="square" lIns="635" tIns="635" rIns="635" bIns="635" rtlCol="0" anchor="t">
             <a:normAutofit/>
           </a:bodyPr>
           <a:lstStyle/>
           <a:p>
+            <a:r>
+              <a:rPr lang="en-US" sz="1700" dirty="0">
+                <a:solidFill>
+                  <a:srgbClr val="17364A"/>
+                </a:solidFill>
+                <a:latin typeface="Aptos" pitchFamily="34" charset="0"/>
+                <a:ea typeface="Aptos" pitchFamily="34" charset="-122"/>
+                <a:cs typeface="Aptos" pitchFamily="34" charset="-120"/>
+              </a:rPr>
+              <a:t>Identify major data quality dimensions relevant to public health AI.</a:t>
+            </a:r>
+            <a:endParaRPr lang="en-US" sz="1700" dirty="0"/>
+          </a:p>
+          <a:p>
+            <a:r>
+              <a:rPr lang="en-US" sz="1700" dirty="0">
+                <a:solidFill>
+                  <a:srgbClr val="17364A"/>
+                </a:solidFill>
+                <a:latin typeface="Aptos" pitchFamily="34" charset="0"/>
+                <a:ea typeface="Aptos" pitchFamily="34" charset="-122"/>
+                <a:cs typeface="Aptos" pitchFamily="34" charset="-120"/>
+              </a:rPr>
+              <a:t>Explain the difference between general data quality and fitness for a specific use.</a:t>
+            </a:r>
+            <a:endParaRPr lang="en-US" sz="1700" dirty="0"/>
+          </a:p>
+          <a:p>
+            <a:r>
+              <a:rPr lang="en-US" sz="1700" dirty="0">
+                <a:solidFill>
+                  <a:srgbClr val="17364A"/>
+                </a:solidFill>
+                <a:latin typeface="Aptos" pitchFamily="34" charset="0"/>
+                <a:ea typeface="Aptos" pitchFamily="34" charset="-122"/>
+                <a:cs typeface="Aptos" pitchFamily="34" charset="-120"/>
+              </a:rPr>
+              <a:t>Assess how missingness, timeliness, duplication, coding variation, and representativeness affect AI outputs.</a:t>
+            </a:r>
+            <a:endParaRPr lang="en-US" sz="1700" dirty="0"/>
+          </a:p>
+          <a:p>
+            <a:r>
+              <a:rPr lang="en-US" sz="1700" dirty="0">
+                <a:solidFill>
+                  <a:srgbClr val="17364A"/>
+                </a:solidFill>
+                <a:latin typeface="Aptos" pitchFamily="34" charset="0"/>
+                <a:ea typeface="Aptos" pitchFamily="34" charset="-122"/>
+                <a:cs typeface="Aptos" pitchFamily="34" charset="-120"/>
+              </a:rPr>
+              <a:t>Define quality thresholds, review rules, and escalation criteria for a workflow.</a:t>
+            </a:r>
+            <a:endParaRPr lang="en-US" sz="1700" dirty="0"/>
+          </a:p>
+        </p:txBody>
+      </p:sp>
+      <p:sp>
+        <p:nvSpPr>
+          <p:cNvPr id="11" name="Shape 9"/>
+          <p:cNvSpPr/>
+          <p:nvPr/>
+        </p:nvSpPr>
+        <p:spPr>
+          <a:xfrm>
+            <a:off x="7909560" y="1417320"/>
+            <a:ext cx="3154680" cy="1828800"/>
+          </a:xfrm>
+          <a:prstGeom prst="roundRect">
+            <a:avLst>
+              <a:gd name="adj" fmla="val 6000"/>
+            </a:avLst>
+          </a:prstGeom>
+          <a:solidFill>
+            <a:srgbClr val="EEF8ED"/>
+          </a:solidFill>
+          <a:ln w="12700">
+            <a:solidFill>
+              <a:srgbClr val="B9D7E6"/>
+            </a:solidFill>
+            <a:prstDash val="solid"/>
+          </a:ln>
+        </p:spPr>
+      </p:sp>
+      <p:sp>
+        <p:nvSpPr>
+          <p:cNvPr id="12" name="Text 10"/>
+          <p:cNvSpPr/>
+          <p:nvPr/>
+        </p:nvSpPr>
+        <p:spPr>
+          <a:xfrm>
+            <a:off x="8074152" y="1563624"/>
+            <a:ext cx="2825496" cy="201168"/>
+          </a:xfrm>
+          <a:prstGeom prst="rect">
+            <a:avLst/>
+          </a:prstGeom>
+          <a:noFill/>
+          <a:ln/>
+        </p:spPr>
+        <p:txBody>
+          <a:bodyPr wrap="square" lIns="0" tIns="0" rIns="0" bIns="0" rtlCol="0" anchor="ctr"/>
+          <a:lstStyle/>
+          <a:p>
             <a:pPr indent="0" marL="0">
               <a:buNone/>
             </a:pPr>
             <a:r>
-              <a:rPr lang="en-US" sz="1420" dirty="0">
+              <a:rPr lang="en-US" sz="950" b="1" dirty="0">
+                <a:solidFill>
+                  <a:srgbClr val="0068B7"/>
+                </a:solidFill>
+                <a:latin typeface="Aptos" pitchFamily="34" charset="0"/>
+                <a:ea typeface="Aptos" pitchFamily="34" charset="-122"/>
+                <a:cs typeface="Aptos" pitchFamily="34" charset="-120"/>
+              </a:rPr>
+              <a:t>Key idea</a:t>
+            </a:r>
+            <a:endParaRPr lang="en-US" sz="950" dirty="0"/>
+          </a:p>
+        </p:txBody>
+      </p:sp>
+      <p:sp>
+        <p:nvSpPr>
+          <p:cNvPr id="13" name="Text 11"/>
+          <p:cNvSpPr/>
+          <p:nvPr/>
+        </p:nvSpPr>
+        <p:spPr>
+          <a:xfrm>
+            <a:off x="8074152" y="1856232"/>
+            <a:ext cx="2825496" cy="1261872"/>
+          </a:xfrm>
+          <a:prstGeom prst="rect">
+            <a:avLst/>
+          </a:prstGeom>
+          <a:noFill/>
+          <a:ln/>
+        </p:spPr>
+        <p:txBody>
+          <a:bodyPr wrap="square" lIns="0" tIns="0" rIns="0" bIns="0" rtlCol="0" anchor="t">
+            <a:normAutofit/>
+          </a:bodyPr>
+          <a:lstStyle/>
+          <a:p>
+            <a:pPr indent="0" marL="0">
+              <a:buNone/>
+            </a:pPr>
+            <a:r>
+              <a:rPr lang="en-US" sz="1250" dirty="0">
                 <a:solidFill>
                   <a:srgbClr val="17364A"/>
                 </a:solidFill>
@@ -6893,9 +12560,116 @@
                 <a:ea typeface="Aptos" pitchFamily="34" charset="-122"/>
                 <a:cs typeface="Aptos" pitchFamily="34" charset="-120"/>
               </a:rPr>
-              <a:t>AI systems can create a false sense of precision when they produce polished outputs from weak data. A summary may sound authoritative even when key fields are missing. A risk score may look objective even when the data underrepresent communities with limited healthcare access. A classification model may appear efficient while encoding historical reporting patterns. Data quality engineering helps agencies identify these problems before they become operational decisions. Public health data quality should always be evaluated in relation to the intended use. A dataset may be adequate for annual descriptive reporting but inadequate for real-time triage. A field may be useful for aggregate trends but too incomplete for individual-level decision support. Fitness for use is therefore a public health judgment as well as a technical assessment. Data quality review also supports trust. Staff are more likely to use AI responsibly when they understand the limitations of the data behind the output. Leaders and communities are more likely to trust AI-supported workflows when limitations, uncertainty, and safeguards are documented.</a:t>
-            </a:r>
-            <a:endParaRPr lang="en-US" sz="1420" dirty="0"/>
+              <a:t>Identify major data quality dimensions relevant to public health AI.</a:t>
+            </a:r>
+            <a:endParaRPr lang="en-US" sz="1250" dirty="0"/>
+          </a:p>
+        </p:txBody>
+      </p:sp>
+      <p:sp>
+        <p:nvSpPr>
+          <p:cNvPr id="14" name="Shape 12"/>
+          <p:cNvSpPr/>
+          <p:nvPr/>
+        </p:nvSpPr>
+        <p:spPr>
+          <a:xfrm>
+            <a:off x="7909560" y="3520440"/>
+            <a:ext cx="3154680" cy="1737360"/>
+          </a:xfrm>
+          <a:prstGeom prst="roundRect">
+            <a:avLst>
+              <a:gd name="adj" fmla="val 6316"/>
+            </a:avLst>
+          </a:prstGeom>
+          <a:solidFill>
+            <a:srgbClr val="EAF6F8"/>
+          </a:solidFill>
+          <a:ln w="12700">
+            <a:solidFill>
+              <a:srgbClr val="B9D7E6"/>
+            </a:solidFill>
+            <a:prstDash val="solid"/>
+          </a:ln>
+        </p:spPr>
+      </p:sp>
+      <p:sp>
+        <p:nvSpPr>
+          <p:cNvPr id="15" name="Text 13"/>
+          <p:cNvSpPr/>
+          <p:nvPr/>
+        </p:nvSpPr>
+        <p:spPr>
+          <a:xfrm>
+            <a:off x="8074152" y="3666744"/>
+            <a:ext cx="2825496" cy="201168"/>
+          </a:xfrm>
+          <a:prstGeom prst="rect">
+            <a:avLst/>
+          </a:prstGeom>
+          <a:noFill/>
+          <a:ln/>
+        </p:spPr>
+        <p:txBody>
+          <a:bodyPr wrap="square" lIns="0" tIns="0" rIns="0" bIns="0" rtlCol="0" anchor="ctr"/>
+          <a:lstStyle/>
+          <a:p>
+            <a:pPr indent="0" marL="0">
+              <a:buNone/>
+            </a:pPr>
+            <a:r>
+              <a:rPr lang="en-US" sz="950" b="1" dirty="0">
+                <a:solidFill>
+                  <a:srgbClr val="0068B7"/>
+                </a:solidFill>
+                <a:latin typeface="Aptos" pitchFamily="34" charset="0"/>
+                <a:ea typeface="Aptos" pitchFamily="34" charset="-122"/>
+                <a:cs typeface="Aptos" pitchFamily="34" charset="-120"/>
+              </a:rPr>
+              <a:t>Use this for</a:t>
+            </a:r>
+            <a:endParaRPr lang="en-US" sz="950" dirty="0"/>
+          </a:p>
+        </p:txBody>
+      </p:sp>
+      <p:sp>
+        <p:nvSpPr>
+          <p:cNvPr id="16" name="Text 14"/>
+          <p:cNvSpPr/>
+          <p:nvPr/>
+        </p:nvSpPr>
+        <p:spPr>
+          <a:xfrm>
+            <a:off x="8074152" y="3959352"/>
+            <a:ext cx="2825496" cy="1170432"/>
+          </a:xfrm>
+          <a:prstGeom prst="rect">
+            <a:avLst/>
+          </a:prstGeom>
+          <a:noFill/>
+          <a:ln/>
+        </p:spPr>
+        <p:txBody>
+          <a:bodyPr wrap="square" lIns="0" tIns="0" rIns="0" bIns="0" rtlCol="0" anchor="t">
+            <a:normAutofit/>
+          </a:bodyPr>
+          <a:lstStyle/>
+          <a:p>
+            <a:pPr indent="0" marL="0">
+              <a:buNone/>
+            </a:pPr>
+            <a:r>
+              <a:rPr lang="en-US" sz="1250" dirty="0">
+                <a:solidFill>
+                  <a:srgbClr val="17364A"/>
+                </a:solidFill>
+                <a:latin typeface="Aptos" pitchFamily="34" charset="0"/>
+                <a:ea typeface="Aptos" pitchFamily="34" charset="-122"/>
+                <a:cs typeface="Aptos" pitchFamily="34" charset="-120"/>
+              </a:rPr>
+              <a:t>Connect the concept to public health decisions, safeguards, documentation, or implementation work.</a:t>
+            </a:r>
+            <a:endParaRPr lang="en-US" sz="1250" dirty="0"/>
           </a:p>
         </p:txBody>
       </p:sp>
@@ -6958,7 +12732,32 @@
       </p:sp>
       <p:sp>
         <p:nvSpPr>
-          <p:cNvPr id="3" name="Text 1"/>
+          <p:cNvPr id="3" name="Shape 1"/>
+          <p:cNvSpPr/>
+          <p:nvPr/>
+        </p:nvSpPr>
+        <p:spPr>
+          <a:xfrm>
+            <a:off x="0" y="164592"/>
+            <a:ext cx="146304" cy="6693408"/>
+          </a:xfrm>
+          <a:prstGeom prst="rect">
+            <a:avLst/>
+          </a:prstGeom>
+          <a:solidFill>
+            <a:srgbClr val="2F8A28"/>
+          </a:solidFill>
+          <a:ln w="12700">
+            <a:solidFill>
+              <a:srgbClr val="2F8A28"/>
+            </a:solidFill>
+            <a:prstDash val="solid"/>
+          </a:ln>
+        </p:spPr>
+      </p:sp>
+      <p:sp>
+        <p:nvSpPr>
+          <p:cNvPr id="4" name="Text 2"/>
           <p:cNvSpPr/>
           <p:nvPr/>
         </p:nvSpPr>
@@ -6997,7 +12796,7 @@
       </p:sp>
       <p:sp>
         <p:nvSpPr>
-          <p:cNvPr id="4" name="Text 2"/>
+          <p:cNvPr id="5" name="Text 3"/>
           <p:cNvSpPr/>
           <p:nvPr/>
         </p:nvSpPr>
@@ -7036,7 +12835,7 @@
       </p:sp>
       <p:sp>
         <p:nvSpPr>
-          <p:cNvPr id="5" name="Text 3"/>
+          <p:cNvPr id="6" name="Text 4"/>
           <p:cNvSpPr/>
           <p:nvPr/>
         </p:nvSpPr>
@@ -7075,13 +12874,77 @@
       </p:sp>
       <p:sp>
         <p:nvSpPr>
-          <p:cNvPr id="6" name="Text 4"/>
+          <p:cNvPr id="7" name="Shape 5"/>
           <p:cNvSpPr/>
           <p:nvPr/>
         </p:nvSpPr>
         <p:spPr>
           <a:xfrm>
             <a:off x="640080" y="658368"/>
+            <a:ext cx="420624" cy="420624"/>
+          </a:xfrm>
+          <a:prstGeom prst="ellipse">
+            <a:avLst/>
+          </a:prstGeom>
+          <a:solidFill>
+            <a:srgbClr val="0068B7"/>
+          </a:solidFill>
+          <a:ln w="12700">
+            <a:solidFill>
+              <a:srgbClr val="0068B7"/>
+            </a:solidFill>
+            <a:prstDash val="solid"/>
+          </a:ln>
+        </p:spPr>
+      </p:sp>
+      <p:sp>
+        <p:nvSpPr>
+          <p:cNvPr id="8" name="Text 6"/>
+          <p:cNvSpPr/>
+          <p:nvPr/>
+        </p:nvSpPr>
+        <p:spPr>
+          <a:xfrm>
+            <a:off x="640080" y="731520"/>
+            <a:ext cx="420624" cy="164592"/>
+          </a:xfrm>
+          <a:prstGeom prst="rect">
+            <a:avLst/>
+          </a:prstGeom>
+          <a:noFill/>
+          <a:ln/>
+        </p:spPr>
+        <p:txBody>
+          <a:bodyPr wrap="square" lIns="0" tIns="0" rIns="0" bIns="0" rtlCol="0" anchor="ctr"/>
+          <a:lstStyle/>
+          <a:p>
+            <a:pPr algn="ctr" indent="0" marL="0">
+              <a:buNone/>
+            </a:pPr>
+            <a:r>
+              <a:rPr lang="en-US" sz="1100" b="1" dirty="0">
+                <a:solidFill>
+                  <a:srgbClr val="FFFFFF"/>
+                </a:solidFill>
+                <a:latin typeface="Aptos" pitchFamily="34" charset="0"/>
+                <a:ea typeface="Aptos" pitchFamily="34" charset="-122"/>
+                <a:cs typeface="Aptos" pitchFamily="34" charset="-120"/>
+              </a:rPr>
+              <a:t>2</a:t>
+            </a:r>
+            <a:endParaRPr lang="en-US" sz="1100" dirty="0"/>
+          </a:p>
+        </p:txBody>
+      </p:sp>
+      <p:sp>
+        <p:nvSpPr>
+          <p:cNvPr id="9" name="Text 7"/>
+          <p:cNvSpPr/>
+          <p:nvPr/>
+        </p:nvSpPr>
+        <p:spPr>
+          <a:xfrm>
+            <a:off x="640080" y="621792"/>
             <a:ext cx="10881360" cy="566928"/>
           </a:xfrm>
           <a:prstGeom prst="rect">
@@ -7108,7 +12971,7 @@
                 <a:ea typeface="Aptos Display" pitchFamily="34" charset="-122"/>
                 <a:cs typeface="Aptos Display" pitchFamily="34" charset="-120"/>
               </a:rPr>
-              <a:t>Core Concepts</a:t>
+              <a:t>Module Overview</a:t>
             </a:r>
             <a:endParaRPr lang="en-US" sz="2700" dirty="0"/>
           </a:p>
@@ -7116,32 +12979,164 @@
       </p:sp>
       <p:sp>
         <p:nvSpPr>
-          <p:cNvPr id="7" name="Text 5"/>
-          <p:cNvSpPr/>
-          <p:nvPr/>
-        </p:nvSpPr>
-        <p:spPr>
-          <a:xfrm>
-            <a:off x="822960" y="1325880"/>
-            <a:ext cx="10378440" cy="4800600"/>
-          </a:xfrm>
-          <a:prstGeom prst="rect">
-            <a:avLst/>
-          </a:prstGeom>
-          <a:noFill/>
-          <a:ln/>
-        </p:spPr>
-        <p:txBody>
-          <a:bodyPr wrap="square" lIns="1016" tIns="1016" rIns="1016" bIns="1016" rtlCol="0" anchor="t">
+          <p:cNvPr id="10" name="Text 8"/>
+          <p:cNvSpPr/>
+          <p:nvPr/>
+        </p:nvSpPr>
+        <p:spPr>
+          <a:xfrm>
+            <a:off x="868680" y="1417320"/>
+            <a:ext cx="6675120" cy="4434840"/>
+          </a:xfrm>
+          <a:prstGeom prst="rect">
+            <a:avLst/>
+          </a:prstGeom>
+          <a:noFill/>
+          <a:ln/>
+        </p:spPr>
+        <p:txBody>
+          <a:bodyPr wrap="square" lIns="635" tIns="635" rIns="635" bIns="635" rtlCol="0" anchor="t">
             <a:normAutofit/>
           </a:bodyPr>
           <a:lstStyle/>
           <a:p>
+            <a:r>
+              <a:rPr lang="en-US" sz="1700" dirty="0">
+                <a:solidFill>
+                  <a:srgbClr val="17364A"/>
+                </a:solidFill>
+                <a:latin typeface="Aptos" pitchFamily="34" charset="0"/>
+                <a:ea typeface="Aptos" pitchFamily="34" charset="-122"/>
+                <a:cs typeface="Aptos" pitchFamily="34" charset="-120"/>
+              </a:rPr>
+              <a:t>Data quality engineering is the practical work of defining, measuring, improving, and monitoring data quality so that data.</a:t>
+            </a:r>
+            <a:endParaRPr lang="en-US" sz="1700" dirty="0"/>
+          </a:p>
+          <a:p>
+            <a:r>
+              <a:rPr lang="en-US" sz="1700" dirty="0">
+                <a:solidFill>
+                  <a:srgbClr val="17364A"/>
+                </a:solidFill>
+                <a:latin typeface="Aptos" pitchFamily="34" charset="0"/>
+                <a:ea typeface="Aptos" pitchFamily="34" charset="-122"/>
+                <a:cs typeface="Aptos" pitchFamily="34" charset="-120"/>
+              </a:rPr>
+              <a:t>In public health AI, data quality is not a background concern.</a:t>
+            </a:r>
+            <a:endParaRPr lang="en-US" sz="1700" dirty="0"/>
+          </a:p>
+          <a:p>
+            <a:r>
+              <a:rPr lang="en-US" sz="1700" dirty="0">
+                <a:solidFill>
+                  <a:srgbClr val="17364A"/>
+                </a:solidFill>
+                <a:latin typeface="Aptos" pitchFamily="34" charset="0"/>
+                <a:ea typeface="Aptos" pitchFamily="34" charset="-122"/>
+                <a:cs typeface="Aptos" pitchFamily="34" charset="-120"/>
+              </a:rPr>
+              <a:t>It directly affects whether AI outputs are accurate, equitable, timely, and safe enough to support public health work.</a:t>
+            </a:r>
+            <a:endParaRPr lang="en-US" sz="1700" dirty="0"/>
+          </a:p>
+        </p:txBody>
+      </p:sp>
+      <p:sp>
+        <p:nvSpPr>
+          <p:cNvPr id="11" name="Shape 9"/>
+          <p:cNvSpPr/>
+          <p:nvPr/>
+        </p:nvSpPr>
+        <p:spPr>
+          <a:xfrm>
+            <a:off x="7909560" y="1417320"/>
+            <a:ext cx="3154680" cy="1828800"/>
+          </a:xfrm>
+          <a:prstGeom prst="roundRect">
+            <a:avLst>
+              <a:gd name="adj" fmla="val 6000"/>
+            </a:avLst>
+          </a:prstGeom>
+          <a:solidFill>
+            <a:srgbClr val="EEF8ED"/>
+          </a:solidFill>
+          <a:ln w="12700">
+            <a:solidFill>
+              <a:srgbClr val="B9D7E6"/>
+            </a:solidFill>
+            <a:prstDash val="solid"/>
+          </a:ln>
+        </p:spPr>
+      </p:sp>
+      <p:sp>
+        <p:nvSpPr>
+          <p:cNvPr id="12" name="Text 10"/>
+          <p:cNvSpPr/>
+          <p:nvPr/>
+        </p:nvSpPr>
+        <p:spPr>
+          <a:xfrm>
+            <a:off x="8074152" y="1563624"/>
+            <a:ext cx="2825496" cy="201168"/>
+          </a:xfrm>
+          <a:prstGeom prst="rect">
+            <a:avLst/>
+          </a:prstGeom>
+          <a:noFill/>
+          <a:ln/>
+        </p:spPr>
+        <p:txBody>
+          <a:bodyPr wrap="square" lIns="0" tIns="0" rIns="0" bIns="0" rtlCol="0" anchor="ctr"/>
+          <a:lstStyle/>
+          <a:p>
             <a:pPr indent="0" marL="0">
               <a:buNone/>
             </a:pPr>
             <a:r>
-              <a:rPr lang="en-US" sz="1420" dirty="0">
+              <a:rPr lang="en-US" sz="950" b="1" dirty="0">
+                <a:solidFill>
+                  <a:srgbClr val="0068B7"/>
+                </a:solidFill>
+                <a:latin typeface="Aptos" pitchFamily="34" charset="0"/>
+                <a:ea typeface="Aptos" pitchFamily="34" charset="-122"/>
+                <a:cs typeface="Aptos" pitchFamily="34" charset="-120"/>
+              </a:rPr>
+              <a:t>Key idea</a:t>
+            </a:r>
+            <a:endParaRPr lang="en-US" sz="950" dirty="0"/>
+          </a:p>
+        </p:txBody>
+      </p:sp>
+      <p:sp>
+        <p:nvSpPr>
+          <p:cNvPr id="13" name="Text 11"/>
+          <p:cNvSpPr/>
+          <p:nvPr/>
+        </p:nvSpPr>
+        <p:spPr>
+          <a:xfrm>
+            <a:off x="8074152" y="1856232"/>
+            <a:ext cx="2825496" cy="1261872"/>
+          </a:xfrm>
+          <a:prstGeom prst="rect">
+            <a:avLst/>
+          </a:prstGeom>
+          <a:noFill/>
+          <a:ln/>
+        </p:spPr>
+        <p:txBody>
+          <a:bodyPr wrap="square" lIns="0" tIns="0" rIns="0" bIns="0" rtlCol="0" anchor="t">
+            <a:normAutofit/>
+          </a:bodyPr>
+          <a:lstStyle/>
+          <a:p>
+            <a:pPr indent="0" marL="0">
+              <a:buNone/>
+            </a:pPr>
+            <a:r>
+              <a:rPr lang="en-US" sz="1250" dirty="0">
                 <a:solidFill>
                   <a:srgbClr val="17364A"/>
                 </a:solidFill>
@@ -7149,9 +13144,116 @@
                 <a:ea typeface="Aptos" pitchFamily="34" charset="-122"/>
                 <a:cs typeface="Aptos" pitchFamily="34" charset="-120"/>
               </a:rPr>
-              <a:t>Completeness. Completeness refers to whether required data fields are present. Missing fields may affect case classification, risk prediction, subgroup analysis, and outreach planning. Timeliness. Timeliness refers to whether data are available quickly enough for the intended use. Delayed data may be acceptable for retrospective analysis but unsafe for urgent response. Validity. Validity refers to whether values follow expected formats, ranges, and rules. Invalid dates, codes, units, or categories can undermine AI performance.</a:t>
-            </a:r>
-            <a:endParaRPr lang="en-US" sz="1420" dirty="0"/>
+              <a:t>Data quality engineering is the practical work of defining, measuring, improving, and monitoring data quality so that data.</a:t>
+            </a:r>
+            <a:endParaRPr lang="en-US" sz="1250" dirty="0"/>
+          </a:p>
+        </p:txBody>
+      </p:sp>
+      <p:sp>
+        <p:nvSpPr>
+          <p:cNvPr id="14" name="Shape 12"/>
+          <p:cNvSpPr/>
+          <p:nvPr/>
+        </p:nvSpPr>
+        <p:spPr>
+          <a:xfrm>
+            <a:off x="7909560" y="3520440"/>
+            <a:ext cx="3154680" cy="1737360"/>
+          </a:xfrm>
+          <a:prstGeom prst="roundRect">
+            <a:avLst>
+              <a:gd name="adj" fmla="val 6316"/>
+            </a:avLst>
+          </a:prstGeom>
+          <a:solidFill>
+            <a:srgbClr val="EAF6F8"/>
+          </a:solidFill>
+          <a:ln w="12700">
+            <a:solidFill>
+              <a:srgbClr val="B9D7E6"/>
+            </a:solidFill>
+            <a:prstDash val="solid"/>
+          </a:ln>
+        </p:spPr>
+      </p:sp>
+      <p:sp>
+        <p:nvSpPr>
+          <p:cNvPr id="15" name="Text 13"/>
+          <p:cNvSpPr/>
+          <p:nvPr/>
+        </p:nvSpPr>
+        <p:spPr>
+          <a:xfrm>
+            <a:off x="8074152" y="3666744"/>
+            <a:ext cx="2825496" cy="201168"/>
+          </a:xfrm>
+          <a:prstGeom prst="rect">
+            <a:avLst/>
+          </a:prstGeom>
+          <a:noFill/>
+          <a:ln/>
+        </p:spPr>
+        <p:txBody>
+          <a:bodyPr wrap="square" lIns="0" tIns="0" rIns="0" bIns="0" rtlCol="0" anchor="ctr"/>
+          <a:lstStyle/>
+          <a:p>
+            <a:pPr indent="0" marL="0">
+              <a:buNone/>
+            </a:pPr>
+            <a:r>
+              <a:rPr lang="en-US" sz="950" b="1" dirty="0">
+                <a:solidFill>
+                  <a:srgbClr val="0068B7"/>
+                </a:solidFill>
+                <a:latin typeface="Aptos" pitchFamily="34" charset="0"/>
+                <a:ea typeface="Aptos" pitchFamily="34" charset="-122"/>
+                <a:cs typeface="Aptos" pitchFamily="34" charset="-120"/>
+              </a:rPr>
+              <a:t>Use this for</a:t>
+            </a:r>
+            <a:endParaRPr lang="en-US" sz="950" dirty="0"/>
+          </a:p>
+        </p:txBody>
+      </p:sp>
+      <p:sp>
+        <p:nvSpPr>
+          <p:cNvPr id="16" name="Text 14"/>
+          <p:cNvSpPr/>
+          <p:nvPr/>
+        </p:nvSpPr>
+        <p:spPr>
+          <a:xfrm>
+            <a:off x="8074152" y="3959352"/>
+            <a:ext cx="2825496" cy="1170432"/>
+          </a:xfrm>
+          <a:prstGeom prst="rect">
+            <a:avLst/>
+          </a:prstGeom>
+          <a:noFill/>
+          <a:ln/>
+        </p:spPr>
+        <p:txBody>
+          <a:bodyPr wrap="square" lIns="0" tIns="0" rIns="0" bIns="0" rtlCol="0" anchor="t">
+            <a:normAutofit/>
+          </a:bodyPr>
+          <a:lstStyle/>
+          <a:p>
+            <a:pPr indent="0" marL="0">
+              <a:buNone/>
+            </a:pPr>
+            <a:r>
+              <a:rPr lang="en-US" sz="1250" dirty="0">
+                <a:solidFill>
+                  <a:srgbClr val="17364A"/>
+                </a:solidFill>
+                <a:latin typeface="Aptos" pitchFamily="34" charset="0"/>
+                <a:ea typeface="Aptos" pitchFamily="34" charset="-122"/>
+                <a:cs typeface="Aptos" pitchFamily="34" charset="-120"/>
+              </a:rPr>
+              <a:t>Connect the concept to public health decisions, safeguards, documentation, or implementation work.</a:t>
+            </a:r>
+            <a:endParaRPr lang="en-US" sz="1250" dirty="0"/>
           </a:p>
         </p:txBody>
       </p:sp>
@@ -7214,7 +13316,32 @@
       </p:sp>
       <p:sp>
         <p:nvSpPr>
-          <p:cNvPr id="3" name="Text 1"/>
+          <p:cNvPr id="3" name="Shape 1"/>
+          <p:cNvSpPr/>
+          <p:nvPr/>
+        </p:nvSpPr>
+        <p:spPr>
+          <a:xfrm>
+            <a:off x="0" y="164592"/>
+            <a:ext cx="146304" cy="6693408"/>
+          </a:xfrm>
+          <a:prstGeom prst="rect">
+            <a:avLst/>
+          </a:prstGeom>
+          <a:solidFill>
+            <a:srgbClr val="2F8A28"/>
+          </a:solidFill>
+          <a:ln w="12700">
+            <a:solidFill>
+              <a:srgbClr val="2F8A28"/>
+            </a:solidFill>
+            <a:prstDash val="solid"/>
+          </a:ln>
+        </p:spPr>
+      </p:sp>
+      <p:sp>
+        <p:nvSpPr>
+          <p:cNvPr id="4" name="Text 2"/>
           <p:cNvSpPr/>
           <p:nvPr/>
         </p:nvSpPr>
@@ -7253,7 +13380,7 @@
       </p:sp>
       <p:sp>
         <p:nvSpPr>
-          <p:cNvPr id="4" name="Text 2"/>
+          <p:cNvPr id="5" name="Text 3"/>
           <p:cNvSpPr/>
           <p:nvPr/>
         </p:nvSpPr>
@@ -7292,7 +13419,7 @@
       </p:sp>
       <p:sp>
         <p:nvSpPr>
-          <p:cNvPr id="5" name="Text 3"/>
+          <p:cNvPr id="6" name="Text 4"/>
           <p:cNvSpPr/>
           <p:nvPr/>
         </p:nvSpPr>
@@ -7331,13 +13458,77 @@
       </p:sp>
       <p:sp>
         <p:nvSpPr>
-          <p:cNvPr id="6" name="Text 4"/>
+          <p:cNvPr id="7" name="Shape 5"/>
           <p:cNvSpPr/>
           <p:nvPr/>
         </p:nvSpPr>
         <p:spPr>
           <a:xfrm>
             <a:off x="640080" y="658368"/>
+            <a:ext cx="420624" cy="420624"/>
+          </a:xfrm>
+          <a:prstGeom prst="ellipse">
+            <a:avLst/>
+          </a:prstGeom>
+          <a:solidFill>
+            <a:srgbClr val="0068B7"/>
+          </a:solidFill>
+          <a:ln w="12700">
+            <a:solidFill>
+              <a:srgbClr val="0068B7"/>
+            </a:solidFill>
+            <a:prstDash val="solid"/>
+          </a:ln>
+        </p:spPr>
+      </p:sp>
+      <p:sp>
+        <p:nvSpPr>
+          <p:cNvPr id="8" name="Text 6"/>
+          <p:cNvSpPr/>
+          <p:nvPr/>
+        </p:nvSpPr>
+        <p:spPr>
+          <a:xfrm>
+            <a:off x="640080" y="731520"/>
+            <a:ext cx="420624" cy="164592"/>
+          </a:xfrm>
+          <a:prstGeom prst="rect">
+            <a:avLst/>
+          </a:prstGeom>
+          <a:noFill/>
+          <a:ln/>
+        </p:spPr>
+        <p:txBody>
+          <a:bodyPr wrap="square" lIns="0" tIns="0" rIns="0" bIns="0" rtlCol="0" anchor="ctr"/>
+          <a:lstStyle/>
+          <a:p>
+            <a:pPr algn="ctr" indent="0" marL="0">
+              <a:buNone/>
+            </a:pPr>
+            <a:r>
+              <a:rPr lang="en-US" sz="1100" b="1" dirty="0">
+                <a:solidFill>
+                  <a:srgbClr val="FFFFFF"/>
+                </a:solidFill>
+                <a:latin typeface="Aptos" pitchFamily="34" charset="0"/>
+                <a:ea typeface="Aptos" pitchFamily="34" charset="-122"/>
+                <a:cs typeface="Aptos" pitchFamily="34" charset="-120"/>
+              </a:rPr>
+              <a:t>3</a:t>
+            </a:r>
+            <a:endParaRPr lang="en-US" sz="1100" dirty="0"/>
+          </a:p>
+        </p:txBody>
+      </p:sp>
+      <p:sp>
+        <p:nvSpPr>
+          <p:cNvPr id="9" name="Text 7"/>
+          <p:cNvSpPr/>
+          <p:nvPr/>
+        </p:nvSpPr>
+        <p:spPr>
+          <a:xfrm>
+            <a:off x="640080" y="621792"/>
             <a:ext cx="10881360" cy="566928"/>
           </a:xfrm>
           <a:prstGeom prst="rect">
@@ -7364,7 +13555,7 @@
                 <a:ea typeface="Aptos Display" pitchFamily="34" charset="-122"/>
                 <a:cs typeface="Aptos Display" pitchFamily="34" charset="-120"/>
               </a:rPr>
-              <a:t>Core Concepts Continued</a:t>
+              <a:t>Why This Topic Matters for Public Health AI</a:t>
             </a:r>
             <a:endParaRPr lang="en-US" sz="2700" dirty="0"/>
           </a:p>
@@ -7372,32 +13563,178 @@
       </p:sp>
       <p:sp>
         <p:nvSpPr>
-          <p:cNvPr id="7" name="Text 5"/>
-          <p:cNvSpPr/>
-          <p:nvPr/>
-        </p:nvSpPr>
-        <p:spPr>
-          <a:xfrm>
-            <a:off x="822960" y="1325880"/>
-            <a:ext cx="10378440" cy="4800600"/>
-          </a:xfrm>
-          <a:prstGeom prst="rect">
-            <a:avLst/>
-          </a:prstGeom>
-          <a:noFill/>
-          <a:ln/>
-        </p:spPr>
-        <p:txBody>
-          <a:bodyPr wrap="square" lIns="1016" tIns="1016" rIns="1016" bIns="1016" rtlCol="0" anchor="t">
+          <p:cNvPr id="10" name="Text 8"/>
+          <p:cNvSpPr/>
+          <p:nvPr/>
+        </p:nvSpPr>
+        <p:spPr>
+          <a:xfrm>
+            <a:off x="868680" y="1417320"/>
+            <a:ext cx="6675120" cy="4434840"/>
+          </a:xfrm>
+          <a:prstGeom prst="rect">
+            <a:avLst/>
+          </a:prstGeom>
+          <a:noFill/>
+          <a:ln/>
+        </p:spPr>
+        <p:txBody>
+          <a:bodyPr wrap="square" lIns="635" tIns="635" rIns="635" bIns="635" rtlCol="0" anchor="t">
             <a:normAutofit/>
           </a:bodyPr>
           <a:lstStyle/>
           <a:p>
+            <a:r>
+              <a:rPr lang="en-US" sz="1700" dirty="0">
+                <a:solidFill>
+                  <a:srgbClr val="17364A"/>
+                </a:solidFill>
+                <a:latin typeface="Aptos" pitchFamily="34" charset="0"/>
+                <a:ea typeface="Aptos" pitchFamily="34" charset="-122"/>
+                <a:cs typeface="Aptos" pitchFamily="34" charset="-120"/>
+              </a:rPr>
+              <a:t>AI systems can create a false sense of precision when they produce polished outputs from weak data.</a:t>
+            </a:r>
+            <a:endParaRPr lang="en-US" sz="1700" dirty="0"/>
+          </a:p>
+          <a:p>
+            <a:r>
+              <a:rPr lang="en-US" sz="1700" dirty="0">
+                <a:solidFill>
+                  <a:srgbClr val="17364A"/>
+                </a:solidFill>
+                <a:latin typeface="Aptos" pitchFamily="34" charset="0"/>
+                <a:ea typeface="Aptos" pitchFamily="34" charset="-122"/>
+                <a:cs typeface="Aptos" pitchFamily="34" charset="-120"/>
+              </a:rPr>
+              <a:t>A summary may sound authoritative even when key fields are missing.</a:t>
+            </a:r>
+            <a:endParaRPr lang="en-US" sz="1700" dirty="0"/>
+          </a:p>
+          <a:p>
+            <a:r>
+              <a:rPr lang="en-US" sz="1700" dirty="0">
+                <a:solidFill>
+                  <a:srgbClr val="17364A"/>
+                </a:solidFill>
+                <a:latin typeface="Aptos" pitchFamily="34" charset="0"/>
+                <a:ea typeface="Aptos" pitchFamily="34" charset="-122"/>
+                <a:cs typeface="Aptos" pitchFamily="34" charset="-120"/>
+              </a:rPr>
+              <a:t>A risk score may look objective even when the data underrepresent communities with limited healthcare access.</a:t>
+            </a:r>
+            <a:endParaRPr lang="en-US" sz="1700" dirty="0"/>
+          </a:p>
+          <a:p>
+            <a:r>
+              <a:rPr lang="en-US" sz="1700" dirty="0">
+                <a:solidFill>
+                  <a:srgbClr val="17364A"/>
+                </a:solidFill>
+                <a:latin typeface="Aptos" pitchFamily="34" charset="0"/>
+                <a:ea typeface="Aptos" pitchFamily="34" charset="-122"/>
+                <a:cs typeface="Aptos" pitchFamily="34" charset="-120"/>
+              </a:rPr>
+              <a:t>A classification model may appear efficient while encoding historical reporting patterns.</a:t>
+            </a:r>
+            <a:endParaRPr lang="en-US" sz="1700" dirty="0"/>
+          </a:p>
+        </p:txBody>
+      </p:sp>
+      <p:sp>
+        <p:nvSpPr>
+          <p:cNvPr id="11" name="Shape 9"/>
+          <p:cNvSpPr/>
+          <p:nvPr/>
+        </p:nvSpPr>
+        <p:spPr>
+          <a:xfrm>
+            <a:off x="7909560" y="1417320"/>
+            <a:ext cx="3154680" cy="1828800"/>
+          </a:xfrm>
+          <a:prstGeom prst="roundRect">
+            <a:avLst>
+              <a:gd name="adj" fmla="val 6000"/>
+            </a:avLst>
+          </a:prstGeom>
+          <a:solidFill>
+            <a:srgbClr val="EEF8ED"/>
+          </a:solidFill>
+          <a:ln w="12700">
+            <a:solidFill>
+              <a:srgbClr val="B9D7E6"/>
+            </a:solidFill>
+            <a:prstDash val="solid"/>
+          </a:ln>
+        </p:spPr>
+      </p:sp>
+      <p:sp>
+        <p:nvSpPr>
+          <p:cNvPr id="12" name="Text 10"/>
+          <p:cNvSpPr/>
+          <p:nvPr/>
+        </p:nvSpPr>
+        <p:spPr>
+          <a:xfrm>
+            <a:off x="8074152" y="1563624"/>
+            <a:ext cx="2825496" cy="201168"/>
+          </a:xfrm>
+          <a:prstGeom prst="rect">
+            <a:avLst/>
+          </a:prstGeom>
+          <a:noFill/>
+          <a:ln/>
+        </p:spPr>
+        <p:txBody>
+          <a:bodyPr wrap="square" lIns="0" tIns="0" rIns="0" bIns="0" rtlCol="0" anchor="ctr"/>
+          <a:lstStyle/>
+          <a:p>
             <a:pPr indent="0" marL="0">
               <a:buNone/>
             </a:pPr>
             <a:r>
-              <a:rPr lang="en-US" sz="1420" dirty="0">
+              <a:rPr lang="en-US" sz="950" b="1" dirty="0">
+                <a:solidFill>
+                  <a:srgbClr val="0068B7"/>
+                </a:solidFill>
+                <a:latin typeface="Aptos" pitchFamily="34" charset="0"/>
+                <a:ea typeface="Aptos" pitchFamily="34" charset="-122"/>
+                <a:cs typeface="Aptos" pitchFamily="34" charset="-120"/>
+              </a:rPr>
+              <a:t>Key idea</a:t>
+            </a:r>
+            <a:endParaRPr lang="en-US" sz="950" dirty="0"/>
+          </a:p>
+        </p:txBody>
+      </p:sp>
+      <p:sp>
+        <p:nvSpPr>
+          <p:cNvPr id="13" name="Text 11"/>
+          <p:cNvSpPr/>
+          <p:nvPr/>
+        </p:nvSpPr>
+        <p:spPr>
+          <a:xfrm>
+            <a:off x="8074152" y="1856232"/>
+            <a:ext cx="2825496" cy="1261872"/>
+          </a:xfrm>
+          <a:prstGeom prst="rect">
+            <a:avLst/>
+          </a:prstGeom>
+          <a:noFill/>
+          <a:ln/>
+        </p:spPr>
+        <p:txBody>
+          <a:bodyPr wrap="square" lIns="0" tIns="0" rIns="0" bIns="0" rtlCol="0" anchor="t">
+            <a:normAutofit/>
+          </a:bodyPr>
+          <a:lstStyle/>
+          <a:p>
+            <a:pPr indent="0" marL="0">
+              <a:buNone/>
+            </a:pPr>
+            <a:r>
+              <a:rPr lang="en-US" sz="1250" dirty="0">
                 <a:solidFill>
                   <a:srgbClr val="17364A"/>
                 </a:solidFill>
@@ -7405,9 +13742,116 @@
                 <a:ea typeface="Aptos" pitchFamily="34" charset="-122"/>
                 <a:cs typeface="Aptos" pitchFamily="34" charset="-120"/>
               </a:rPr>
-              <a:t>Representativeness. Representativeness refers to whether data reflect the population, events, or settings relevant to the use case. Underrepresentation can produce biased or incomplete AI outputs. Data drift. Data drift is a change in data patterns over time. Drift can occur when reporting partners, testing practices, disease patterns, coding rules, or community behaviors change.</a:t>
-            </a:r>
-            <a:endParaRPr lang="en-US" sz="1420" dirty="0"/>
+              <a:t>AI systems can create a false sense of precision when they produce polished outputs from weak data.</a:t>
+            </a:r>
+            <a:endParaRPr lang="en-US" sz="1250" dirty="0"/>
+          </a:p>
+        </p:txBody>
+      </p:sp>
+      <p:sp>
+        <p:nvSpPr>
+          <p:cNvPr id="14" name="Shape 12"/>
+          <p:cNvSpPr/>
+          <p:nvPr/>
+        </p:nvSpPr>
+        <p:spPr>
+          <a:xfrm>
+            <a:off x="7909560" y="3520440"/>
+            <a:ext cx="3154680" cy="1737360"/>
+          </a:xfrm>
+          <a:prstGeom prst="roundRect">
+            <a:avLst>
+              <a:gd name="adj" fmla="val 6316"/>
+            </a:avLst>
+          </a:prstGeom>
+          <a:solidFill>
+            <a:srgbClr val="EAF6F8"/>
+          </a:solidFill>
+          <a:ln w="12700">
+            <a:solidFill>
+              <a:srgbClr val="B9D7E6"/>
+            </a:solidFill>
+            <a:prstDash val="solid"/>
+          </a:ln>
+        </p:spPr>
+      </p:sp>
+      <p:sp>
+        <p:nvSpPr>
+          <p:cNvPr id="15" name="Text 13"/>
+          <p:cNvSpPr/>
+          <p:nvPr/>
+        </p:nvSpPr>
+        <p:spPr>
+          <a:xfrm>
+            <a:off x="8074152" y="3666744"/>
+            <a:ext cx="2825496" cy="201168"/>
+          </a:xfrm>
+          <a:prstGeom prst="rect">
+            <a:avLst/>
+          </a:prstGeom>
+          <a:noFill/>
+          <a:ln/>
+        </p:spPr>
+        <p:txBody>
+          <a:bodyPr wrap="square" lIns="0" tIns="0" rIns="0" bIns="0" rtlCol="0" anchor="ctr"/>
+          <a:lstStyle/>
+          <a:p>
+            <a:pPr indent="0" marL="0">
+              <a:buNone/>
+            </a:pPr>
+            <a:r>
+              <a:rPr lang="en-US" sz="950" b="1" dirty="0">
+                <a:solidFill>
+                  <a:srgbClr val="0068B7"/>
+                </a:solidFill>
+                <a:latin typeface="Aptos" pitchFamily="34" charset="0"/>
+                <a:ea typeface="Aptos" pitchFamily="34" charset="-122"/>
+                <a:cs typeface="Aptos" pitchFamily="34" charset="-120"/>
+              </a:rPr>
+              <a:t>Use this for</a:t>
+            </a:r>
+            <a:endParaRPr lang="en-US" sz="950" dirty="0"/>
+          </a:p>
+        </p:txBody>
+      </p:sp>
+      <p:sp>
+        <p:nvSpPr>
+          <p:cNvPr id="16" name="Text 14"/>
+          <p:cNvSpPr/>
+          <p:nvPr/>
+        </p:nvSpPr>
+        <p:spPr>
+          <a:xfrm>
+            <a:off x="8074152" y="3959352"/>
+            <a:ext cx="2825496" cy="1170432"/>
+          </a:xfrm>
+          <a:prstGeom prst="rect">
+            <a:avLst/>
+          </a:prstGeom>
+          <a:noFill/>
+          <a:ln/>
+        </p:spPr>
+        <p:txBody>
+          <a:bodyPr wrap="square" lIns="0" tIns="0" rIns="0" bIns="0" rtlCol="0" anchor="t">
+            <a:normAutofit/>
+          </a:bodyPr>
+          <a:lstStyle/>
+          <a:p>
+            <a:pPr indent="0" marL="0">
+              <a:buNone/>
+            </a:pPr>
+            <a:r>
+              <a:rPr lang="en-US" sz="1250" dirty="0">
+                <a:solidFill>
+                  <a:srgbClr val="17364A"/>
+                </a:solidFill>
+                <a:latin typeface="Aptos" pitchFamily="34" charset="0"/>
+                <a:ea typeface="Aptos" pitchFamily="34" charset="-122"/>
+                <a:cs typeface="Aptos" pitchFamily="34" charset="-120"/>
+              </a:rPr>
+              <a:t>Connect the concept to public health decisions, safeguards, documentation, or implementation work.</a:t>
+            </a:r>
+            <a:endParaRPr lang="en-US" sz="1250" dirty="0"/>
           </a:p>
         </p:txBody>
       </p:sp>
@@ -7470,7 +13914,32 @@
       </p:sp>
       <p:sp>
         <p:nvSpPr>
-          <p:cNvPr id="3" name="Text 1"/>
+          <p:cNvPr id="3" name="Shape 1"/>
+          <p:cNvSpPr/>
+          <p:nvPr/>
+        </p:nvSpPr>
+        <p:spPr>
+          <a:xfrm>
+            <a:off x="0" y="164592"/>
+            <a:ext cx="146304" cy="6693408"/>
+          </a:xfrm>
+          <a:prstGeom prst="rect">
+            <a:avLst/>
+          </a:prstGeom>
+          <a:solidFill>
+            <a:srgbClr val="2F8A28"/>
+          </a:solidFill>
+          <a:ln w="12700">
+            <a:solidFill>
+              <a:srgbClr val="2F8A28"/>
+            </a:solidFill>
+            <a:prstDash val="solid"/>
+          </a:ln>
+        </p:spPr>
+      </p:sp>
+      <p:sp>
+        <p:nvSpPr>
+          <p:cNvPr id="4" name="Text 2"/>
           <p:cNvSpPr/>
           <p:nvPr/>
         </p:nvSpPr>
@@ -7509,7 +13978,7 @@
       </p:sp>
       <p:sp>
         <p:nvSpPr>
-          <p:cNvPr id="4" name="Text 2"/>
+          <p:cNvPr id="5" name="Text 3"/>
           <p:cNvSpPr/>
           <p:nvPr/>
         </p:nvSpPr>
@@ -7548,7 +14017,7 @@
       </p:sp>
       <p:sp>
         <p:nvSpPr>
-          <p:cNvPr id="5" name="Text 3"/>
+          <p:cNvPr id="6" name="Text 4"/>
           <p:cNvSpPr/>
           <p:nvPr/>
         </p:nvSpPr>
@@ -7587,13 +14056,77 @@
       </p:sp>
       <p:sp>
         <p:nvSpPr>
-          <p:cNvPr id="6" name="Text 4"/>
+          <p:cNvPr id="7" name="Shape 5"/>
           <p:cNvSpPr/>
           <p:nvPr/>
         </p:nvSpPr>
         <p:spPr>
           <a:xfrm>
             <a:off x="640080" y="658368"/>
+            <a:ext cx="420624" cy="420624"/>
+          </a:xfrm>
+          <a:prstGeom prst="ellipse">
+            <a:avLst/>
+          </a:prstGeom>
+          <a:solidFill>
+            <a:srgbClr val="0068B7"/>
+          </a:solidFill>
+          <a:ln w="12700">
+            <a:solidFill>
+              <a:srgbClr val="0068B7"/>
+            </a:solidFill>
+            <a:prstDash val="solid"/>
+          </a:ln>
+        </p:spPr>
+      </p:sp>
+      <p:sp>
+        <p:nvSpPr>
+          <p:cNvPr id="8" name="Text 6"/>
+          <p:cNvSpPr/>
+          <p:nvPr/>
+        </p:nvSpPr>
+        <p:spPr>
+          <a:xfrm>
+            <a:off x="640080" y="731520"/>
+            <a:ext cx="420624" cy="164592"/>
+          </a:xfrm>
+          <a:prstGeom prst="rect">
+            <a:avLst/>
+          </a:prstGeom>
+          <a:noFill/>
+          <a:ln/>
+        </p:spPr>
+        <p:txBody>
+          <a:bodyPr wrap="square" lIns="0" tIns="0" rIns="0" bIns="0" rtlCol="0" anchor="ctr"/>
+          <a:lstStyle/>
+          <a:p>
+            <a:pPr algn="ctr" indent="0" marL="0">
+              <a:buNone/>
+            </a:pPr>
+            <a:r>
+              <a:rPr lang="en-US" sz="1100" b="1" dirty="0">
+                <a:solidFill>
+                  <a:srgbClr val="FFFFFF"/>
+                </a:solidFill>
+                <a:latin typeface="Aptos" pitchFamily="34" charset="0"/>
+                <a:ea typeface="Aptos" pitchFamily="34" charset="-122"/>
+                <a:cs typeface="Aptos" pitchFamily="34" charset="-120"/>
+              </a:rPr>
+              <a:t>4</a:t>
+            </a:r>
+            <a:endParaRPr lang="en-US" sz="1100" dirty="0"/>
+          </a:p>
+        </p:txBody>
+      </p:sp>
+      <p:sp>
+        <p:nvSpPr>
+          <p:cNvPr id="9" name="Text 7"/>
+          <p:cNvSpPr/>
+          <p:nvPr/>
+        </p:nvSpPr>
+        <p:spPr>
+          <a:xfrm>
+            <a:off x="640080" y="621792"/>
             <a:ext cx="10881360" cy="566928"/>
           </a:xfrm>
           <a:prstGeom prst="rect">
@@ -7620,7 +14153,7 @@
                 <a:ea typeface="Aptos Display" pitchFamily="34" charset="-122"/>
                 <a:cs typeface="Aptos Display" pitchFamily="34" charset="-120"/>
               </a:rPr>
-              <a:t>Public Health Example</a:t>
+              <a:t>Core Concepts</a:t>
             </a:r>
             <a:endParaRPr lang="en-US" sz="2700" dirty="0"/>
           </a:p>
@@ -7628,32 +14161,178 @@
       </p:sp>
       <p:sp>
         <p:nvSpPr>
-          <p:cNvPr id="7" name="Text 5"/>
-          <p:cNvSpPr/>
-          <p:nvPr/>
-        </p:nvSpPr>
-        <p:spPr>
-          <a:xfrm>
-            <a:off x="822960" y="1325880"/>
-            <a:ext cx="10378440" cy="4800600"/>
-          </a:xfrm>
-          <a:prstGeom prst="rect">
-            <a:avLst/>
-          </a:prstGeom>
-          <a:noFill/>
-          <a:ln/>
-        </p:spPr>
-        <p:txBody>
-          <a:bodyPr wrap="square" lIns="1016" tIns="1016" rIns="1016" bIns="1016" rtlCol="0" anchor="t">
+          <p:cNvPr id="10" name="Text 8"/>
+          <p:cNvSpPr/>
+          <p:nvPr/>
+        </p:nvSpPr>
+        <p:spPr>
+          <a:xfrm>
+            <a:off x="868680" y="1417320"/>
+            <a:ext cx="6675120" cy="4434840"/>
+          </a:xfrm>
+          <a:prstGeom prst="rect">
+            <a:avLst/>
+          </a:prstGeom>
+          <a:noFill/>
+          <a:ln/>
+        </p:spPr>
+        <p:txBody>
+          <a:bodyPr wrap="square" lIns="635" tIns="635" rIns="635" bIns="635" rtlCol="0" anchor="t">
             <a:normAutofit/>
           </a:bodyPr>
           <a:lstStyle/>
           <a:p>
+            <a:r>
+              <a:rPr lang="en-US" sz="1700" dirty="0">
+                <a:solidFill>
+                  <a:srgbClr val="17364A"/>
+                </a:solidFill>
+                <a:latin typeface="Aptos" pitchFamily="34" charset="0"/>
+                <a:ea typeface="Aptos" pitchFamily="34" charset="-122"/>
+                <a:cs typeface="Aptos" pitchFamily="34" charset="-120"/>
+              </a:rPr>
+              <a:t>Completeness.</a:t>
+            </a:r>
+            <a:endParaRPr lang="en-US" sz="1700" dirty="0"/>
+          </a:p>
+          <a:p>
+            <a:r>
+              <a:rPr lang="en-US" sz="1700" dirty="0">
+                <a:solidFill>
+                  <a:srgbClr val="17364A"/>
+                </a:solidFill>
+                <a:latin typeface="Aptos" pitchFamily="34" charset="0"/>
+                <a:ea typeface="Aptos" pitchFamily="34" charset="-122"/>
+                <a:cs typeface="Aptos" pitchFamily="34" charset="-120"/>
+              </a:rPr>
+              <a:t>Completeness refers to whether required data fields are present.</a:t>
+            </a:r>
+            <a:endParaRPr lang="en-US" sz="1700" dirty="0"/>
+          </a:p>
+          <a:p>
+            <a:r>
+              <a:rPr lang="en-US" sz="1700" dirty="0">
+                <a:solidFill>
+                  <a:srgbClr val="17364A"/>
+                </a:solidFill>
+                <a:latin typeface="Aptos" pitchFamily="34" charset="0"/>
+                <a:ea typeface="Aptos" pitchFamily="34" charset="-122"/>
+                <a:cs typeface="Aptos" pitchFamily="34" charset="-120"/>
+              </a:rPr>
+              <a:t>Missing fields may affect case classification, risk prediction, subgroup analysis, and outreach planning.</a:t>
+            </a:r>
+            <a:endParaRPr lang="en-US" sz="1700" dirty="0"/>
+          </a:p>
+          <a:p>
+            <a:r>
+              <a:rPr lang="en-US" sz="1700" dirty="0">
+                <a:solidFill>
+                  <a:srgbClr val="17364A"/>
+                </a:solidFill>
+                <a:latin typeface="Aptos" pitchFamily="34" charset="0"/>
+                <a:ea typeface="Aptos" pitchFamily="34" charset="-122"/>
+                <a:cs typeface="Aptos" pitchFamily="34" charset="-120"/>
+              </a:rPr>
+              <a:t>Timeliness.</a:t>
+            </a:r>
+            <a:endParaRPr lang="en-US" sz="1700" dirty="0"/>
+          </a:p>
+        </p:txBody>
+      </p:sp>
+      <p:sp>
+        <p:nvSpPr>
+          <p:cNvPr id="11" name="Shape 9"/>
+          <p:cNvSpPr/>
+          <p:nvPr/>
+        </p:nvSpPr>
+        <p:spPr>
+          <a:xfrm>
+            <a:off x="7909560" y="1417320"/>
+            <a:ext cx="3154680" cy="1828800"/>
+          </a:xfrm>
+          <a:prstGeom prst="roundRect">
+            <a:avLst>
+              <a:gd name="adj" fmla="val 6000"/>
+            </a:avLst>
+          </a:prstGeom>
+          <a:solidFill>
+            <a:srgbClr val="EEF8ED"/>
+          </a:solidFill>
+          <a:ln w="12700">
+            <a:solidFill>
+              <a:srgbClr val="B9D7E6"/>
+            </a:solidFill>
+            <a:prstDash val="solid"/>
+          </a:ln>
+        </p:spPr>
+      </p:sp>
+      <p:sp>
+        <p:nvSpPr>
+          <p:cNvPr id="12" name="Text 10"/>
+          <p:cNvSpPr/>
+          <p:nvPr/>
+        </p:nvSpPr>
+        <p:spPr>
+          <a:xfrm>
+            <a:off x="8074152" y="1563624"/>
+            <a:ext cx="2825496" cy="201168"/>
+          </a:xfrm>
+          <a:prstGeom prst="rect">
+            <a:avLst/>
+          </a:prstGeom>
+          <a:noFill/>
+          <a:ln/>
+        </p:spPr>
+        <p:txBody>
+          <a:bodyPr wrap="square" lIns="0" tIns="0" rIns="0" bIns="0" rtlCol="0" anchor="ctr"/>
+          <a:lstStyle/>
+          <a:p>
             <a:pPr indent="0" marL="0">
               <a:buNone/>
             </a:pPr>
             <a:r>
-              <a:rPr lang="en-US" sz="1420" dirty="0">
+              <a:rPr lang="en-US" sz="950" b="1" dirty="0">
+                <a:solidFill>
+                  <a:srgbClr val="0068B7"/>
+                </a:solidFill>
+                <a:latin typeface="Aptos" pitchFamily="34" charset="0"/>
+                <a:ea typeface="Aptos" pitchFamily="34" charset="-122"/>
+                <a:cs typeface="Aptos" pitchFamily="34" charset="-120"/>
+              </a:rPr>
+              <a:t>Key idea</a:t>
+            </a:r>
+            <a:endParaRPr lang="en-US" sz="950" dirty="0"/>
+          </a:p>
+        </p:txBody>
+      </p:sp>
+      <p:sp>
+        <p:nvSpPr>
+          <p:cNvPr id="13" name="Text 11"/>
+          <p:cNvSpPr/>
+          <p:nvPr/>
+        </p:nvSpPr>
+        <p:spPr>
+          <a:xfrm>
+            <a:off x="8074152" y="1856232"/>
+            <a:ext cx="2825496" cy="1261872"/>
+          </a:xfrm>
+          <a:prstGeom prst="rect">
+            <a:avLst/>
+          </a:prstGeom>
+          <a:noFill/>
+          <a:ln/>
+        </p:spPr>
+        <p:txBody>
+          <a:bodyPr wrap="square" lIns="0" tIns="0" rIns="0" bIns="0" rtlCol="0" anchor="t">
+            <a:normAutofit/>
+          </a:bodyPr>
+          <a:lstStyle/>
+          <a:p>
+            <a:pPr indent="0" marL="0">
+              <a:buNone/>
+            </a:pPr>
+            <a:r>
+              <a:rPr lang="en-US" sz="1250" dirty="0">
                 <a:solidFill>
                   <a:srgbClr val="17364A"/>
                 </a:solidFill>
@@ -7661,9 +14340,116 @@
                 <a:ea typeface="Aptos" pitchFamily="34" charset="-122"/>
                 <a:cs typeface="Aptos" pitchFamily="34" charset="-120"/>
               </a:rPr>
-              <a:t>A health department may use AI to identify cases needing rapid follow-up. If demographic fields are missing more often for some populations, the model may be less reliable for those groups. If the data feed from certain clinics is delayed, the prioritization queue may reflect reporting timeliness rather than true need. A data quality review can reveal these issues before the tool is deployed. A community health assessment team may use AI to summarize survey comments and administrative data. If survey responses are not representative of residents with limited English proficiency, unstable housing, disability, or limited internet access, the AI-generated themes may miss important community needs. Data quality engineering should include equity and representativeness review.</a:t>
-            </a:r>
-            <a:endParaRPr lang="en-US" sz="1420" dirty="0"/>
+              <a:t>Completeness.</a:t>
+            </a:r>
+            <a:endParaRPr lang="en-US" sz="1250" dirty="0"/>
+          </a:p>
+        </p:txBody>
+      </p:sp>
+      <p:sp>
+        <p:nvSpPr>
+          <p:cNvPr id="14" name="Shape 12"/>
+          <p:cNvSpPr/>
+          <p:nvPr/>
+        </p:nvSpPr>
+        <p:spPr>
+          <a:xfrm>
+            <a:off x="7909560" y="3520440"/>
+            <a:ext cx="3154680" cy="1737360"/>
+          </a:xfrm>
+          <a:prstGeom prst="roundRect">
+            <a:avLst>
+              <a:gd name="adj" fmla="val 6316"/>
+            </a:avLst>
+          </a:prstGeom>
+          <a:solidFill>
+            <a:srgbClr val="EAF6F8"/>
+          </a:solidFill>
+          <a:ln w="12700">
+            <a:solidFill>
+              <a:srgbClr val="B9D7E6"/>
+            </a:solidFill>
+            <a:prstDash val="solid"/>
+          </a:ln>
+        </p:spPr>
+      </p:sp>
+      <p:sp>
+        <p:nvSpPr>
+          <p:cNvPr id="15" name="Text 13"/>
+          <p:cNvSpPr/>
+          <p:nvPr/>
+        </p:nvSpPr>
+        <p:spPr>
+          <a:xfrm>
+            <a:off x="8074152" y="3666744"/>
+            <a:ext cx="2825496" cy="201168"/>
+          </a:xfrm>
+          <a:prstGeom prst="rect">
+            <a:avLst/>
+          </a:prstGeom>
+          <a:noFill/>
+          <a:ln/>
+        </p:spPr>
+        <p:txBody>
+          <a:bodyPr wrap="square" lIns="0" tIns="0" rIns="0" bIns="0" rtlCol="0" anchor="ctr"/>
+          <a:lstStyle/>
+          <a:p>
+            <a:pPr indent="0" marL="0">
+              <a:buNone/>
+            </a:pPr>
+            <a:r>
+              <a:rPr lang="en-US" sz="950" b="1" dirty="0">
+                <a:solidFill>
+                  <a:srgbClr val="0068B7"/>
+                </a:solidFill>
+                <a:latin typeface="Aptos" pitchFamily="34" charset="0"/>
+                <a:ea typeface="Aptos" pitchFamily="34" charset="-122"/>
+                <a:cs typeface="Aptos" pitchFamily="34" charset="-120"/>
+              </a:rPr>
+              <a:t>Use this for</a:t>
+            </a:r>
+            <a:endParaRPr lang="en-US" sz="950" dirty="0"/>
+          </a:p>
+        </p:txBody>
+      </p:sp>
+      <p:sp>
+        <p:nvSpPr>
+          <p:cNvPr id="16" name="Text 14"/>
+          <p:cNvSpPr/>
+          <p:nvPr/>
+        </p:nvSpPr>
+        <p:spPr>
+          <a:xfrm>
+            <a:off x="8074152" y="3959352"/>
+            <a:ext cx="2825496" cy="1170432"/>
+          </a:xfrm>
+          <a:prstGeom prst="rect">
+            <a:avLst/>
+          </a:prstGeom>
+          <a:noFill/>
+          <a:ln/>
+        </p:spPr>
+        <p:txBody>
+          <a:bodyPr wrap="square" lIns="0" tIns="0" rIns="0" bIns="0" rtlCol="0" anchor="t">
+            <a:normAutofit/>
+          </a:bodyPr>
+          <a:lstStyle/>
+          <a:p>
+            <a:pPr indent="0" marL="0">
+              <a:buNone/>
+            </a:pPr>
+            <a:r>
+              <a:rPr lang="en-US" sz="1250" dirty="0">
+                <a:solidFill>
+                  <a:srgbClr val="17364A"/>
+                </a:solidFill>
+                <a:latin typeface="Aptos" pitchFamily="34" charset="0"/>
+                <a:ea typeface="Aptos" pitchFamily="34" charset="-122"/>
+                <a:cs typeface="Aptos" pitchFamily="34" charset="-120"/>
+              </a:rPr>
+              <a:t>Connect the concept to public health decisions, safeguards, documentation, or implementation work.</a:t>
+            </a:r>
+            <a:endParaRPr lang="en-US" sz="1250" dirty="0"/>
           </a:p>
         </p:txBody>
       </p:sp>
@@ -7726,7 +14512,32 @@
       </p:sp>
       <p:sp>
         <p:nvSpPr>
-          <p:cNvPr id="3" name="Text 1"/>
+          <p:cNvPr id="3" name="Shape 1"/>
+          <p:cNvSpPr/>
+          <p:nvPr/>
+        </p:nvSpPr>
+        <p:spPr>
+          <a:xfrm>
+            <a:off x="0" y="164592"/>
+            <a:ext cx="146304" cy="6693408"/>
+          </a:xfrm>
+          <a:prstGeom prst="rect">
+            <a:avLst/>
+          </a:prstGeom>
+          <a:solidFill>
+            <a:srgbClr val="2F8A28"/>
+          </a:solidFill>
+          <a:ln w="12700">
+            <a:solidFill>
+              <a:srgbClr val="2F8A28"/>
+            </a:solidFill>
+            <a:prstDash val="solid"/>
+          </a:ln>
+        </p:spPr>
+      </p:sp>
+      <p:sp>
+        <p:nvSpPr>
+          <p:cNvPr id="4" name="Text 2"/>
           <p:cNvSpPr/>
           <p:nvPr/>
         </p:nvSpPr>
@@ -7765,7 +14576,7 @@
       </p:sp>
       <p:sp>
         <p:nvSpPr>
-          <p:cNvPr id="4" name="Text 2"/>
+          <p:cNvPr id="5" name="Text 3"/>
           <p:cNvSpPr/>
           <p:nvPr/>
         </p:nvSpPr>
@@ -7804,7 +14615,7 @@
       </p:sp>
       <p:sp>
         <p:nvSpPr>
-          <p:cNvPr id="5" name="Text 3"/>
+          <p:cNvPr id="6" name="Text 4"/>
           <p:cNvSpPr/>
           <p:nvPr/>
         </p:nvSpPr>
@@ -7843,7 +14654,7 @@
       </p:sp>
       <p:sp>
         <p:nvSpPr>
-          <p:cNvPr id="6" name="Text 4"/>
+          <p:cNvPr id="7" name="Text 5"/>
           <p:cNvSpPr/>
           <p:nvPr/>
         </p:nvSpPr>
@@ -7876,7 +14687,7 @@
                 <a:ea typeface="Aptos Display" pitchFamily="34" charset="-122"/>
                 <a:cs typeface="Aptos Display" pitchFamily="34" charset="-120"/>
               </a:rPr>
-              <a:t>Technical Deep Dive</a:t>
+              <a:t>Core Concepts Continued</a:t>
             </a:r>
             <a:endParaRPr lang="en-US" sz="2700" dirty="0"/>
           </a:p>
@@ -7884,32 +14695,178 @@
       </p:sp>
       <p:sp>
         <p:nvSpPr>
-          <p:cNvPr id="7" name="Text 5"/>
-          <p:cNvSpPr/>
-          <p:nvPr/>
-        </p:nvSpPr>
-        <p:spPr>
-          <a:xfrm>
-            <a:off x="822960" y="1325880"/>
-            <a:ext cx="10378440" cy="4800600"/>
-          </a:xfrm>
-          <a:prstGeom prst="rect">
-            <a:avLst/>
-          </a:prstGeom>
-          <a:noFill/>
-          <a:ln/>
-        </p:spPr>
-        <p:txBody>
-          <a:bodyPr wrap="square" lIns="1016" tIns="1016" rIns="1016" bIns="1016" rtlCol="0" anchor="t">
+          <p:cNvPr id="8" name="Text 6"/>
+          <p:cNvSpPr/>
+          <p:nvPr/>
+        </p:nvSpPr>
+        <p:spPr>
+          <a:xfrm>
+            <a:off x="868680" y="1417320"/>
+            <a:ext cx="6675120" cy="4434840"/>
+          </a:xfrm>
+          <a:prstGeom prst="rect">
+            <a:avLst/>
+          </a:prstGeom>
+          <a:noFill/>
+          <a:ln/>
+        </p:spPr>
+        <p:txBody>
+          <a:bodyPr wrap="square" lIns="635" tIns="635" rIns="635" bIns="635" rtlCol="0" anchor="t">
             <a:normAutofit/>
           </a:bodyPr>
           <a:lstStyle/>
           <a:p>
+            <a:r>
+              <a:rPr lang="en-US" sz="1700" dirty="0">
+                <a:solidFill>
+                  <a:srgbClr val="17364A"/>
+                </a:solidFill>
+                <a:latin typeface="Aptos" pitchFamily="34" charset="0"/>
+                <a:ea typeface="Aptos" pitchFamily="34" charset="-122"/>
+                <a:cs typeface="Aptos" pitchFamily="34" charset="-120"/>
+              </a:rPr>
+              <a:t>Representativeness.</a:t>
+            </a:r>
+            <a:endParaRPr lang="en-US" sz="1700" dirty="0"/>
+          </a:p>
+          <a:p>
+            <a:r>
+              <a:rPr lang="en-US" sz="1700" dirty="0">
+                <a:solidFill>
+                  <a:srgbClr val="17364A"/>
+                </a:solidFill>
+                <a:latin typeface="Aptos" pitchFamily="34" charset="0"/>
+                <a:ea typeface="Aptos" pitchFamily="34" charset="-122"/>
+                <a:cs typeface="Aptos" pitchFamily="34" charset="-120"/>
+              </a:rPr>
+              <a:t>Representativeness refers to whether data reflect the population, events, or settings relevant to the use case.</a:t>
+            </a:r>
+            <a:endParaRPr lang="en-US" sz="1700" dirty="0"/>
+          </a:p>
+          <a:p>
+            <a:r>
+              <a:rPr lang="en-US" sz="1700" dirty="0">
+                <a:solidFill>
+                  <a:srgbClr val="17364A"/>
+                </a:solidFill>
+                <a:latin typeface="Aptos" pitchFamily="34" charset="0"/>
+                <a:ea typeface="Aptos" pitchFamily="34" charset="-122"/>
+                <a:cs typeface="Aptos" pitchFamily="34" charset="-120"/>
+              </a:rPr>
+              <a:t>Underrepresentation can produce biased or incomplete AI outputs.</a:t>
+            </a:r>
+            <a:endParaRPr lang="en-US" sz="1700" dirty="0"/>
+          </a:p>
+          <a:p>
+            <a:r>
+              <a:rPr lang="en-US" sz="1700" dirty="0">
+                <a:solidFill>
+                  <a:srgbClr val="17364A"/>
+                </a:solidFill>
+                <a:latin typeface="Aptos" pitchFamily="34" charset="0"/>
+                <a:ea typeface="Aptos" pitchFamily="34" charset="-122"/>
+                <a:cs typeface="Aptos" pitchFamily="34" charset="-120"/>
+              </a:rPr>
+              <a:t>Data drift.</a:t>
+            </a:r>
+            <a:endParaRPr lang="en-US" sz="1700" dirty="0"/>
+          </a:p>
+        </p:txBody>
+      </p:sp>
+      <p:sp>
+        <p:nvSpPr>
+          <p:cNvPr id="9" name="Shape 7"/>
+          <p:cNvSpPr/>
+          <p:nvPr/>
+        </p:nvSpPr>
+        <p:spPr>
+          <a:xfrm>
+            <a:off x="7909560" y="1417320"/>
+            <a:ext cx="3154680" cy="1828800"/>
+          </a:xfrm>
+          <a:prstGeom prst="roundRect">
+            <a:avLst>
+              <a:gd name="adj" fmla="val 6000"/>
+            </a:avLst>
+          </a:prstGeom>
+          <a:solidFill>
+            <a:srgbClr val="EEF8ED"/>
+          </a:solidFill>
+          <a:ln w="12700">
+            <a:solidFill>
+              <a:srgbClr val="B9D7E6"/>
+            </a:solidFill>
+            <a:prstDash val="solid"/>
+          </a:ln>
+        </p:spPr>
+      </p:sp>
+      <p:sp>
+        <p:nvSpPr>
+          <p:cNvPr id="10" name="Text 8"/>
+          <p:cNvSpPr/>
+          <p:nvPr/>
+        </p:nvSpPr>
+        <p:spPr>
+          <a:xfrm>
+            <a:off x="8074152" y="1563624"/>
+            <a:ext cx="2825496" cy="201168"/>
+          </a:xfrm>
+          <a:prstGeom prst="rect">
+            <a:avLst/>
+          </a:prstGeom>
+          <a:noFill/>
+          <a:ln/>
+        </p:spPr>
+        <p:txBody>
+          <a:bodyPr wrap="square" lIns="0" tIns="0" rIns="0" bIns="0" rtlCol="0" anchor="ctr"/>
+          <a:lstStyle/>
+          <a:p>
             <a:pPr indent="0" marL="0">
               <a:buNone/>
             </a:pPr>
             <a:r>
-              <a:rPr lang="en-US" sz="1420" dirty="0">
+              <a:rPr lang="en-US" sz="950" b="1" dirty="0">
+                <a:solidFill>
+                  <a:srgbClr val="0068B7"/>
+                </a:solidFill>
+                <a:latin typeface="Aptos" pitchFamily="34" charset="0"/>
+                <a:ea typeface="Aptos" pitchFamily="34" charset="-122"/>
+                <a:cs typeface="Aptos" pitchFamily="34" charset="-120"/>
+              </a:rPr>
+              <a:t>Key idea</a:t>
+            </a:r>
+            <a:endParaRPr lang="en-US" sz="950" dirty="0"/>
+          </a:p>
+        </p:txBody>
+      </p:sp>
+      <p:sp>
+        <p:nvSpPr>
+          <p:cNvPr id="11" name="Text 9"/>
+          <p:cNvSpPr/>
+          <p:nvPr/>
+        </p:nvSpPr>
+        <p:spPr>
+          <a:xfrm>
+            <a:off x="8074152" y="1856232"/>
+            <a:ext cx="2825496" cy="1261872"/>
+          </a:xfrm>
+          <a:prstGeom prst="rect">
+            <a:avLst/>
+          </a:prstGeom>
+          <a:noFill/>
+          <a:ln/>
+        </p:spPr>
+        <p:txBody>
+          <a:bodyPr wrap="square" lIns="0" tIns="0" rIns="0" bIns="0" rtlCol="0" anchor="t">
+            <a:normAutofit/>
+          </a:bodyPr>
+          <a:lstStyle/>
+          <a:p>
+            <a:pPr indent="0" marL="0">
+              <a:buNone/>
+            </a:pPr>
+            <a:r>
+              <a:rPr lang="en-US" sz="1250" dirty="0">
                 <a:solidFill>
                   <a:srgbClr val="17364A"/>
                 </a:solidFill>
@@ -7917,9 +14874,116 @@
                 <a:ea typeface="Aptos" pitchFamily="34" charset="-122"/>
                 <a:cs typeface="Aptos" pitchFamily="34" charset="-120"/>
               </a:rPr>
-              <a:t>Data quality engineering begins by defining required fields and acceptable thresholds for the intended use. For an AI-supported case triage workflow, required fields may include condition, lab evidence, onset date, specimen date, jurisdiction, age, pregnancy status, hospitalization, and contact information. The agency should decide which missing fields stop automated support, which trigger a warning, and which can be handled through human review. Quality measurement should include completeness, timeliness, validity, consistency, uniqueness, accuracy, and representativeness. Some dimensions can be measured automatically. Others require program knowledge, source review, or comparison to external benchmarks. Data quality should not be treated as a one-time predeployment activity. It should be monitored throughout the AI lifecycle. Documentation is essential. A data quality plan should describe known limitations, review thresholds, monitoring frequency, responsible owners, escalation criteria, and decisions about acceptable use. When data quality is insufficient, the correct response may be to restrict the use case, add human review, improve the data pipeline, delay deployment, or avoid AI use for that workflow.</a:t>
-            </a:r>
-            <a:endParaRPr lang="en-US" sz="1420" dirty="0"/>
+              <a:t>Representativeness.</a:t>
+            </a:r>
+            <a:endParaRPr lang="en-US" sz="1250" dirty="0"/>
+          </a:p>
+        </p:txBody>
+      </p:sp>
+      <p:sp>
+        <p:nvSpPr>
+          <p:cNvPr id="12" name="Shape 10"/>
+          <p:cNvSpPr/>
+          <p:nvPr/>
+        </p:nvSpPr>
+        <p:spPr>
+          <a:xfrm>
+            <a:off x="7909560" y="3520440"/>
+            <a:ext cx="3154680" cy="1737360"/>
+          </a:xfrm>
+          <a:prstGeom prst="roundRect">
+            <a:avLst>
+              <a:gd name="adj" fmla="val 6316"/>
+            </a:avLst>
+          </a:prstGeom>
+          <a:solidFill>
+            <a:srgbClr val="EAF6F8"/>
+          </a:solidFill>
+          <a:ln w="12700">
+            <a:solidFill>
+              <a:srgbClr val="B9D7E6"/>
+            </a:solidFill>
+            <a:prstDash val="solid"/>
+          </a:ln>
+        </p:spPr>
+      </p:sp>
+      <p:sp>
+        <p:nvSpPr>
+          <p:cNvPr id="13" name="Text 11"/>
+          <p:cNvSpPr/>
+          <p:nvPr/>
+        </p:nvSpPr>
+        <p:spPr>
+          <a:xfrm>
+            <a:off x="8074152" y="3666744"/>
+            <a:ext cx="2825496" cy="201168"/>
+          </a:xfrm>
+          <a:prstGeom prst="rect">
+            <a:avLst/>
+          </a:prstGeom>
+          <a:noFill/>
+          <a:ln/>
+        </p:spPr>
+        <p:txBody>
+          <a:bodyPr wrap="square" lIns="0" tIns="0" rIns="0" bIns="0" rtlCol="0" anchor="ctr"/>
+          <a:lstStyle/>
+          <a:p>
+            <a:pPr indent="0" marL="0">
+              <a:buNone/>
+            </a:pPr>
+            <a:r>
+              <a:rPr lang="en-US" sz="950" b="1" dirty="0">
+                <a:solidFill>
+                  <a:srgbClr val="0068B7"/>
+                </a:solidFill>
+                <a:latin typeface="Aptos" pitchFamily="34" charset="0"/>
+                <a:ea typeface="Aptos" pitchFamily="34" charset="-122"/>
+                <a:cs typeface="Aptos" pitchFamily="34" charset="-120"/>
+              </a:rPr>
+              <a:t>Use this for</a:t>
+            </a:r>
+            <a:endParaRPr lang="en-US" sz="950" dirty="0"/>
+          </a:p>
+        </p:txBody>
+      </p:sp>
+      <p:sp>
+        <p:nvSpPr>
+          <p:cNvPr id="14" name="Text 12"/>
+          <p:cNvSpPr/>
+          <p:nvPr/>
+        </p:nvSpPr>
+        <p:spPr>
+          <a:xfrm>
+            <a:off x="8074152" y="3959352"/>
+            <a:ext cx="2825496" cy="1170432"/>
+          </a:xfrm>
+          <a:prstGeom prst="rect">
+            <a:avLst/>
+          </a:prstGeom>
+          <a:noFill/>
+          <a:ln/>
+        </p:spPr>
+        <p:txBody>
+          <a:bodyPr wrap="square" lIns="0" tIns="0" rIns="0" bIns="0" rtlCol="0" anchor="t">
+            <a:normAutofit/>
+          </a:bodyPr>
+          <a:lstStyle/>
+          <a:p>
+            <a:pPr indent="0" marL="0">
+              <a:buNone/>
+            </a:pPr>
+            <a:r>
+              <a:rPr lang="en-US" sz="1250" dirty="0">
+                <a:solidFill>
+                  <a:srgbClr val="17364A"/>
+                </a:solidFill>
+                <a:latin typeface="Aptos" pitchFamily="34" charset="0"/>
+                <a:ea typeface="Aptos" pitchFamily="34" charset="-122"/>
+                <a:cs typeface="Aptos" pitchFamily="34" charset="-120"/>
+              </a:rPr>
+              <a:t>Connect the concept to public health decisions, safeguards, documentation, or implementation work.</a:t>
+            </a:r>
+            <a:endParaRPr lang="en-US" sz="1250" dirty="0"/>
           </a:p>
         </p:txBody>
       </p:sp>

--- a/downloads/presentations/modules/lesson-53-data-quality-engineering-for-ai.pptx
+++ b/downloads/presentations/modules/lesson-53-data-quality-engineering-for-ai.pptx
@@ -2997,6 +2997,45 @@
           </a:p>
         </p:txBody>
       </p:sp>
+      <p:sp>
+        <p:nvSpPr>
+          <p:cNvPr id="8" name="Text 5"/>
+          <p:cNvSpPr/>
+          <p:nvPr/>
+        </p:nvSpPr>
+        <p:spPr>
+          <a:xfrm>
+            <a:off x="11137392" y="6510528"/>
+            <a:ext cx="411480" cy="201168"/>
+          </a:xfrm>
+          <a:prstGeom prst="rect">
+            <a:avLst/>
+          </a:prstGeom>
+          <a:noFill/>
+          <a:ln/>
+        </p:spPr>
+        <p:txBody>
+          <a:bodyPr wrap="square" lIns="0" tIns="0" rIns="0" bIns="0" rtlCol="0" anchor="ctr"/>
+          <a:lstStyle/>
+          <a:p>
+            <a:pPr algn="r" indent="0" marL="0">
+              <a:buNone/>
+            </a:pPr>
+            <a:r>
+              <a:rPr lang="en-US" sz="900" dirty="0">
+                <a:solidFill>
+                  <a:srgbClr val="5F7181"/>
+                </a:solidFill>
+                <a:latin typeface="Aptos" pitchFamily="34" charset="0"/>
+                <a:ea typeface="Aptos" pitchFamily="34" charset="-122"/>
+                <a:cs typeface="Aptos" pitchFamily="34" charset="-120"/>
+              </a:rPr>
+              <a:t>1</a:t>
+            </a:r>
+            <a:endParaRPr lang="en-US" sz="900" dirty="0"/>
+          </a:p>
+        </p:txBody>
+      </p:sp>
     </p:spTree>
   </p:cSld>
   <p:clrMapOvr>
@@ -3190,7 +3229,7 @@
                 <a:ea typeface="Aptos" pitchFamily="34" charset="-122"/>
                 <a:cs typeface="Aptos" pitchFamily="34" charset="-120"/>
               </a:rPr>
-              <a:t>© Paula Soper</a:t>
+              <a:t>Â© Paula Soper</a:t>
             </a:r>
             <a:endParaRPr lang="en-US" sz="800" dirty="0"/>
           </a:p>
@@ -3198,7 +3237,46 @@
       </p:sp>
       <p:sp>
         <p:nvSpPr>
-          <p:cNvPr id="7" name="Shape 5"/>
+          <p:cNvPr id="7" name="Text 5"/>
+          <p:cNvSpPr/>
+          <p:nvPr/>
+        </p:nvSpPr>
+        <p:spPr>
+          <a:xfrm>
+            <a:off x="11137392" y="6510528"/>
+            <a:ext cx="411480" cy="201168"/>
+          </a:xfrm>
+          <a:prstGeom prst="rect">
+            <a:avLst/>
+          </a:prstGeom>
+          <a:noFill/>
+          <a:ln/>
+        </p:spPr>
+        <p:txBody>
+          <a:bodyPr wrap="square" lIns="0" tIns="0" rIns="0" bIns="0" rtlCol="0" anchor="ctr"/>
+          <a:lstStyle/>
+          <a:p>
+            <a:pPr algn="r" indent="0" marL="0">
+              <a:buNone/>
+            </a:pPr>
+            <a:r>
+              <a:rPr lang="en-US" sz="900" dirty="0">
+                <a:solidFill>
+                  <a:srgbClr val="5F7181"/>
+                </a:solidFill>
+                <a:latin typeface="Aptos" pitchFamily="34" charset="0"/>
+                <a:ea typeface="Aptos" pitchFamily="34" charset="-122"/>
+                <a:cs typeface="Aptos" pitchFamily="34" charset="-120"/>
+              </a:rPr>
+              <a:t>10</a:t>
+            </a:r>
+            <a:endParaRPr lang="en-US" sz="900" dirty="0"/>
+          </a:p>
+        </p:txBody>
+      </p:sp>
+      <p:sp>
+        <p:nvSpPr>
+          <p:cNvPr id="8" name="Shape 6"/>
           <p:cNvSpPr/>
           <p:nvPr/>
         </p:nvSpPr>
@@ -3223,7 +3301,7 @@
       </p:sp>
       <p:sp>
         <p:nvSpPr>
-          <p:cNvPr id="8" name="Text 6"/>
+          <p:cNvPr id="9" name="Text 7"/>
           <p:cNvSpPr/>
           <p:nvPr/>
         </p:nvSpPr>
@@ -3262,14 +3340,14 @@
       </p:sp>
       <p:sp>
         <p:nvSpPr>
-          <p:cNvPr id="9" name="Text 7"/>
+          <p:cNvPr id="10" name="Text 8"/>
           <p:cNvSpPr/>
           <p:nvPr/>
         </p:nvSpPr>
         <p:spPr>
           <a:xfrm>
             <a:off x="640080" y="621792"/>
-            <a:ext cx="10881360" cy="566928"/>
+            <a:ext cx="10881360" cy="713232"/>
           </a:xfrm>
           <a:prstGeom prst="rect">
             <a:avLst/>
@@ -3287,7 +3365,7 @@
               <a:buNone/>
             </a:pPr>
             <a:r>
-              <a:rPr lang="en-US" sz="2700" b="1" dirty="0">
+              <a:rPr lang="en-US" sz="3400" b="1" dirty="0">
                 <a:solidFill>
                   <a:srgbClr val="003A63"/>
                 </a:solidFill>
@@ -3297,20 +3375,20 @@
               </a:rPr>
               <a:t>Public Health Example</a:t>
             </a:r>
-            <a:endParaRPr lang="en-US" sz="2700" dirty="0"/>
-          </a:p>
-        </p:txBody>
-      </p:sp>
-      <p:sp>
-        <p:nvSpPr>
-          <p:cNvPr id="10" name="Text 8"/>
-          <p:cNvSpPr/>
-          <p:nvPr/>
-        </p:nvSpPr>
-        <p:spPr>
-          <a:xfrm>
-            <a:off x="868680" y="1417320"/>
-            <a:ext cx="6675120" cy="4434840"/>
+            <a:endParaRPr lang="en-US" sz="3400" dirty="0"/>
+          </a:p>
+        </p:txBody>
+      </p:sp>
+      <p:sp>
+        <p:nvSpPr>
+          <p:cNvPr id="11" name="Text 9"/>
+          <p:cNvSpPr/>
+          <p:nvPr/>
+        </p:nvSpPr>
+        <p:spPr>
+          <a:xfrm>
+            <a:off x="868680" y="1508760"/>
+            <a:ext cx="6537960" cy="4160520"/>
           </a:xfrm>
           <a:prstGeom prst="rect">
             <a:avLst/>
@@ -3325,7 +3403,7 @@
           <a:lstStyle/>
           <a:p>
             <a:r>
-              <a:rPr lang="en-US" sz="1700" dirty="0">
+              <a:rPr lang="en-US" sz="2100" dirty="0">
                 <a:solidFill>
                   <a:srgbClr val="17364A"/>
                 </a:solidFill>
@@ -3335,11 +3413,11 @@
               </a:rPr>
               <a:t>A health department may use AI to identify cases needing rapid follow-up.</a:t>
             </a:r>
-            <a:endParaRPr lang="en-US" sz="1700" dirty="0"/>
-          </a:p>
-          <a:p>
-            <a:r>
-              <a:rPr lang="en-US" sz="1700" dirty="0">
+            <a:endParaRPr lang="en-US" sz="2100" dirty="0"/>
+          </a:p>
+          <a:p>
+            <a:r>
+              <a:rPr lang="en-US" sz="2100" dirty="0">
                 <a:solidFill>
                   <a:srgbClr val="17364A"/>
                 </a:solidFill>
@@ -3347,13 +3425,13 @@
                 <a:ea typeface="Aptos" pitchFamily="34" charset="-122"/>
                 <a:cs typeface="Aptos" pitchFamily="34" charset="-120"/>
               </a:rPr>
-              <a:t>If demographic fields are missing more often for some populations, the model may be less reliable for those groups.</a:t>
-            </a:r>
-            <a:endParaRPr lang="en-US" sz="1700" dirty="0"/>
-          </a:p>
-          <a:p>
-            <a:r>
-              <a:rPr lang="en-US" sz="1700" dirty="0">
+              <a:t>If demographic fields are missing more often for some populations, the model may be less reliable for.</a:t>
+            </a:r>
+            <a:endParaRPr lang="en-US" sz="2100" dirty="0"/>
+          </a:p>
+          <a:p>
+            <a:r>
+              <a:rPr lang="en-US" sz="2100" dirty="0">
                 <a:solidFill>
                   <a:srgbClr val="17364A"/>
                 </a:solidFill>
@@ -3361,29 +3439,15 @@
                 <a:ea typeface="Aptos" pitchFamily="34" charset="-122"/>
                 <a:cs typeface="Aptos" pitchFamily="34" charset="-120"/>
               </a:rPr>
-              <a:t>If the data feed from certain clinics is delayed, the prioritization queue may reflect reporting timeliness rather than.</a:t>
-            </a:r>
-            <a:endParaRPr lang="en-US" sz="1700" dirty="0"/>
-          </a:p>
-          <a:p>
-            <a:r>
-              <a:rPr lang="en-US" sz="1700" dirty="0">
-                <a:solidFill>
-                  <a:srgbClr val="17364A"/>
-                </a:solidFill>
-                <a:latin typeface="Aptos" pitchFamily="34" charset="0"/>
-                <a:ea typeface="Aptos" pitchFamily="34" charset="-122"/>
-                <a:cs typeface="Aptos" pitchFamily="34" charset="-120"/>
-              </a:rPr>
-              <a:t>A data quality review can reveal these issues before the tool is deployed.</a:t>
-            </a:r>
-            <a:endParaRPr lang="en-US" sz="1700" dirty="0"/>
-          </a:p>
-        </p:txBody>
-      </p:sp>
-      <p:sp>
-        <p:nvSpPr>
-          <p:cNvPr id="11" name="Shape 9"/>
+              <a:t>If the data feed from certain clinics is delayed, the prioritization queue may reflect reporting.</a:t>
+            </a:r>
+            <a:endParaRPr lang="en-US" sz="2100" dirty="0"/>
+          </a:p>
+        </p:txBody>
+      </p:sp>
+      <p:sp>
+        <p:nvSpPr>
+          <p:cNvPr id="12" name="Shape 10"/>
           <p:cNvSpPr/>
           <p:nvPr/>
         </p:nvSpPr>
@@ -3410,14 +3474,14 @@
       </p:sp>
       <p:sp>
         <p:nvSpPr>
-          <p:cNvPr id="12" name="Text 10"/>
+          <p:cNvPr id="13" name="Text 11"/>
           <p:cNvSpPr/>
           <p:nvPr/>
         </p:nvSpPr>
         <p:spPr>
           <a:xfrm>
             <a:off x="8074152" y="1563624"/>
-            <a:ext cx="2825496" cy="201168"/>
+            <a:ext cx="2825496" cy="256032"/>
           </a:xfrm>
           <a:prstGeom prst="rect">
             <a:avLst/>
@@ -3433,7 +3497,7 @@
               <a:buNone/>
             </a:pPr>
             <a:r>
-              <a:rPr lang="en-US" sz="950" b="1" dirty="0">
+              <a:rPr lang="en-US" sz="1300" b="1" dirty="0">
                 <a:solidFill>
                   <a:srgbClr val="0068B7"/>
                 </a:solidFill>
@@ -3443,20 +3507,20 @@
               </a:rPr>
               <a:t>Key idea</a:t>
             </a:r>
-            <a:endParaRPr lang="en-US" sz="950" dirty="0"/>
-          </a:p>
-        </p:txBody>
-      </p:sp>
-      <p:sp>
-        <p:nvSpPr>
-          <p:cNvPr id="13" name="Text 11"/>
-          <p:cNvSpPr/>
-          <p:nvPr/>
-        </p:nvSpPr>
-        <p:spPr>
-          <a:xfrm>
-            <a:off x="8074152" y="1856232"/>
-            <a:ext cx="2825496" cy="1261872"/>
+            <a:endParaRPr lang="en-US" sz="1300" dirty="0"/>
+          </a:p>
+        </p:txBody>
+      </p:sp>
+      <p:sp>
+        <p:nvSpPr>
+          <p:cNvPr id="14" name="Text 12"/>
+          <p:cNvSpPr/>
+          <p:nvPr/>
+        </p:nvSpPr>
+        <p:spPr>
+          <a:xfrm>
+            <a:off x="8074152" y="1920240"/>
+            <a:ext cx="2825496" cy="1188720"/>
           </a:xfrm>
           <a:prstGeom prst="rect">
             <a:avLst/>
@@ -3474,7 +3538,7 @@
               <a:buNone/>
             </a:pPr>
             <a:r>
-              <a:rPr lang="en-US" sz="1250" dirty="0">
+              <a:rPr lang="en-US" sz="1550" dirty="0">
                 <a:solidFill>
                   <a:srgbClr val="17364A"/>
                 </a:solidFill>
@@ -3484,13 +3548,13 @@
               </a:rPr>
               <a:t>A health department may use AI to identify cases needing rapid follow-up.</a:t>
             </a:r>
-            <a:endParaRPr lang="en-US" sz="1250" dirty="0"/>
-          </a:p>
-        </p:txBody>
-      </p:sp>
-      <p:sp>
-        <p:nvSpPr>
-          <p:cNvPr id="14" name="Shape 12"/>
+            <a:endParaRPr lang="en-US" sz="1550" dirty="0"/>
+          </a:p>
+        </p:txBody>
+      </p:sp>
+      <p:sp>
+        <p:nvSpPr>
+          <p:cNvPr id="15" name="Shape 13"/>
           <p:cNvSpPr/>
           <p:nvPr/>
         </p:nvSpPr>
@@ -3517,14 +3581,14 @@
       </p:sp>
       <p:sp>
         <p:nvSpPr>
-          <p:cNvPr id="15" name="Text 13"/>
+          <p:cNvPr id="16" name="Text 14"/>
           <p:cNvSpPr/>
           <p:nvPr/>
         </p:nvSpPr>
         <p:spPr>
           <a:xfrm>
             <a:off x="8074152" y="3666744"/>
-            <a:ext cx="2825496" cy="201168"/>
+            <a:ext cx="2825496" cy="256032"/>
           </a:xfrm>
           <a:prstGeom prst="rect">
             <a:avLst/>
@@ -3540,7 +3604,7 @@
               <a:buNone/>
             </a:pPr>
             <a:r>
-              <a:rPr lang="en-US" sz="950" b="1" dirty="0">
+              <a:rPr lang="en-US" sz="1300" b="1" dirty="0">
                 <a:solidFill>
                   <a:srgbClr val="0068B7"/>
                 </a:solidFill>
@@ -3550,20 +3614,20 @@
               </a:rPr>
               <a:t>Use this for</a:t>
             </a:r>
-            <a:endParaRPr lang="en-US" sz="950" dirty="0"/>
-          </a:p>
-        </p:txBody>
-      </p:sp>
-      <p:sp>
-        <p:nvSpPr>
-          <p:cNvPr id="16" name="Text 14"/>
-          <p:cNvSpPr/>
-          <p:nvPr/>
-        </p:nvSpPr>
-        <p:spPr>
-          <a:xfrm>
-            <a:off x="8074152" y="3959352"/>
-            <a:ext cx="2825496" cy="1170432"/>
+            <a:endParaRPr lang="en-US" sz="1300" dirty="0"/>
+          </a:p>
+        </p:txBody>
+      </p:sp>
+      <p:sp>
+        <p:nvSpPr>
+          <p:cNvPr id="17" name="Text 15"/>
+          <p:cNvSpPr/>
+          <p:nvPr/>
+        </p:nvSpPr>
+        <p:spPr>
+          <a:xfrm>
+            <a:off x="8074152" y="4023360"/>
+            <a:ext cx="2825496" cy="1097280"/>
           </a:xfrm>
           <a:prstGeom prst="rect">
             <a:avLst/>
@@ -3581,7 +3645,7 @@
               <a:buNone/>
             </a:pPr>
             <a:r>
-              <a:rPr lang="en-US" sz="1250" dirty="0">
+              <a:rPr lang="en-US" sz="1550" dirty="0">
                 <a:solidFill>
                   <a:srgbClr val="17364A"/>
                 </a:solidFill>
@@ -3591,7 +3655,7 @@
               </a:rPr>
               <a:t>Connect the concept to public health decisions, safeguards, documentation, or implementation work.</a:t>
             </a:r>
-            <a:endParaRPr lang="en-US" sz="1250" dirty="0"/>
+            <a:endParaRPr lang="en-US" sz="1550" dirty="0"/>
           </a:p>
         </p:txBody>
       </p:sp>
@@ -3788,7 +3852,7 @@
                 <a:ea typeface="Aptos" pitchFamily="34" charset="-122"/>
                 <a:cs typeface="Aptos" pitchFamily="34" charset="-120"/>
               </a:rPr>
-              <a:t>© Paula Soper</a:t>
+              <a:t>Â© Paula Soper</a:t>
             </a:r>
             <a:endParaRPr lang="en-US" sz="800" dirty="0"/>
           </a:p>
@@ -3796,7 +3860,46 @@
       </p:sp>
       <p:sp>
         <p:nvSpPr>
-          <p:cNvPr id="7" name="Shape 5"/>
+          <p:cNvPr id="7" name="Text 5"/>
+          <p:cNvSpPr/>
+          <p:nvPr/>
+        </p:nvSpPr>
+        <p:spPr>
+          <a:xfrm>
+            <a:off x="11137392" y="6510528"/>
+            <a:ext cx="411480" cy="201168"/>
+          </a:xfrm>
+          <a:prstGeom prst="rect">
+            <a:avLst/>
+          </a:prstGeom>
+          <a:noFill/>
+          <a:ln/>
+        </p:spPr>
+        <p:txBody>
+          <a:bodyPr wrap="square" lIns="0" tIns="0" rIns="0" bIns="0" rtlCol="0" anchor="ctr"/>
+          <a:lstStyle/>
+          <a:p>
+            <a:pPr algn="r" indent="0" marL="0">
+              <a:buNone/>
+            </a:pPr>
+            <a:r>
+              <a:rPr lang="en-US" sz="900" dirty="0">
+                <a:solidFill>
+                  <a:srgbClr val="5F7181"/>
+                </a:solidFill>
+                <a:latin typeface="Aptos" pitchFamily="34" charset="0"/>
+                <a:ea typeface="Aptos" pitchFamily="34" charset="-122"/>
+                <a:cs typeface="Aptos" pitchFamily="34" charset="-120"/>
+              </a:rPr>
+              <a:t>11</a:t>
+            </a:r>
+            <a:endParaRPr lang="en-US" sz="900" dirty="0"/>
+          </a:p>
+        </p:txBody>
+      </p:sp>
+      <p:sp>
+        <p:nvSpPr>
+          <p:cNvPr id="8" name="Shape 6"/>
           <p:cNvSpPr/>
           <p:nvPr/>
         </p:nvSpPr>
@@ -3821,7 +3924,7 @@
       </p:sp>
       <p:sp>
         <p:nvSpPr>
-          <p:cNvPr id="8" name="Text 6"/>
+          <p:cNvPr id="9" name="Text 7"/>
           <p:cNvSpPr/>
           <p:nvPr/>
         </p:nvSpPr>
@@ -3860,14 +3963,14 @@
       </p:sp>
       <p:sp>
         <p:nvSpPr>
-          <p:cNvPr id="9" name="Text 7"/>
+          <p:cNvPr id="10" name="Text 8"/>
           <p:cNvSpPr/>
           <p:nvPr/>
         </p:nvSpPr>
         <p:spPr>
           <a:xfrm>
             <a:off x="640080" y="621792"/>
-            <a:ext cx="10881360" cy="566928"/>
+            <a:ext cx="10881360" cy="713232"/>
           </a:xfrm>
           <a:prstGeom prst="rect">
             <a:avLst/>
@@ -3885,7 +3988,7 @@
               <a:buNone/>
             </a:pPr>
             <a:r>
-              <a:rPr lang="en-US" sz="2700" b="1" dirty="0">
+              <a:rPr lang="en-US" sz="3400" b="1" dirty="0">
                 <a:solidFill>
                   <a:srgbClr val="003A63"/>
                 </a:solidFill>
@@ -3895,20 +3998,20 @@
               </a:rPr>
               <a:t>Technical Deep Dive</a:t>
             </a:r>
-            <a:endParaRPr lang="en-US" sz="2700" dirty="0"/>
-          </a:p>
-        </p:txBody>
-      </p:sp>
-      <p:sp>
-        <p:nvSpPr>
-          <p:cNvPr id="10" name="Text 8"/>
-          <p:cNvSpPr/>
-          <p:nvPr/>
-        </p:nvSpPr>
-        <p:spPr>
-          <a:xfrm>
-            <a:off x="868680" y="1417320"/>
-            <a:ext cx="6675120" cy="4434840"/>
+            <a:endParaRPr lang="en-US" sz="3400" dirty="0"/>
+          </a:p>
+        </p:txBody>
+      </p:sp>
+      <p:sp>
+        <p:nvSpPr>
+          <p:cNvPr id="11" name="Text 9"/>
+          <p:cNvSpPr/>
+          <p:nvPr/>
+        </p:nvSpPr>
+        <p:spPr>
+          <a:xfrm>
+            <a:off x="868680" y="1508760"/>
+            <a:ext cx="6537960" cy="4160520"/>
           </a:xfrm>
           <a:prstGeom prst="rect">
             <a:avLst/>
@@ -3923,7 +4026,7 @@
           <a:lstStyle/>
           <a:p>
             <a:r>
-              <a:rPr lang="en-US" sz="1700" dirty="0">
+              <a:rPr lang="en-US" sz="2100" dirty="0">
                 <a:solidFill>
                   <a:srgbClr val="17364A"/>
                 </a:solidFill>
@@ -3931,13 +4034,13 @@
                 <a:ea typeface="Aptos" pitchFamily="34" charset="-122"/>
                 <a:cs typeface="Aptos" pitchFamily="34" charset="-120"/>
               </a:rPr>
-              <a:t>Data quality engineering begins by defining required fields and acceptable thresholds for the intended use.</a:t>
-            </a:r>
-            <a:endParaRPr lang="en-US" sz="1700" dirty="0"/>
-          </a:p>
-          <a:p>
-            <a:r>
-              <a:rPr lang="en-US" sz="1700" dirty="0">
+              <a:t>Data quality engineering begins by defining required fields and acceptable thresholds for the intended.</a:t>
+            </a:r>
+            <a:endParaRPr lang="en-US" sz="2100" dirty="0"/>
+          </a:p>
+          <a:p>
+            <a:r>
+              <a:rPr lang="en-US" sz="2100" dirty="0">
                 <a:solidFill>
                   <a:srgbClr val="17364A"/>
                 </a:solidFill>
@@ -3945,13 +4048,13 @@
                 <a:ea typeface="Aptos" pitchFamily="34" charset="-122"/>
                 <a:cs typeface="Aptos" pitchFamily="34" charset="-120"/>
               </a:rPr>
-              <a:t>For an AI-supported case triage workflow, required fields may include condition, lab evidence, onset date, specimen date,.</a:t>
-            </a:r>
-            <a:endParaRPr lang="en-US" sz="1700" dirty="0"/>
-          </a:p>
-          <a:p>
-            <a:r>
-              <a:rPr lang="en-US" sz="1700" dirty="0">
+              <a:t>For an AI-supported case triage workflow, required fields may include condition, lab evidence, onset.</a:t>
+            </a:r>
+            <a:endParaRPr lang="en-US" sz="2100" dirty="0"/>
+          </a:p>
+          <a:p>
+            <a:r>
+              <a:rPr lang="en-US" sz="2100" dirty="0">
                 <a:solidFill>
                   <a:srgbClr val="17364A"/>
                 </a:solidFill>
@@ -3959,29 +4062,15 @@
                 <a:ea typeface="Aptos" pitchFamily="34" charset="-122"/>
                 <a:cs typeface="Aptos" pitchFamily="34" charset="-120"/>
               </a:rPr>
-              <a:t>The agency should decide which missing fields stop automated support, which trigger a warning, and which can be handled.</a:t>
-            </a:r>
-            <a:endParaRPr lang="en-US" sz="1700" dirty="0"/>
-          </a:p>
-          <a:p>
-            <a:r>
-              <a:rPr lang="en-US" sz="1700" dirty="0">
-                <a:solidFill>
-                  <a:srgbClr val="17364A"/>
-                </a:solidFill>
-                <a:latin typeface="Aptos" pitchFamily="34" charset="0"/>
-                <a:ea typeface="Aptos" pitchFamily="34" charset="-122"/>
-                <a:cs typeface="Aptos" pitchFamily="34" charset="-120"/>
-              </a:rPr>
-              <a:t>Quality measurement should include completeness, timeliness, validity, consistency, uniqueness, accuracy, and.</a:t>
-            </a:r>
-            <a:endParaRPr lang="en-US" sz="1700" dirty="0"/>
-          </a:p>
-        </p:txBody>
-      </p:sp>
-      <p:sp>
-        <p:nvSpPr>
-          <p:cNvPr id="11" name="Shape 9"/>
+              <a:t>The agency should decide which missing fields stop automated support, which trigger a warning, and.</a:t>
+            </a:r>
+            <a:endParaRPr lang="en-US" sz="2100" dirty="0"/>
+          </a:p>
+        </p:txBody>
+      </p:sp>
+      <p:sp>
+        <p:nvSpPr>
+          <p:cNvPr id="12" name="Shape 10"/>
           <p:cNvSpPr/>
           <p:nvPr/>
         </p:nvSpPr>
@@ -4008,14 +4097,14 @@
       </p:sp>
       <p:sp>
         <p:nvSpPr>
-          <p:cNvPr id="12" name="Text 10"/>
+          <p:cNvPr id="13" name="Text 11"/>
           <p:cNvSpPr/>
           <p:nvPr/>
         </p:nvSpPr>
         <p:spPr>
           <a:xfrm>
             <a:off x="8074152" y="1563624"/>
-            <a:ext cx="2825496" cy="201168"/>
+            <a:ext cx="2825496" cy="256032"/>
           </a:xfrm>
           <a:prstGeom prst="rect">
             <a:avLst/>
@@ -4031,7 +4120,7 @@
               <a:buNone/>
             </a:pPr>
             <a:r>
-              <a:rPr lang="en-US" sz="950" b="1" dirty="0">
+              <a:rPr lang="en-US" sz="1300" b="1" dirty="0">
                 <a:solidFill>
                   <a:srgbClr val="0068B7"/>
                 </a:solidFill>
@@ -4041,20 +4130,20 @@
               </a:rPr>
               <a:t>Key idea</a:t>
             </a:r>
-            <a:endParaRPr lang="en-US" sz="950" dirty="0"/>
-          </a:p>
-        </p:txBody>
-      </p:sp>
-      <p:sp>
-        <p:nvSpPr>
-          <p:cNvPr id="13" name="Text 11"/>
-          <p:cNvSpPr/>
-          <p:nvPr/>
-        </p:nvSpPr>
-        <p:spPr>
-          <a:xfrm>
-            <a:off x="8074152" y="1856232"/>
-            <a:ext cx="2825496" cy="1261872"/>
+            <a:endParaRPr lang="en-US" sz="1300" dirty="0"/>
+          </a:p>
+        </p:txBody>
+      </p:sp>
+      <p:sp>
+        <p:nvSpPr>
+          <p:cNvPr id="14" name="Text 12"/>
+          <p:cNvSpPr/>
+          <p:nvPr/>
+        </p:nvSpPr>
+        <p:spPr>
+          <a:xfrm>
+            <a:off x="8074152" y="1920240"/>
+            <a:ext cx="2825496" cy="1188720"/>
           </a:xfrm>
           <a:prstGeom prst="rect">
             <a:avLst/>
@@ -4072,7 +4161,7 @@
               <a:buNone/>
             </a:pPr>
             <a:r>
-              <a:rPr lang="en-US" sz="1250" dirty="0">
+              <a:rPr lang="en-US" sz="1550" dirty="0">
                 <a:solidFill>
                   <a:srgbClr val="17364A"/>
                 </a:solidFill>
@@ -4080,15 +4169,15 @@
                 <a:ea typeface="Aptos" pitchFamily="34" charset="-122"/>
                 <a:cs typeface="Aptos" pitchFamily="34" charset="-120"/>
               </a:rPr>
-              <a:t>Data quality engineering begins by defining required fields and acceptable thresholds for the intended use.</a:t>
-            </a:r>
-            <a:endParaRPr lang="en-US" sz="1250" dirty="0"/>
-          </a:p>
-        </p:txBody>
-      </p:sp>
-      <p:sp>
-        <p:nvSpPr>
-          <p:cNvPr id="14" name="Shape 12"/>
+              <a:t>Data quality engineering begins by defining required fields and acceptable thresholds for the intended.</a:t>
+            </a:r>
+            <a:endParaRPr lang="en-US" sz="1550" dirty="0"/>
+          </a:p>
+        </p:txBody>
+      </p:sp>
+      <p:sp>
+        <p:nvSpPr>
+          <p:cNvPr id="15" name="Shape 13"/>
           <p:cNvSpPr/>
           <p:nvPr/>
         </p:nvSpPr>
@@ -4115,14 +4204,14 @@
       </p:sp>
       <p:sp>
         <p:nvSpPr>
-          <p:cNvPr id="15" name="Text 13"/>
+          <p:cNvPr id="16" name="Text 14"/>
           <p:cNvSpPr/>
           <p:nvPr/>
         </p:nvSpPr>
         <p:spPr>
           <a:xfrm>
             <a:off x="8074152" y="3666744"/>
-            <a:ext cx="2825496" cy="201168"/>
+            <a:ext cx="2825496" cy="256032"/>
           </a:xfrm>
           <a:prstGeom prst="rect">
             <a:avLst/>
@@ -4138,7 +4227,7 @@
               <a:buNone/>
             </a:pPr>
             <a:r>
-              <a:rPr lang="en-US" sz="950" b="1" dirty="0">
+              <a:rPr lang="en-US" sz="1300" b="1" dirty="0">
                 <a:solidFill>
                   <a:srgbClr val="0068B7"/>
                 </a:solidFill>
@@ -4148,20 +4237,20 @@
               </a:rPr>
               <a:t>Use this for</a:t>
             </a:r>
-            <a:endParaRPr lang="en-US" sz="950" dirty="0"/>
-          </a:p>
-        </p:txBody>
-      </p:sp>
-      <p:sp>
-        <p:nvSpPr>
-          <p:cNvPr id="16" name="Text 14"/>
-          <p:cNvSpPr/>
-          <p:nvPr/>
-        </p:nvSpPr>
-        <p:spPr>
-          <a:xfrm>
-            <a:off x="8074152" y="3959352"/>
-            <a:ext cx="2825496" cy="1170432"/>
+            <a:endParaRPr lang="en-US" sz="1300" dirty="0"/>
+          </a:p>
+        </p:txBody>
+      </p:sp>
+      <p:sp>
+        <p:nvSpPr>
+          <p:cNvPr id="17" name="Text 15"/>
+          <p:cNvSpPr/>
+          <p:nvPr/>
+        </p:nvSpPr>
+        <p:spPr>
+          <a:xfrm>
+            <a:off x="8074152" y="4023360"/>
+            <a:ext cx="2825496" cy="1097280"/>
           </a:xfrm>
           <a:prstGeom prst="rect">
             <a:avLst/>
@@ -4179,7 +4268,7 @@
               <a:buNone/>
             </a:pPr>
             <a:r>
-              <a:rPr lang="en-US" sz="1250" dirty="0">
+              <a:rPr lang="en-US" sz="1550" dirty="0">
                 <a:solidFill>
                   <a:srgbClr val="17364A"/>
                 </a:solidFill>
@@ -4189,7 +4278,7 @@
               </a:rPr>
               <a:t>Connect the concept to public health decisions, safeguards, documentation, or implementation work.</a:t>
             </a:r>
-            <a:endParaRPr lang="en-US" sz="1250" dirty="0"/>
+            <a:endParaRPr lang="en-US" sz="1550" dirty="0"/>
           </a:p>
         </p:txBody>
       </p:sp>
@@ -4386,7 +4475,7 @@
                 <a:ea typeface="Aptos" pitchFamily="34" charset="-122"/>
                 <a:cs typeface="Aptos" pitchFamily="34" charset="-120"/>
               </a:rPr>
-              <a:t>© Paula Soper</a:t>
+              <a:t>Â© Paula Soper</a:t>
             </a:r>
             <a:endParaRPr lang="en-US" sz="800" dirty="0"/>
           </a:p>
@@ -4394,7 +4483,46 @@
       </p:sp>
       <p:sp>
         <p:nvSpPr>
-          <p:cNvPr id="7" name="Shape 5"/>
+          <p:cNvPr id="7" name="Text 5"/>
+          <p:cNvSpPr/>
+          <p:nvPr/>
+        </p:nvSpPr>
+        <p:spPr>
+          <a:xfrm>
+            <a:off x="11137392" y="6510528"/>
+            <a:ext cx="411480" cy="201168"/>
+          </a:xfrm>
+          <a:prstGeom prst="rect">
+            <a:avLst/>
+          </a:prstGeom>
+          <a:noFill/>
+          <a:ln/>
+        </p:spPr>
+        <p:txBody>
+          <a:bodyPr wrap="square" lIns="0" tIns="0" rIns="0" bIns="0" rtlCol="0" anchor="ctr"/>
+          <a:lstStyle/>
+          <a:p>
+            <a:pPr algn="r" indent="0" marL="0">
+              <a:buNone/>
+            </a:pPr>
+            <a:r>
+              <a:rPr lang="en-US" sz="900" dirty="0">
+                <a:solidFill>
+                  <a:srgbClr val="5F7181"/>
+                </a:solidFill>
+                <a:latin typeface="Aptos" pitchFamily="34" charset="0"/>
+                <a:ea typeface="Aptos" pitchFamily="34" charset="-122"/>
+                <a:cs typeface="Aptos" pitchFamily="34" charset="-120"/>
+              </a:rPr>
+              <a:t>12</a:t>
+            </a:r>
+            <a:endParaRPr lang="en-US" sz="900" dirty="0"/>
+          </a:p>
+        </p:txBody>
+      </p:sp>
+      <p:sp>
+        <p:nvSpPr>
+          <p:cNvPr id="8" name="Shape 6"/>
           <p:cNvSpPr/>
           <p:nvPr/>
         </p:nvSpPr>
@@ -4419,7 +4547,7 @@
       </p:sp>
       <p:sp>
         <p:nvSpPr>
-          <p:cNvPr id="8" name="Text 6"/>
+          <p:cNvPr id="9" name="Text 7"/>
           <p:cNvSpPr/>
           <p:nvPr/>
         </p:nvSpPr>
@@ -4458,14 +4586,14 @@
       </p:sp>
       <p:sp>
         <p:nvSpPr>
-          <p:cNvPr id="9" name="Text 7"/>
+          <p:cNvPr id="10" name="Text 8"/>
           <p:cNvSpPr/>
           <p:nvPr/>
         </p:nvSpPr>
         <p:spPr>
           <a:xfrm>
             <a:off x="640080" y="621792"/>
-            <a:ext cx="10881360" cy="566928"/>
+            <a:ext cx="10881360" cy="713232"/>
           </a:xfrm>
           <a:prstGeom prst="rect">
             <a:avLst/>
@@ -4483,7 +4611,7 @@
               <a:buNone/>
             </a:pPr>
             <a:r>
-              <a:rPr lang="en-US" sz="2700" b="1" dirty="0">
+              <a:rPr lang="en-US" sz="3400" b="1" dirty="0">
                 <a:solidFill>
                   <a:srgbClr val="003A63"/>
                 </a:solidFill>
@@ -4493,20 +4621,20 @@
               </a:rPr>
               <a:t>Risks, Failure Modes, and Guardrails</a:t>
             </a:r>
-            <a:endParaRPr lang="en-US" sz="2700" dirty="0"/>
-          </a:p>
-        </p:txBody>
-      </p:sp>
-      <p:sp>
-        <p:nvSpPr>
-          <p:cNvPr id="10" name="Text 8"/>
-          <p:cNvSpPr/>
-          <p:nvPr/>
-        </p:nvSpPr>
-        <p:spPr>
-          <a:xfrm>
-            <a:off x="868680" y="1417320"/>
-            <a:ext cx="6675120" cy="4434840"/>
+            <a:endParaRPr lang="en-US" sz="3400" dirty="0"/>
+          </a:p>
+        </p:txBody>
+      </p:sp>
+      <p:sp>
+        <p:nvSpPr>
+          <p:cNvPr id="11" name="Text 9"/>
+          <p:cNvSpPr/>
+          <p:nvPr/>
+        </p:nvSpPr>
+        <p:spPr>
+          <a:xfrm>
+            <a:off x="868680" y="1508760"/>
+            <a:ext cx="6537960" cy="4160520"/>
           </a:xfrm>
           <a:prstGeom prst="rect">
             <a:avLst/>
@@ -4521,7 +4649,7 @@
           <a:lstStyle/>
           <a:p>
             <a:r>
-              <a:rPr lang="en-US" sz="1700" dirty="0">
+              <a:rPr lang="en-US" sz="2100" dirty="0">
                 <a:solidFill>
                   <a:srgbClr val="17364A"/>
                 </a:solidFill>
@@ -4531,11 +4659,11 @@
               </a:rPr>
               <a:t>Confident output from weak data.</a:t>
             </a:r>
-            <a:endParaRPr lang="en-US" sz="1700" dirty="0"/>
-          </a:p>
-          <a:p>
-            <a:r>
-              <a:rPr lang="en-US" sz="1700" dirty="0">
+            <a:endParaRPr lang="en-US" sz="2100" dirty="0"/>
+          </a:p>
+          <a:p>
+            <a:r>
+              <a:rPr lang="en-US" sz="2100" dirty="0">
                 <a:solidFill>
                   <a:srgbClr val="17364A"/>
                 </a:solidFill>
@@ -4545,11 +4673,11 @@
               </a:rPr>
               <a:t>AI may produce polished outputs from incomplete or biased data.</a:t>
             </a:r>
-            <a:endParaRPr lang="en-US" sz="1700" dirty="0"/>
-          </a:p>
-          <a:p>
-            <a:r>
-              <a:rPr lang="en-US" sz="1700" dirty="0">
+            <a:endParaRPr lang="en-US" sz="2100" dirty="0"/>
+          </a:p>
+          <a:p>
+            <a:r>
+              <a:rPr lang="en-US" sz="2100" dirty="0">
                 <a:solidFill>
                   <a:srgbClr val="17364A"/>
                 </a:solidFill>
@@ -4559,27 +4687,13 @@
               </a:rPr>
               <a:t>Guardrails include uncertainty labeling, source review, and limits on use.</a:t>
             </a:r>
-            <a:endParaRPr lang="en-US" sz="1700" dirty="0"/>
-          </a:p>
-          <a:p>
-            <a:r>
-              <a:rPr lang="en-US" sz="1700" dirty="0">
-                <a:solidFill>
-                  <a:srgbClr val="17364A"/>
-                </a:solidFill>
-                <a:latin typeface="Aptos" pitchFamily="34" charset="0"/>
-                <a:ea typeface="Aptos" pitchFamily="34" charset="-122"/>
-                <a:cs typeface="Aptos" pitchFamily="34" charset="-120"/>
-              </a:rPr>
-              <a:t>Fitness-for-use mismatch.</a:t>
-            </a:r>
-            <a:endParaRPr lang="en-US" sz="1700" dirty="0"/>
-          </a:p>
-        </p:txBody>
-      </p:sp>
-      <p:sp>
-        <p:nvSpPr>
-          <p:cNvPr id="11" name="Shape 9"/>
+            <a:endParaRPr lang="en-US" sz="2100" dirty="0"/>
+          </a:p>
+        </p:txBody>
+      </p:sp>
+      <p:sp>
+        <p:nvSpPr>
+          <p:cNvPr id="12" name="Shape 10"/>
           <p:cNvSpPr/>
           <p:nvPr/>
         </p:nvSpPr>
@@ -4606,14 +4720,14 @@
       </p:sp>
       <p:sp>
         <p:nvSpPr>
-          <p:cNvPr id="12" name="Text 10"/>
+          <p:cNvPr id="13" name="Text 11"/>
           <p:cNvSpPr/>
           <p:nvPr/>
         </p:nvSpPr>
         <p:spPr>
           <a:xfrm>
             <a:off x="8074152" y="1563624"/>
-            <a:ext cx="2825496" cy="201168"/>
+            <a:ext cx="2825496" cy="256032"/>
           </a:xfrm>
           <a:prstGeom prst="rect">
             <a:avLst/>
@@ -4629,7 +4743,7 @@
               <a:buNone/>
             </a:pPr>
             <a:r>
-              <a:rPr lang="en-US" sz="950" b="1" dirty="0">
+              <a:rPr lang="en-US" sz="1300" b="1" dirty="0">
                 <a:solidFill>
                   <a:srgbClr val="0068B7"/>
                 </a:solidFill>
@@ -4639,20 +4753,20 @@
               </a:rPr>
               <a:t>Key idea</a:t>
             </a:r>
-            <a:endParaRPr lang="en-US" sz="950" dirty="0"/>
-          </a:p>
-        </p:txBody>
-      </p:sp>
-      <p:sp>
-        <p:nvSpPr>
-          <p:cNvPr id="13" name="Text 11"/>
-          <p:cNvSpPr/>
-          <p:nvPr/>
-        </p:nvSpPr>
-        <p:spPr>
-          <a:xfrm>
-            <a:off x="8074152" y="1856232"/>
-            <a:ext cx="2825496" cy="1261872"/>
+            <a:endParaRPr lang="en-US" sz="1300" dirty="0"/>
+          </a:p>
+        </p:txBody>
+      </p:sp>
+      <p:sp>
+        <p:nvSpPr>
+          <p:cNvPr id="14" name="Text 12"/>
+          <p:cNvSpPr/>
+          <p:nvPr/>
+        </p:nvSpPr>
+        <p:spPr>
+          <a:xfrm>
+            <a:off x="8074152" y="1920240"/>
+            <a:ext cx="2825496" cy="1188720"/>
           </a:xfrm>
           <a:prstGeom prst="rect">
             <a:avLst/>
@@ -4670,7 +4784,7 @@
               <a:buNone/>
             </a:pPr>
             <a:r>
-              <a:rPr lang="en-US" sz="1250" dirty="0">
+              <a:rPr lang="en-US" sz="1550" dirty="0">
                 <a:solidFill>
                   <a:srgbClr val="17364A"/>
                 </a:solidFill>
@@ -4680,13 +4794,13 @@
               </a:rPr>
               <a:t>Confident output from weak data.</a:t>
             </a:r>
-            <a:endParaRPr lang="en-US" sz="1250" dirty="0"/>
-          </a:p>
-        </p:txBody>
-      </p:sp>
-      <p:sp>
-        <p:nvSpPr>
-          <p:cNvPr id="14" name="Shape 12"/>
+            <a:endParaRPr lang="en-US" sz="1550" dirty="0"/>
+          </a:p>
+        </p:txBody>
+      </p:sp>
+      <p:sp>
+        <p:nvSpPr>
+          <p:cNvPr id="15" name="Shape 13"/>
           <p:cNvSpPr/>
           <p:nvPr/>
         </p:nvSpPr>
@@ -4713,14 +4827,14 @@
       </p:sp>
       <p:sp>
         <p:nvSpPr>
-          <p:cNvPr id="15" name="Text 13"/>
+          <p:cNvPr id="16" name="Text 14"/>
           <p:cNvSpPr/>
           <p:nvPr/>
         </p:nvSpPr>
         <p:spPr>
           <a:xfrm>
             <a:off x="8074152" y="3666744"/>
-            <a:ext cx="2825496" cy="201168"/>
+            <a:ext cx="2825496" cy="256032"/>
           </a:xfrm>
           <a:prstGeom prst="rect">
             <a:avLst/>
@@ -4736,7 +4850,7 @@
               <a:buNone/>
             </a:pPr>
             <a:r>
-              <a:rPr lang="en-US" sz="950" b="1" dirty="0">
+              <a:rPr lang="en-US" sz="1300" b="1" dirty="0">
                 <a:solidFill>
                   <a:srgbClr val="0068B7"/>
                 </a:solidFill>
@@ -4746,20 +4860,20 @@
               </a:rPr>
               <a:t>Use this for</a:t>
             </a:r>
-            <a:endParaRPr lang="en-US" sz="950" dirty="0"/>
-          </a:p>
-        </p:txBody>
-      </p:sp>
-      <p:sp>
-        <p:nvSpPr>
-          <p:cNvPr id="16" name="Text 14"/>
-          <p:cNvSpPr/>
-          <p:nvPr/>
-        </p:nvSpPr>
-        <p:spPr>
-          <a:xfrm>
-            <a:off x="8074152" y="3959352"/>
-            <a:ext cx="2825496" cy="1170432"/>
+            <a:endParaRPr lang="en-US" sz="1300" dirty="0"/>
+          </a:p>
+        </p:txBody>
+      </p:sp>
+      <p:sp>
+        <p:nvSpPr>
+          <p:cNvPr id="17" name="Text 15"/>
+          <p:cNvSpPr/>
+          <p:nvPr/>
+        </p:nvSpPr>
+        <p:spPr>
+          <a:xfrm>
+            <a:off x="8074152" y="4023360"/>
+            <a:ext cx="2825496" cy="1097280"/>
           </a:xfrm>
           <a:prstGeom prst="rect">
             <a:avLst/>
@@ -4777,7 +4891,7 @@
               <a:buNone/>
             </a:pPr>
             <a:r>
-              <a:rPr lang="en-US" sz="1250" dirty="0">
+              <a:rPr lang="en-US" sz="1550" dirty="0">
                 <a:solidFill>
                   <a:srgbClr val="17364A"/>
                 </a:solidFill>
@@ -4787,7 +4901,7 @@
               </a:rPr>
               <a:t>Connect the concept to public health decisions, safeguards, documentation, or implementation work.</a:t>
             </a:r>
-            <a:endParaRPr lang="en-US" sz="1250" dirty="0"/>
+            <a:endParaRPr lang="en-US" sz="1550" dirty="0"/>
           </a:p>
         </p:txBody>
       </p:sp>
@@ -4984,7 +5098,7 @@
                 <a:ea typeface="Aptos" pitchFamily="34" charset="-122"/>
                 <a:cs typeface="Aptos" pitchFamily="34" charset="-120"/>
               </a:rPr>
-              <a:t>© Paula Soper</a:t>
+              <a:t>Â© Paula Soper</a:t>
             </a:r>
             <a:endParaRPr lang="en-US" sz="800" dirty="0"/>
           </a:p>
@@ -4998,8 +5112,47 @@
         </p:nvSpPr>
         <p:spPr>
           <a:xfrm>
+            <a:off x="11137392" y="6510528"/>
+            <a:ext cx="411480" cy="201168"/>
+          </a:xfrm>
+          <a:prstGeom prst="rect">
+            <a:avLst/>
+          </a:prstGeom>
+          <a:noFill/>
+          <a:ln/>
+        </p:spPr>
+        <p:txBody>
+          <a:bodyPr wrap="square" lIns="0" tIns="0" rIns="0" bIns="0" rtlCol="0" anchor="ctr"/>
+          <a:lstStyle/>
+          <a:p>
+            <a:pPr algn="r" indent="0" marL="0">
+              <a:buNone/>
+            </a:pPr>
+            <a:r>
+              <a:rPr lang="en-US" sz="900" dirty="0">
+                <a:solidFill>
+                  <a:srgbClr val="5F7181"/>
+                </a:solidFill>
+                <a:latin typeface="Aptos" pitchFamily="34" charset="0"/>
+                <a:ea typeface="Aptos" pitchFamily="34" charset="-122"/>
+                <a:cs typeface="Aptos" pitchFamily="34" charset="-120"/>
+              </a:rPr>
+              <a:t>13</a:t>
+            </a:r>
+            <a:endParaRPr lang="en-US" sz="900" dirty="0"/>
+          </a:p>
+        </p:txBody>
+      </p:sp>
+      <p:sp>
+        <p:nvSpPr>
+          <p:cNvPr id="8" name="Text 6"/>
+          <p:cNvSpPr/>
+          <p:nvPr/>
+        </p:nvSpPr>
+        <p:spPr>
+          <a:xfrm>
             <a:off x="640080" y="658368"/>
-            <a:ext cx="10881360" cy="566928"/>
+            <a:ext cx="10881360" cy="713232"/>
           </a:xfrm>
           <a:prstGeom prst="rect">
             <a:avLst/>
@@ -5017,7 +5170,7 @@
               <a:buNone/>
             </a:pPr>
             <a:r>
-              <a:rPr lang="en-US" sz="2700" b="1" dirty="0">
+              <a:rPr lang="en-US" sz="3400" b="1" dirty="0">
                 <a:solidFill>
                   <a:srgbClr val="003A63"/>
                 </a:solidFill>
@@ -5027,20 +5180,20 @@
               </a:rPr>
               <a:t>Risks, Failure Modes, and Guardrails Continued</a:t>
             </a:r>
-            <a:endParaRPr lang="en-US" sz="2700" dirty="0"/>
-          </a:p>
-        </p:txBody>
-      </p:sp>
-      <p:sp>
-        <p:nvSpPr>
-          <p:cNvPr id="8" name="Text 6"/>
-          <p:cNvSpPr/>
-          <p:nvPr/>
-        </p:nvSpPr>
-        <p:spPr>
-          <a:xfrm>
-            <a:off x="868680" y="1417320"/>
-            <a:ext cx="6675120" cy="4434840"/>
+            <a:endParaRPr lang="en-US" sz="3400" dirty="0"/>
+          </a:p>
+        </p:txBody>
+      </p:sp>
+      <p:sp>
+        <p:nvSpPr>
+          <p:cNvPr id="9" name="Text 7"/>
+          <p:cNvSpPr/>
+          <p:nvPr/>
+        </p:nvSpPr>
+        <p:spPr>
+          <a:xfrm>
+            <a:off x="868680" y="1508760"/>
+            <a:ext cx="6537960" cy="4160520"/>
           </a:xfrm>
           <a:prstGeom prst="rect">
             <a:avLst/>
@@ -5055,7 +5208,7 @@
           <a:lstStyle/>
           <a:p>
             <a:r>
-              <a:rPr lang="en-US" sz="1700" dirty="0">
+              <a:rPr lang="en-US" sz="2100" dirty="0">
                 <a:solidFill>
                   <a:srgbClr val="17364A"/>
                 </a:solidFill>
@@ -5065,11 +5218,11 @@
               </a:rPr>
               <a:t>Equity blind spots.</a:t>
             </a:r>
-            <a:endParaRPr lang="en-US" sz="1700" dirty="0"/>
-          </a:p>
-          <a:p>
-            <a:r>
-              <a:rPr lang="en-US" sz="1700" dirty="0">
+            <a:endParaRPr lang="en-US" sz="2100" dirty="0"/>
+          </a:p>
+          <a:p>
+            <a:r>
+              <a:rPr lang="en-US" sz="2100" dirty="0">
                 <a:solidFill>
                   <a:srgbClr val="17364A"/>
                 </a:solidFill>
@@ -5079,11 +5232,11 @@
               </a:rPr>
               <a:t>Missingness and underrepresentation may affect some groups more than others.</a:t>
             </a:r>
-            <a:endParaRPr lang="en-US" sz="1700" dirty="0"/>
-          </a:p>
-          <a:p>
-            <a:r>
-              <a:rPr lang="en-US" sz="1700" dirty="0">
+            <a:endParaRPr lang="en-US" sz="2100" dirty="0"/>
+          </a:p>
+          <a:p>
+            <a:r>
+              <a:rPr lang="en-US" sz="2100" dirty="0">
                 <a:solidFill>
                   <a:srgbClr val="17364A"/>
                 </a:solidFill>
@@ -5093,13 +5246,13 @@
               </a:rPr>
               <a:t>Guardrails include subgroup review, community context, and documentation of limitations.</a:t>
             </a:r>
-            <a:endParaRPr lang="en-US" sz="1700" dirty="0"/>
-          </a:p>
-        </p:txBody>
-      </p:sp>
-      <p:sp>
-        <p:nvSpPr>
-          <p:cNvPr id="9" name="Shape 7"/>
+            <a:endParaRPr lang="en-US" sz="2100" dirty="0"/>
+          </a:p>
+        </p:txBody>
+      </p:sp>
+      <p:sp>
+        <p:nvSpPr>
+          <p:cNvPr id="10" name="Shape 8"/>
           <p:cNvSpPr/>
           <p:nvPr/>
         </p:nvSpPr>
@@ -5126,14 +5279,14 @@
       </p:sp>
       <p:sp>
         <p:nvSpPr>
-          <p:cNvPr id="10" name="Text 8"/>
+          <p:cNvPr id="11" name="Text 9"/>
           <p:cNvSpPr/>
           <p:nvPr/>
         </p:nvSpPr>
         <p:spPr>
           <a:xfrm>
             <a:off x="8074152" y="1563624"/>
-            <a:ext cx="2825496" cy="201168"/>
+            <a:ext cx="2825496" cy="256032"/>
           </a:xfrm>
           <a:prstGeom prst="rect">
             <a:avLst/>
@@ -5149,7 +5302,7 @@
               <a:buNone/>
             </a:pPr>
             <a:r>
-              <a:rPr lang="en-US" sz="950" b="1" dirty="0">
+              <a:rPr lang="en-US" sz="1300" b="1" dirty="0">
                 <a:solidFill>
                   <a:srgbClr val="0068B7"/>
                 </a:solidFill>
@@ -5159,20 +5312,20 @@
               </a:rPr>
               <a:t>Key idea</a:t>
             </a:r>
-            <a:endParaRPr lang="en-US" sz="950" dirty="0"/>
-          </a:p>
-        </p:txBody>
-      </p:sp>
-      <p:sp>
-        <p:nvSpPr>
-          <p:cNvPr id="11" name="Text 9"/>
-          <p:cNvSpPr/>
-          <p:nvPr/>
-        </p:nvSpPr>
-        <p:spPr>
-          <a:xfrm>
-            <a:off x="8074152" y="1856232"/>
-            <a:ext cx="2825496" cy="1261872"/>
+            <a:endParaRPr lang="en-US" sz="1300" dirty="0"/>
+          </a:p>
+        </p:txBody>
+      </p:sp>
+      <p:sp>
+        <p:nvSpPr>
+          <p:cNvPr id="12" name="Text 10"/>
+          <p:cNvSpPr/>
+          <p:nvPr/>
+        </p:nvSpPr>
+        <p:spPr>
+          <a:xfrm>
+            <a:off x="8074152" y="1920240"/>
+            <a:ext cx="2825496" cy="1188720"/>
           </a:xfrm>
           <a:prstGeom prst="rect">
             <a:avLst/>
@@ -5190,7 +5343,7 @@
               <a:buNone/>
             </a:pPr>
             <a:r>
-              <a:rPr lang="en-US" sz="1250" dirty="0">
+              <a:rPr lang="en-US" sz="1550" dirty="0">
                 <a:solidFill>
                   <a:srgbClr val="17364A"/>
                 </a:solidFill>
@@ -5200,13 +5353,13 @@
               </a:rPr>
               <a:t>Equity blind spots.</a:t>
             </a:r>
-            <a:endParaRPr lang="en-US" sz="1250" dirty="0"/>
-          </a:p>
-        </p:txBody>
-      </p:sp>
-      <p:sp>
-        <p:nvSpPr>
-          <p:cNvPr id="12" name="Shape 10"/>
+            <a:endParaRPr lang="en-US" sz="1550" dirty="0"/>
+          </a:p>
+        </p:txBody>
+      </p:sp>
+      <p:sp>
+        <p:nvSpPr>
+          <p:cNvPr id="13" name="Shape 11"/>
           <p:cNvSpPr/>
           <p:nvPr/>
         </p:nvSpPr>
@@ -5233,14 +5386,14 @@
       </p:sp>
       <p:sp>
         <p:nvSpPr>
-          <p:cNvPr id="13" name="Text 11"/>
+          <p:cNvPr id="14" name="Text 12"/>
           <p:cNvSpPr/>
           <p:nvPr/>
         </p:nvSpPr>
         <p:spPr>
           <a:xfrm>
             <a:off x="8074152" y="3666744"/>
-            <a:ext cx="2825496" cy="201168"/>
+            <a:ext cx="2825496" cy="256032"/>
           </a:xfrm>
           <a:prstGeom prst="rect">
             <a:avLst/>
@@ -5256,7 +5409,7 @@
               <a:buNone/>
             </a:pPr>
             <a:r>
-              <a:rPr lang="en-US" sz="950" b="1" dirty="0">
+              <a:rPr lang="en-US" sz="1300" b="1" dirty="0">
                 <a:solidFill>
                   <a:srgbClr val="0068B7"/>
                 </a:solidFill>
@@ -5266,20 +5419,20 @@
               </a:rPr>
               <a:t>Use this for</a:t>
             </a:r>
-            <a:endParaRPr lang="en-US" sz="950" dirty="0"/>
-          </a:p>
-        </p:txBody>
-      </p:sp>
-      <p:sp>
-        <p:nvSpPr>
-          <p:cNvPr id="14" name="Text 12"/>
-          <p:cNvSpPr/>
-          <p:nvPr/>
-        </p:nvSpPr>
-        <p:spPr>
-          <a:xfrm>
-            <a:off x="8074152" y="3959352"/>
-            <a:ext cx="2825496" cy="1170432"/>
+            <a:endParaRPr lang="en-US" sz="1300" dirty="0"/>
+          </a:p>
+        </p:txBody>
+      </p:sp>
+      <p:sp>
+        <p:nvSpPr>
+          <p:cNvPr id="15" name="Text 13"/>
+          <p:cNvSpPr/>
+          <p:nvPr/>
+        </p:nvSpPr>
+        <p:spPr>
+          <a:xfrm>
+            <a:off x="8074152" y="4023360"/>
+            <a:ext cx="2825496" cy="1097280"/>
           </a:xfrm>
           <a:prstGeom prst="rect">
             <a:avLst/>
@@ -5297,7 +5450,7 @@
               <a:buNone/>
             </a:pPr>
             <a:r>
-              <a:rPr lang="en-US" sz="1250" dirty="0">
+              <a:rPr lang="en-US" sz="1550" dirty="0">
                 <a:solidFill>
                   <a:srgbClr val="17364A"/>
                 </a:solidFill>
@@ -5307,7 +5460,7 @@
               </a:rPr>
               <a:t>Connect the concept to public health decisions, safeguards, documentation, or implementation work.</a:t>
             </a:r>
-            <a:endParaRPr lang="en-US" sz="1250" dirty="0"/>
+            <a:endParaRPr lang="en-US" sz="1550" dirty="0"/>
           </a:p>
         </p:txBody>
       </p:sp>
@@ -5504,7 +5657,7 @@
                 <a:ea typeface="Aptos" pitchFamily="34" charset="-122"/>
                 <a:cs typeface="Aptos" pitchFamily="34" charset="-120"/>
               </a:rPr>
-              <a:t>© Paula Soper</a:t>
+              <a:t>Â© Paula Soper</a:t>
             </a:r>
             <a:endParaRPr lang="en-US" sz="800" dirty="0"/>
           </a:p>
@@ -5512,7 +5665,46 @@
       </p:sp>
       <p:sp>
         <p:nvSpPr>
-          <p:cNvPr id="7" name="Shape 5"/>
+          <p:cNvPr id="7" name="Text 5"/>
+          <p:cNvSpPr/>
+          <p:nvPr/>
+        </p:nvSpPr>
+        <p:spPr>
+          <a:xfrm>
+            <a:off x="11137392" y="6510528"/>
+            <a:ext cx="411480" cy="201168"/>
+          </a:xfrm>
+          <a:prstGeom prst="rect">
+            <a:avLst/>
+          </a:prstGeom>
+          <a:noFill/>
+          <a:ln/>
+        </p:spPr>
+        <p:txBody>
+          <a:bodyPr wrap="square" lIns="0" tIns="0" rIns="0" bIns="0" rtlCol="0" anchor="ctr"/>
+          <a:lstStyle/>
+          <a:p>
+            <a:pPr algn="r" indent="0" marL="0">
+              <a:buNone/>
+            </a:pPr>
+            <a:r>
+              <a:rPr lang="en-US" sz="900" dirty="0">
+                <a:solidFill>
+                  <a:srgbClr val="5F7181"/>
+                </a:solidFill>
+                <a:latin typeface="Aptos" pitchFamily="34" charset="0"/>
+                <a:ea typeface="Aptos" pitchFamily="34" charset="-122"/>
+                <a:cs typeface="Aptos" pitchFamily="34" charset="-120"/>
+              </a:rPr>
+              <a:t>14</a:t>
+            </a:r>
+            <a:endParaRPr lang="en-US" sz="900" dirty="0"/>
+          </a:p>
+        </p:txBody>
+      </p:sp>
+      <p:sp>
+        <p:nvSpPr>
+          <p:cNvPr id="8" name="Shape 6"/>
           <p:cNvSpPr/>
           <p:nvPr/>
         </p:nvSpPr>
@@ -5537,7 +5729,7 @@
       </p:sp>
       <p:sp>
         <p:nvSpPr>
-          <p:cNvPr id="8" name="Text 6"/>
+          <p:cNvPr id="9" name="Text 7"/>
           <p:cNvSpPr/>
           <p:nvPr/>
         </p:nvSpPr>
@@ -5576,14 +5768,14 @@
       </p:sp>
       <p:sp>
         <p:nvSpPr>
-          <p:cNvPr id="9" name="Text 7"/>
+          <p:cNvPr id="10" name="Text 8"/>
           <p:cNvSpPr/>
           <p:nvPr/>
         </p:nvSpPr>
         <p:spPr>
           <a:xfrm>
             <a:off x="640080" y="621792"/>
-            <a:ext cx="10881360" cy="566928"/>
+            <a:ext cx="10881360" cy="713232"/>
           </a:xfrm>
           <a:prstGeom prst="rect">
             <a:avLst/>
@@ -5601,7 +5793,7 @@
               <a:buNone/>
             </a:pPr>
             <a:r>
-              <a:rPr lang="en-US" sz="2700" b="1" dirty="0">
+              <a:rPr lang="en-US" sz="3400" b="1" dirty="0">
                 <a:solidFill>
                   <a:srgbClr val="003A63"/>
                 </a:solidFill>
@@ -5611,20 +5803,20 @@
               </a:rPr>
               <a:t>Application to AI-Supported Workflows</a:t>
             </a:r>
-            <a:endParaRPr lang="en-US" sz="2700" dirty="0"/>
-          </a:p>
-        </p:txBody>
-      </p:sp>
-      <p:sp>
-        <p:nvSpPr>
-          <p:cNvPr id="10" name="Text 8"/>
-          <p:cNvSpPr/>
-          <p:nvPr/>
-        </p:nvSpPr>
-        <p:spPr>
-          <a:xfrm>
-            <a:off x="868680" y="1417320"/>
-            <a:ext cx="6675120" cy="4434840"/>
+            <a:endParaRPr lang="en-US" sz="3400" dirty="0"/>
+          </a:p>
+        </p:txBody>
+      </p:sp>
+      <p:sp>
+        <p:nvSpPr>
+          <p:cNvPr id="11" name="Text 9"/>
+          <p:cNvSpPr/>
+          <p:nvPr/>
+        </p:nvSpPr>
+        <p:spPr>
+          <a:xfrm>
+            <a:off x="868680" y="1508760"/>
+            <a:ext cx="6537960" cy="4160520"/>
           </a:xfrm>
           <a:prstGeom prst="rect">
             <a:avLst/>
@@ -5639,7 +5831,7 @@
           <a:lstStyle/>
           <a:p>
             <a:r>
-              <a:rPr lang="en-US" sz="1700" dirty="0">
+              <a:rPr lang="en-US" sz="2100" dirty="0">
                 <a:solidFill>
                   <a:srgbClr val="17364A"/>
                 </a:solidFill>
@@ -5649,11 +5841,11 @@
               </a:rPr>
               <a:t>Generative AI may summarize datasets or records, but the output must reflect missingness and uncertainty.</a:t>
             </a:r>
-            <a:endParaRPr lang="en-US" sz="1700" dirty="0"/>
-          </a:p>
-          <a:p>
-            <a:r>
-              <a:rPr lang="en-US" sz="1700" dirty="0">
+            <a:endParaRPr lang="en-US" sz="2100" dirty="0"/>
+          </a:p>
+          <a:p>
+            <a:r>
+              <a:rPr lang="en-US" sz="2100" dirty="0">
                 <a:solidFill>
                   <a:srgbClr val="17364A"/>
                 </a:solidFill>
@@ -5663,11 +5855,11 @@
               </a:rPr>
               <a:t>Predictive analytics depend heavily on feature quality, label quality, and representative training data.</a:t>
             </a:r>
-            <a:endParaRPr lang="en-US" sz="1700" dirty="0"/>
-          </a:p>
-          <a:p>
-            <a:r>
-              <a:rPr lang="en-US" sz="1700" dirty="0">
+            <a:endParaRPr lang="en-US" sz="2100" dirty="0"/>
+          </a:p>
+          <a:p>
+            <a:r>
+              <a:rPr lang="en-US" sz="2100" dirty="0">
                 <a:solidFill>
                   <a:srgbClr val="17364A"/>
                 </a:solidFill>
@@ -5677,27 +5869,13 @@
               </a:rPr>
               <a:t>NLP may be affected by language variation, abbreviations, and documentation practices.</a:t>
             </a:r>
-            <a:endParaRPr lang="en-US" sz="1700" dirty="0"/>
-          </a:p>
-          <a:p>
-            <a:r>
-              <a:rPr lang="en-US" sz="1700" dirty="0">
-                <a:solidFill>
-                  <a:srgbClr val="17364A"/>
-                </a:solidFill>
-                <a:latin typeface="Aptos" pitchFamily="34" charset="0"/>
-                <a:ea typeface="Aptos" pitchFamily="34" charset="-122"/>
-                <a:cs typeface="Aptos" pitchFamily="34" charset="-120"/>
-              </a:rPr>
-              <a:t>RAG depends on document quality, metadata, and currency.</a:t>
-            </a:r>
-            <a:endParaRPr lang="en-US" sz="1700" dirty="0"/>
-          </a:p>
-        </p:txBody>
-      </p:sp>
-      <p:sp>
-        <p:nvSpPr>
-          <p:cNvPr id="11" name="Shape 9"/>
+            <a:endParaRPr lang="en-US" sz="2100" dirty="0"/>
+          </a:p>
+        </p:txBody>
+      </p:sp>
+      <p:sp>
+        <p:nvSpPr>
+          <p:cNvPr id="12" name="Shape 10"/>
           <p:cNvSpPr/>
           <p:nvPr/>
         </p:nvSpPr>
@@ -5724,14 +5902,14 @@
       </p:sp>
       <p:sp>
         <p:nvSpPr>
-          <p:cNvPr id="12" name="Text 10"/>
+          <p:cNvPr id="13" name="Text 11"/>
           <p:cNvSpPr/>
           <p:nvPr/>
         </p:nvSpPr>
         <p:spPr>
           <a:xfrm>
             <a:off x="8074152" y="1563624"/>
-            <a:ext cx="2825496" cy="201168"/>
+            <a:ext cx="2825496" cy="256032"/>
           </a:xfrm>
           <a:prstGeom prst="rect">
             <a:avLst/>
@@ -5747,7 +5925,7 @@
               <a:buNone/>
             </a:pPr>
             <a:r>
-              <a:rPr lang="en-US" sz="950" b="1" dirty="0">
+              <a:rPr lang="en-US" sz="1300" b="1" dirty="0">
                 <a:solidFill>
                   <a:srgbClr val="0068B7"/>
                 </a:solidFill>
@@ -5757,20 +5935,20 @@
               </a:rPr>
               <a:t>Key idea</a:t>
             </a:r>
-            <a:endParaRPr lang="en-US" sz="950" dirty="0"/>
-          </a:p>
-        </p:txBody>
-      </p:sp>
-      <p:sp>
-        <p:nvSpPr>
-          <p:cNvPr id="13" name="Text 11"/>
-          <p:cNvSpPr/>
-          <p:nvPr/>
-        </p:nvSpPr>
-        <p:spPr>
-          <a:xfrm>
-            <a:off x="8074152" y="1856232"/>
-            <a:ext cx="2825496" cy="1261872"/>
+            <a:endParaRPr lang="en-US" sz="1300" dirty="0"/>
+          </a:p>
+        </p:txBody>
+      </p:sp>
+      <p:sp>
+        <p:nvSpPr>
+          <p:cNvPr id="14" name="Text 12"/>
+          <p:cNvSpPr/>
+          <p:nvPr/>
+        </p:nvSpPr>
+        <p:spPr>
+          <a:xfrm>
+            <a:off x="8074152" y="1920240"/>
+            <a:ext cx="2825496" cy="1188720"/>
           </a:xfrm>
           <a:prstGeom prst="rect">
             <a:avLst/>
@@ -5788,7 +5966,7 @@
               <a:buNone/>
             </a:pPr>
             <a:r>
-              <a:rPr lang="en-US" sz="1250" dirty="0">
+              <a:rPr lang="en-US" sz="1550" dirty="0">
                 <a:solidFill>
                   <a:srgbClr val="17364A"/>
                 </a:solidFill>
@@ -5798,13 +5976,13 @@
               </a:rPr>
               <a:t>Generative AI may summarize datasets or records, but the output must reflect missingness and uncertainty.</a:t>
             </a:r>
-            <a:endParaRPr lang="en-US" sz="1250" dirty="0"/>
-          </a:p>
-        </p:txBody>
-      </p:sp>
-      <p:sp>
-        <p:nvSpPr>
-          <p:cNvPr id="14" name="Shape 12"/>
+            <a:endParaRPr lang="en-US" sz="1550" dirty="0"/>
+          </a:p>
+        </p:txBody>
+      </p:sp>
+      <p:sp>
+        <p:nvSpPr>
+          <p:cNvPr id="15" name="Shape 13"/>
           <p:cNvSpPr/>
           <p:nvPr/>
         </p:nvSpPr>
@@ -5831,14 +6009,14 @@
       </p:sp>
       <p:sp>
         <p:nvSpPr>
-          <p:cNvPr id="15" name="Text 13"/>
+          <p:cNvPr id="16" name="Text 14"/>
           <p:cNvSpPr/>
           <p:nvPr/>
         </p:nvSpPr>
         <p:spPr>
           <a:xfrm>
             <a:off x="8074152" y="3666744"/>
-            <a:ext cx="2825496" cy="201168"/>
+            <a:ext cx="2825496" cy="256032"/>
           </a:xfrm>
           <a:prstGeom prst="rect">
             <a:avLst/>
@@ -5854,7 +6032,7 @@
               <a:buNone/>
             </a:pPr>
             <a:r>
-              <a:rPr lang="en-US" sz="950" b="1" dirty="0">
+              <a:rPr lang="en-US" sz="1300" b="1" dirty="0">
                 <a:solidFill>
                   <a:srgbClr val="0068B7"/>
                 </a:solidFill>
@@ -5864,20 +6042,20 @@
               </a:rPr>
               <a:t>Use this for</a:t>
             </a:r>
-            <a:endParaRPr lang="en-US" sz="950" dirty="0"/>
-          </a:p>
-        </p:txBody>
-      </p:sp>
-      <p:sp>
-        <p:nvSpPr>
-          <p:cNvPr id="16" name="Text 14"/>
-          <p:cNvSpPr/>
-          <p:nvPr/>
-        </p:nvSpPr>
-        <p:spPr>
-          <a:xfrm>
-            <a:off x="8074152" y="3959352"/>
-            <a:ext cx="2825496" cy="1170432"/>
+            <a:endParaRPr lang="en-US" sz="1300" dirty="0"/>
+          </a:p>
+        </p:txBody>
+      </p:sp>
+      <p:sp>
+        <p:nvSpPr>
+          <p:cNvPr id="17" name="Text 15"/>
+          <p:cNvSpPr/>
+          <p:nvPr/>
+        </p:nvSpPr>
+        <p:spPr>
+          <a:xfrm>
+            <a:off x="8074152" y="4023360"/>
+            <a:ext cx="2825496" cy="1097280"/>
           </a:xfrm>
           <a:prstGeom prst="rect">
             <a:avLst/>
@@ -5895,7 +6073,7 @@
               <a:buNone/>
             </a:pPr>
             <a:r>
-              <a:rPr lang="en-US" sz="1250" dirty="0">
+              <a:rPr lang="en-US" sz="1550" dirty="0">
                 <a:solidFill>
                   <a:srgbClr val="17364A"/>
                 </a:solidFill>
@@ -5905,7 +6083,7 @@
               </a:rPr>
               <a:t>Connect the concept to public health decisions, safeguards, documentation, or implementation work.</a:t>
             </a:r>
-            <a:endParaRPr lang="en-US" sz="1250" dirty="0"/>
+            <a:endParaRPr lang="en-US" sz="1550" dirty="0"/>
           </a:p>
         </p:txBody>
       </p:sp>
@@ -6102,7 +6280,7 @@
                 <a:ea typeface="Aptos" pitchFamily="34" charset="-122"/>
                 <a:cs typeface="Aptos" pitchFamily="34" charset="-120"/>
               </a:rPr>
-              <a:t>© Paula Soper</a:t>
+              <a:t>Â© Paula Soper</a:t>
             </a:r>
             <a:endParaRPr lang="en-US" sz="800" dirty="0"/>
           </a:p>
@@ -6110,7 +6288,46 @@
       </p:sp>
       <p:sp>
         <p:nvSpPr>
-          <p:cNvPr id="7" name="Shape 5"/>
+          <p:cNvPr id="7" name="Text 5"/>
+          <p:cNvSpPr/>
+          <p:nvPr/>
+        </p:nvSpPr>
+        <p:spPr>
+          <a:xfrm>
+            <a:off x="11137392" y="6510528"/>
+            <a:ext cx="411480" cy="201168"/>
+          </a:xfrm>
+          <a:prstGeom prst="rect">
+            <a:avLst/>
+          </a:prstGeom>
+          <a:noFill/>
+          <a:ln/>
+        </p:spPr>
+        <p:txBody>
+          <a:bodyPr wrap="square" lIns="0" tIns="0" rIns="0" bIns="0" rtlCol="0" anchor="ctr"/>
+          <a:lstStyle/>
+          <a:p>
+            <a:pPr algn="r" indent="0" marL="0">
+              <a:buNone/>
+            </a:pPr>
+            <a:r>
+              <a:rPr lang="en-US" sz="900" dirty="0">
+                <a:solidFill>
+                  <a:srgbClr val="5F7181"/>
+                </a:solidFill>
+                <a:latin typeface="Aptos" pitchFamily="34" charset="0"/>
+                <a:ea typeface="Aptos" pitchFamily="34" charset="-122"/>
+                <a:cs typeface="Aptos" pitchFamily="34" charset="-120"/>
+              </a:rPr>
+              <a:t>15</a:t>
+            </a:r>
+            <a:endParaRPr lang="en-US" sz="900" dirty="0"/>
+          </a:p>
+        </p:txBody>
+      </p:sp>
+      <p:sp>
+        <p:nvSpPr>
+          <p:cNvPr id="8" name="Shape 6"/>
           <p:cNvSpPr/>
           <p:nvPr/>
         </p:nvSpPr>
@@ -6135,7 +6352,7 @@
       </p:sp>
       <p:sp>
         <p:nvSpPr>
-          <p:cNvPr id="8" name="Text 6"/>
+          <p:cNvPr id="9" name="Text 7"/>
           <p:cNvSpPr/>
           <p:nvPr/>
         </p:nvSpPr>
@@ -6174,14 +6391,14 @@
       </p:sp>
       <p:sp>
         <p:nvSpPr>
-          <p:cNvPr id="9" name="Text 7"/>
+          <p:cNvPr id="10" name="Text 8"/>
           <p:cNvSpPr/>
           <p:nvPr/>
         </p:nvSpPr>
         <p:spPr>
           <a:xfrm>
             <a:off x="640080" y="621792"/>
-            <a:ext cx="10881360" cy="566928"/>
+            <a:ext cx="10881360" cy="713232"/>
           </a:xfrm>
           <a:prstGeom prst="rect">
             <a:avLst/>
@@ -6199,7 +6416,7 @@
               <a:buNone/>
             </a:pPr>
             <a:r>
-              <a:rPr lang="en-US" sz="2700" b="1" dirty="0">
+              <a:rPr lang="en-US" sz="3400" b="1" dirty="0">
                 <a:solidFill>
                   <a:srgbClr val="003A63"/>
                 </a:solidFill>
@@ -6209,20 +6426,20 @@
               </a:rPr>
               <a:t>Reflection Questions</a:t>
             </a:r>
-            <a:endParaRPr lang="en-US" sz="2700" dirty="0"/>
-          </a:p>
-        </p:txBody>
-      </p:sp>
-      <p:sp>
-        <p:nvSpPr>
-          <p:cNvPr id="10" name="Text 8"/>
-          <p:cNvSpPr/>
-          <p:nvPr/>
-        </p:nvSpPr>
-        <p:spPr>
-          <a:xfrm>
-            <a:off x="868680" y="1417320"/>
-            <a:ext cx="6675120" cy="4434840"/>
+            <a:endParaRPr lang="en-US" sz="3400" dirty="0"/>
+          </a:p>
+        </p:txBody>
+      </p:sp>
+      <p:sp>
+        <p:nvSpPr>
+          <p:cNvPr id="11" name="Text 9"/>
+          <p:cNvSpPr/>
+          <p:nvPr/>
+        </p:nvSpPr>
+        <p:spPr>
+          <a:xfrm>
+            <a:off x="868680" y="1508760"/>
+            <a:ext cx="6537960" cy="4160520"/>
           </a:xfrm>
           <a:prstGeom prst="rect">
             <a:avLst/>
@@ -6237,7 +6454,7 @@
           <a:lstStyle/>
           <a:p>
             <a:r>
-              <a:rPr lang="en-US" sz="1700" dirty="0">
+              <a:rPr lang="en-US" sz="2100" dirty="0">
                 <a:solidFill>
                   <a:srgbClr val="17364A"/>
                 </a:solidFill>
@@ -6247,11 +6464,11 @@
               </a:rPr>
               <a:t>Which data quality problems most often affect your program area?</a:t>
             </a:r>
-            <a:endParaRPr lang="en-US" sz="1700" dirty="0"/>
-          </a:p>
-          <a:p>
-            <a:r>
-              <a:rPr lang="en-US" sz="1700" dirty="0">
+            <a:endParaRPr lang="en-US" sz="2100" dirty="0"/>
+          </a:p>
+          <a:p>
+            <a:r>
+              <a:rPr lang="en-US" sz="2100" dirty="0">
                 <a:solidFill>
                   <a:srgbClr val="17364A"/>
                 </a:solidFill>
@@ -6261,11 +6478,11 @@
               </a:rPr>
               <a:t>Which missing fields would make an AI output unsafe or unreliable?</a:t>
             </a:r>
-            <a:endParaRPr lang="en-US" sz="1700" dirty="0"/>
-          </a:p>
-          <a:p>
-            <a:r>
-              <a:rPr lang="en-US" sz="1700" dirty="0">
+            <a:endParaRPr lang="en-US" sz="2100" dirty="0"/>
+          </a:p>
+          <a:p>
+            <a:r>
+              <a:rPr lang="en-US" sz="2100" dirty="0">
                 <a:solidFill>
                   <a:srgbClr val="17364A"/>
                 </a:solidFill>
@@ -6275,13 +6492,13 @@
               </a:rPr>
               <a:t>Which populations or settings may be underrepresented in the data?</a:t>
             </a:r>
-            <a:endParaRPr lang="en-US" sz="1700" dirty="0"/>
-          </a:p>
-        </p:txBody>
-      </p:sp>
-      <p:sp>
-        <p:nvSpPr>
-          <p:cNvPr id="11" name="Shape 9"/>
+            <a:endParaRPr lang="en-US" sz="2100" dirty="0"/>
+          </a:p>
+        </p:txBody>
+      </p:sp>
+      <p:sp>
+        <p:nvSpPr>
+          <p:cNvPr id="12" name="Shape 10"/>
           <p:cNvSpPr/>
           <p:nvPr/>
         </p:nvSpPr>
@@ -6308,14 +6525,14 @@
       </p:sp>
       <p:sp>
         <p:nvSpPr>
-          <p:cNvPr id="12" name="Text 10"/>
+          <p:cNvPr id="13" name="Text 11"/>
           <p:cNvSpPr/>
           <p:nvPr/>
         </p:nvSpPr>
         <p:spPr>
           <a:xfrm>
             <a:off x="8074152" y="1563624"/>
-            <a:ext cx="2825496" cy="201168"/>
+            <a:ext cx="2825496" cy="256032"/>
           </a:xfrm>
           <a:prstGeom prst="rect">
             <a:avLst/>
@@ -6331,7 +6548,7 @@
               <a:buNone/>
             </a:pPr>
             <a:r>
-              <a:rPr lang="en-US" sz="950" b="1" dirty="0">
+              <a:rPr lang="en-US" sz="1300" b="1" dirty="0">
                 <a:solidFill>
                   <a:srgbClr val="0068B7"/>
                 </a:solidFill>
@@ -6341,20 +6558,20 @@
               </a:rPr>
               <a:t>Key idea</a:t>
             </a:r>
-            <a:endParaRPr lang="en-US" sz="950" dirty="0"/>
-          </a:p>
-        </p:txBody>
-      </p:sp>
-      <p:sp>
-        <p:nvSpPr>
-          <p:cNvPr id="13" name="Text 11"/>
-          <p:cNvSpPr/>
-          <p:nvPr/>
-        </p:nvSpPr>
-        <p:spPr>
-          <a:xfrm>
-            <a:off x="8074152" y="1856232"/>
-            <a:ext cx="2825496" cy="1261872"/>
+            <a:endParaRPr lang="en-US" sz="1300" dirty="0"/>
+          </a:p>
+        </p:txBody>
+      </p:sp>
+      <p:sp>
+        <p:nvSpPr>
+          <p:cNvPr id="14" name="Text 12"/>
+          <p:cNvSpPr/>
+          <p:nvPr/>
+        </p:nvSpPr>
+        <p:spPr>
+          <a:xfrm>
+            <a:off x="8074152" y="1920240"/>
+            <a:ext cx="2825496" cy="1188720"/>
           </a:xfrm>
           <a:prstGeom prst="rect">
             <a:avLst/>
@@ -6372,7 +6589,7 @@
               <a:buNone/>
             </a:pPr>
             <a:r>
-              <a:rPr lang="en-US" sz="1250" dirty="0">
+              <a:rPr lang="en-US" sz="1550" dirty="0">
                 <a:solidFill>
                   <a:srgbClr val="17364A"/>
                 </a:solidFill>
@@ -6382,13 +6599,13 @@
               </a:rPr>
               <a:t>Which data quality problems most often affect your program area?</a:t>
             </a:r>
-            <a:endParaRPr lang="en-US" sz="1250" dirty="0"/>
-          </a:p>
-        </p:txBody>
-      </p:sp>
-      <p:sp>
-        <p:nvSpPr>
-          <p:cNvPr id="14" name="Shape 12"/>
+            <a:endParaRPr lang="en-US" sz="1550" dirty="0"/>
+          </a:p>
+        </p:txBody>
+      </p:sp>
+      <p:sp>
+        <p:nvSpPr>
+          <p:cNvPr id="15" name="Shape 13"/>
           <p:cNvSpPr/>
           <p:nvPr/>
         </p:nvSpPr>
@@ -6415,14 +6632,14 @@
       </p:sp>
       <p:sp>
         <p:nvSpPr>
-          <p:cNvPr id="15" name="Text 13"/>
+          <p:cNvPr id="16" name="Text 14"/>
           <p:cNvSpPr/>
           <p:nvPr/>
         </p:nvSpPr>
         <p:spPr>
           <a:xfrm>
             <a:off x="8074152" y="3666744"/>
-            <a:ext cx="2825496" cy="201168"/>
+            <a:ext cx="2825496" cy="256032"/>
           </a:xfrm>
           <a:prstGeom prst="rect">
             <a:avLst/>
@@ -6438,7 +6655,7 @@
               <a:buNone/>
             </a:pPr>
             <a:r>
-              <a:rPr lang="en-US" sz="950" b="1" dirty="0">
+              <a:rPr lang="en-US" sz="1300" b="1" dirty="0">
                 <a:solidFill>
                   <a:srgbClr val="0068B7"/>
                 </a:solidFill>
@@ -6448,20 +6665,20 @@
               </a:rPr>
               <a:t>Use this for</a:t>
             </a:r>
-            <a:endParaRPr lang="en-US" sz="950" dirty="0"/>
-          </a:p>
-        </p:txBody>
-      </p:sp>
-      <p:sp>
-        <p:nvSpPr>
-          <p:cNvPr id="16" name="Text 14"/>
-          <p:cNvSpPr/>
-          <p:nvPr/>
-        </p:nvSpPr>
-        <p:spPr>
-          <a:xfrm>
-            <a:off x="8074152" y="3959352"/>
-            <a:ext cx="2825496" cy="1170432"/>
+            <a:endParaRPr lang="en-US" sz="1300" dirty="0"/>
+          </a:p>
+        </p:txBody>
+      </p:sp>
+      <p:sp>
+        <p:nvSpPr>
+          <p:cNvPr id="17" name="Text 15"/>
+          <p:cNvSpPr/>
+          <p:nvPr/>
+        </p:nvSpPr>
+        <p:spPr>
+          <a:xfrm>
+            <a:off x="8074152" y="4023360"/>
+            <a:ext cx="2825496" cy="1097280"/>
           </a:xfrm>
           <a:prstGeom prst="rect">
             <a:avLst/>
@@ -6479,7 +6696,7 @@
               <a:buNone/>
             </a:pPr>
             <a:r>
-              <a:rPr lang="en-US" sz="1250" dirty="0">
+              <a:rPr lang="en-US" sz="1550" dirty="0">
                 <a:solidFill>
                   <a:srgbClr val="17364A"/>
                 </a:solidFill>
@@ -6489,7 +6706,7 @@
               </a:rPr>
               <a:t>Connect the concept to public health decisions, safeguards, documentation, or implementation work.</a:t>
             </a:r>
-            <a:endParaRPr lang="en-US" sz="1250" dirty="0"/>
+            <a:endParaRPr lang="en-US" sz="1550" dirty="0"/>
           </a:p>
         </p:txBody>
       </p:sp>
@@ -6686,7 +6903,7 @@
                 <a:ea typeface="Aptos" pitchFamily="34" charset="-122"/>
                 <a:cs typeface="Aptos" pitchFamily="34" charset="-120"/>
               </a:rPr>
-              <a:t>© Paula Soper</a:t>
+              <a:t>Â© Paula Soper</a:t>
             </a:r>
             <a:endParaRPr lang="en-US" sz="800" dirty="0"/>
           </a:p>
@@ -6700,8 +6917,47 @@
         </p:nvSpPr>
         <p:spPr>
           <a:xfrm>
+            <a:off x="11137392" y="6510528"/>
+            <a:ext cx="411480" cy="201168"/>
+          </a:xfrm>
+          <a:prstGeom prst="rect">
+            <a:avLst/>
+          </a:prstGeom>
+          <a:noFill/>
+          <a:ln/>
+        </p:spPr>
+        <p:txBody>
+          <a:bodyPr wrap="square" lIns="0" tIns="0" rIns="0" bIns="0" rtlCol="0" anchor="ctr"/>
+          <a:lstStyle/>
+          <a:p>
+            <a:pPr algn="r" indent="0" marL="0">
+              <a:buNone/>
+            </a:pPr>
+            <a:r>
+              <a:rPr lang="en-US" sz="900" dirty="0">
+                <a:solidFill>
+                  <a:srgbClr val="5F7181"/>
+                </a:solidFill>
+                <a:latin typeface="Aptos" pitchFamily="34" charset="0"/>
+                <a:ea typeface="Aptos" pitchFamily="34" charset="-122"/>
+                <a:cs typeface="Aptos" pitchFamily="34" charset="-120"/>
+              </a:rPr>
+              <a:t>16</a:t>
+            </a:r>
+            <a:endParaRPr lang="en-US" sz="900" dirty="0"/>
+          </a:p>
+        </p:txBody>
+      </p:sp>
+      <p:sp>
+        <p:nvSpPr>
+          <p:cNvPr id="8" name="Text 6"/>
+          <p:cNvSpPr/>
+          <p:nvPr/>
+        </p:nvSpPr>
+        <p:spPr>
+          <a:xfrm>
             <a:off x="640080" y="658368"/>
-            <a:ext cx="10881360" cy="566928"/>
+            <a:ext cx="10881360" cy="713232"/>
           </a:xfrm>
           <a:prstGeom prst="rect">
             <a:avLst/>
@@ -6719,7 +6975,7 @@
               <a:buNone/>
             </a:pPr>
             <a:r>
-              <a:rPr lang="en-US" sz="2700" b="1" dirty="0">
+              <a:rPr lang="en-US" sz="3400" b="1" dirty="0">
                 <a:solidFill>
                   <a:srgbClr val="003A63"/>
                 </a:solidFill>
@@ -6729,20 +6985,20 @@
               </a:rPr>
               <a:t>Reflection Questions Continued</a:t>
             </a:r>
-            <a:endParaRPr lang="en-US" sz="2700" dirty="0"/>
-          </a:p>
-        </p:txBody>
-      </p:sp>
-      <p:sp>
-        <p:nvSpPr>
-          <p:cNvPr id="8" name="Text 6"/>
-          <p:cNvSpPr/>
-          <p:nvPr/>
-        </p:nvSpPr>
-        <p:spPr>
-          <a:xfrm>
-            <a:off x="868680" y="1417320"/>
-            <a:ext cx="6675120" cy="4434840"/>
+            <a:endParaRPr lang="en-US" sz="3400" dirty="0"/>
+          </a:p>
+        </p:txBody>
+      </p:sp>
+      <p:sp>
+        <p:nvSpPr>
+          <p:cNvPr id="9" name="Text 7"/>
+          <p:cNvSpPr/>
+          <p:nvPr/>
+        </p:nvSpPr>
+        <p:spPr>
+          <a:xfrm>
+            <a:off x="868680" y="1508760"/>
+            <a:ext cx="6537960" cy="4160520"/>
           </a:xfrm>
           <a:prstGeom prst="rect">
             <a:avLst/>
@@ -6757,7 +7013,7 @@
           <a:lstStyle/>
           <a:p>
             <a:r>
-              <a:rPr lang="en-US" sz="1700" dirty="0">
+              <a:rPr lang="en-US" sz="2100" dirty="0">
                 <a:solidFill>
                   <a:srgbClr val="17364A"/>
                 </a:solidFill>
@@ -6767,11 +7023,11 @@
               </a:rPr>
               <a:t>How would staff detect data drift?</a:t>
             </a:r>
-            <a:endParaRPr lang="en-US" sz="1700" dirty="0"/>
-          </a:p>
-          <a:p>
-            <a:r>
-              <a:rPr lang="en-US" sz="1700" dirty="0">
+            <a:endParaRPr lang="en-US" sz="2100" dirty="0"/>
+          </a:p>
+          <a:p>
+            <a:r>
+              <a:rPr lang="en-US" sz="2100" dirty="0">
                 <a:solidFill>
                   <a:srgbClr val="17364A"/>
                 </a:solidFill>
@@ -6781,13 +7037,13 @@
               </a:rPr>
               <a:t>Who has authority to pause or limit AI use when data quality is insufficient?</a:t>
             </a:r>
-            <a:endParaRPr lang="en-US" sz="1700" dirty="0"/>
-          </a:p>
-        </p:txBody>
-      </p:sp>
-      <p:sp>
-        <p:nvSpPr>
-          <p:cNvPr id="9" name="Shape 7"/>
+            <a:endParaRPr lang="en-US" sz="2100" dirty="0"/>
+          </a:p>
+        </p:txBody>
+      </p:sp>
+      <p:sp>
+        <p:nvSpPr>
+          <p:cNvPr id="10" name="Shape 8"/>
           <p:cNvSpPr/>
           <p:nvPr/>
         </p:nvSpPr>
@@ -6814,14 +7070,14 @@
       </p:sp>
       <p:sp>
         <p:nvSpPr>
-          <p:cNvPr id="10" name="Text 8"/>
+          <p:cNvPr id="11" name="Text 9"/>
           <p:cNvSpPr/>
           <p:nvPr/>
         </p:nvSpPr>
         <p:spPr>
           <a:xfrm>
             <a:off x="8074152" y="1563624"/>
-            <a:ext cx="2825496" cy="201168"/>
+            <a:ext cx="2825496" cy="256032"/>
           </a:xfrm>
           <a:prstGeom prst="rect">
             <a:avLst/>
@@ -6837,7 +7093,7 @@
               <a:buNone/>
             </a:pPr>
             <a:r>
-              <a:rPr lang="en-US" sz="950" b="1" dirty="0">
+              <a:rPr lang="en-US" sz="1300" b="1" dirty="0">
                 <a:solidFill>
                   <a:srgbClr val="0068B7"/>
                 </a:solidFill>
@@ -6847,20 +7103,20 @@
               </a:rPr>
               <a:t>Key idea</a:t>
             </a:r>
-            <a:endParaRPr lang="en-US" sz="950" dirty="0"/>
-          </a:p>
-        </p:txBody>
-      </p:sp>
-      <p:sp>
-        <p:nvSpPr>
-          <p:cNvPr id="11" name="Text 9"/>
-          <p:cNvSpPr/>
-          <p:nvPr/>
-        </p:nvSpPr>
-        <p:spPr>
-          <a:xfrm>
-            <a:off x="8074152" y="1856232"/>
-            <a:ext cx="2825496" cy="1261872"/>
+            <a:endParaRPr lang="en-US" sz="1300" dirty="0"/>
+          </a:p>
+        </p:txBody>
+      </p:sp>
+      <p:sp>
+        <p:nvSpPr>
+          <p:cNvPr id="12" name="Text 10"/>
+          <p:cNvSpPr/>
+          <p:nvPr/>
+        </p:nvSpPr>
+        <p:spPr>
+          <a:xfrm>
+            <a:off x="8074152" y="1920240"/>
+            <a:ext cx="2825496" cy="1188720"/>
           </a:xfrm>
           <a:prstGeom prst="rect">
             <a:avLst/>
@@ -6878,7 +7134,7 @@
               <a:buNone/>
             </a:pPr>
             <a:r>
-              <a:rPr lang="en-US" sz="1250" dirty="0">
+              <a:rPr lang="en-US" sz="1550" dirty="0">
                 <a:solidFill>
                   <a:srgbClr val="17364A"/>
                 </a:solidFill>
@@ -6888,13 +7144,13 @@
               </a:rPr>
               <a:t>How would staff detect data drift?</a:t>
             </a:r>
-            <a:endParaRPr lang="en-US" sz="1250" dirty="0"/>
-          </a:p>
-        </p:txBody>
-      </p:sp>
-      <p:sp>
-        <p:nvSpPr>
-          <p:cNvPr id="12" name="Shape 10"/>
+            <a:endParaRPr lang="en-US" sz="1550" dirty="0"/>
+          </a:p>
+        </p:txBody>
+      </p:sp>
+      <p:sp>
+        <p:nvSpPr>
+          <p:cNvPr id="13" name="Shape 11"/>
           <p:cNvSpPr/>
           <p:nvPr/>
         </p:nvSpPr>
@@ -6921,14 +7177,14 @@
       </p:sp>
       <p:sp>
         <p:nvSpPr>
-          <p:cNvPr id="13" name="Text 11"/>
+          <p:cNvPr id="14" name="Text 12"/>
           <p:cNvSpPr/>
           <p:nvPr/>
         </p:nvSpPr>
         <p:spPr>
           <a:xfrm>
             <a:off x="8074152" y="3666744"/>
-            <a:ext cx="2825496" cy="201168"/>
+            <a:ext cx="2825496" cy="256032"/>
           </a:xfrm>
           <a:prstGeom prst="rect">
             <a:avLst/>
@@ -6944,7 +7200,7 @@
               <a:buNone/>
             </a:pPr>
             <a:r>
-              <a:rPr lang="en-US" sz="950" b="1" dirty="0">
+              <a:rPr lang="en-US" sz="1300" b="1" dirty="0">
                 <a:solidFill>
                   <a:srgbClr val="0068B7"/>
                 </a:solidFill>
@@ -6954,20 +7210,20 @@
               </a:rPr>
               <a:t>Use this for</a:t>
             </a:r>
-            <a:endParaRPr lang="en-US" sz="950" dirty="0"/>
-          </a:p>
-        </p:txBody>
-      </p:sp>
-      <p:sp>
-        <p:nvSpPr>
-          <p:cNvPr id="14" name="Text 12"/>
-          <p:cNvSpPr/>
-          <p:nvPr/>
-        </p:nvSpPr>
-        <p:spPr>
-          <a:xfrm>
-            <a:off x="8074152" y="3959352"/>
-            <a:ext cx="2825496" cy="1170432"/>
+            <a:endParaRPr lang="en-US" sz="1300" dirty="0"/>
+          </a:p>
+        </p:txBody>
+      </p:sp>
+      <p:sp>
+        <p:nvSpPr>
+          <p:cNvPr id="15" name="Text 13"/>
+          <p:cNvSpPr/>
+          <p:nvPr/>
+        </p:nvSpPr>
+        <p:spPr>
+          <a:xfrm>
+            <a:off x="8074152" y="4023360"/>
+            <a:ext cx="2825496" cy="1097280"/>
           </a:xfrm>
           <a:prstGeom prst="rect">
             <a:avLst/>
@@ -6985,7 +7241,7 @@
               <a:buNone/>
             </a:pPr>
             <a:r>
-              <a:rPr lang="en-US" sz="1250" dirty="0">
+              <a:rPr lang="en-US" sz="1550" dirty="0">
                 <a:solidFill>
                   <a:srgbClr val="17364A"/>
                 </a:solidFill>
@@ -6995,7 +7251,7 @@
               </a:rPr>
               <a:t>Connect the concept to public health decisions, safeguards, documentation, or implementation work.</a:t>
             </a:r>
-            <a:endParaRPr lang="en-US" sz="1250" dirty="0"/>
+            <a:endParaRPr lang="en-US" sz="1550" dirty="0"/>
           </a:p>
         </p:txBody>
       </p:sp>
@@ -7192,7 +7448,7 @@
                 <a:ea typeface="Aptos" pitchFamily="34" charset="-122"/>
                 <a:cs typeface="Aptos" pitchFamily="34" charset="-120"/>
               </a:rPr>
-              <a:t>© Paula Soper</a:t>
+              <a:t>Â© Paula Soper</a:t>
             </a:r>
             <a:endParaRPr lang="en-US" sz="800" dirty="0"/>
           </a:p>
@@ -7200,7 +7456,46 @@
       </p:sp>
       <p:sp>
         <p:nvSpPr>
-          <p:cNvPr id="7" name="Shape 5"/>
+          <p:cNvPr id="7" name="Text 5"/>
+          <p:cNvSpPr/>
+          <p:nvPr/>
+        </p:nvSpPr>
+        <p:spPr>
+          <a:xfrm>
+            <a:off x="11137392" y="6510528"/>
+            <a:ext cx="411480" cy="201168"/>
+          </a:xfrm>
+          <a:prstGeom prst="rect">
+            <a:avLst/>
+          </a:prstGeom>
+          <a:noFill/>
+          <a:ln/>
+        </p:spPr>
+        <p:txBody>
+          <a:bodyPr wrap="square" lIns="0" tIns="0" rIns="0" bIns="0" rtlCol="0" anchor="ctr"/>
+          <a:lstStyle/>
+          <a:p>
+            <a:pPr algn="r" indent="0" marL="0">
+              <a:buNone/>
+            </a:pPr>
+            <a:r>
+              <a:rPr lang="en-US" sz="900" dirty="0">
+                <a:solidFill>
+                  <a:srgbClr val="5F7181"/>
+                </a:solidFill>
+                <a:latin typeface="Aptos" pitchFamily="34" charset="0"/>
+                <a:ea typeface="Aptos" pitchFamily="34" charset="-122"/>
+                <a:cs typeface="Aptos" pitchFamily="34" charset="-120"/>
+              </a:rPr>
+              <a:t>17</a:t>
+            </a:r>
+            <a:endParaRPr lang="en-US" sz="900" dirty="0"/>
+          </a:p>
+        </p:txBody>
+      </p:sp>
+      <p:sp>
+        <p:nvSpPr>
+          <p:cNvPr id="8" name="Shape 6"/>
           <p:cNvSpPr/>
           <p:nvPr/>
         </p:nvSpPr>
@@ -7225,7 +7520,7 @@
       </p:sp>
       <p:sp>
         <p:nvSpPr>
-          <p:cNvPr id="8" name="Text 6"/>
+          <p:cNvPr id="9" name="Text 7"/>
           <p:cNvSpPr/>
           <p:nvPr/>
         </p:nvSpPr>
@@ -7264,14 +7559,14 @@
       </p:sp>
       <p:sp>
         <p:nvSpPr>
-          <p:cNvPr id="9" name="Text 7"/>
+          <p:cNvPr id="10" name="Text 8"/>
           <p:cNvSpPr/>
           <p:nvPr/>
         </p:nvSpPr>
         <p:spPr>
           <a:xfrm>
             <a:off x="640080" y="621792"/>
-            <a:ext cx="10881360" cy="566928"/>
+            <a:ext cx="10881360" cy="713232"/>
           </a:xfrm>
           <a:prstGeom prst="rect">
             <a:avLst/>
@@ -7289,7 +7584,7 @@
               <a:buNone/>
             </a:pPr>
             <a:r>
-              <a:rPr lang="en-US" sz="2700" b="1" dirty="0">
+              <a:rPr lang="en-US" sz="3400" b="1" dirty="0">
                 <a:solidFill>
                   <a:srgbClr val="003A63"/>
                 </a:solidFill>
@@ -7299,20 +7594,20 @@
               </a:rPr>
               <a:t>Practical Exercise</a:t>
             </a:r>
-            <a:endParaRPr lang="en-US" sz="2700" dirty="0"/>
-          </a:p>
-        </p:txBody>
-      </p:sp>
-      <p:sp>
-        <p:nvSpPr>
-          <p:cNvPr id="10" name="Text 8"/>
-          <p:cNvSpPr/>
-          <p:nvPr/>
-        </p:nvSpPr>
-        <p:spPr>
-          <a:xfrm>
-            <a:off x="868680" y="1417320"/>
-            <a:ext cx="6675120" cy="4434840"/>
+            <a:endParaRPr lang="en-US" sz="3400" dirty="0"/>
+          </a:p>
+        </p:txBody>
+      </p:sp>
+      <p:sp>
+        <p:nvSpPr>
+          <p:cNvPr id="11" name="Text 9"/>
+          <p:cNvSpPr/>
+          <p:nvPr/>
+        </p:nvSpPr>
+        <p:spPr>
+          <a:xfrm>
+            <a:off x="868680" y="1508760"/>
+            <a:ext cx="6537960" cy="4160520"/>
           </a:xfrm>
           <a:prstGeom prst="rect">
             <a:avLst/>
@@ -7327,7 +7622,7 @@
           <a:lstStyle/>
           <a:p>
             <a:r>
-              <a:rPr lang="en-US" sz="1700" dirty="0">
+              <a:rPr lang="en-US" sz="2100" dirty="0">
                 <a:solidFill>
                   <a:srgbClr val="17364A"/>
                 </a:solidFill>
@@ -7337,11 +7632,11 @@
               </a:rPr>
               <a:t>Create a data quality review plan for one AI-supported workflow.</a:t>
             </a:r>
-            <a:endParaRPr lang="en-US" sz="1700" dirty="0"/>
-          </a:p>
-          <a:p>
-            <a:r>
-              <a:rPr lang="en-US" sz="1700" dirty="0">
+            <a:endParaRPr lang="en-US" sz="2100" dirty="0"/>
+          </a:p>
+          <a:p>
+            <a:r>
+              <a:rPr lang="en-US" sz="2100" dirty="0">
                 <a:solidFill>
                   <a:srgbClr val="17364A"/>
                 </a:solidFill>
@@ -7349,15 +7644,15 @@
                 <a:ea typeface="Aptos" pitchFamily="34" charset="-122"/>
                 <a:cs typeface="Aptos" pitchFamily="34" charset="-120"/>
               </a:rPr>
-              <a:t>Include the use case, required fields, quality dimensions, thresholds or review rules, known limitations, equity concerns,.</a:t>
-            </a:r>
-            <a:endParaRPr lang="en-US" sz="1700" dirty="0"/>
-          </a:p>
-        </p:txBody>
-      </p:sp>
-      <p:sp>
-        <p:nvSpPr>
-          <p:cNvPr id="11" name="Shape 9"/>
+              <a:t>Include the use case, required fields, quality dimensions, thresholds or review rules, known.</a:t>
+            </a:r>
+            <a:endParaRPr lang="en-US" sz="2100" dirty="0"/>
+          </a:p>
+        </p:txBody>
+      </p:sp>
+      <p:sp>
+        <p:nvSpPr>
+          <p:cNvPr id="12" name="Shape 10"/>
           <p:cNvSpPr/>
           <p:nvPr/>
         </p:nvSpPr>
@@ -7384,14 +7679,14 @@
       </p:sp>
       <p:sp>
         <p:nvSpPr>
-          <p:cNvPr id="12" name="Text 10"/>
+          <p:cNvPr id="13" name="Text 11"/>
           <p:cNvSpPr/>
           <p:nvPr/>
         </p:nvSpPr>
         <p:spPr>
           <a:xfrm>
             <a:off x="8074152" y="1563624"/>
-            <a:ext cx="2825496" cy="201168"/>
+            <a:ext cx="2825496" cy="256032"/>
           </a:xfrm>
           <a:prstGeom prst="rect">
             <a:avLst/>
@@ -7407,7 +7702,7 @@
               <a:buNone/>
             </a:pPr>
             <a:r>
-              <a:rPr lang="en-US" sz="950" b="1" dirty="0">
+              <a:rPr lang="en-US" sz="1300" b="1" dirty="0">
                 <a:solidFill>
                   <a:srgbClr val="0068B7"/>
                 </a:solidFill>
@@ -7417,20 +7712,20 @@
               </a:rPr>
               <a:t>Key idea</a:t>
             </a:r>
-            <a:endParaRPr lang="en-US" sz="950" dirty="0"/>
-          </a:p>
-        </p:txBody>
-      </p:sp>
-      <p:sp>
-        <p:nvSpPr>
-          <p:cNvPr id="13" name="Text 11"/>
-          <p:cNvSpPr/>
-          <p:nvPr/>
-        </p:nvSpPr>
-        <p:spPr>
-          <a:xfrm>
-            <a:off x="8074152" y="1856232"/>
-            <a:ext cx="2825496" cy="1261872"/>
+            <a:endParaRPr lang="en-US" sz="1300" dirty="0"/>
+          </a:p>
+        </p:txBody>
+      </p:sp>
+      <p:sp>
+        <p:nvSpPr>
+          <p:cNvPr id="14" name="Text 12"/>
+          <p:cNvSpPr/>
+          <p:nvPr/>
+        </p:nvSpPr>
+        <p:spPr>
+          <a:xfrm>
+            <a:off x="8074152" y="1920240"/>
+            <a:ext cx="2825496" cy="1188720"/>
           </a:xfrm>
           <a:prstGeom prst="rect">
             <a:avLst/>
@@ -7448,7 +7743,7 @@
               <a:buNone/>
             </a:pPr>
             <a:r>
-              <a:rPr lang="en-US" sz="1250" dirty="0">
+              <a:rPr lang="en-US" sz="1550" dirty="0">
                 <a:solidFill>
                   <a:srgbClr val="17364A"/>
                 </a:solidFill>
@@ -7458,13 +7753,13 @@
               </a:rPr>
               <a:t>Create a data quality review plan for one AI-supported workflow.</a:t>
             </a:r>
-            <a:endParaRPr lang="en-US" sz="1250" dirty="0"/>
-          </a:p>
-        </p:txBody>
-      </p:sp>
-      <p:sp>
-        <p:nvSpPr>
-          <p:cNvPr id="14" name="Shape 12"/>
+            <a:endParaRPr lang="en-US" sz="1550" dirty="0"/>
+          </a:p>
+        </p:txBody>
+      </p:sp>
+      <p:sp>
+        <p:nvSpPr>
+          <p:cNvPr id="15" name="Shape 13"/>
           <p:cNvSpPr/>
           <p:nvPr/>
         </p:nvSpPr>
@@ -7491,14 +7786,14 @@
       </p:sp>
       <p:sp>
         <p:nvSpPr>
-          <p:cNvPr id="15" name="Text 13"/>
+          <p:cNvPr id="16" name="Text 14"/>
           <p:cNvSpPr/>
           <p:nvPr/>
         </p:nvSpPr>
         <p:spPr>
           <a:xfrm>
             <a:off x="8074152" y="3666744"/>
-            <a:ext cx="2825496" cy="201168"/>
+            <a:ext cx="2825496" cy="256032"/>
           </a:xfrm>
           <a:prstGeom prst="rect">
             <a:avLst/>
@@ -7514,7 +7809,7 @@
               <a:buNone/>
             </a:pPr>
             <a:r>
-              <a:rPr lang="en-US" sz="950" b="1" dirty="0">
+              <a:rPr lang="en-US" sz="1300" b="1" dirty="0">
                 <a:solidFill>
                   <a:srgbClr val="0068B7"/>
                 </a:solidFill>
@@ -7524,20 +7819,20 @@
               </a:rPr>
               <a:t>Use this for</a:t>
             </a:r>
-            <a:endParaRPr lang="en-US" sz="950" dirty="0"/>
-          </a:p>
-        </p:txBody>
-      </p:sp>
-      <p:sp>
-        <p:nvSpPr>
-          <p:cNvPr id="16" name="Text 14"/>
-          <p:cNvSpPr/>
-          <p:nvPr/>
-        </p:nvSpPr>
-        <p:spPr>
-          <a:xfrm>
-            <a:off x="8074152" y="3959352"/>
-            <a:ext cx="2825496" cy="1170432"/>
+            <a:endParaRPr lang="en-US" sz="1300" dirty="0"/>
+          </a:p>
+        </p:txBody>
+      </p:sp>
+      <p:sp>
+        <p:nvSpPr>
+          <p:cNvPr id="17" name="Text 15"/>
+          <p:cNvSpPr/>
+          <p:nvPr/>
+        </p:nvSpPr>
+        <p:spPr>
+          <a:xfrm>
+            <a:off x="8074152" y="4023360"/>
+            <a:ext cx="2825496" cy="1097280"/>
           </a:xfrm>
           <a:prstGeom prst="rect">
             <a:avLst/>
@@ -7555,7 +7850,7 @@
               <a:buNone/>
             </a:pPr>
             <a:r>
-              <a:rPr lang="en-US" sz="1250" dirty="0">
+              <a:rPr lang="en-US" sz="1550" dirty="0">
                 <a:solidFill>
                   <a:srgbClr val="17364A"/>
                 </a:solidFill>
@@ -7565,7 +7860,7 @@
               </a:rPr>
               <a:t>Connect the concept to public health decisions, safeguards, documentation, or implementation work.</a:t>
             </a:r>
-            <a:endParaRPr lang="en-US" sz="1250" dirty="0"/>
+            <a:endParaRPr lang="en-US" sz="1550" dirty="0"/>
           </a:p>
         </p:txBody>
       </p:sp>
@@ -7762,7 +8057,7 @@
                 <a:ea typeface="Aptos" pitchFamily="34" charset="-122"/>
                 <a:cs typeface="Aptos" pitchFamily="34" charset="-120"/>
               </a:rPr>
-              <a:t>© Paula Soper</a:t>
+              <a:t>Â© Paula Soper</a:t>
             </a:r>
             <a:endParaRPr lang="en-US" sz="800" dirty="0"/>
           </a:p>
@@ -7770,7 +8065,46 @@
       </p:sp>
       <p:sp>
         <p:nvSpPr>
-          <p:cNvPr id="7" name="Shape 5"/>
+          <p:cNvPr id="7" name="Text 5"/>
+          <p:cNvSpPr/>
+          <p:nvPr/>
+        </p:nvSpPr>
+        <p:spPr>
+          <a:xfrm>
+            <a:off x="11137392" y="6510528"/>
+            <a:ext cx="411480" cy="201168"/>
+          </a:xfrm>
+          <a:prstGeom prst="rect">
+            <a:avLst/>
+          </a:prstGeom>
+          <a:noFill/>
+          <a:ln/>
+        </p:spPr>
+        <p:txBody>
+          <a:bodyPr wrap="square" lIns="0" tIns="0" rIns="0" bIns="0" rtlCol="0" anchor="ctr"/>
+          <a:lstStyle/>
+          <a:p>
+            <a:pPr algn="r" indent="0" marL="0">
+              <a:buNone/>
+            </a:pPr>
+            <a:r>
+              <a:rPr lang="en-US" sz="900" dirty="0">
+                <a:solidFill>
+                  <a:srgbClr val="5F7181"/>
+                </a:solidFill>
+                <a:latin typeface="Aptos" pitchFamily="34" charset="0"/>
+                <a:ea typeface="Aptos" pitchFamily="34" charset="-122"/>
+                <a:cs typeface="Aptos" pitchFamily="34" charset="-120"/>
+              </a:rPr>
+              <a:t>18</a:t>
+            </a:r>
+            <a:endParaRPr lang="en-US" sz="900" dirty="0"/>
+          </a:p>
+        </p:txBody>
+      </p:sp>
+      <p:sp>
+        <p:nvSpPr>
+          <p:cNvPr id="8" name="Shape 6"/>
           <p:cNvSpPr/>
           <p:nvPr/>
         </p:nvSpPr>
@@ -7795,7 +8129,7 @@
       </p:sp>
       <p:sp>
         <p:nvSpPr>
-          <p:cNvPr id="8" name="Text 6"/>
+          <p:cNvPr id="9" name="Text 7"/>
           <p:cNvSpPr/>
           <p:nvPr/>
         </p:nvSpPr>
@@ -7834,14 +8168,14 @@
       </p:sp>
       <p:sp>
         <p:nvSpPr>
-          <p:cNvPr id="9" name="Text 7"/>
+          <p:cNvPr id="10" name="Text 8"/>
           <p:cNvSpPr/>
           <p:nvPr/>
         </p:nvSpPr>
         <p:spPr>
           <a:xfrm>
             <a:off x="640080" y="621792"/>
-            <a:ext cx="10881360" cy="566928"/>
+            <a:ext cx="10881360" cy="713232"/>
           </a:xfrm>
           <a:prstGeom prst="rect">
             <a:avLst/>
@@ -7859,7 +8193,7 @@
               <a:buNone/>
             </a:pPr>
             <a:r>
-              <a:rPr lang="en-US" sz="2700" b="1" dirty="0">
+              <a:rPr lang="en-US" sz="3400" b="1" dirty="0">
                 <a:solidFill>
                   <a:srgbClr val="003A63"/>
                 </a:solidFill>
@@ -7869,20 +8203,20 @@
               </a:rPr>
               <a:t>Expected Artifact or Evidence</a:t>
             </a:r>
-            <a:endParaRPr lang="en-US" sz="2700" dirty="0"/>
-          </a:p>
-        </p:txBody>
-      </p:sp>
-      <p:sp>
-        <p:nvSpPr>
-          <p:cNvPr id="10" name="Text 8"/>
-          <p:cNvSpPr/>
-          <p:nvPr/>
-        </p:nvSpPr>
-        <p:spPr>
-          <a:xfrm>
-            <a:off x="868680" y="1417320"/>
-            <a:ext cx="6675120" cy="4434840"/>
+            <a:endParaRPr lang="en-US" sz="3400" dirty="0"/>
+          </a:p>
+        </p:txBody>
+      </p:sp>
+      <p:sp>
+        <p:nvSpPr>
+          <p:cNvPr id="11" name="Text 9"/>
+          <p:cNvSpPr/>
+          <p:nvPr/>
+        </p:nvSpPr>
+        <p:spPr>
+          <a:xfrm>
+            <a:off x="868680" y="1508760"/>
+            <a:ext cx="6537960" cy="4160520"/>
           </a:xfrm>
           <a:prstGeom prst="rect">
             <a:avLst/>
@@ -7897,7 +8231,7 @@
           <a:lstStyle/>
           <a:p>
             <a:r>
-              <a:rPr lang="en-US" sz="1700" dirty="0">
+              <a:rPr lang="en-US" sz="2100" dirty="0">
                 <a:solidFill>
                   <a:srgbClr val="17364A"/>
                 </a:solidFill>
@@ -7907,11 +8241,11 @@
               </a:rPr>
               <a:t>Data quality review plan</a:t>
             </a:r>
-            <a:endParaRPr lang="en-US" sz="1700" dirty="0"/>
-          </a:p>
-          <a:p>
-            <a:r>
-              <a:rPr lang="en-US" sz="1700" dirty="0">
+            <a:endParaRPr lang="en-US" sz="2100" dirty="0"/>
+          </a:p>
+          <a:p>
+            <a:r>
+              <a:rPr lang="en-US" sz="2100" dirty="0">
                 <a:solidFill>
                   <a:srgbClr val="17364A"/>
                 </a:solidFill>
@@ -7921,11 +8255,11 @@
               </a:rPr>
               <a:t>Data quality checklist</a:t>
             </a:r>
-            <a:endParaRPr lang="en-US" sz="1700" dirty="0"/>
-          </a:p>
-          <a:p>
-            <a:r>
-              <a:rPr lang="en-US" sz="1700" dirty="0">
+            <a:endParaRPr lang="en-US" sz="2100" dirty="0"/>
+          </a:p>
+          <a:p>
+            <a:r>
+              <a:rPr lang="en-US" sz="2100" dirty="0">
                 <a:solidFill>
                   <a:srgbClr val="17364A"/>
                 </a:solidFill>
@@ -7935,13 +8269,13 @@
               </a:rPr>
               <a:t>Thresholds or review criteria</a:t>
             </a:r>
-            <a:endParaRPr lang="en-US" sz="1700" dirty="0"/>
-          </a:p>
-        </p:txBody>
-      </p:sp>
-      <p:sp>
-        <p:nvSpPr>
-          <p:cNvPr id="11" name="Shape 9"/>
+            <a:endParaRPr lang="en-US" sz="2100" dirty="0"/>
+          </a:p>
+        </p:txBody>
+      </p:sp>
+      <p:sp>
+        <p:nvSpPr>
+          <p:cNvPr id="12" name="Shape 10"/>
           <p:cNvSpPr/>
           <p:nvPr/>
         </p:nvSpPr>
@@ -7968,14 +8302,14 @@
       </p:sp>
       <p:sp>
         <p:nvSpPr>
-          <p:cNvPr id="12" name="Text 10"/>
+          <p:cNvPr id="13" name="Text 11"/>
           <p:cNvSpPr/>
           <p:nvPr/>
         </p:nvSpPr>
         <p:spPr>
           <a:xfrm>
             <a:off x="8074152" y="1563624"/>
-            <a:ext cx="2825496" cy="201168"/>
+            <a:ext cx="2825496" cy="256032"/>
           </a:xfrm>
           <a:prstGeom prst="rect">
             <a:avLst/>
@@ -7991,7 +8325,7 @@
               <a:buNone/>
             </a:pPr>
             <a:r>
-              <a:rPr lang="en-US" sz="950" b="1" dirty="0">
+              <a:rPr lang="en-US" sz="1300" b="1" dirty="0">
                 <a:solidFill>
                   <a:srgbClr val="0068B7"/>
                 </a:solidFill>
@@ -8001,20 +8335,20 @@
               </a:rPr>
               <a:t>Key idea</a:t>
             </a:r>
-            <a:endParaRPr lang="en-US" sz="950" dirty="0"/>
-          </a:p>
-        </p:txBody>
-      </p:sp>
-      <p:sp>
-        <p:nvSpPr>
-          <p:cNvPr id="13" name="Text 11"/>
-          <p:cNvSpPr/>
-          <p:nvPr/>
-        </p:nvSpPr>
-        <p:spPr>
-          <a:xfrm>
-            <a:off x="8074152" y="1856232"/>
-            <a:ext cx="2825496" cy="1261872"/>
+            <a:endParaRPr lang="en-US" sz="1300" dirty="0"/>
+          </a:p>
+        </p:txBody>
+      </p:sp>
+      <p:sp>
+        <p:nvSpPr>
+          <p:cNvPr id="14" name="Text 12"/>
+          <p:cNvSpPr/>
+          <p:nvPr/>
+        </p:nvSpPr>
+        <p:spPr>
+          <a:xfrm>
+            <a:off x="8074152" y="1920240"/>
+            <a:ext cx="2825496" cy="1188720"/>
           </a:xfrm>
           <a:prstGeom prst="rect">
             <a:avLst/>
@@ -8032,7 +8366,7 @@
               <a:buNone/>
             </a:pPr>
             <a:r>
-              <a:rPr lang="en-US" sz="1250" dirty="0">
+              <a:rPr lang="en-US" sz="1550" dirty="0">
                 <a:solidFill>
                   <a:srgbClr val="17364A"/>
                 </a:solidFill>
@@ -8042,13 +8376,13 @@
               </a:rPr>
               <a:t>Data quality review plan</a:t>
             </a:r>
-            <a:endParaRPr lang="en-US" sz="1250" dirty="0"/>
-          </a:p>
-        </p:txBody>
-      </p:sp>
-      <p:sp>
-        <p:nvSpPr>
-          <p:cNvPr id="14" name="Shape 12"/>
+            <a:endParaRPr lang="en-US" sz="1550" dirty="0"/>
+          </a:p>
+        </p:txBody>
+      </p:sp>
+      <p:sp>
+        <p:nvSpPr>
+          <p:cNvPr id="15" name="Shape 13"/>
           <p:cNvSpPr/>
           <p:nvPr/>
         </p:nvSpPr>
@@ -8075,14 +8409,14 @@
       </p:sp>
       <p:sp>
         <p:nvSpPr>
-          <p:cNvPr id="15" name="Text 13"/>
+          <p:cNvPr id="16" name="Text 14"/>
           <p:cNvSpPr/>
           <p:nvPr/>
         </p:nvSpPr>
         <p:spPr>
           <a:xfrm>
             <a:off x="8074152" y="3666744"/>
-            <a:ext cx="2825496" cy="201168"/>
+            <a:ext cx="2825496" cy="256032"/>
           </a:xfrm>
           <a:prstGeom prst="rect">
             <a:avLst/>
@@ -8098,7 +8432,7 @@
               <a:buNone/>
             </a:pPr>
             <a:r>
-              <a:rPr lang="en-US" sz="950" b="1" dirty="0">
+              <a:rPr lang="en-US" sz="1300" b="1" dirty="0">
                 <a:solidFill>
                   <a:srgbClr val="0068B7"/>
                 </a:solidFill>
@@ -8108,20 +8442,20 @@
               </a:rPr>
               <a:t>Use this for</a:t>
             </a:r>
-            <a:endParaRPr lang="en-US" sz="950" dirty="0"/>
-          </a:p>
-        </p:txBody>
-      </p:sp>
-      <p:sp>
-        <p:nvSpPr>
-          <p:cNvPr id="16" name="Text 14"/>
-          <p:cNvSpPr/>
-          <p:nvPr/>
-        </p:nvSpPr>
-        <p:spPr>
-          <a:xfrm>
-            <a:off x="8074152" y="3959352"/>
-            <a:ext cx="2825496" cy="1170432"/>
+            <a:endParaRPr lang="en-US" sz="1300" dirty="0"/>
+          </a:p>
+        </p:txBody>
+      </p:sp>
+      <p:sp>
+        <p:nvSpPr>
+          <p:cNvPr id="17" name="Text 15"/>
+          <p:cNvSpPr/>
+          <p:nvPr/>
+        </p:nvSpPr>
+        <p:spPr>
+          <a:xfrm>
+            <a:off x="8074152" y="4023360"/>
+            <a:ext cx="2825496" cy="1097280"/>
           </a:xfrm>
           <a:prstGeom prst="rect">
             <a:avLst/>
@@ -8139,7 +8473,7 @@
               <a:buNone/>
             </a:pPr>
             <a:r>
-              <a:rPr lang="en-US" sz="1250" dirty="0">
+              <a:rPr lang="en-US" sz="1550" dirty="0">
                 <a:solidFill>
                   <a:srgbClr val="17364A"/>
                 </a:solidFill>
@@ -8149,7 +8483,7 @@
               </a:rPr>
               <a:t>Connect the concept to public health decisions, safeguards, documentation, or implementation work.</a:t>
             </a:r>
-            <a:endParaRPr lang="en-US" sz="1250" dirty="0"/>
+            <a:endParaRPr lang="en-US" sz="1550" dirty="0"/>
           </a:p>
         </p:txBody>
       </p:sp>
@@ -8346,7 +8680,7 @@
                 <a:ea typeface="Aptos" pitchFamily="34" charset="-122"/>
                 <a:cs typeface="Aptos" pitchFamily="34" charset="-120"/>
               </a:rPr>
-              <a:t>© Paula Soper</a:t>
+              <a:t>Â© Paula Soper</a:t>
             </a:r>
             <a:endParaRPr lang="en-US" sz="800" dirty="0"/>
           </a:p>
@@ -8360,8 +8694,47 @@
         </p:nvSpPr>
         <p:spPr>
           <a:xfrm>
+            <a:off x="11137392" y="6510528"/>
+            <a:ext cx="411480" cy="201168"/>
+          </a:xfrm>
+          <a:prstGeom prst="rect">
+            <a:avLst/>
+          </a:prstGeom>
+          <a:noFill/>
+          <a:ln/>
+        </p:spPr>
+        <p:txBody>
+          <a:bodyPr wrap="square" lIns="0" tIns="0" rIns="0" bIns="0" rtlCol="0" anchor="ctr"/>
+          <a:lstStyle/>
+          <a:p>
+            <a:pPr algn="r" indent="0" marL="0">
+              <a:buNone/>
+            </a:pPr>
+            <a:r>
+              <a:rPr lang="en-US" sz="900" dirty="0">
+                <a:solidFill>
+                  <a:srgbClr val="5F7181"/>
+                </a:solidFill>
+                <a:latin typeface="Aptos" pitchFamily="34" charset="0"/>
+                <a:ea typeface="Aptos" pitchFamily="34" charset="-122"/>
+                <a:cs typeface="Aptos" pitchFamily="34" charset="-120"/>
+              </a:rPr>
+              <a:t>19</a:t>
+            </a:r>
+            <a:endParaRPr lang="en-US" sz="900" dirty="0"/>
+          </a:p>
+        </p:txBody>
+      </p:sp>
+      <p:sp>
+        <p:nvSpPr>
+          <p:cNvPr id="8" name="Text 6"/>
+          <p:cNvSpPr/>
+          <p:nvPr/>
+        </p:nvSpPr>
+        <p:spPr>
+          <a:xfrm>
             <a:off x="640080" y="658368"/>
-            <a:ext cx="10881360" cy="566928"/>
+            <a:ext cx="10881360" cy="713232"/>
           </a:xfrm>
           <a:prstGeom prst="rect">
             <a:avLst/>
@@ -8379,7 +8752,7 @@
               <a:buNone/>
             </a:pPr>
             <a:r>
-              <a:rPr lang="en-US" sz="2700" b="1" dirty="0">
+              <a:rPr lang="en-US" sz="3400" b="1" dirty="0">
                 <a:solidFill>
                   <a:srgbClr val="003A63"/>
                 </a:solidFill>
@@ -8389,20 +8762,20 @@
               </a:rPr>
               <a:t>Expected Artifact or Evidence Continued</a:t>
             </a:r>
-            <a:endParaRPr lang="en-US" sz="2700" dirty="0"/>
-          </a:p>
-        </p:txBody>
-      </p:sp>
-      <p:sp>
-        <p:nvSpPr>
-          <p:cNvPr id="8" name="Text 6"/>
-          <p:cNvSpPr/>
-          <p:nvPr/>
-        </p:nvSpPr>
-        <p:spPr>
-          <a:xfrm>
-            <a:off x="868680" y="1417320"/>
-            <a:ext cx="6675120" cy="4434840"/>
+            <a:endParaRPr lang="en-US" sz="3400" dirty="0"/>
+          </a:p>
+        </p:txBody>
+      </p:sp>
+      <p:sp>
+        <p:nvSpPr>
+          <p:cNvPr id="9" name="Text 7"/>
+          <p:cNvSpPr/>
+          <p:nvPr/>
+        </p:nvSpPr>
+        <p:spPr>
+          <a:xfrm>
+            <a:off x="868680" y="1508760"/>
+            <a:ext cx="6537960" cy="4160520"/>
           </a:xfrm>
           <a:prstGeom prst="rect">
             <a:avLst/>
@@ -8417,7 +8790,7 @@
           <a:lstStyle/>
           <a:p>
             <a:r>
-              <a:rPr lang="en-US" sz="1700" dirty="0">
+              <a:rPr lang="en-US" sz="2100" dirty="0">
                 <a:solidFill>
                   <a:srgbClr val="17364A"/>
                 </a:solidFill>
@@ -8427,13 +8800,13 @@
               </a:rPr>
               <a:t>Known limitations statement</a:t>
             </a:r>
-            <a:endParaRPr lang="en-US" sz="1700" dirty="0"/>
-          </a:p>
-        </p:txBody>
-      </p:sp>
-      <p:sp>
-        <p:nvSpPr>
-          <p:cNvPr id="9" name="Shape 7"/>
+            <a:endParaRPr lang="en-US" sz="2100" dirty="0"/>
+          </a:p>
+        </p:txBody>
+      </p:sp>
+      <p:sp>
+        <p:nvSpPr>
+          <p:cNvPr id="10" name="Shape 8"/>
           <p:cNvSpPr/>
           <p:nvPr/>
         </p:nvSpPr>
@@ -8460,14 +8833,14 @@
       </p:sp>
       <p:sp>
         <p:nvSpPr>
-          <p:cNvPr id="10" name="Text 8"/>
+          <p:cNvPr id="11" name="Text 9"/>
           <p:cNvSpPr/>
           <p:nvPr/>
         </p:nvSpPr>
         <p:spPr>
           <a:xfrm>
             <a:off x="8074152" y="1563624"/>
-            <a:ext cx="2825496" cy="201168"/>
+            <a:ext cx="2825496" cy="256032"/>
           </a:xfrm>
           <a:prstGeom prst="rect">
             <a:avLst/>
@@ -8483,7 +8856,7 @@
               <a:buNone/>
             </a:pPr>
             <a:r>
-              <a:rPr lang="en-US" sz="950" b="1" dirty="0">
+              <a:rPr lang="en-US" sz="1300" b="1" dirty="0">
                 <a:solidFill>
                   <a:srgbClr val="0068B7"/>
                 </a:solidFill>
@@ -8493,20 +8866,20 @@
               </a:rPr>
               <a:t>Key idea</a:t>
             </a:r>
-            <a:endParaRPr lang="en-US" sz="950" dirty="0"/>
-          </a:p>
-        </p:txBody>
-      </p:sp>
-      <p:sp>
-        <p:nvSpPr>
-          <p:cNvPr id="11" name="Text 9"/>
-          <p:cNvSpPr/>
-          <p:nvPr/>
-        </p:nvSpPr>
-        <p:spPr>
-          <a:xfrm>
-            <a:off x="8074152" y="1856232"/>
-            <a:ext cx="2825496" cy="1261872"/>
+            <a:endParaRPr lang="en-US" sz="1300" dirty="0"/>
+          </a:p>
+        </p:txBody>
+      </p:sp>
+      <p:sp>
+        <p:nvSpPr>
+          <p:cNvPr id="12" name="Text 10"/>
+          <p:cNvSpPr/>
+          <p:nvPr/>
+        </p:nvSpPr>
+        <p:spPr>
+          <a:xfrm>
+            <a:off x="8074152" y="1920240"/>
+            <a:ext cx="2825496" cy="1188720"/>
           </a:xfrm>
           <a:prstGeom prst="rect">
             <a:avLst/>
@@ -8524,7 +8897,7 @@
               <a:buNone/>
             </a:pPr>
             <a:r>
-              <a:rPr lang="en-US" sz="1250" dirty="0">
+              <a:rPr lang="en-US" sz="1550" dirty="0">
                 <a:solidFill>
                   <a:srgbClr val="17364A"/>
                 </a:solidFill>
@@ -8534,13 +8907,13 @@
               </a:rPr>
               <a:t>Known limitations statement</a:t>
             </a:r>
-            <a:endParaRPr lang="en-US" sz="1250" dirty="0"/>
-          </a:p>
-        </p:txBody>
-      </p:sp>
-      <p:sp>
-        <p:nvSpPr>
-          <p:cNvPr id="12" name="Shape 10"/>
+            <a:endParaRPr lang="en-US" sz="1550" dirty="0"/>
+          </a:p>
+        </p:txBody>
+      </p:sp>
+      <p:sp>
+        <p:nvSpPr>
+          <p:cNvPr id="13" name="Shape 11"/>
           <p:cNvSpPr/>
           <p:nvPr/>
         </p:nvSpPr>
@@ -8567,14 +8940,14 @@
       </p:sp>
       <p:sp>
         <p:nvSpPr>
-          <p:cNvPr id="13" name="Text 11"/>
+          <p:cNvPr id="14" name="Text 12"/>
           <p:cNvSpPr/>
           <p:nvPr/>
         </p:nvSpPr>
         <p:spPr>
           <a:xfrm>
             <a:off x="8074152" y="3666744"/>
-            <a:ext cx="2825496" cy="201168"/>
+            <a:ext cx="2825496" cy="256032"/>
           </a:xfrm>
           <a:prstGeom prst="rect">
             <a:avLst/>
@@ -8590,7 +8963,7 @@
               <a:buNone/>
             </a:pPr>
             <a:r>
-              <a:rPr lang="en-US" sz="950" b="1" dirty="0">
+              <a:rPr lang="en-US" sz="1300" b="1" dirty="0">
                 <a:solidFill>
                   <a:srgbClr val="0068B7"/>
                 </a:solidFill>
@@ -8600,20 +8973,20 @@
               </a:rPr>
               <a:t>Use this for</a:t>
             </a:r>
-            <a:endParaRPr lang="en-US" sz="950" dirty="0"/>
-          </a:p>
-        </p:txBody>
-      </p:sp>
-      <p:sp>
-        <p:nvSpPr>
-          <p:cNvPr id="14" name="Text 12"/>
-          <p:cNvSpPr/>
-          <p:nvPr/>
-        </p:nvSpPr>
-        <p:spPr>
-          <a:xfrm>
-            <a:off x="8074152" y="3959352"/>
-            <a:ext cx="2825496" cy="1170432"/>
+            <a:endParaRPr lang="en-US" sz="1300" dirty="0"/>
+          </a:p>
+        </p:txBody>
+      </p:sp>
+      <p:sp>
+        <p:nvSpPr>
+          <p:cNvPr id="15" name="Text 13"/>
+          <p:cNvSpPr/>
+          <p:nvPr/>
+        </p:nvSpPr>
+        <p:spPr>
+          <a:xfrm>
+            <a:off x="8074152" y="4023360"/>
+            <a:ext cx="2825496" cy="1097280"/>
           </a:xfrm>
           <a:prstGeom prst="rect">
             <a:avLst/>
@@ -8631,7 +9004,7 @@
               <a:buNone/>
             </a:pPr>
             <a:r>
-              <a:rPr lang="en-US" sz="1250" dirty="0">
+              <a:rPr lang="en-US" sz="1550" dirty="0">
                 <a:solidFill>
                   <a:srgbClr val="17364A"/>
                 </a:solidFill>
@@ -8641,7 +9014,7 @@
               </a:rPr>
               <a:t>Connect the concept to public health decisions, safeguards, documentation, or implementation work.</a:t>
             </a:r>
-            <a:endParaRPr lang="en-US" sz="1250" dirty="0"/>
+            <a:endParaRPr lang="en-US" sz="1550" dirty="0"/>
           </a:p>
         </p:txBody>
       </p:sp>
@@ -8838,7 +9211,7 @@
                 <a:ea typeface="Aptos" pitchFamily="34" charset="-122"/>
                 <a:cs typeface="Aptos" pitchFamily="34" charset="-120"/>
               </a:rPr>
-              <a:t>© Paula Soper</a:t>
+              <a:t>Â© Paula Soper</a:t>
             </a:r>
             <a:endParaRPr lang="en-US" sz="800" dirty="0"/>
           </a:p>
@@ -8852,8 +9225,47 @@
         </p:nvSpPr>
         <p:spPr>
           <a:xfrm>
+            <a:off x="11137392" y="6510528"/>
+            <a:ext cx="411480" cy="201168"/>
+          </a:xfrm>
+          <a:prstGeom prst="rect">
+            <a:avLst/>
+          </a:prstGeom>
+          <a:noFill/>
+          <a:ln/>
+        </p:spPr>
+        <p:txBody>
+          <a:bodyPr wrap="square" lIns="0" tIns="0" rIns="0" bIns="0" rtlCol="0" anchor="ctr"/>
+          <a:lstStyle/>
+          <a:p>
+            <a:pPr algn="r" indent="0" marL="0">
+              <a:buNone/>
+            </a:pPr>
+            <a:r>
+              <a:rPr lang="en-US" sz="900" dirty="0">
+                <a:solidFill>
+                  <a:srgbClr val="5F7181"/>
+                </a:solidFill>
+                <a:latin typeface="Aptos" pitchFamily="34" charset="0"/>
+                <a:ea typeface="Aptos" pitchFamily="34" charset="-122"/>
+                <a:cs typeface="Aptos" pitchFamily="34" charset="-120"/>
+              </a:rPr>
+              <a:t>2</a:t>
+            </a:r>
+            <a:endParaRPr lang="en-US" sz="900" dirty="0"/>
+          </a:p>
+        </p:txBody>
+      </p:sp>
+      <p:sp>
+        <p:nvSpPr>
+          <p:cNvPr id="8" name="Text 6"/>
+          <p:cNvSpPr/>
+          <p:nvPr/>
+        </p:nvSpPr>
+        <p:spPr>
+          <a:xfrm>
             <a:off x="640080" y="658368"/>
-            <a:ext cx="10881360" cy="566928"/>
+            <a:ext cx="10881360" cy="713232"/>
           </a:xfrm>
           <a:prstGeom prst="rect">
             <a:avLst/>
@@ -8871,7 +9283,7 @@
               <a:buNone/>
             </a:pPr>
             <a:r>
-              <a:rPr lang="en-US" sz="2700" b="1" dirty="0">
+              <a:rPr lang="en-US" sz="3400" b="1" dirty="0">
                 <a:solidFill>
                   <a:srgbClr val="003A63"/>
                 </a:solidFill>
@@ -8881,20 +9293,20 @@
               </a:rPr>
               <a:t>What this module helps you do</a:t>
             </a:r>
-            <a:endParaRPr lang="en-US" sz="2700" dirty="0"/>
-          </a:p>
-        </p:txBody>
-      </p:sp>
-      <p:sp>
-        <p:nvSpPr>
-          <p:cNvPr id="8" name="Text 6"/>
-          <p:cNvSpPr/>
-          <p:nvPr/>
-        </p:nvSpPr>
-        <p:spPr>
-          <a:xfrm>
-            <a:off x="868680" y="1417320"/>
-            <a:ext cx="6675120" cy="3291840"/>
+            <a:endParaRPr lang="en-US" sz="3400" dirty="0"/>
+          </a:p>
+        </p:txBody>
+      </p:sp>
+      <p:sp>
+        <p:nvSpPr>
+          <p:cNvPr id="9" name="Text 7"/>
+          <p:cNvSpPr/>
+          <p:nvPr/>
+        </p:nvSpPr>
+        <p:spPr>
+          <a:xfrm>
+            <a:off x="868680" y="1508760"/>
+            <a:ext cx="6446520" cy="2926080"/>
           </a:xfrm>
           <a:prstGeom prst="rect">
             <a:avLst/>
@@ -8909,7 +9321,7 @@
           <a:lstStyle/>
           <a:p>
             <a:r>
-              <a:rPr lang="en-US" sz="1700" dirty="0">
+              <a:rPr lang="en-US" sz="2100" dirty="0">
                 <a:solidFill>
                   <a:srgbClr val="17364A"/>
                 </a:solidFill>
@@ -8917,13 +9329,13 @@
                 <a:ea typeface="Aptos" pitchFamily="34" charset="-122"/>
                 <a:cs typeface="Aptos" pitchFamily="34" charset="-120"/>
               </a:rPr>
-              <a:t>Data quality engineering is the practical work of defining, measuring, improving, and monitoring data quality so that data are fit for use.</a:t>
-            </a:r>
-            <a:endParaRPr lang="en-US" sz="1700" dirty="0"/>
-          </a:p>
-          <a:p>
-            <a:r>
-              <a:rPr lang="en-US" sz="1700" dirty="0">
+              <a:t>Data quality engineering is the practical work of defining, measuring, improving, and monitoring data quality so.</a:t>
+            </a:r>
+            <a:endParaRPr lang="en-US" sz="2100" dirty="0"/>
+          </a:p>
+          <a:p>
+            <a:r>
+              <a:rPr lang="en-US" sz="2100" dirty="0">
                 <a:solidFill>
                   <a:srgbClr val="17364A"/>
                 </a:solidFill>
@@ -8933,11 +9345,11 @@
               </a:rPr>
               <a:t>In public health AI, data quality is not a background concern.</a:t>
             </a:r>
-            <a:endParaRPr lang="en-US" sz="1700" dirty="0"/>
-          </a:p>
-          <a:p>
-            <a:r>
-              <a:rPr lang="en-US" sz="1700" dirty="0">
+            <a:endParaRPr lang="en-US" sz="2100" dirty="0"/>
+          </a:p>
+          <a:p>
+            <a:r>
+              <a:rPr lang="en-US" sz="2100" dirty="0">
                 <a:solidFill>
                   <a:srgbClr val="17364A"/>
                 </a:solidFill>
@@ -8945,15 +9357,15 @@
                 <a:ea typeface="Aptos" pitchFamily="34" charset="-122"/>
                 <a:cs typeface="Aptos" pitchFamily="34" charset="-120"/>
               </a:rPr>
-              <a:t>It directly affects whether AI outputs are accurate, equitable, timely, and safe enough to support public health work.</a:t>
-            </a:r>
-            <a:endParaRPr lang="en-US" sz="1700" dirty="0"/>
-          </a:p>
-        </p:txBody>
-      </p:sp>
-      <p:sp>
-        <p:nvSpPr>
-          <p:cNvPr id="9" name="Shape 7"/>
+              <a:t>It directly affects whether AI outputs are accurate, equitable, timely, and safe enough to support public health.</a:t>
+            </a:r>
+            <a:endParaRPr lang="en-US" sz="2100" dirty="0"/>
+          </a:p>
+        </p:txBody>
+      </p:sp>
+      <p:sp>
+        <p:nvSpPr>
+          <p:cNvPr id="10" name="Shape 8"/>
           <p:cNvSpPr/>
           <p:nvPr/>
         </p:nvSpPr>
@@ -8980,14 +9392,14 @@
       </p:sp>
       <p:sp>
         <p:nvSpPr>
-          <p:cNvPr id="10" name="Text 8"/>
+          <p:cNvPr id="11" name="Text 9"/>
           <p:cNvSpPr/>
           <p:nvPr/>
         </p:nvSpPr>
         <p:spPr>
           <a:xfrm>
             <a:off x="8074152" y="1563624"/>
-            <a:ext cx="2825496" cy="201168"/>
+            <a:ext cx="2825496" cy="256032"/>
           </a:xfrm>
           <a:prstGeom prst="rect">
             <a:avLst/>
@@ -9003,7 +9415,7 @@
               <a:buNone/>
             </a:pPr>
             <a:r>
-              <a:rPr lang="en-US" sz="950" b="1" dirty="0">
+              <a:rPr lang="en-US" sz="1300" b="1" dirty="0">
                 <a:solidFill>
                   <a:srgbClr val="0068B7"/>
                 </a:solidFill>
@@ -9013,20 +9425,20 @@
               </a:rPr>
               <a:t>Module details</a:t>
             </a:r>
-            <a:endParaRPr lang="en-US" sz="950" dirty="0"/>
-          </a:p>
-        </p:txBody>
-      </p:sp>
-      <p:sp>
-        <p:nvSpPr>
-          <p:cNvPr id="11" name="Text 9"/>
-          <p:cNvSpPr/>
-          <p:nvPr/>
-        </p:nvSpPr>
-        <p:spPr>
-          <a:xfrm>
-            <a:off x="8074152" y="1856232"/>
-            <a:ext cx="2825496" cy="1353312"/>
+            <a:endParaRPr lang="en-US" sz="1300" dirty="0"/>
+          </a:p>
+        </p:txBody>
+      </p:sp>
+      <p:sp>
+        <p:nvSpPr>
+          <p:cNvPr id="12" name="Text 10"/>
+          <p:cNvSpPr/>
+          <p:nvPr/>
+        </p:nvSpPr>
+        <p:spPr>
+          <a:xfrm>
+            <a:off x="8074152" y="1920240"/>
+            <a:ext cx="2825496" cy="1280160"/>
           </a:xfrm>
           <a:prstGeom prst="rect">
             <a:avLst/>
@@ -9044,7 +9456,7 @@
               <a:buNone/>
             </a:pPr>
             <a:r>
-              <a:rPr lang="en-US" sz="1250" dirty="0">
+              <a:rPr lang="en-US" sz="1550" dirty="0">
                 <a:solidFill>
                   <a:srgbClr val="17364A"/>
                 </a:solidFill>
@@ -9054,14 +9466,14 @@
               </a:rPr>
               <a:t>Level: applied/foundational</a:t>
             </a:r>
-            <a:endParaRPr lang="en-US" sz="1250" dirty="0"/>
+            <a:endParaRPr lang="en-US" sz="1550" dirty="0"/>
           </a:p>
           <a:p>
             <a:pPr indent="0" marL="0">
               <a:buNone/>
             </a:pPr>
             <a:r>
-              <a:rPr lang="en-US" sz="1250" dirty="0">
+              <a:rPr lang="en-US" sz="1550" dirty="0">
                 <a:solidFill>
                   <a:srgbClr val="17364A"/>
                 </a:solidFill>
@@ -9071,14 +9483,14 @@
               </a:rPr>
               <a:t>Primary track: Operations and Data Quality Track</a:t>
             </a:r>
-            <a:endParaRPr lang="en-US" sz="1250" dirty="0"/>
+            <a:endParaRPr lang="en-US" sz="1550" dirty="0"/>
           </a:p>
           <a:p>
             <a:pPr indent="0" marL="0">
               <a:buNone/>
             </a:pPr>
             <a:r>
-              <a:rPr lang="en-US" sz="1250" dirty="0">
+              <a:rPr lang="en-US" sz="1550" dirty="0">
                 <a:solidFill>
                   <a:srgbClr val="17364A"/>
                 </a:solidFill>
@@ -9088,32 +9500,32 @@
               </a:rPr>
               <a:t>Appears in tracks: technical-architecture</a:t>
             </a:r>
-            <a:endParaRPr lang="en-US" sz="1250" dirty="0"/>
-          </a:p>
-        </p:txBody>
-      </p:sp>
-      <p:sp>
-        <p:nvSpPr>
-          <p:cNvPr id="12" name="Shape 10"/>
-          <p:cNvSpPr/>
-          <p:nvPr/>
-        </p:nvSpPr>
-        <p:spPr>
-          <a:xfrm>
-            <a:off x="7909560" y="3611880"/>
-            <a:ext cx="3154680" cy="1783080"/>
+            <a:endParaRPr lang="en-US" sz="1550" dirty="0"/>
+          </a:p>
+        </p:txBody>
+      </p:sp>
+      <p:sp>
+        <p:nvSpPr>
+          <p:cNvPr id="13" name="Shape 11"/>
+          <p:cNvSpPr/>
+          <p:nvPr/>
+        </p:nvSpPr>
+        <p:spPr>
+          <a:xfrm>
+            <a:off x="7635240" y="3730752"/>
+            <a:ext cx="1033272" cy="749808"/>
           </a:xfrm>
           <a:prstGeom prst="roundRect">
             <a:avLst>
-              <a:gd name="adj" fmla="val 6154"/>
+              <a:gd name="adj" fmla="val 14634"/>
             </a:avLst>
           </a:prstGeom>
           <a:solidFill>
-            <a:srgbClr val="EEF8ED"/>
+            <a:srgbClr val="0068B7"/>
           </a:solidFill>
           <a:ln w="12700">
             <a:solidFill>
-              <a:srgbClr val="B9D7E6"/>
+              <a:srgbClr val="0068B7"/>
             </a:solidFill>
             <a:prstDash val="solid"/>
           </a:ln>
@@ -9121,81 +9533,256 @@
       </p:sp>
       <p:sp>
         <p:nvSpPr>
-          <p:cNvPr id="13" name="Text 11"/>
-          <p:cNvSpPr/>
-          <p:nvPr/>
-        </p:nvSpPr>
-        <p:spPr>
-          <a:xfrm>
-            <a:off x="8074152" y="3758184"/>
-            <a:ext cx="2825496" cy="201168"/>
-          </a:xfrm>
-          <a:prstGeom prst="rect">
-            <a:avLst/>
-          </a:prstGeom>
-          <a:noFill/>
-          <a:ln/>
-        </p:spPr>
-        <p:txBody>
-          <a:bodyPr wrap="square" lIns="0" tIns="0" rIns="0" bIns="0" rtlCol="0" anchor="ctr"/>
-          <a:lstStyle/>
-          <a:p>
-            <a:pPr indent="0" marL="0">
-              <a:buNone/>
-            </a:pPr>
-            <a:r>
-              <a:rPr lang="en-US" sz="950" b="1" dirty="0">
-                <a:solidFill>
-                  <a:srgbClr val="0068B7"/>
-                </a:solidFill>
-                <a:latin typeface="Aptos" pitchFamily="34" charset="0"/>
-                <a:ea typeface="Aptos" pitchFamily="34" charset="-122"/>
-                <a:cs typeface="Aptos" pitchFamily="34" charset="-120"/>
-              </a:rPr>
-              <a:t>Learning approach</a:t>
-            </a:r>
-            <a:endParaRPr lang="en-US" sz="950" dirty="0"/>
-          </a:p>
-        </p:txBody>
-      </p:sp>
-      <p:sp>
-        <p:nvSpPr>
           <p:cNvPr id="14" name="Text 12"/>
           <p:cNvSpPr/>
           <p:nvPr/>
         </p:nvSpPr>
         <p:spPr>
           <a:xfrm>
-            <a:off x="8074152" y="4050792"/>
-            <a:ext cx="2825496" cy="1216152"/>
-          </a:xfrm>
-          <a:prstGeom prst="rect">
-            <a:avLst/>
-          </a:prstGeom>
-          <a:noFill/>
-          <a:ln/>
-        </p:spPr>
-        <p:txBody>
-          <a:bodyPr wrap="square" lIns="0" tIns="0" rIns="0" bIns="0" rtlCol="0" anchor="t">
+            <a:off x="7708392" y="3922776"/>
+            <a:ext cx="886968" cy="310896"/>
+          </a:xfrm>
+          <a:prstGeom prst="rect">
+            <a:avLst/>
+          </a:prstGeom>
+          <a:noFill/>
+          <a:ln/>
+        </p:spPr>
+        <p:txBody>
+          <a:bodyPr wrap="square" lIns="0" tIns="0" rIns="0" bIns="0" rtlCol="0" anchor="ctr">
             <a:normAutofit/>
           </a:bodyPr>
           <a:lstStyle/>
           <a:p>
-            <a:pPr indent="0" marL="0">
-              <a:buNone/>
-            </a:pPr>
-            <a:r>
-              <a:rPr lang="en-US" sz="1250" dirty="0">
-                <a:solidFill>
-                  <a:srgbClr val="17364A"/>
-                </a:solidFill>
-                <a:latin typeface="Aptos" pitchFamily="34" charset="0"/>
-                <a:ea typeface="Aptos" pitchFamily="34" charset="-122"/>
-                <a:cs typeface="Aptos" pitchFamily="34" charset="-120"/>
-              </a:rPr>
-              <a:t>Review the core ideas, complete the practical exercise, check your understanding, and use the related plays and tools to apply the lesson.</a:t>
-            </a:r>
-            <a:endParaRPr lang="en-US" sz="1250" dirty="0"/>
+            <a:pPr algn="ctr" indent="0" marL="0">
+              <a:buNone/>
+            </a:pPr>
+            <a:r>
+              <a:rPr lang="en-US" sz="1500" b="1" dirty="0">
+                <a:solidFill>
+                  <a:srgbClr val="FFFFFF"/>
+                </a:solidFill>
+                <a:latin typeface="Aptos" pitchFamily="34" charset="0"/>
+                <a:ea typeface="Aptos" pitchFamily="34" charset="-122"/>
+                <a:cs typeface="Aptos" pitchFamily="34" charset="-120"/>
+              </a:rPr>
+              <a:t>Learn</a:t>
+            </a:r>
+            <a:endParaRPr lang="en-US" sz="1500" dirty="0"/>
+          </a:p>
+        </p:txBody>
+      </p:sp>
+      <p:sp>
+        <p:nvSpPr>
+          <p:cNvPr id="15" name="Text 13"/>
+          <p:cNvSpPr/>
+          <p:nvPr/>
+        </p:nvSpPr>
+        <p:spPr>
+          <a:xfrm>
+            <a:off x="8695944" y="3941064"/>
+            <a:ext cx="201168" cy="256032"/>
+          </a:xfrm>
+          <a:prstGeom prst="rect">
+            <a:avLst/>
+          </a:prstGeom>
+          <a:noFill/>
+          <a:ln/>
+        </p:spPr>
+        <p:txBody>
+          <a:bodyPr wrap="square" lIns="0" tIns="0" rIns="0" bIns="0" rtlCol="0" anchor="ctr"/>
+          <a:lstStyle/>
+          <a:p>
+            <a:pPr algn="ctr" indent="0" marL="0">
+              <a:buNone/>
+            </a:pPr>
+            <a:r>
+              <a:rPr lang="en-US" sz="1800" b="1" dirty="0">
+                <a:solidFill>
+                  <a:srgbClr val="0068B7"/>
+                </a:solidFill>
+                <a:latin typeface="Aptos" pitchFamily="34" charset="0"/>
+                <a:ea typeface="Aptos" pitchFamily="34" charset="-122"/>
+                <a:cs typeface="Aptos" pitchFamily="34" charset="-120"/>
+              </a:rPr>
+              <a:t>â†’</a:t>
+            </a:r>
+            <a:endParaRPr lang="en-US" sz="1800" dirty="0"/>
+          </a:p>
+        </p:txBody>
+      </p:sp>
+      <p:sp>
+        <p:nvSpPr>
+          <p:cNvPr id="16" name="Shape 14"/>
+          <p:cNvSpPr/>
+          <p:nvPr/>
+        </p:nvSpPr>
+        <p:spPr>
+          <a:xfrm>
+            <a:off x="8924544" y="3730752"/>
+            <a:ext cx="1033272" cy="749808"/>
+          </a:xfrm>
+          <a:prstGeom prst="roundRect">
+            <a:avLst>
+              <a:gd name="adj" fmla="val 14634"/>
+            </a:avLst>
+          </a:prstGeom>
+          <a:solidFill>
+            <a:srgbClr val="2F8A28"/>
+          </a:solidFill>
+          <a:ln w="12700">
+            <a:solidFill>
+              <a:srgbClr val="2F8A28"/>
+            </a:solidFill>
+            <a:prstDash val="solid"/>
+          </a:ln>
+        </p:spPr>
+      </p:sp>
+      <p:sp>
+        <p:nvSpPr>
+          <p:cNvPr id="17" name="Text 15"/>
+          <p:cNvSpPr/>
+          <p:nvPr/>
+        </p:nvSpPr>
+        <p:spPr>
+          <a:xfrm>
+            <a:off x="8997696" y="3922776"/>
+            <a:ext cx="886968" cy="310896"/>
+          </a:xfrm>
+          <a:prstGeom prst="rect">
+            <a:avLst/>
+          </a:prstGeom>
+          <a:noFill/>
+          <a:ln/>
+        </p:spPr>
+        <p:txBody>
+          <a:bodyPr wrap="square" lIns="0" tIns="0" rIns="0" bIns="0" rtlCol="0" anchor="ctr">
+            <a:normAutofit/>
+          </a:bodyPr>
+          <a:lstStyle/>
+          <a:p>
+            <a:pPr algn="ctr" indent="0" marL="0">
+              <a:buNone/>
+            </a:pPr>
+            <a:r>
+              <a:rPr lang="en-US" sz="1500" b="1" dirty="0">
+                <a:solidFill>
+                  <a:srgbClr val="FFFFFF"/>
+                </a:solidFill>
+                <a:latin typeface="Aptos" pitchFamily="34" charset="0"/>
+                <a:ea typeface="Aptos" pitchFamily="34" charset="-122"/>
+                <a:cs typeface="Aptos" pitchFamily="34" charset="-120"/>
+              </a:rPr>
+              <a:t>Apply</a:t>
+            </a:r>
+            <a:endParaRPr lang="en-US" sz="1500" dirty="0"/>
+          </a:p>
+        </p:txBody>
+      </p:sp>
+      <p:sp>
+        <p:nvSpPr>
+          <p:cNvPr id="18" name="Text 16"/>
+          <p:cNvSpPr/>
+          <p:nvPr/>
+        </p:nvSpPr>
+        <p:spPr>
+          <a:xfrm>
+            <a:off x="9985248" y="3941064"/>
+            <a:ext cx="201168" cy="256032"/>
+          </a:xfrm>
+          <a:prstGeom prst="rect">
+            <a:avLst/>
+          </a:prstGeom>
+          <a:noFill/>
+          <a:ln/>
+        </p:spPr>
+        <p:txBody>
+          <a:bodyPr wrap="square" lIns="0" tIns="0" rIns="0" bIns="0" rtlCol="0" anchor="ctr"/>
+          <a:lstStyle/>
+          <a:p>
+            <a:pPr algn="ctr" indent="0" marL="0">
+              <a:buNone/>
+            </a:pPr>
+            <a:r>
+              <a:rPr lang="en-US" sz="1800" b="1" dirty="0">
+                <a:solidFill>
+                  <a:srgbClr val="0068B7"/>
+                </a:solidFill>
+                <a:latin typeface="Aptos" pitchFamily="34" charset="0"/>
+                <a:ea typeface="Aptos" pitchFamily="34" charset="-122"/>
+                <a:cs typeface="Aptos" pitchFamily="34" charset="-120"/>
+              </a:rPr>
+              <a:t>â†’</a:t>
+            </a:r>
+            <a:endParaRPr lang="en-US" sz="1800" dirty="0"/>
+          </a:p>
+        </p:txBody>
+      </p:sp>
+      <p:sp>
+        <p:nvSpPr>
+          <p:cNvPr id="19" name="Shape 17"/>
+          <p:cNvSpPr/>
+          <p:nvPr/>
+        </p:nvSpPr>
+        <p:spPr>
+          <a:xfrm>
+            <a:off x="10213848" y="3730752"/>
+            <a:ext cx="1033272" cy="749808"/>
+          </a:xfrm>
+          <a:prstGeom prst="roundRect">
+            <a:avLst>
+              <a:gd name="adj" fmla="val 14634"/>
+            </a:avLst>
+          </a:prstGeom>
+          <a:solidFill>
+            <a:srgbClr val="6A4CA3"/>
+          </a:solidFill>
+          <a:ln w="12700">
+            <a:solidFill>
+              <a:srgbClr val="6A4CA3"/>
+            </a:solidFill>
+            <a:prstDash val="solid"/>
+          </a:ln>
+        </p:spPr>
+      </p:sp>
+      <p:sp>
+        <p:nvSpPr>
+          <p:cNvPr id="20" name="Text 18"/>
+          <p:cNvSpPr/>
+          <p:nvPr/>
+        </p:nvSpPr>
+        <p:spPr>
+          <a:xfrm>
+            <a:off x="10287000" y="3922776"/>
+            <a:ext cx="886968" cy="310896"/>
+          </a:xfrm>
+          <a:prstGeom prst="rect">
+            <a:avLst/>
+          </a:prstGeom>
+          <a:noFill/>
+          <a:ln/>
+        </p:spPr>
+        <p:txBody>
+          <a:bodyPr wrap="square" lIns="0" tIns="0" rIns="0" bIns="0" rtlCol="0" anchor="ctr">
+            <a:normAutofit/>
+          </a:bodyPr>
+          <a:lstStyle/>
+          <a:p>
+            <a:pPr algn="ctr" indent="0" marL="0">
+              <a:buNone/>
+            </a:pPr>
+            <a:r>
+              <a:rPr lang="en-US" sz="1500" b="1" dirty="0">
+                <a:solidFill>
+                  <a:srgbClr val="FFFFFF"/>
+                </a:solidFill>
+                <a:latin typeface="Aptos" pitchFamily="34" charset="0"/>
+                <a:ea typeface="Aptos" pitchFamily="34" charset="-122"/>
+                <a:cs typeface="Aptos" pitchFamily="34" charset="-120"/>
+              </a:rPr>
+              <a:t>Document</a:t>
+            </a:r>
+            <a:endParaRPr lang="en-US" sz="1500" dirty="0"/>
           </a:p>
         </p:txBody>
       </p:sp>
@@ -9392,7 +9979,7 @@
                 <a:ea typeface="Aptos" pitchFamily="34" charset="-122"/>
                 <a:cs typeface="Aptos" pitchFamily="34" charset="-120"/>
               </a:rPr>
-              <a:t>© Paula Soper</a:t>
+              <a:t>Â© Paula Soper</a:t>
             </a:r>
             <a:endParaRPr lang="en-US" sz="800" dirty="0"/>
           </a:p>
@@ -9400,7 +9987,46 @@
       </p:sp>
       <p:sp>
         <p:nvSpPr>
-          <p:cNvPr id="7" name="Shape 5"/>
+          <p:cNvPr id="7" name="Text 5"/>
+          <p:cNvSpPr/>
+          <p:nvPr/>
+        </p:nvSpPr>
+        <p:spPr>
+          <a:xfrm>
+            <a:off x="11137392" y="6510528"/>
+            <a:ext cx="411480" cy="201168"/>
+          </a:xfrm>
+          <a:prstGeom prst="rect">
+            <a:avLst/>
+          </a:prstGeom>
+          <a:noFill/>
+          <a:ln/>
+        </p:spPr>
+        <p:txBody>
+          <a:bodyPr wrap="square" lIns="0" tIns="0" rIns="0" bIns="0" rtlCol="0" anchor="ctr"/>
+          <a:lstStyle/>
+          <a:p>
+            <a:pPr algn="r" indent="0" marL="0">
+              <a:buNone/>
+            </a:pPr>
+            <a:r>
+              <a:rPr lang="en-US" sz="900" dirty="0">
+                <a:solidFill>
+                  <a:srgbClr val="5F7181"/>
+                </a:solidFill>
+                <a:latin typeface="Aptos" pitchFamily="34" charset="0"/>
+                <a:ea typeface="Aptos" pitchFamily="34" charset="-122"/>
+                <a:cs typeface="Aptos" pitchFamily="34" charset="-120"/>
+              </a:rPr>
+              <a:t>20</a:t>
+            </a:r>
+            <a:endParaRPr lang="en-US" sz="900" dirty="0"/>
+          </a:p>
+        </p:txBody>
+      </p:sp>
+      <p:sp>
+        <p:nvSpPr>
+          <p:cNvPr id="8" name="Shape 6"/>
           <p:cNvSpPr/>
           <p:nvPr/>
         </p:nvSpPr>
@@ -9425,7 +10051,7 @@
       </p:sp>
       <p:sp>
         <p:nvSpPr>
-          <p:cNvPr id="8" name="Text 6"/>
+          <p:cNvPr id="9" name="Text 7"/>
           <p:cNvSpPr/>
           <p:nvPr/>
         </p:nvSpPr>
@@ -9464,14 +10090,14 @@
       </p:sp>
       <p:sp>
         <p:nvSpPr>
-          <p:cNvPr id="9" name="Text 7"/>
+          <p:cNvPr id="10" name="Text 8"/>
           <p:cNvSpPr/>
           <p:nvPr/>
         </p:nvSpPr>
         <p:spPr>
           <a:xfrm>
             <a:off x="640080" y="621792"/>
-            <a:ext cx="10881360" cy="566928"/>
+            <a:ext cx="10881360" cy="713232"/>
           </a:xfrm>
           <a:prstGeom prst="rect">
             <a:avLst/>
@@ -9489,7 +10115,7 @@
               <a:buNone/>
             </a:pPr>
             <a:r>
-              <a:rPr lang="en-US" sz="2700" b="1" dirty="0">
+              <a:rPr lang="en-US" sz="3400" b="1" dirty="0">
                 <a:solidFill>
                   <a:srgbClr val="003A63"/>
                 </a:solidFill>
@@ -9499,20 +10125,20 @@
               </a:rPr>
               <a:t>Expected Assignment</a:t>
             </a:r>
-            <a:endParaRPr lang="en-US" sz="2700" dirty="0"/>
-          </a:p>
-        </p:txBody>
-      </p:sp>
-      <p:sp>
-        <p:nvSpPr>
-          <p:cNvPr id="10" name="Text 8"/>
-          <p:cNvSpPr/>
-          <p:nvPr/>
-        </p:nvSpPr>
-        <p:spPr>
-          <a:xfrm>
-            <a:off x="868680" y="1417320"/>
-            <a:ext cx="6675120" cy="4434840"/>
+            <a:endParaRPr lang="en-US" sz="3400" dirty="0"/>
+          </a:p>
+        </p:txBody>
+      </p:sp>
+      <p:sp>
+        <p:nvSpPr>
+          <p:cNvPr id="11" name="Text 9"/>
+          <p:cNvSpPr/>
+          <p:nvPr/>
+        </p:nvSpPr>
+        <p:spPr>
+          <a:xfrm>
+            <a:off x="868680" y="1508760"/>
+            <a:ext cx="6537960" cy="4160520"/>
           </a:xfrm>
           <a:prstGeom prst="rect">
             <a:avLst/>
@@ -9527,7 +10153,7 @@
           <a:lstStyle/>
           <a:p>
             <a:r>
-              <a:rPr lang="en-US" sz="1700" dirty="0">
+              <a:rPr lang="en-US" sz="2100" dirty="0">
                 <a:solidFill>
                   <a:srgbClr val="17364A"/>
                 </a:solidFill>
@@ -9537,11 +10163,11 @@
               </a:rPr>
               <a:t>Data quality review plan</a:t>
             </a:r>
-            <a:endParaRPr lang="en-US" sz="1700" dirty="0"/>
-          </a:p>
-          <a:p>
-            <a:r>
-              <a:rPr lang="en-US" sz="1700" dirty="0">
+            <a:endParaRPr lang="en-US" sz="2100" dirty="0"/>
+          </a:p>
+          <a:p>
+            <a:r>
+              <a:rPr lang="en-US" sz="2100" dirty="0">
                 <a:solidFill>
                   <a:srgbClr val="17364A"/>
                 </a:solidFill>
@@ -9551,11 +10177,11 @@
               </a:rPr>
               <a:t>Data quality checklist</a:t>
             </a:r>
-            <a:endParaRPr lang="en-US" sz="1700" dirty="0"/>
-          </a:p>
-          <a:p>
-            <a:r>
-              <a:rPr lang="en-US" sz="1700" dirty="0">
+            <a:endParaRPr lang="en-US" sz="2100" dirty="0"/>
+          </a:p>
+          <a:p>
+            <a:r>
+              <a:rPr lang="en-US" sz="2100" dirty="0">
                 <a:solidFill>
                   <a:srgbClr val="17364A"/>
                 </a:solidFill>
@@ -9565,27 +10191,13 @@
               </a:rPr>
               <a:t>Thresholds or review criteria</a:t>
             </a:r>
-            <a:endParaRPr lang="en-US" sz="1700" dirty="0"/>
-          </a:p>
-          <a:p>
-            <a:r>
-              <a:rPr lang="en-US" sz="1700" dirty="0">
-                <a:solidFill>
-                  <a:srgbClr val="17364A"/>
-                </a:solidFill>
-                <a:latin typeface="Aptos" pitchFamily="34" charset="0"/>
-                <a:ea typeface="Aptos" pitchFamily="34" charset="-122"/>
-                <a:cs typeface="Aptos" pitchFamily="34" charset="-120"/>
-              </a:rPr>
-              <a:t>Known limitations statement</a:t>
-            </a:r>
-            <a:endParaRPr lang="en-US" sz="1700" dirty="0"/>
-          </a:p>
-        </p:txBody>
-      </p:sp>
-      <p:sp>
-        <p:nvSpPr>
-          <p:cNvPr id="11" name="Shape 9"/>
+            <a:endParaRPr lang="en-US" sz="2100" dirty="0"/>
+          </a:p>
+        </p:txBody>
+      </p:sp>
+      <p:sp>
+        <p:nvSpPr>
+          <p:cNvPr id="12" name="Shape 10"/>
           <p:cNvSpPr/>
           <p:nvPr/>
         </p:nvSpPr>
@@ -9612,14 +10224,14 @@
       </p:sp>
       <p:sp>
         <p:nvSpPr>
-          <p:cNvPr id="12" name="Text 10"/>
+          <p:cNvPr id="13" name="Text 11"/>
           <p:cNvSpPr/>
           <p:nvPr/>
         </p:nvSpPr>
         <p:spPr>
           <a:xfrm>
             <a:off x="8074152" y="1563624"/>
-            <a:ext cx="2825496" cy="201168"/>
+            <a:ext cx="2825496" cy="256032"/>
           </a:xfrm>
           <a:prstGeom prst="rect">
             <a:avLst/>
@@ -9635,7 +10247,7 @@
               <a:buNone/>
             </a:pPr>
             <a:r>
-              <a:rPr lang="en-US" sz="950" b="1" dirty="0">
+              <a:rPr lang="en-US" sz="1300" b="1" dirty="0">
                 <a:solidFill>
                   <a:srgbClr val="0068B7"/>
                 </a:solidFill>
@@ -9645,20 +10257,20 @@
               </a:rPr>
               <a:t>Key idea</a:t>
             </a:r>
-            <a:endParaRPr lang="en-US" sz="950" dirty="0"/>
-          </a:p>
-        </p:txBody>
-      </p:sp>
-      <p:sp>
-        <p:nvSpPr>
-          <p:cNvPr id="13" name="Text 11"/>
-          <p:cNvSpPr/>
-          <p:nvPr/>
-        </p:nvSpPr>
-        <p:spPr>
-          <a:xfrm>
-            <a:off x="8074152" y="1856232"/>
-            <a:ext cx="2825496" cy="1261872"/>
+            <a:endParaRPr lang="en-US" sz="1300" dirty="0"/>
+          </a:p>
+        </p:txBody>
+      </p:sp>
+      <p:sp>
+        <p:nvSpPr>
+          <p:cNvPr id="14" name="Text 12"/>
+          <p:cNvSpPr/>
+          <p:nvPr/>
+        </p:nvSpPr>
+        <p:spPr>
+          <a:xfrm>
+            <a:off x="8074152" y="1920240"/>
+            <a:ext cx="2825496" cy="1188720"/>
           </a:xfrm>
           <a:prstGeom prst="rect">
             <a:avLst/>
@@ -9676,7 +10288,7 @@
               <a:buNone/>
             </a:pPr>
             <a:r>
-              <a:rPr lang="en-US" sz="1250" dirty="0">
+              <a:rPr lang="en-US" sz="1550" dirty="0">
                 <a:solidFill>
                   <a:srgbClr val="17364A"/>
                 </a:solidFill>
@@ -9686,13 +10298,13 @@
               </a:rPr>
               <a:t>Data quality review plan</a:t>
             </a:r>
-            <a:endParaRPr lang="en-US" sz="1250" dirty="0"/>
-          </a:p>
-        </p:txBody>
-      </p:sp>
-      <p:sp>
-        <p:nvSpPr>
-          <p:cNvPr id="14" name="Shape 12"/>
+            <a:endParaRPr lang="en-US" sz="1550" dirty="0"/>
+          </a:p>
+        </p:txBody>
+      </p:sp>
+      <p:sp>
+        <p:nvSpPr>
+          <p:cNvPr id="15" name="Shape 13"/>
           <p:cNvSpPr/>
           <p:nvPr/>
         </p:nvSpPr>
@@ -9719,14 +10331,14 @@
       </p:sp>
       <p:sp>
         <p:nvSpPr>
-          <p:cNvPr id="15" name="Text 13"/>
+          <p:cNvPr id="16" name="Text 14"/>
           <p:cNvSpPr/>
           <p:nvPr/>
         </p:nvSpPr>
         <p:spPr>
           <a:xfrm>
             <a:off x="8074152" y="3666744"/>
-            <a:ext cx="2825496" cy="201168"/>
+            <a:ext cx="2825496" cy="256032"/>
           </a:xfrm>
           <a:prstGeom prst="rect">
             <a:avLst/>
@@ -9742,7 +10354,7 @@
               <a:buNone/>
             </a:pPr>
             <a:r>
-              <a:rPr lang="en-US" sz="950" b="1" dirty="0">
+              <a:rPr lang="en-US" sz="1300" b="1" dirty="0">
                 <a:solidFill>
                   <a:srgbClr val="0068B7"/>
                 </a:solidFill>
@@ -9752,20 +10364,20 @@
               </a:rPr>
               <a:t>Use this for</a:t>
             </a:r>
-            <a:endParaRPr lang="en-US" sz="950" dirty="0"/>
-          </a:p>
-        </p:txBody>
-      </p:sp>
-      <p:sp>
-        <p:nvSpPr>
-          <p:cNvPr id="16" name="Text 14"/>
-          <p:cNvSpPr/>
-          <p:nvPr/>
-        </p:nvSpPr>
-        <p:spPr>
-          <a:xfrm>
-            <a:off x="8074152" y="3959352"/>
-            <a:ext cx="2825496" cy="1170432"/>
+            <a:endParaRPr lang="en-US" sz="1300" dirty="0"/>
+          </a:p>
+        </p:txBody>
+      </p:sp>
+      <p:sp>
+        <p:nvSpPr>
+          <p:cNvPr id="17" name="Text 15"/>
+          <p:cNvSpPr/>
+          <p:nvPr/>
+        </p:nvSpPr>
+        <p:spPr>
+          <a:xfrm>
+            <a:off x="8074152" y="4023360"/>
+            <a:ext cx="2825496" cy="1097280"/>
           </a:xfrm>
           <a:prstGeom prst="rect">
             <a:avLst/>
@@ -9783,7 +10395,7 @@
               <a:buNone/>
             </a:pPr>
             <a:r>
-              <a:rPr lang="en-US" sz="1250" dirty="0">
+              <a:rPr lang="en-US" sz="1550" dirty="0">
                 <a:solidFill>
                   <a:srgbClr val="17364A"/>
                 </a:solidFill>
@@ -9793,7 +10405,7 @@
               </a:rPr>
               <a:t>Connect the concept to public health decisions, safeguards, documentation, or implementation work.</a:t>
             </a:r>
-            <a:endParaRPr lang="en-US" sz="1250" dirty="0"/>
+            <a:endParaRPr lang="en-US" sz="1550" dirty="0"/>
           </a:p>
         </p:txBody>
       </p:sp>
@@ -9990,7 +10602,7 @@
                 <a:ea typeface="Aptos" pitchFamily="34" charset="-122"/>
                 <a:cs typeface="Aptos" pitchFamily="34" charset="-120"/>
               </a:rPr>
-              <a:t>© Paula Soper</a:t>
+              <a:t>Â© Paula Soper</a:t>
             </a:r>
             <a:endParaRPr lang="en-US" sz="800" dirty="0"/>
           </a:p>
@@ -9998,7 +10610,46 @@
       </p:sp>
       <p:sp>
         <p:nvSpPr>
-          <p:cNvPr id="7" name="Shape 5"/>
+          <p:cNvPr id="7" name="Text 5"/>
+          <p:cNvSpPr/>
+          <p:nvPr/>
+        </p:nvSpPr>
+        <p:spPr>
+          <a:xfrm>
+            <a:off x="11137392" y="6510528"/>
+            <a:ext cx="411480" cy="201168"/>
+          </a:xfrm>
+          <a:prstGeom prst="rect">
+            <a:avLst/>
+          </a:prstGeom>
+          <a:noFill/>
+          <a:ln/>
+        </p:spPr>
+        <p:txBody>
+          <a:bodyPr wrap="square" lIns="0" tIns="0" rIns="0" bIns="0" rtlCol="0" anchor="ctr"/>
+          <a:lstStyle/>
+          <a:p>
+            <a:pPr algn="r" indent="0" marL="0">
+              <a:buNone/>
+            </a:pPr>
+            <a:r>
+              <a:rPr lang="en-US" sz="900" dirty="0">
+                <a:solidFill>
+                  <a:srgbClr val="5F7181"/>
+                </a:solidFill>
+                <a:latin typeface="Aptos" pitchFamily="34" charset="0"/>
+                <a:ea typeface="Aptos" pitchFamily="34" charset="-122"/>
+                <a:cs typeface="Aptos" pitchFamily="34" charset="-120"/>
+              </a:rPr>
+              <a:t>21</a:t>
+            </a:r>
+            <a:endParaRPr lang="en-US" sz="900" dirty="0"/>
+          </a:p>
+        </p:txBody>
+      </p:sp>
+      <p:sp>
+        <p:nvSpPr>
+          <p:cNvPr id="8" name="Shape 6"/>
           <p:cNvSpPr/>
           <p:nvPr/>
         </p:nvSpPr>
@@ -10023,7 +10674,7 @@
       </p:sp>
       <p:sp>
         <p:nvSpPr>
-          <p:cNvPr id="8" name="Text 6"/>
+          <p:cNvPr id="9" name="Text 7"/>
           <p:cNvSpPr/>
           <p:nvPr/>
         </p:nvSpPr>
@@ -10062,14 +10713,14 @@
       </p:sp>
       <p:sp>
         <p:nvSpPr>
-          <p:cNvPr id="9" name="Text 7"/>
+          <p:cNvPr id="10" name="Text 8"/>
           <p:cNvSpPr/>
           <p:nvPr/>
         </p:nvSpPr>
         <p:spPr>
           <a:xfrm>
             <a:off x="640080" y="621792"/>
-            <a:ext cx="10881360" cy="566928"/>
+            <a:ext cx="10881360" cy="713232"/>
           </a:xfrm>
           <a:prstGeom prst="rect">
             <a:avLst/>
@@ -10087,7 +10738,7 @@
               <a:buNone/>
             </a:pPr>
             <a:r>
-              <a:rPr lang="en-US" sz="2700" b="1" dirty="0">
+              <a:rPr lang="en-US" sz="3400" b="1" dirty="0">
                 <a:solidFill>
                   <a:srgbClr val="003A63"/>
                 </a:solidFill>
@@ -10097,20 +10748,20 @@
               </a:rPr>
               <a:t>Knowledge Check</a:t>
             </a:r>
-            <a:endParaRPr lang="en-US" sz="2700" dirty="0"/>
-          </a:p>
-        </p:txBody>
-      </p:sp>
-      <p:sp>
-        <p:nvSpPr>
-          <p:cNvPr id="10" name="Text 8"/>
-          <p:cNvSpPr/>
-          <p:nvPr/>
-        </p:nvSpPr>
-        <p:spPr>
-          <a:xfrm>
-            <a:off x="868680" y="1417320"/>
-            <a:ext cx="6675120" cy="4434840"/>
+            <a:endParaRPr lang="en-US" sz="3400" dirty="0"/>
+          </a:p>
+        </p:txBody>
+      </p:sp>
+      <p:sp>
+        <p:nvSpPr>
+          <p:cNvPr id="11" name="Text 9"/>
+          <p:cNvSpPr/>
+          <p:nvPr/>
+        </p:nvSpPr>
+        <p:spPr>
+          <a:xfrm>
+            <a:off x="868680" y="1508760"/>
+            <a:ext cx="6537960" cy="4160520"/>
           </a:xfrm>
           <a:prstGeom prst="rect">
             <a:avLst/>
@@ -10125,7 +10776,7 @@
           <a:lstStyle/>
           <a:p>
             <a:r>
-              <a:rPr lang="en-US" sz="1700" dirty="0">
+              <a:rPr lang="en-US" sz="2100" dirty="0">
                 <a:solidFill>
                   <a:srgbClr val="17364A"/>
                 </a:solidFill>
@@ -10135,11 +10786,11 @@
               </a:rPr>
               <a:t>1. What does fitness for use mean?</a:t>
             </a:r>
-            <a:endParaRPr lang="en-US" sz="1700" dirty="0"/>
-          </a:p>
-          <a:p>
-            <a:r>
-              <a:rPr lang="en-US" sz="1700" dirty="0">
+            <a:endParaRPr lang="en-US" sz="2100" dirty="0"/>
+          </a:p>
+          <a:p>
+            <a:r>
+              <a:rPr lang="en-US" sz="2100" dirty="0">
                 <a:solidFill>
                   <a:srgbClr val="17364A"/>
                 </a:solidFill>
@@ -10149,11 +10800,11 @@
               </a:rPr>
               <a:t>2. Why can poor data quality be dangerous in AI-supported workflows?</a:t>
             </a:r>
-            <a:endParaRPr lang="en-US" sz="1700" dirty="0"/>
-          </a:p>
-          <a:p>
-            <a:r>
-              <a:rPr lang="en-US" sz="1700" dirty="0">
+            <a:endParaRPr lang="en-US" sz="2100" dirty="0"/>
+          </a:p>
+          <a:p>
+            <a:r>
+              <a:rPr lang="en-US" sz="2100" dirty="0">
                 <a:solidFill>
                   <a:srgbClr val="17364A"/>
                 </a:solidFill>
@@ -10163,27 +10814,13 @@
               </a:rPr>
               <a:t>3. What is data drift?</a:t>
             </a:r>
-            <a:endParaRPr lang="en-US" sz="1700" dirty="0"/>
-          </a:p>
-          <a:p>
-            <a:r>
-              <a:rPr lang="en-US" sz="1700" dirty="0">
-                <a:solidFill>
-                  <a:srgbClr val="17364A"/>
-                </a:solidFill>
-                <a:latin typeface="Aptos" pitchFamily="34" charset="0"/>
-                <a:ea typeface="Aptos" pitchFamily="34" charset="-122"/>
-                <a:cs typeface="Aptos" pitchFamily="34" charset="-120"/>
-              </a:rPr>
-              <a:t>4. Which item belongs in a data quality review plan?</a:t>
-            </a:r>
-            <a:endParaRPr lang="en-US" sz="1700" dirty="0"/>
-          </a:p>
-        </p:txBody>
-      </p:sp>
-      <p:sp>
-        <p:nvSpPr>
-          <p:cNvPr id="11" name="Shape 9"/>
+            <a:endParaRPr lang="en-US" sz="2100" dirty="0"/>
+          </a:p>
+        </p:txBody>
+      </p:sp>
+      <p:sp>
+        <p:nvSpPr>
+          <p:cNvPr id="12" name="Shape 10"/>
           <p:cNvSpPr/>
           <p:nvPr/>
         </p:nvSpPr>
@@ -10210,14 +10847,14 @@
       </p:sp>
       <p:sp>
         <p:nvSpPr>
-          <p:cNvPr id="12" name="Text 10"/>
+          <p:cNvPr id="13" name="Text 11"/>
           <p:cNvSpPr/>
           <p:nvPr/>
         </p:nvSpPr>
         <p:spPr>
           <a:xfrm>
             <a:off x="8074152" y="1563624"/>
-            <a:ext cx="2825496" cy="201168"/>
+            <a:ext cx="2825496" cy="256032"/>
           </a:xfrm>
           <a:prstGeom prst="rect">
             <a:avLst/>
@@ -10233,7 +10870,7 @@
               <a:buNone/>
             </a:pPr>
             <a:r>
-              <a:rPr lang="en-US" sz="950" b="1" dirty="0">
+              <a:rPr lang="en-US" sz="1300" b="1" dirty="0">
                 <a:solidFill>
                   <a:srgbClr val="0068B7"/>
                 </a:solidFill>
@@ -10243,20 +10880,20 @@
               </a:rPr>
               <a:t>Key idea</a:t>
             </a:r>
-            <a:endParaRPr lang="en-US" sz="950" dirty="0"/>
-          </a:p>
-        </p:txBody>
-      </p:sp>
-      <p:sp>
-        <p:nvSpPr>
-          <p:cNvPr id="13" name="Text 11"/>
-          <p:cNvSpPr/>
-          <p:nvPr/>
-        </p:nvSpPr>
-        <p:spPr>
-          <a:xfrm>
-            <a:off x="8074152" y="1856232"/>
-            <a:ext cx="2825496" cy="1261872"/>
+            <a:endParaRPr lang="en-US" sz="1300" dirty="0"/>
+          </a:p>
+        </p:txBody>
+      </p:sp>
+      <p:sp>
+        <p:nvSpPr>
+          <p:cNvPr id="14" name="Text 12"/>
+          <p:cNvSpPr/>
+          <p:nvPr/>
+        </p:nvSpPr>
+        <p:spPr>
+          <a:xfrm>
+            <a:off x="8074152" y="1920240"/>
+            <a:ext cx="2825496" cy="1188720"/>
           </a:xfrm>
           <a:prstGeom prst="rect">
             <a:avLst/>
@@ -10274,7 +10911,7 @@
               <a:buNone/>
             </a:pPr>
             <a:r>
-              <a:rPr lang="en-US" sz="1250" dirty="0">
+              <a:rPr lang="en-US" sz="1550" dirty="0">
                 <a:solidFill>
                   <a:srgbClr val="17364A"/>
                 </a:solidFill>
@@ -10284,13 +10921,13 @@
               </a:rPr>
               <a:t>1. What does fitness for use mean?</a:t>
             </a:r>
-            <a:endParaRPr lang="en-US" sz="1250" dirty="0"/>
-          </a:p>
-        </p:txBody>
-      </p:sp>
-      <p:sp>
-        <p:nvSpPr>
-          <p:cNvPr id="14" name="Shape 12"/>
+            <a:endParaRPr lang="en-US" sz="1550" dirty="0"/>
+          </a:p>
+        </p:txBody>
+      </p:sp>
+      <p:sp>
+        <p:nvSpPr>
+          <p:cNvPr id="15" name="Shape 13"/>
           <p:cNvSpPr/>
           <p:nvPr/>
         </p:nvSpPr>
@@ -10317,14 +10954,14 @@
       </p:sp>
       <p:sp>
         <p:nvSpPr>
-          <p:cNvPr id="15" name="Text 13"/>
+          <p:cNvPr id="16" name="Text 14"/>
           <p:cNvSpPr/>
           <p:nvPr/>
         </p:nvSpPr>
         <p:spPr>
           <a:xfrm>
             <a:off x="8074152" y="3666744"/>
-            <a:ext cx="2825496" cy="201168"/>
+            <a:ext cx="2825496" cy="256032"/>
           </a:xfrm>
           <a:prstGeom prst="rect">
             <a:avLst/>
@@ -10340,7 +10977,7 @@
               <a:buNone/>
             </a:pPr>
             <a:r>
-              <a:rPr lang="en-US" sz="950" b="1" dirty="0">
+              <a:rPr lang="en-US" sz="1300" b="1" dirty="0">
                 <a:solidFill>
                   <a:srgbClr val="0068B7"/>
                 </a:solidFill>
@@ -10350,20 +10987,20 @@
               </a:rPr>
               <a:t>Use this for</a:t>
             </a:r>
-            <a:endParaRPr lang="en-US" sz="950" dirty="0"/>
-          </a:p>
-        </p:txBody>
-      </p:sp>
-      <p:sp>
-        <p:nvSpPr>
-          <p:cNvPr id="16" name="Text 14"/>
-          <p:cNvSpPr/>
-          <p:nvPr/>
-        </p:nvSpPr>
-        <p:spPr>
-          <a:xfrm>
-            <a:off x="8074152" y="3959352"/>
-            <a:ext cx="2825496" cy="1170432"/>
+            <a:endParaRPr lang="en-US" sz="1300" dirty="0"/>
+          </a:p>
+        </p:txBody>
+      </p:sp>
+      <p:sp>
+        <p:nvSpPr>
+          <p:cNvPr id="17" name="Text 15"/>
+          <p:cNvSpPr/>
+          <p:nvPr/>
+        </p:nvSpPr>
+        <p:spPr>
+          <a:xfrm>
+            <a:off x="8074152" y="4023360"/>
+            <a:ext cx="2825496" cy="1097280"/>
           </a:xfrm>
           <a:prstGeom prst="rect">
             <a:avLst/>
@@ -10381,7 +11018,7 @@
               <a:buNone/>
             </a:pPr>
             <a:r>
-              <a:rPr lang="en-US" sz="1250" dirty="0">
+              <a:rPr lang="en-US" sz="1550" dirty="0">
                 <a:solidFill>
                   <a:srgbClr val="17364A"/>
                 </a:solidFill>
@@ -10391,7 +11028,7 @@
               </a:rPr>
               <a:t>Connect the concept to public health decisions, safeguards, documentation, or implementation work.</a:t>
             </a:r>
-            <a:endParaRPr lang="en-US" sz="1250" dirty="0"/>
+            <a:endParaRPr lang="en-US" sz="1550" dirty="0"/>
           </a:p>
         </p:txBody>
       </p:sp>
@@ -10588,7 +11225,7 @@
                 <a:ea typeface="Aptos" pitchFamily="34" charset="-122"/>
                 <a:cs typeface="Aptos" pitchFamily="34" charset="-120"/>
               </a:rPr>
-              <a:t>© Paula Soper</a:t>
+              <a:t>Â© Paula Soper</a:t>
             </a:r>
             <a:endParaRPr lang="en-US" sz="800" dirty="0"/>
           </a:p>
@@ -10596,7 +11233,46 @@
       </p:sp>
       <p:sp>
         <p:nvSpPr>
-          <p:cNvPr id="7" name="Shape 5"/>
+          <p:cNvPr id="7" name="Text 5"/>
+          <p:cNvSpPr/>
+          <p:nvPr/>
+        </p:nvSpPr>
+        <p:spPr>
+          <a:xfrm>
+            <a:off x="11137392" y="6510528"/>
+            <a:ext cx="411480" cy="201168"/>
+          </a:xfrm>
+          <a:prstGeom prst="rect">
+            <a:avLst/>
+          </a:prstGeom>
+          <a:noFill/>
+          <a:ln/>
+        </p:spPr>
+        <p:txBody>
+          <a:bodyPr wrap="square" lIns="0" tIns="0" rIns="0" bIns="0" rtlCol="0" anchor="ctr"/>
+          <a:lstStyle/>
+          <a:p>
+            <a:pPr algn="r" indent="0" marL="0">
+              <a:buNone/>
+            </a:pPr>
+            <a:r>
+              <a:rPr lang="en-US" sz="900" dirty="0">
+                <a:solidFill>
+                  <a:srgbClr val="5F7181"/>
+                </a:solidFill>
+                <a:latin typeface="Aptos" pitchFamily="34" charset="0"/>
+                <a:ea typeface="Aptos" pitchFamily="34" charset="-122"/>
+                <a:cs typeface="Aptos" pitchFamily="34" charset="-120"/>
+              </a:rPr>
+              <a:t>22</a:t>
+            </a:r>
+            <a:endParaRPr lang="en-US" sz="900" dirty="0"/>
+          </a:p>
+        </p:txBody>
+      </p:sp>
+      <p:sp>
+        <p:nvSpPr>
+          <p:cNvPr id="8" name="Shape 6"/>
           <p:cNvSpPr/>
           <p:nvPr/>
         </p:nvSpPr>
@@ -10621,7 +11297,7 @@
       </p:sp>
       <p:sp>
         <p:nvSpPr>
-          <p:cNvPr id="8" name="Text 6"/>
+          <p:cNvPr id="9" name="Text 7"/>
           <p:cNvSpPr/>
           <p:nvPr/>
         </p:nvSpPr>
@@ -10660,14 +11336,14 @@
       </p:sp>
       <p:sp>
         <p:nvSpPr>
-          <p:cNvPr id="9" name="Text 7"/>
+          <p:cNvPr id="10" name="Text 8"/>
           <p:cNvSpPr/>
           <p:nvPr/>
         </p:nvSpPr>
         <p:spPr>
           <a:xfrm>
             <a:off x="640080" y="621792"/>
-            <a:ext cx="10881360" cy="566928"/>
+            <a:ext cx="10881360" cy="713232"/>
           </a:xfrm>
           <a:prstGeom prst="rect">
             <a:avLst/>
@@ -10685,7 +11361,7 @@
               <a:buNone/>
             </a:pPr>
             <a:r>
-              <a:rPr lang="en-US" sz="2700" b="1" dirty="0">
+              <a:rPr lang="en-US" sz="3400" b="1" dirty="0">
                 <a:solidFill>
                   <a:srgbClr val="003A63"/>
                 </a:solidFill>
@@ -10695,20 +11371,20 @@
               </a:rPr>
               <a:t>References and Resources</a:t>
             </a:r>
-            <a:endParaRPr lang="en-US" sz="2700" dirty="0"/>
-          </a:p>
-        </p:txBody>
-      </p:sp>
-      <p:sp>
-        <p:nvSpPr>
-          <p:cNvPr id="10" name="Text 8"/>
-          <p:cNvSpPr/>
-          <p:nvPr/>
-        </p:nvSpPr>
-        <p:spPr>
-          <a:xfrm>
-            <a:off x="868680" y="1417320"/>
-            <a:ext cx="6675120" cy="4434840"/>
+            <a:endParaRPr lang="en-US" sz="3400" dirty="0"/>
+          </a:p>
+        </p:txBody>
+      </p:sp>
+      <p:sp>
+        <p:nvSpPr>
+          <p:cNvPr id="11" name="Text 9"/>
+          <p:cNvSpPr/>
+          <p:nvPr/>
+        </p:nvSpPr>
+        <p:spPr>
+          <a:xfrm>
+            <a:off x="868680" y="1508760"/>
+            <a:ext cx="6537960" cy="4160520"/>
           </a:xfrm>
           <a:prstGeom prst="rect">
             <a:avLst/>
@@ -10723,7 +11399,7 @@
           <a:lstStyle/>
           <a:p>
             <a:r>
-              <a:rPr lang="en-US" sz="1700" dirty="0">
+              <a:rPr lang="en-US" sz="2100" dirty="0">
                 <a:solidFill>
                   <a:srgbClr val="17364A"/>
                 </a:solidFill>
@@ -10733,11 +11409,11 @@
               </a:rPr>
               <a:t>CDC surveillance and data quality resources</a:t>
             </a:r>
-            <a:endParaRPr lang="en-US" sz="1700" dirty="0"/>
-          </a:p>
-          <a:p>
-            <a:r>
-              <a:rPr lang="en-US" sz="1700" dirty="0">
+            <a:endParaRPr lang="en-US" sz="2100" dirty="0"/>
+          </a:p>
+          <a:p>
+            <a:r>
+              <a:rPr lang="en-US" sz="2100" dirty="0">
                 <a:solidFill>
                   <a:srgbClr val="17364A"/>
                 </a:solidFill>
@@ -10747,11 +11423,11 @@
               </a:rPr>
               <a:t>CDC Public Health Data Strategy: https://www.cdc.gov/public-health-data-strategy/php/about/index.html</a:t>
             </a:r>
-            <a:endParaRPr lang="en-US" sz="1700" dirty="0"/>
-          </a:p>
-          <a:p>
-            <a:r>
-              <a:rPr lang="en-US" sz="1700" dirty="0">
+            <a:endParaRPr lang="en-US" sz="2100" dirty="0"/>
+          </a:p>
+          <a:p>
+            <a:r>
+              <a:rPr lang="en-US" sz="2100" dirty="0">
                 <a:solidFill>
                   <a:srgbClr val="17364A"/>
                 </a:solidFill>
@@ -10761,27 +11437,13 @@
               </a:rPr>
               <a:t>NIST AI Risk Management Framework: https://www.nist.gov/itl/ai-risk-management-framework</a:t>
             </a:r>
-            <a:endParaRPr lang="en-US" sz="1700" dirty="0"/>
-          </a:p>
-          <a:p>
-            <a:r>
-              <a:rPr lang="en-US" sz="1700" dirty="0">
-                <a:solidFill>
-                  <a:srgbClr val="17364A"/>
-                </a:solidFill>
-                <a:latin typeface="Aptos" pitchFamily="34" charset="0"/>
-                <a:ea typeface="Aptos" pitchFamily="34" charset="-122"/>
-                <a:cs typeface="Aptos" pitchFamily="34" charset="-120"/>
-              </a:rPr>
-              <a:t>Agency data governance policies</a:t>
-            </a:r>
-            <a:endParaRPr lang="en-US" sz="1700" dirty="0"/>
-          </a:p>
-        </p:txBody>
-      </p:sp>
-      <p:sp>
-        <p:nvSpPr>
-          <p:cNvPr id="11" name="Shape 9"/>
+            <a:endParaRPr lang="en-US" sz="2100" dirty="0"/>
+          </a:p>
+        </p:txBody>
+      </p:sp>
+      <p:sp>
+        <p:nvSpPr>
+          <p:cNvPr id="12" name="Shape 10"/>
           <p:cNvSpPr/>
           <p:nvPr/>
         </p:nvSpPr>
@@ -10808,14 +11470,14 @@
       </p:sp>
       <p:sp>
         <p:nvSpPr>
-          <p:cNvPr id="12" name="Text 10"/>
+          <p:cNvPr id="13" name="Text 11"/>
           <p:cNvSpPr/>
           <p:nvPr/>
         </p:nvSpPr>
         <p:spPr>
           <a:xfrm>
             <a:off x="8074152" y="1563624"/>
-            <a:ext cx="2825496" cy="201168"/>
+            <a:ext cx="2825496" cy="256032"/>
           </a:xfrm>
           <a:prstGeom prst="rect">
             <a:avLst/>
@@ -10831,7 +11493,7 @@
               <a:buNone/>
             </a:pPr>
             <a:r>
-              <a:rPr lang="en-US" sz="950" b="1" dirty="0">
+              <a:rPr lang="en-US" sz="1300" b="1" dirty="0">
                 <a:solidFill>
                   <a:srgbClr val="0068B7"/>
                 </a:solidFill>
@@ -10841,20 +11503,20 @@
               </a:rPr>
               <a:t>Key idea</a:t>
             </a:r>
-            <a:endParaRPr lang="en-US" sz="950" dirty="0"/>
-          </a:p>
-        </p:txBody>
-      </p:sp>
-      <p:sp>
-        <p:nvSpPr>
-          <p:cNvPr id="13" name="Text 11"/>
-          <p:cNvSpPr/>
-          <p:nvPr/>
-        </p:nvSpPr>
-        <p:spPr>
-          <a:xfrm>
-            <a:off x="8074152" y="1856232"/>
-            <a:ext cx="2825496" cy="1261872"/>
+            <a:endParaRPr lang="en-US" sz="1300" dirty="0"/>
+          </a:p>
+        </p:txBody>
+      </p:sp>
+      <p:sp>
+        <p:nvSpPr>
+          <p:cNvPr id="14" name="Text 12"/>
+          <p:cNvSpPr/>
+          <p:nvPr/>
+        </p:nvSpPr>
+        <p:spPr>
+          <a:xfrm>
+            <a:off x="8074152" y="1920240"/>
+            <a:ext cx="2825496" cy="1188720"/>
           </a:xfrm>
           <a:prstGeom prst="rect">
             <a:avLst/>
@@ -10872,7 +11534,7 @@
               <a:buNone/>
             </a:pPr>
             <a:r>
-              <a:rPr lang="en-US" sz="1250" dirty="0">
+              <a:rPr lang="en-US" sz="1550" dirty="0">
                 <a:solidFill>
                   <a:srgbClr val="17364A"/>
                 </a:solidFill>
@@ -10882,13 +11544,13 @@
               </a:rPr>
               <a:t>CDC surveillance and data quality resources</a:t>
             </a:r>
-            <a:endParaRPr lang="en-US" sz="1250" dirty="0"/>
-          </a:p>
-        </p:txBody>
-      </p:sp>
-      <p:sp>
-        <p:nvSpPr>
-          <p:cNvPr id="14" name="Shape 12"/>
+            <a:endParaRPr lang="en-US" sz="1550" dirty="0"/>
+          </a:p>
+        </p:txBody>
+      </p:sp>
+      <p:sp>
+        <p:nvSpPr>
+          <p:cNvPr id="15" name="Shape 13"/>
           <p:cNvSpPr/>
           <p:nvPr/>
         </p:nvSpPr>
@@ -10915,14 +11577,14 @@
       </p:sp>
       <p:sp>
         <p:nvSpPr>
-          <p:cNvPr id="15" name="Text 13"/>
+          <p:cNvPr id="16" name="Text 14"/>
           <p:cNvSpPr/>
           <p:nvPr/>
         </p:nvSpPr>
         <p:spPr>
           <a:xfrm>
             <a:off x="8074152" y="3666744"/>
-            <a:ext cx="2825496" cy="201168"/>
+            <a:ext cx="2825496" cy="256032"/>
           </a:xfrm>
           <a:prstGeom prst="rect">
             <a:avLst/>
@@ -10938,7 +11600,7 @@
               <a:buNone/>
             </a:pPr>
             <a:r>
-              <a:rPr lang="en-US" sz="950" b="1" dirty="0">
+              <a:rPr lang="en-US" sz="1300" b="1" dirty="0">
                 <a:solidFill>
                   <a:srgbClr val="0068B7"/>
                 </a:solidFill>
@@ -10948,20 +11610,20 @@
               </a:rPr>
               <a:t>Use this for</a:t>
             </a:r>
-            <a:endParaRPr lang="en-US" sz="950" dirty="0"/>
-          </a:p>
-        </p:txBody>
-      </p:sp>
-      <p:sp>
-        <p:nvSpPr>
-          <p:cNvPr id="16" name="Text 14"/>
-          <p:cNvSpPr/>
-          <p:nvPr/>
-        </p:nvSpPr>
-        <p:spPr>
-          <a:xfrm>
-            <a:off x="8074152" y="3959352"/>
-            <a:ext cx="2825496" cy="1170432"/>
+            <a:endParaRPr lang="en-US" sz="1300" dirty="0"/>
+          </a:p>
+        </p:txBody>
+      </p:sp>
+      <p:sp>
+        <p:nvSpPr>
+          <p:cNvPr id="17" name="Text 15"/>
+          <p:cNvSpPr/>
+          <p:nvPr/>
+        </p:nvSpPr>
+        <p:spPr>
+          <a:xfrm>
+            <a:off x="8074152" y="4023360"/>
+            <a:ext cx="2825496" cy="1097280"/>
           </a:xfrm>
           <a:prstGeom prst="rect">
             <a:avLst/>
@@ -10979,7 +11641,7 @@
               <a:buNone/>
             </a:pPr>
             <a:r>
-              <a:rPr lang="en-US" sz="1250" dirty="0">
+              <a:rPr lang="en-US" sz="1550" dirty="0">
                 <a:solidFill>
                   <a:srgbClr val="17364A"/>
                 </a:solidFill>
@@ -10989,7 +11651,7 @@
               </a:rPr>
               <a:t>Connect the concept to public health decisions, safeguards, documentation, or implementation work.</a:t>
             </a:r>
-            <a:endParaRPr lang="en-US" sz="1250" dirty="0"/>
+            <a:endParaRPr lang="en-US" sz="1550" dirty="0"/>
           </a:p>
         </p:txBody>
       </p:sp>
@@ -11186,7 +11848,7 @@
                 <a:ea typeface="Aptos" pitchFamily="34" charset="-122"/>
                 <a:cs typeface="Aptos" pitchFamily="34" charset="-120"/>
               </a:rPr>
-              <a:t>© Paula Soper</a:t>
+              <a:t>Â© Paula Soper</a:t>
             </a:r>
             <a:endParaRPr lang="en-US" sz="800" dirty="0"/>
           </a:p>
@@ -11200,8 +11862,47 @@
         </p:nvSpPr>
         <p:spPr>
           <a:xfrm>
+            <a:off x="11137392" y="6510528"/>
+            <a:ext cx="411480" cy="201168"/>
+          </a:xfrm>
+          <a:prstGeom prst="rect">
+            <a:avLst/>
+          </a:prstGeom>
+          <a:noFill/>
+          <a:ln/>
+        </p:spPr>
+        <p:txBody>
+          <a:bodyPr wrap="square" lIns="0" tIns="0" rIns="0" bIns="0" rtlCol="0" anchor="ctr"/>
+          <a:lstStyle/>
+          <a:p>
+            <a:pPr algn="r" indent="0" marL="0">
+              <a:buNone/>
+            </a:pPr>
+            <a:r>
+              <a:rPr lang="en-US" sz="900" dirty="0">
+                <a:solidFill>
+                  <a:srgbClr val="5F7181"/>
+                </a:solidFill>
+                <a:latin typeface="Aptos" pitchFamily="34" charset="0"/>
+                <a:ea typeface="Aptos" pitchFamily="34" charset="-122"/>
+                <a:cs typeface="Aptos" pitchFamily="34" charset="-120"/>
+              </a:rPr>
+              <a:t>3</a:t>
+            </a:r>
+            <a:endParaRPr lang="en-US" sz="900" dirty="0"/>
+          </a:p>
+        </p:txBody>
+      </p:sp>
+      <p:sp>
+        <p:nvSpPr>
+          <p:cNvPr id="8" name="Text 6"/>
+          <p:cNvSpPr/>
+          <p:nvPr/>
+        </p:nvSpPr>
+        <p:spPr>
+          <a:xfrm>
             <a:off x="640080" y="658368"/>
-            <a:ext cx="10881360" cy="566928"/>
+            <a:ext cx="10881360" cy="713232"/>
           </a:xfrm>
           <a:prstGeom prst="rect">
             <a:avLst/>
@@ -11219,7 +11920,7 @@
               <a:buNone/>
             </a:pPr>
             <a:r>
-              <a:rPr lang="en-US" sz="2700" b="1" dirty="0">
+              <a:rPr lang="en-US" sz="3400" b="1" dirty="0">
                 <a:solidFill>
                   <a:srgbClr val="003A63"/>
                 </a:solidFill>
@@ -11229,20 +11930,20 @@
               </a:rPr>
               <a:t>How this module connects to the playbook</a:t>
             </a:r>
-            <a:endParaRPr lang="en-US" sz="2700" dirty="0"/>
-          </a:p>
-        </p:txBody>
-      </p:sp>
-      <p:sp>
-        <p:nvSpPr>
-          <p:cNvPr id="8" name="Text 6"/>
-          <p:cNvSpPr/>
-          <p:nvPr/>
-        </p:nvSpPr>
-        <p:spPr>
-          <a:xfrm>
-            <a:off x="868680" y="1417320"/>
-            <a:ext cx="6903720" cy="4480560"/>
+            <a:endParaRPr lang="en-US" sz="3400" dirty="0"/>
+          </a:p>
+        </p:txBody>
+      </p:sp>
+      <p:sp>
+        <p:nvSpPr>
+          <p:cNvPr id="9" name="Text 7"/>
+          <p:cNvSpPr/>
+          <p:nvPr/>
+        </p:nvSpPr>
+        <p:spPr>
+          <a:xfrm>
+            <a:off x="868680" y="1508760"/>
+            <a:ext cx="6812280" cy="3977640"/>
           </a:xfrm>
           <a:prstGeom prst="rect">
             <a:avLst/>
@@ -11257,7 +11958,7 @@
           <a:lstStyle/>
           <a:p>
             <a:r>
-              <a:rPr lang="en-US" sz="1540" dirty="0">
+              <a:rPr lang="en-US" sz="1900" dirty="0">
                 <a:solidFill>
                   <a:srgbClr val="17364A"/>
                 </a:solidFill>
@@ -11265,13 +11966,13 @@
                 <a:ea typeface="Aptos" pitchFamily="34" charset="-122"/>
                 <a:cs typeface="Aptos" pitchFamily="34" charset="-120"/>
               </a:rPr>
-              <a:t>Play 11: Build and Deploy AI Solutions - This lesson informs Play 11 by helping learners connect the lesson topic to build and deploy.</a:t>
-            </a:r>
-            <a:endParaRPr lang="en-US" sz="1540" dirty="0"/>
-          </a:p>
-          <a:p>
-            <a:r>
-              <a:rPr lang="en-US" sz="1540" dirty="0">
+              <a:t>Play 11: Build and Deploy AI Solutions - This lesson informs Play 11 by helping learners connect the lesson.</a:t>
+            </a:r>
+            <a:endParaRPr lang="en-US" sz="1900" dirty="0"/>
+          </a:p>
+          <a:p>
+            <a:r>
+              <a:rPr lang="en-US" sz="1900" dirty="0">
                 <a:solidFill>
                   <a:srgbClr val="17364A"/>
                 </a:solidFill>
@@ -11279,13 +11980,13 @@
                 <a:ea typeface="Aptos" pitchFamily="34" charset="-122"/>
                 <a:cs typeface="Aptos" pitchFamily="34" charset="-120"/>
               </a:rPr>
-              <a:t>Play 7: Prioritize Use Cases - This lesson informs Play 7 by helping learners connect the lesson topic to prioritize use cases work.</a:t>
-            </a:r>
-            <a:endParaRPr lang="en-US" sz="1540" dirty="0"/>
-          </a:p>
-          <a:p>
-            <a:r>
-              <a:rPr lang="en-US" sz="1540" dirty="0">
+              <a:t>Play 7: Prioritize Use Cases - This lesson informs Play 7 by helping learners connect the lesson topic to.</a:t>
+            </a:r>
+            <a:endParaRPr lang="en-US" sz="1900" dirty="0"/>
+          </a:p>
+          <a:p>
+            <a:r>
+              <a:rPr lang="en-US" sz="1900" dirty="0">
                 <a:solidFill>
                   <a:srgbClr val="17364A"/>
                 </a:solidFill>
@@ -11293,13 +11994,13 @@
                 <a:ea typeface="Aptos" pitchFamily="34" charset="-122"/>
                 <a:cs typeface="Aptos" pitchFamily="34" charset="-120"/>
               </a:rPr>
-              <a:t>Play 1: Vision &amp; Guardrails - This lesson informs Play 1 by helping learners connect the lesson topic to vision &amp; guardrails work in.</a:t>
-            </a:r>
-            <a:endParaRPr lang="en-US" sz="1540" dirty="0"/>
-          </a:p>
-          <a:p>
-            <a:r>
-              <a:rPr lang="en-US" sz="1540" dirty="0">
+              <a:t>Play 1: Vision &amp; Guardrails - This lesson informs Play 1 by helping learners connect the lesson topic to.</a:t>
+            </a:r>
+            <a:endParaRPr lang="en-US" sz="1900" dirty="0"/>
+          </a:p>
+          <a:p>
+            <a:r>
+              <a:rPr lang="en-US" sz="1900" dirty="0">
                 <a:solidFill>
                   <a:srgbClr val="17364A"/>
                 </a:solidFill>
@@ -11307,15 +12008,15 @@
                 <a:ea typeface="Aptos" pitchFamily="34" charset="-122"/>
                 <a:cs typeface="Aptos" pitchFamily="34" charset="-120"/>
               </a:rPr>
-              <a:t>Play 2: Readiness Assessment - This lesson informs Play 2 by helping learners connect the lesson topic to readiness assessment work.</a:t>
-            </a:r>
-            <a:endParaRPr lang="en-US" sz="1540" dirty="0"/>
-          </a:p>
-        </p:txBody>
-      </p:sp>
-      <p:sp>
-        <p:nvSpPr>
-          <p:cNvPr id="9" name="Shape 7"/>
+              <a:t>Play 2: Readiness Assessment - This lesson informs Play 2 by helping learners connect the lesson topic to.</a:t>
+            </a:r>
+            <a:endParaRPr lang="en-US" sz="1900" dirty="0"/>
+          </a:p>
+        </p:txBody>
+      </p:sp>
+      <p:sp>
+        <p:nvSpPr>
+          <p:cNvPr id="10" name="Shape 8"/>
           <p:cNvSpPr/>
           <p:nvPr/>
         </p:nvSpPr>
@@ -11342,14 +12043,14 @@
       </p:sp>
       <p:sp>
         <p:nvSpPr>
-          <p:cNvPr id="10" name="Text 8"/>
+          <p:cNvPr id="11" name="Text 9"/>
           <p:cNvSpPr/>
           <p:nvPr/>
         </p:nvSpPr>
         <p:spPr>
           <a:xfrm>
             <a:off x="8211312" y="1563624"/>
-            <a:ext cx="2734056" cy="201168"/>
+            <a:ext cx="2734056" cy="256032"/>
           </a:xfrm>
           <a:prstGeom prst="rect">
             <a:avLst/>
@@ -11365,7 +12066,7 @@
               <a:buNone/>
             </a:pPr>
             <a:r>
-              <a:rPr lang="en-US" sz="950" b="1" dirty="0">
+              <a:rPr lang="en-US" sz="1300" b="1" dirty="0">
                 <a:solidFill>
                   <a:srgbClr val="0068B7"/>
                 </a:solidFill>
@@ -11375,20 +12076,20 @@
               </a:rPr>
               <a:t>Apply the lesson</a:t>
             </a:r>
-            <a:endParaRPr lang="en-US" sz="950" dirty="0"/>
-          </a:p>
-        </p:txBody>
-      </p:sp>
-      <p:sp>
-        <p:nvSpPr>
-          <p:cNvPr id="11" name="Text 9"/>
-          <p:cNvSpPr/>
-          <p:nvPr/>
-        </p:nvSpPr>
-        <p:spPr>
-          <a:xfrm>
-            <a:off x="8211312" y="1856232"/>
-            <a:ext cx="2734056" cy="1536192"/>
+            <a:endParaRPr lang="en-US" sz="1300" dirty="0"/>
+          </a:p>
+        </p:txBody>
+      </p:sp>
+      <p:sp>
+        <p:nvSpPr>
+          <p:cNvPr id="12" name="Text 10"/>
+          <p:cNvSpPr/>
+          <p:nvPr/>
+        </p:nvSpPr>
+        <p:spPr>
+          <a:xfrm>
+            <a:off x="8211312" y="1920240"/>
+            <a:ext cx="2734056" cy="1463040"/>
           </a:xfrm>
           <a:prstGeom prst="rect">
             <a:avLst/>
@@ -11406,7 +12107,7 @@
               <a:buNone/>
             </a:pPr>
             <a:r>
-              <a:rPr lang="en-US" sz="1250" dirty="0">
+              <a:rPr lang="en-US" sz="1550" dirty="0">
                 <a:solidFill>
                   <a:srgbClr val="17364A"/>
                 </a:solidFill>
@@ -11416,32 +12117,32 @@
               </a:rPr>
               <a:t>Use the related plays to identify decisions, participants, timing, approvals, and documentation needed for responsible implementation.</a:t>
             </a:r>
-            <a:endParaRPr lang="en-US" sz="1250" dirty="0"/>
-          </a:p>
-        </p:txBody>
-      </p:sp>
-      <p:sp>
-        <p:nvSpPr>
-          <p:cNvPr id="12" name="Shape 10"/>
-          <p:cNvSpPr/>
-          <p:nvPr/>
-        </p:nvSpPr>
-        <p:spPr>
-          <a:xfrm>
-            <a:off x="8046720" y="3794760"/>
-            <a:ext cx="3063240" cy="1508760"/>
+            <a:endParaRPr lang="en-US" sz="1550" dirty="0"/>
+          </a:p>
+        </p:txBody>
+      </p:sp>
+      <p:sp>
+        <p:nvSpPr>
+          <p:cNvPr id="13" name="Shape 11"/>
+          <p:cNvSpPr/>
+          <p:nvPr/>
+        </p:nvSpPr>
+        <p:spPr>
+          <a:xfrm>
+            <a:off x="7818120" y="3977640"/>
+            <a:ext cx="972312" cy="749808"/>
           </a:xfrm>
           <a:prstGeom prst="roundRect">
             <a:avLst>
-              <a:gd name="adj" fmla="val 7273"/>
+              <a:gd name="adj" fmla="val 14634"/>
             </a:avLst>
           </a:prstGeom>
           <a:solidFill>
-            <a:srgbClr val="FFF4D9"/>
+            <a:srgbClr val="0068B7"/>
           </a:solidFill>
           <a:ln w="12700">
             <a:solidFill>
-              <a:srgbClr val="B9D7E6"/>
+              <a:srgbClr val="0068B7"/>
             </a:solidFill>
             <a:prstDash val="solid"/>
           </a:ln>
@@ -11449,81 +12150,256 @@
       </p:sp>
       <p:sp>
         <p:nvSpPr>
-          <p:cNvPr id="13" name="Text 11"/>
-          <p:cNvSpPr/>
-          <p:nvPr/>
-        </p:nvSpPr>
-        <p:spPr>
-          <a:xfrm>
-            <a:off x="8211312" y="3941064"/>
-            <a:ext cx="2734056" cy="201168"/>
-          </a:xfrm>
-          <a:prstGeom prst="rect">
-            <a:avLst/>
-          </a:prstGeom>
-          <a:noFill/>
-          <a:ln/>
-        </p:spPr>
-        <p:txBody>
-          <a:bodyPr wrap="square" lIns="0" tIns="0" rIns="0" bIns="0" rtlCol="0" anchor="ctr"/>
-          <a:lstStyle/>
-          <a:p>
-            <a:pPr indent="0" marL="0">
-              <a:buNone/>
-            </a:pPr>
-            <a:r>
-              <a:rPr lang="en-US" sz="950" b="1" dirty="0">
-                <a:solidFill>
-                  <a:srgbClr val="0068B7"/>
-                </a:solidFill>
-                <a:latin typeface="Aptos" pitchFamily="34" charset="0"/>
-                <a:ea typeface="Aptos" pitchFamily="34" charset="-122"/>
-                <a:cs typeface="Aptos" pitchFamily="34" charset="-120"/>
-              </a:rPr>
-              <a:t>Keep in mind</a:t>
-            </a:r>
-            <a:endParaRPr lang="en-US" sz="950" dirty="0"/>
-          </a:p>
-        </p:txBody>
-      </p:sp>
-      <p:sp>
-        <p:nvSpPr>
           <p:cNvPr id="14" name="Text 12"/>
           <p:cNvSpPr/>
           <p:nvPr/>
         </p:nvSpPr>
         <p:spPr>
           <a:xfrm>
-            <a:off x="8211312" y="4233672"/>
-            <a:ext cx="2734056" cy="941832"/>
-          </a:xfrm>
-          <a:prstGeom prst="rect">
-            <a:avLst/>
-          </a:prstGeom>
-          <a:noFill/>
-          <a:ln/>
-        </p:spPr>
-        <p:txBody>
-          <a:bodyPr wrap="square" lIns="0" tIns="0" rIns="0" bIns="0" rtlCol="0" anchor="t">
+            <a:off x="7891272" y="4169664"/>
+            <a:ext cx="826008" cy="310896"/>
+          </a:xfrm>
+          <a:prstGeom prst="rect">
+            <a:avLst/>
+          </a:prstGeom>
+          <a:noFill/>
+          <a:ln/>
+        </p:spPr>
+        <p:txBody>
+          <a:bodyPr wrap="square" lIns="0" tIns="0" rIns="0" bIns="0" rtlCol="0" anchor="ctr">
             <a:normAutofit/>
           </a:bodyPr>
           <a:lstStyle/>
           <a:p>
-            <a:pPr indent="0" marL="0">
-              <a:buNone/>
-            </a:pPr>
-            <a:r>
-              <a:rPr lang="en-US" sz="1250" dirty="0">
-                <a:solidFill>
-                  <a:srgbClr val="17364A"/>
-                </a:solidFill>
-                <a:latin typeface="Aptos" pitchFamily="34" charset="0"/>
-                <a:ea typeface="Aptos" pitchFamily="34" charset="-122"/>
-                <a:cs typeface="Aptos" pitchFamily="34" charset="-120"/>
-              </a:rPr>
-              <a:t>The playbook connection helps turn training into agency work, not just individual knowledge.</a:t>
-            </a:r>
-            <a:endParaRPr lang="en-US" sz="1250" dirty="0"/>
+            <a:pPr algn="ctr" indent="0" marL="0">
+              <a:buNone/>
+            </a:pPr>
+            <a:r>
+              <a:rPr lang="en-US" sz="1500" b="1" dirty="0">
+                <a:solidFill>
+                  <a:srgbClr val="FFFFFF"/>
+                </a:solidFill>
+                <a:latin typeface="Aptos" pitchFamily="34" charset="0"/>
+                <a:ea typeface="Aptos" pitchFamily="34" charset="-122"/>
+                <a:cs typeface="Aptos" pitchFamily="34" charset="-120"/>
+              </a:rPr>
+              <a:t>Lesson</a:t>
+            </a:r>
+            <a:endParaRPr lang="en-US" sz="1500" dirty="0"/>
+          </a:p>
+        </p:txBody>
+      </p:sp>
+      <p:sp>
+        <p:nvSpPr>
+          <p:cNvPr id="15" name="Text 13"/>
+          <p:cNvSpPr/>
+          <p:nvPr/>
+        </p:nvSpPr>
+        <p:spPr>
+          <a:xfrm>
+            <a:off x="8817864" y="4187952"/>
+            <a:ext cx="201168" cy="256032"/>
+          </a:xfrm>
+          <a:prstGeom prst="rect">
+            <a:avLst/>
+          </a:prstGeom>
+          <a:noFill/>
+          <a:ln/>
+        </p:spPr>
+        <p:txBody>
+          <a:bodyPr wrap="square" lIns="0" tIns="0" rIns="0" bIns="0" rtlCol="0" anchor="ctr"/>
+          <a:lstStyle/>
+          <a:p>
+            <a:pPr algn="ctr" indent="0" marL="0">
+              <a:buNone/>
+            </a:pPr>
+            <a:r>
+              <a:rPr lang="en-US" sz="1800" b="1" dirty="0">
+                <a:solidFill>
+                  <a:srgbClr val="0068B7"/>
+                </a:solidFill>
+                <a:latin typeface="Aptos" pitchFamily="34" charset="0"/>
+                <a:ea typeface="Aptos" pitchFamily="34" charset="-122"/>
+                <a:cs typeface="Aptos" pitchFamily="34" charset="-120"/>
+              </a:rPr>
+              <a:t>â†’</a:t>
+            </a:r>
+            <a:endParaRPr lang="en-US" sz="1800" dirty="0"/>
+          </a:p>
+        </p:txBody>
+      </p:sp>
+      <p:sp>
+        <p:nvSpPr>
+          <p:cNvPr id="16" name="Shape 14"/>
+          <p:cNvSpPr/>
+          <p:nvPr/>
+        </p:nvSpPr>
+        <p:spPr>
+          <a:xfrm>
+            <a:off x="9046464" y="3977640"/>
+            <a:ext cx="972312" cy="749808"/>
+          </a:xfrm>
+          <a:prstGeom prst="roundRect">
+            <a:avLst>
+              <a:gd name="adj" fmla="val 14634"/>
+            </a:avLst>
+          </a:prstGeom>
+          <a:solidFill>
+            <a:srgbClr val="2F8A28"/>
+          </a:solidFill>
+          <a:ln w="12700">
+            <a:solidFill>
+              <a:srgbClr val="2F8A28"/>
+            </a:solidFill>
+            <a:prstDash val="solid"/>
+          </a:ln>
+        </p:spPr>
+      </p:sp>
+      <p:sp>
+        <p:nvSpPr>
+          <p:cNvPr id="17" name="Text 15"/>
+          <p:cNvSpPr/>
+          <p:nvPr/>
+        </p:nvSpPr>
+        <p:spPr>
+          <a:xfrm>
+            <a:off x="9119616" y="4169664"/>
+            <a:ext cx="826008" cy="310896"/>
+          </a:xfrm>
+          <a:prstGeom prst="rect">
+            <a:avLst/>
+          </a:prstGeom>
+          <a:noFill/>
+          <a:ln/>
+        </p:spPr>
+        <p:txBody>
+          <a:bodyPr wrap="square" lIns="0" tIns="0" rIns="0" bIns="0" rtlCol="0" anchor="ctr">
+            <a:normAutofit/>
+          </a:bodyPr>
+          <a:lstStyle/>
+          <a:p>
+            <a:pPr algn="ctr" indent="0" marL="0">
+              <a:buNone/>
+            </a:pPr>
+            <a:r>
+              <a:rPr lang="en-US" sz="1500" b="1" dirty="0">
+                <a:solidFill>
+                  <a:srgbClr val="FFFFFF"/>
+                </a:solidFill>
+                <a:latin typeface="Aptos" pitchFamily="34" charset="0"/>
+                <a:ea typeface="Aptos" pitchFamily="34" charset="-122"/>
+                <a:cs typeface="Aptos" pitchFamily="34" charset="-120"/>
+              </a:rPr>
+              <a:t>Plays</a:t>
+            </a:r>
+            <a:endParaRPr lang="en-US" sz="1500" dirty="0"/>
+          </a:p>
+        </p:txBody>
+      </p:sp>
+      <p:sp>
+        <p:nvSpPr>
+          <p:cNvPr id="18" name="Text 16"/>
+          <p:cNvSpPr/>
+          <p:nvPr/>
+        </p:nvSpPr>
+        <p:spPr>
+          <a:xfrm>
+            <a:off x="10046208" y="4187952"/>
+            <a:ext cx="201168" cy="256032"/>
+          </a:xfrm>
+          <a:prstGeom prst="rect">
+            <a:avLst/>
+          </a:prstGeom>
+          <a:noFill/>
+          <a:ln/>
+        </p:spPr>
+        <p:txBody>
+          <a:bodyPr wrap="square" lIns="0" tIns="0" rIns="0" bIns="0" rtlCol="0" anchor="ctr"/>
+          <a:lstStyle/>
+          <a:p>
+            <a:pPr algn="ctr" indent="0" marL="0">
+              <a:buNone/>
+            </a:pPr>
+            <a:r>
+              <a:rPr lang="en-US" sz="1800" b="1" dirty="0">
+                <a:solidFill>
+                  <a:srgbClr val="0068B7"/>
+                </a:solidFill>
+                <a:latin typeface="Aptos" pitchFamily="34" charset="0"/>
+                <a:ea typeface="Aptos" pitchFamily="34" charset="-122"/>
+                <a:cs typeface="Aptos" pitchFamily="34" charset="-120"/>
+              </a:rPr>
+              <a:t>â†’</a:t>
+            </a:r>
+            <a:endParaRPr lang="en-US" sz="1800" dirty="0"/>
+          </a:p>
+        </p:txBody>
+      </p:sp>
+      <p:sp>
+        <p:nvSpPr>
+          <p:cNvPr id="19" name="Shape 17"/>
+          <p:cNvSpPr/>
+          <p:nvPr/>
+        </p:nvSpPr>
+        <p:spPr>
+          <a:xfrm>
+            <a:off x="10274808" y="3977640"/>
+            <a:ext cx="972312" cy="749808"/>
+          </a:xfrm>
+          <a:prstGeom prst="roundRect">
+            <a:avLst>
+              <a:gd name="adj" fmla="val 14634"/>
+            </a:avLst>
+          </a:prstGeom>
+          <a:solidFill>
+            <a:srgbClr val="6A4CA3"/>
+          </a:solidFill>
+          <a:ln w="12700">
+            <a:solidFill>
+              <a:srgbClr val="6A4CA3"/>
+            </a:solidFill>
+            <a:prstDash val="solid"/>
+          </a:ln>
+        </p:spPr>
+      </p:sp>
+      <p:sp>
+        <p:nvSpPr>
+          <p:cNvPr id="20" name="Text 18"/>
+          <p:cNvSpPr/>
+          <p:nvPr/>
+        </p:nvSpPr>
+        <p:spPr>
+          <a:xfrm>
+            <a:off x="10347960" y="4169664"/>
+            <a:ext cx="826008" cy="310896"/>
+          </a:xfrm>
+          <a:prstGeom prst="rect">
+            <a:avLst/>
+          </a:prstGeom>
+          <a:noFill/>
+          <a:ln/>
+        </p:spPr>
+        <p:txBody>
+          <a:bodyPr wrap="square" lIns="0" tIns="0" rIns="0" bIns="0" rtlCol="0" anchor="ctr">
+            <a:normAutofit/>
+          </a:bodyPr>
+          <a:lstStyle/>
+          <a:p>
+            <a:pPr algn="ctr" indent="0" marL="0">
+              <a:buNone/>
+            </a:pPr>
+            <a:r>
+              <a:rPr lang="en-US" sz="1500" b="1" dirty="0">
+                <a:solidFill>
+                  <a:srgbClr val="FFFFFF"/>
+                </a:solidFill>
+                <a:latin typeface="Aptos" pitchFamily="34" charset="0"/>
+                <a:ea typeface="Aptos" pitchFamily="34" charset="-122"/>
+                <a:cs typeface="Aptos" pitchFamily="34" charset="-120"/>
+              </a:rPr>
+              <a:t>Action</a:t>
+            </a:r>
+            <a:endParaRPr lang="en-US" sz="1500" dirty="0"/>
           </a:p>
         </p:txBody>
       </p:sp>
@@ -11720,7 +12596,7 @@
                 <a:ea typeface="Aptos" pitchFamily="34" charset="-122"/>
                 <a:cs typeface="Aptos" pitchFamily="34" charset="-120"/>
               </a:rPr>
-              <a:t>© Paula Soper</a:t>
+              <a:t>Â© Paula Soper</a:t>
             </a:r>
             <a:endParaRPr lang="en-US" sz="800" dirty="0"/>
           </a:p>
@@ -11734,8 +12610,47 @@
         </p:nvSpPr>
         <p:spPr>
           <a:xfrm>
+            <a:off x="11137392" y="6510528"/>
+            <a:ext cx="411480" cy="201168"/>
+          </a:xfrm>
+          <a:prstGeom prst="rect">
+            <a:avLst/>
+          </a:prstGeom>
+          <a:noFill/>
+          <a:ln/>
+        </p:spPr>
+        <p:txBody>
+          <a:bodyPr wrap="square" lIns="0" tIns="0" rIns="0" bIns="0" rtlCol="0" anchor="ctr"/>
+          <a:lstStyle/>
+          <a:p>
+            <a:pPr algn="r" indent="0" marL="0">
+              <a:buNone/>
+            </a:pPr>
+            <a:r>
+              <a:rPr lang="en-US" sz="900" dirty="0">
+                <a:solidFill>
+                  <a:srgbClr val="5F7181"/>
+                </a:solidFill>
+                <a:latin typeface="Aptos" pitchFamily="34" charset="0"/>
+                <a:ea typeface="Aptos" pitchFamily="34" charset="-122"/>
+                <a:cs typeface="Aptos" pitchFamily="34" charset="-120"/>
+              </a:rPr>
+              <a:t>4</a:t>
+            </a:r>
+            <a:endParaRPr lang="en-US" sz="900" dirty="0"/>
+          </a:p>
+        </p:txBody>
+      </p:sp>
+      <p:sp>
+        <p:nvSpPr>
+          <p:cNvPr id="8" name="Text 6"/>
+          <p:cNvSpPr/>
+          <p:nvPr/>
+        </p:nvSpPr>
+        <p:spPr>
+          <a:xfrm>
             <a:off x="640080" y="658368"/>
-            <a:ext cx="10881360" cy="566928"/>
+            <a:ext cx="10881360" cy="713232"/>
           </a:xfrm>
           <a:prstGeom prst="rect">
             <a:avLst/>
@@ -11753,7 +12668,7 @@
               <a:buNone/>
             </a:pPr>
             <a:r>
-              <a:rPr lang="en-US" sz="2700" b="1" dirty="0">
+              <a:rPr lang="en-US" sz="3400" b="1" dirty="0">
                 <a:solidFill>
                   <a:srgbClr val="003A63"/>
                 </a:solidFill>
@@ -11763,20 +12678,20 @@
               </a:rPr>
               <a:t>Related toolkit resources</a:t>
             </a:r>
-            <a:endParaRPr lang="en-US" sz="2700" dirty="0"/>
-          </a:p>
-        </p:txBody>
-      </p:sp>
-      <p:sp>
-        <p:nvSpPr>
-          <p:cNvPr id="8" name="Text 6"/>
-          <p:cNvSpPr/>
-          <p:nvPr/>
-        </p:nvSpPr>
-        <p:spPr>
-          <a:xfrm>
-            <a:off x="868680" y="1417320"/>
-            <a:ext cx="6903720" cy="4480560"/>
+            <a:endParaRPr lang="en-US" sz="3400" dirty="0"/>
+          </a:p>
+        </p:txBody>
+      </p:sp>
+      <p:sp>
+        <p:nvSpPr>
+          <p:cNvPr id="9" name="Text 7"/>
+          <p:cNvSpPr/>
+          <p:nvPr/>
+        </p:nvSpPr>
+        <p:spPr>
+          <a:xfrm>
+            <a:off x="868680" y="1508760"/>
+            <a:ext cx="6812280" cy="3977640"/>
           </a:xfrm>
           <a:prstGeom prst="rect">
             <a:avLst/>
@@ -11791,7 +12706,7 @@
           <a:lstStyle/>
           <a:p>
             <a:r>
-              <a:rPr lang="en-US" sz="1460" dirty="0">
+              <a:rPr lang="en-US" sz="1850" dirty="0">
                 <a:solidFill>
                   <a:srgbClr val="17364A"/>
                 </a:solidFill>
@@ -11799,13 +12714,13 @@
                 <a:ea typeface="Aptos" pitchFamily="34" charset="-122"/>
                 <a:cs typeface="Aptos" pitchFamily="34" charset="-120"/>
               </a:rPr>
-              <a:t>Tool 3: Equity Impact Assessment Checklist (Checklist) - Use this tool to complete or strengthen the practical exercise for the.</a:t>
-            </a:r>
-            <a:endParaRPr lang="en-US" sz="1460" dirty="0"/>
-          </a:p>
-          <a:p>
-            <a:r>
-              <a:rPr lang="en-US" sz="1460" dirty="0">
+              <a:t>Tool 3: Equity Impact Assessment Checklist (Checklist) - Use this tool to complete or strengthen the.</a:t>
+            </a:r>
+            <a:endParaRPr lang="en-US" sz="1850" dirty="0"/>
+          </a:p>
+          <a:p>
+            <a:r>
+              <a:rPr lang="en-US" sz="1850" dirty="0">
                 <a:solidFill>
                   <a:srgbClr val="17364A"/>
                 </a:solidFill>
@@ -11813,13 +12728,13 @@
                 <a:ea typeface="Aptos" pitchFamily="34" charset="-122"/>
                 <a:cs typeface="Aptos" pitchFamily="34" charset="-120"/>
               </a:rPr>
-              <a:t>Tool 4: AI Policy Landscape Scan (Worksheet) - Use AI Policy Landscape Scan to translate this lesson into a documented public health.</a:t>
-            </a:r>
-            <a:endParaRPr lang="en-US" sz="1460" dirty="0"/>
-          </a:p>
-          <a:p>
-            <a:r>
-              <a:rPr lang="en-US" sz="1460" dirty="0">
+              <a:t>Tool 4: AI Policy Landscape Scan (Worksheet) - Use AI Policy Landscape Scan to translate this lesson into a.</a:t>
+            </a:r>
+            <a:endParaRPr lang="en-US" sz="1850" dirty="0"/>
+          </a:p>
+          <a:p>
+            <a:r>
+              <a:rPr lang="en-US" sz="1850" dirty="0">
                 <a:solidFill>
                   <a:srgbClr val="17364A"/>
                 </a:solidFill>
@@ -11827,13 +12742,13 @@
                 <a:ea typeface="Aptos" pitchFamily="34" charset="-122"/>
                 <a:cs typeface="Aptos" pitchFamily="34" charset="-120"/>
               </a:rPr>
-              <a:t>Tool 5: AI Environmental and Resource Impact Review (Checklist) - Use AI Environmental and Resource Impact Review to translate this.</a:t>
-            </a:r>
-            <a:endParaRPr lang="en-US" sz="1460" dirty="0"/>
-          </a:p>
-          <a:p>
-            <a:r>
-              <a:rPr lang="en-US" sz="1460" dirty="0">
+              <a:t>Tool 5: AI Environmental and Resource Impact Review (Checklist) - Use AI Environmental and Resource Impact.</a:t>
+            </a:r>
+            <a:endParaRPr lang="en-US" sz="1850" dirty="0"/>
+          </a:p>
+          <a:p>
+            <a:r>
+              <a:rPr lang="en-US" sz="1850" dirty="0">
                 <a:solidFill>
                   <a:srgbClr val="17364A"/>
                 </a:solidFill>
@@ -11841,29 +12756,15 @@
                 <a:ea typeface="Aptos" pitchFamily="34" charset="-122"/>
                 <a:cs typeface="Aptos" pitchFamily="34" charset="-120"/>
               </a:rPr>
-              <a:t>Tool 6: Human-Centered AI Decision Rule Checklist (Checklist) - Use Human-Centered AI Decision Rule Checklist to translate this.</a:t>
-            </a:r>
-            <a:endParaRPr lang="en-US" sz="1460" dirty="0"/>
-          </a:p>
-          <a:p>
-            <a:r>
-              <a:rPr lang="en-US" sz="1460" dirty="0">
-                <a:solidFill>
-                  <a:srgbClr val="17364A"/>
-                </a:solidFill>
-                <a:latin typeface="Aptos" pitchFamily="34" charset="0"/>
-                <a:ea typeface="Aptos" pitchFamily="34" charset="-122"/>
-                <a:cs typeface="Aptos" pitchFamily="34" charset="-120"/>
-              </a:rPr>
-              <a:t>Tool 8: AI Project Charter (Planning) - Use AI Project Charter to translate this lesson into a documented public health AI planning,.</a:t>
-            </a:r>
-            <a:endParaRPr lang="en-US" sz="1460" dirty="0"/>
-          </a:p>
-        </p:txBody>
-      </p:sp>
-      <p:sp>
-        <p:nvSpPr>
-          <p:cNvPr id="9" name="Shape 7"/>
+              <a:t>Tool 6: Human-Centered AI Decision Rule Checklist (Checklist) - Use Human-Centered AI Decision Rule.</a:t>
+            </a:r>
+            <a:endParaRPr lang="en-US" sz="1850" dirty="0"/>
+          </a:p>
+        </p:txBody>
+      </p:sp>
+      <p:sp>
+        <p:nvSpPr>
+          <p:cNvPr id="10" name="Shape 8"/>
           <p:cNvSpPr/>
           <p:nvPr/>
         </p:nvSpPr>
@@ -11890,14 +12791,14 @@
       </p:sp>
       <p:sp>
         <p:nvSpPr>
-          <p:cNvPr id="10" name="Text 8"/>
+          <p:cNvPr id="11" name="Text 9"/>
           <p:cNvSpPr/>
           <p:nvPr/>
         </p:nvSpPr>
         <p:spPr>
           <a:xfrm>
             <a:off x="8211312" y="1563624"/>
-            <a:ext cx="2734056" cy="201168"/>
+            <a:ext cx="2734056" cy="256032"/>
           </a:xfrm>
           <a:prstGeom prst="rect">
             <a:avLst/>
@@ -11913,7 +12814,7 @@
               <a:buNone/>
             </a:pPr>
             <a:r>
-              <a:rPr lang="en-US" sz="950" b="1" dirty="0">
+              <a:rPr lang="en-US" sz="1300" b="1" dirty="0">
                 <a:solidFill>
                   <a:srgbClr val="0068B7"/>
                 </a:solidFill>
@@ -11923,20 +12824,20 @@
               </a:rPr>
               <a:t>Use the tools</a:t>
             </a:r>
-            <a:endParaRPr lang="en-US" sz="950" dirty="0"/>
-          </a:p>
-        </p:txBody>
-      </p:sp>
-      <p:sp>
-        <p:nvSpPr>
-          <p:cNvPr id="11" name="Text 9"/>
-          <p:cNvSpPr/>
-          <p:nvPr/>
-        </p:nvSpPr>
-        <p:spPr>
-          <a:xfrm>
-            <a:off x="8211312" y="1856232"/>
-            <a:ext cx="2734056" cy="1536192"/>
+            <a:endParaRPr lang="en-US" sz="1300" dirty="0"/>
+          </a:p>
+        </p:txBody>
+      </p:sp>
+      <p:sp>
+        <p:nvSpPr>
+          <p:cNvPr id="12" name="Text 10"/>
+          <p:cNvSpPr/>
+          <p:nvPr/>
+        </p:nvSpPr>
+        <p:spPr>
+          <a:xfrm>
+            <a:off x="8211312" y="1920240"/>
+            <a:ext cx="2734056" cy="1463040"/>
           </a:xfrm>
           <a:prstGeom prst="rect">
             <a:avLst/>
@@ -11954,7 +12855,7 @@
               <a:buNone/>
             </a:pPr>
             <a:r>
-              <a:rPr lang="en-US" sz="1250" dirty="0">
+              <a:rPr lang="en-US" sz="1550" dirty="0">
                 <a:solidFill>
                   <a:srgbClr val="17364A"/>
                 </a:solidFill>
@@ -11964,32 +12865,32 @@
               </a:rPr>
               <a:t>Use linked tools when your department needs a structured worksheet, template, checklist, review process, or documentation artifact.</a:t>
             </a:r>
-            <a:endParaRPr lang="en-US" sz="1250" dirty="0"/>
-          </a:p>
-        </p:txBody>
-      </p:sp>
-      <p:sp>
-        <p:nvSpPr>
-          <p:cNvPr id="12" name="Shape 10"/>
-          <p:cNvSpPr/>
-          <p:nvPr/>
-        </p:nvSpPr>
-        <p:spPr>
-          <a:xfrm>
-            <a:off x="8046720" y="3794760"/>
-            <a:ext cx="3063240" cy="1508760"/>
+            <a:endParaRPr lang="en-US" sz="1550" dirty="0"/>
+          </a:p>
+        </p:txBody>
+      </p:sp>
+      <p:sp>
+        <p:nvSpPr>
+          <p:cNvPr id="13" name="Shape 11"/>
+          <p:cNvSpPr/>
+          <p:nvPr/>
+        </p:nvSpPr>
+        <p:spPr>
+          <a:xfrm>
+            <a:off x="7818120" y="3977640"/>
+            <a:ext cx="972312" cy="749808"/>
           </a:xfrm>
           <a:prstGeom prst="roundRect">
             <a:avLst>
-              <a:gd name="adj" fmla="val 7273"/>
+              <a:gd name="adj" fmla="val 14634"/>
             </a:avLst>
           </a:prstGeom>
           <a:solidFill>
-            <a:srgbClr val="EEF8ED"/>
+            <a:srgbClr val="0068B7"/>
           </a:solidFill>
           <a:ln w="12700">
             <a:solidFill>
-              <a:srgbClr val="B9D7E6"/>
+              <a:srgbClr val="0068B7"/>
             </a:solidFill>
             <a:prstDash val="solid"/>
           </a:ln>
@@ -11997,81 +12898,256 @@
       </p:sp>
       <p:sp>
         <p:nvSpPr>
-          <p:cNvPr id="13" name="Text 11"/>
-          <p:cNvSpPr/>
-          <p:nvPr/>
-        </p:nvSpPr>
-        <p:spPr>
-          <a:xfrm>
-            <a:off x="8211312" y="3941064"/>
-            <a:ext cx="2734056" cy="201168"/>
-          </a:xfrm>
-          <a:prstGeom prst="rect">
-            <a:avLst/>
-          </a:prstGeom>
-          <a:noFill/>
-          <a:ln/>
-        </p:spPr>
-        <p:txBody>
-          <a:bodyPr wrap="square" lIns="0" tIns="0" rIns="0" bIns="0" rtlCol="0" anchor="ctr"/>
-          <a:lstStyle/>
-          <a:p>
-            <a:pPr indent="0" marL="0">
-              <a:buNone/>
-            </a:pPr>
-            <a:r>
-              <a:rPr lang="en-US" sz="950" b="1" dirty="0">
-                <a:solidFill>
-                  <a:srgbClr val="0068B7"/>
-                </a:solidFill>
-                <a:latin typeface="Aptos" pitchFamily="34" charset="0"/>
-                <a:ea typeface="Aptos" pitchFamily="34" charset="-122"/>
-                <a:cs typeface="Aptos" pitchFamily="34" charset="-120"/>
-              </a:rPr>
-              <a:t>Avoid duplication</a:t>
-            </a:r>
-            <a:endParaRPr lang="en-US" sz="950" dirty="0"/>
-          </a:p>
-        </p:txBody>
-      </p:sp>
-      <p:sp>
-        <p:nvSpPr>
           <p:cNvPr id="14" name="Text 12"/>
           <p:cNvSpPr/>
           <p:nvPr/>
         </p:nvSpPr>
         <p:spPr>
           <a:xfrm>
-            <a:off x="8211312" y="4233672"/>
-            <a:ext cx="2734056" cy="941832"/>
-          </a:xfrm>
-          <a:prstGeom prst="rect">
-            <a:avLst/>
-          </a:prstGeom>
-          <a:noFill/>
-          <a:ln/>
-        </p:spPr>
-        <p:txBody>
-          <a:bodyPr wrap="square" lIns="0" tIns="0" rIns="0" bIns="0" rtlCol="0" anchor="t">
+            <a:off x="7891272" y="4169664"/>
+            <a:ext cx="826008" cy="310896"/>
+          </a:xfrm>
+          <a:prstGeom prst="rect">
+            <a:avLst/>
+          </a:prstGeom>
+          <a:noFill/>
+          <a:ln/>
+        </p:spPr>
+        <p:txBody>
+          <a:bodyPr wrap="square" lIns="0" tIns="0" rIns="0" bIns="0" rtlCol="0" anchor="ctr">
             <a:normAutofit/>
           </a:bodyPr>
           <a:lstStyle/>
           <a:p>
-            <a:pPr indent="0" marL="0">
-              <a:buNone/>
-            </a:pPr>
-            <a:r>
-              <a:rPr lang="en-US" sz="1250" dirty="0">
-                <a:solidFill>
-                  <a:srgbClr val="17364A"/>
-                </a:solidFill>
-                <a:latin typeface="Aptos" pitchFamily="34" charset="0"/>
-                <a:ea typeface="Aptos" pitchFamily="34" charset="-122"/>
-                <a:cs typeface="Aptos" pitchFamily="34" charset="-120"/>
-              </a:rPr>
-              <a:t>If your department already has a strong equivalent tool, adapt or use the existing process instead of recreating it.</a:t>
-            </a:r>
-            <a:endParaRPr lang="en-US" sz="1250" dirty="0"/>
+            <a:pPr algn="ctr" indent="0" marL="0">
+              <a:buNone/>
+            </a:pPr>
+            <a:r>
+              <a:rPr lang="en-US" sz="1500" b="1" dirty="0">
+                <a:solidFill>
+                  <a:srgbClr val="FFFFFF"/>
+                </a:solidFill>
+                <a:latin typeface="Aptos" pitchFamily="34" charset="0"/>
+                <a:ea typeface="Aptos" pitchFamily="34" charset="-122"/>
+                <a:cs typeface="Aptos" pitchFamily="34" charset="-120"/>
+              </a:rPr>
+              <a:t>Concept</a:t>
+            </a:r>
+            <a:endParaRPr lang="en-US" sz="1500" dirty="0"/>
+          </a:p>
+        </p:txBody>
+      </p:sp>
+      <p:sp>
+        <p:nvSpPr>
+          <p:cNvPr id="15" name="Text 13"/>
+          <p:cNvSpPr/>
+          <p:nvPr/>
+        </p:nvSpPr>
+        <p:spPr>
+          <a:xfrm>
+            <a:off x="8817864" y="4187952"/>
+            <a:ext cx="201168" cy="256032"/>
+          </a:xfrm>
+          <a:prstGeom prst="rect">
+            <a:avLst/>
+          </a:prstGeom>
+          <a:noFill/>
+          <a:ln/>
+        </p:spPr>
+        <p:txBody>
+          <a:bodyPr wrap="square" lIns="0" tIns="0" rIns="0" bIns="0" rtlCol="0" anchor="ctr"/>
+          <a:lstStyle/>
+          <a:p>
+            <a:pPr algn="ctr" indent="0" marL="0">
+              <a:buNone/>
+            </a:pPr>
+            <a:r>
+              <a:rPr lang="en-US" sz="1800" b="1" dirty="0">
+                <a:solidFill>
+                  <a:srgbClr val="0068B7"/>
+                </a:solidFill>
+                <a:latin typeface="Aptos" pitchFamily="34" charset="0"/>
+                <a:ea typeface="Aptos" pitchFamily="34" charset="-122"/>
+                <a:cs typeface="Aptos" pitchFamily="34" charset="-120"/>
+              </a:rPr>
+              <a:t>â†’</a:t>
+            </a:r>
+            <a:endParaRPr lang="en-US" sz="1800" dirty="0"/>
+          </a:p>
+        </p:txBody>
+      </p:sp>
+      <p:sp>
+        <p:nvSpPr>
+          <p:cNvPr id="16" name="Shape 14"/>
+          <p:cNvSpPr/>
+          <p:nvPr/>
+        </p:nvSpPr>
+        <p:spPr>
+          <a:xfrm>
+            <a:off x="9046464" y="3977640"/>
+            <a:ext cx="972312" cy="749808"/>
+          </a:xfrm>
+          <a:prstGeom prst="roundRect">
+            <a:avLst>
+              <a:gd name="adj" fmla="val 14634"/>
+            </a:avLst>
+          </a:prstGeom>
+          <a:solidFill>
+            <a:srgbClr val="2F8A28"/>
+          </a:solidFill>
+          <a:ln w="12700">
+            <a:solidFill>
+              <a:srgbClr val="2F8A28"/>
+            </a:solidFill>
+            <a:prstDash val="solid"/>
+          </a:ln>
+        </p:spPr>
+      </p:sp>
+      <p:sp>
+        <p:nvSpPr>
+          <p:cNvPr id="17" name="Text 15"/>
+          <p:cNvSpPr/>
+          <p:nvPr/>
+        </p:nvSpPr>
+        <p:spPr>
+          <a:xfrm>
+            <a:off x="9119616" y="4169664"/>
+            <a:ext cx="826008" cy="310896"/>
+          </a:xfrm>
+          <a:prstGeom prst="rect">
+            <a:avLst/>
+          </a:prstGeom>
+          <a:noFill/>
+          <a:ln/>
+        </p:spPr>
+        <p:txBody>
+          <a:bodyPr wrap="square" lIns="0" tIns="0" rIns="0" bIns="0" rtlCol="0" anchor="ctr">
+            <a:normAutofit/>
+          </a:bodyPr>
+          <a:lstStyle/>
+          <a:p>
+            <a:pPr algn="ctr" indent="0" marL="0">
+              <a:buNone/>
+            </a:pPr>
+            <a:r>
+              <a:rPr lang="en-US" sz="1500" b="1" dirty="0">
+                <a:solidFill>
+                  <a:srgbClr val="FFFFFF"/>
+                </a:solidFill>
+                <a:latin typeface="Aptos" pitchFamily="34" charset="0"/>
+                <a:ea typeface="Aptos" pitchFamily="34" charset="-122"/>
+                <a:cs typeface="Aptos" pitchFamily="34" charset="-120"/>
+              </a:rPr>
+              <a:t>Tool</a:t>
+            </a:r>
+            <a:endParaRPr lang="en-US" sz="1500" dirty="0"/>
+          </a:p>
+        </p:txBody>
+      </p:sp>
+      <p:sp>
+        <p:nvSpPr>
+          <p:cNvPr id="18" name="Text 16"/>
+          <p:cNvSpPr/>
+          <p:nvPr/>
+        </p:nvSpPr>
+        <p:spPr>
+          <a:xfrm>
+            <a:off x="10046208" y="4187952"/>
+            <a:ext cx="201168" cy="256032"/>
+          </a:xfrm>
+          <a:prstGeom prst="rect">
+            <a:avLst/>
+          </a:prstGeom>
+          <a:noFill/>
+          <a:ln/>
+        </p:spPr>
+        <p:txBody>
+          <a:bodyPr wrap="square" lIns="0" tIns="0" rIns="0" bIns="0" rtlCol="0" anchor="ctr"/>
+          <a:lstStyle/>
+          <a:p>
+            <a:pPr algn="ctr" indent="0" marL="0">
+              <a:buNone/>
+            </a:pPr>
+            <a:r>
+              <a:rPr lang="en-US" sz="1800" b="1" dirty="0">
+                <a:solidFill>
+                  <a:srgbClr val="0068B7"/>
+                </a:solidFill>
+                <a:latin typeface="Aptos" pitchFamily="34" charset="0"/>
+                <a:ea typeface="Aptos" pitchFamily="34" charset="-122"/>
+                <a:cs typeface="Aptos" pitchFamily="34" charset="-120"/>
+              </a:rPr>
+              <a:t>â†’</a:t>
+            </a:r>
+            <a:endParaRPr lang="en-US" sz="1800" dirty="0"/>
+          </a:p>
+        </p:txBody>
+      </p:sp>
+      <p:sp>
+        <p:nvSpPr>
+          <p:cNvPr id="19" name="Shape 17"/>
+          <p:cNvSpPr/>
+          <p:nvPr/>
+        </p:nvSpPr>
+        <p:spPr>
+          <a:xfrm>
+            <a:off x="10274808" y="3977640"/>
+            <a:ext cx="972312" cy="749808"/>
+          </a:xfrm>
+          <a:prstGeom prst="roundRect">
+            <a:avLst>
+              <a:gd name="adj" fmla="val 14634"/>
+            </a:avLst>
+          </a:prstGeom>
+          <a:solidFill>
+            <a:srgbClr val="D69A2D"/>
+          </a:solidFill>
+          <a:ln w="12700">
+            <a:solidFill>
+              <a:srgbClr val="D69A2D"/>
+            </a:solidFill>
+            <a:prstDash val="solid"/>
+          </a:ln>
+        </p:spPr>
+      </p:sp>
+      <p:sp>
+        <p:nvSpPr>
+          <p:cNvPr id="20" name="Text 18"/>
+          <p:cNvSpPr/>
+          <p:nvPr/>
+        </p:nvSpPr>
+        <p:spPr>
+          <a:xfrm>
+            <a:off x="10347960" y="4169664"/>
+            <a:ext cx="826008" cy="310896"/>
+          </a:xfrm>
+          <a:prstGeom prst="rect">
+            <a:avLst/>
+          </a:prstGeom>
+          <a:noFill/>
+          <a:ln/>
+        </p:spPr>
+        <p:txBody>
+          <a:bodyPr wrap="square" lIns="0" tIns="0" rIns="0" bIns="0" rtlCol="0" anchor="ctr">
+            <a:normAutofit/>
+          </a:bodyPr>
+          <a:lstStyle/>
+          <a:p>
+            <a:pPr algn="ctr" indent="0" marL="0">
+              <a:buNone/>
+            </a:pPr>
+            <a:r>
+              <a:rPr lang="en-US" sz="1500" b="1" dirty="0">
+                <a:solidFill>
+                  <a:srgbClr val="FFFFFF"/>
+                </a:solidFill>
+                <a:latin typeface="Aptos" pitchFamily="34" charset="0"/>
+                <a:ea typeface="Aptos" pitchFamily="34" charset="-122"/>
+                <a:cs typeface="Aptos" pitchFamily="34" charset="-120"/>
+              </a:rPr>
+              <a:t>Artifact</a:t>
+            </a:r>
+            <a:endParaRPr lang="en-US" sz="1500" dirty="0"/>
           </a:p>
         </p:txBody>
       </p:sp>
@@ -12268,7 +13344,7 @@
                 <a:ea typeface="Aptos" pitchFamily="34" charset="-122"/>
                 <a:cs typeface="Aptos" pitchFamily="34" charset="-120"/>
               </a:rPr>
-              <a:t>© Paula Soper</a:t>
+              <a:t>Â© Paula Soper</a:t>
             </a:r>
             <a:endParaRPr lang="en-US" sz="800" dirty="0"/>
           </a:p>
@@ -12276,7 +13352,46 @@
       </p:sp>
       <p:sp>
         <p:nvSpPr>
-          <p:cNvPr id="7" name="Shape 5"/>
+          <p:cNvPr id="7" name="Text 5"/>
+          <p:cNvSpPr/>
+          <p:nvPr/>
+        </p:nvSpPr>
+        <p:spPr>
+          <a:xfrm>
+            <a:off x="11137392" y="6510528"/>
+            <a:ext cx="411480" cy="201168"/>
+          </a:xfrm>
+          <a:prstGeom prst="rect">
+            <a:avLst/>
+          </a:prstGeom>
+          <a:noFill/>
+          <a:ln/>
+        </p:spPr>
+        <p:txBody>
+          <a:bodyPr wrap="square" lIns="0" tIns="0" rIns="0" bIns="0" rtlCol="0" anchor="ctr"/>
+          <a:lstStyle/>
+          <a:p>
+            <a:pPr algn="r" indent="0" marL="0">
+              <a:buNone/>
+            </a:pPr>
+            <a:r>
+              <a:rPr lang="en-US" sz="900" dirty="0">
+                <a:solidFill>
+                  <a:srgbClr val="5F7181"/>
+                </a:solidFill>
+                <a:latin typeface="Aptos" pitchFamily="34" charset="0"/>
+                <a:ea typeface="Aptos" pitchFamily="34" charset="-122"/>
+                <a:cs typeface="Aptos" pitchFamily="34" charset="-120"/>
+              </a:rPr>
+              <a:t>5</a:t>
+            </a:r>
+            <a:endParaRPr lang="en-US" sz="900" dirty="0"/>
+          </a:p>
+        </p:txBody>
+      </p:sp>
+      <p:sp>
+        <p:nvSpPr>
+          <p:cNvPr id="8" name="Shape 6"/>
           <p:cNvSpPr/>
           <p:nvPr/>
         </p:nvSpPr>
@@ -12301,7 +13416,7 @@
       </p:sp>
       <p:sp>
         <p:nvSpPr>
-          <p:cNvPr id="8" name="Text 6"/>
+          <p:cNvPr id="9" name="Text 7"/>
           <p:cNvSpPr/>
           <p:nvPr/>
         </p:nvSpPr>
@@ -12340,14 +13455,14 @@
       </p:sp>
       <p:sp>
         <p:nvSpPr>
-          <p:cNvPr id="9" name="Text 7"/>
+          <p:cNvPr id="10" name="Text 8"/>
           <p:cNvSpPr/>
           <p:nvPr/>
         </p:nvSpPr>
         <p:spPr>
           <a:xfrm>
             <a:off x="640080" y="621792"/>
-            <a:ext cx="10881360" cy="566928"/>
+            <a:ext cx="10881360" cy="713232"/>
           </a:xfrm>
           <a:prstGeom prst="rect">
             <a:avLst/>
@@ -12365,7 +13480,7 @@
               <a:buNone/>
             </a:pPr>
             <a:r>
-              <a:rPr lang="en-US" sz="2700" b="1" dirty="0">
+              <a:rPr lang="en-US" sz="3400" b="1" dirty="0">
                 <a:solidFill>
                   <a:srgbClr val="003A63"/>
                 </a:solidFill>
@@ -12375,20 +13490,20 @@
               </a:rPr>
               <a:t>Learning Objectives</a:t>
             </a:r>
-            <a:endParaRPr lang="en-US" sz="2700" dirty="0"/>
-          </a:p>
-        </p:txBody>
-      </p:sp>
-      <p:sp>
-        <p:nvSpPr>
-          <p:cNvPr id="10" name="Text 8"/>
-          <p:cNvSpPr/>
-          <p:nvPr/>
-        </p:nvSpPr>
-        <p:spPr>
-          <a:xfrm>
-            <a:off x="868680" y="1417320"/>
-            <a:ext cx="6675120" cy="4434840"/>
+            <a:endParaRPr lang="en-US" sz="3400" dirty="0"/>
+          </a:p>
+        </p:txBody>
+      </p:sp>
+      <p:sp>
+        <p:nvSpPr>
+          <p:cNvPr id="11" name="Text 9"/>
+          <p:cNvSpPr/>
+          <p:nvPr/>
+        </p:nvSpPr>
+        <p:spPr>
+          <a:xfrm>
+            <a:off x="868680" y="1508760"/>
+            <a:ext cx="6537960" cy="4160520"/>
           </a:xfrm>
           <a:prstGeom prst="rect">
             <a:avLst/>
@@ -12403,7 +13518,7 @@
           <a:lstStyle/>
           <a:p>
             <a:r>
-              <a:rPr lang="en-US" sz="1700" dirty="0">
+              <a:rPr lang="en-US" sz="2100" dirty="0">
                 <a:solidFill>
                   <a:srgbClr val="17364A"/>
                 </a:solidFill>
@@ -12413,11 +13528,11 @@
               </a:rPr>
               <a:t>Identify major data quality dimensions relevant to public health AI.</a:t>
             </a:r>
-            <a:endParaRPr lang="en-US" sz="1700" dirty="0"/>
-          </a:p>
-          <a:p>
-            <a:r>
-              <a:rPr lang="en-US" sz="1700" dirty="0">
+            <a:endParaRPr lang="en-US" sz="2100" dirty="0"/>
+          </a:p>
+          <a:p>
+            <a:r>
+              <a:rPr lang="en-US" sz="2100" dirty="0">
                 <a:solidFill>
                   <a:srgbClr val="17364A"/>
                 </a:solidFill>
@@ -12427,11 +13542,11 @@
               </a:rPr>
               <a:t>Explain the difference between general data quality and fitness for a specific use.</a:t>
             </a:r>
-            <a:endParaRPr lang="en-US" sz="1700" dirty="0"/>
-          </a:p>
-          <a:p>
-            <a:r>
-              <a:rPr lang="en-US" sz="1700" dirty="0">
+            <a:endParaRPr lang="en-US" sz="2100" dirty="0"/>
+          </a:p>
+          <a:p>
+            <a:r>
+              <a:rPr lang="en-US" sz="2100" dirty="0">
                 <a:solidFill>
                   <a:srgbClr val="17364A"/>
                 </a:solidFill>
@@ -12439,29 +13554,15 @@
                 <a:ea typeface="Aptos" pitchFamily="34" charset="-122"/>
                 <a:cs typeface="Aptos" pitchFamily="34" charset="-120"/>
               </a:rPr>
-              <a:t>Assess how missingness, timeliness, duplication, coding variation, and representativeness affect AI outputs.</a:t>
-            </a:r>
-            <a:endParaRPr lang="en-US" sz="1700" dirty="0"/>
-          </a:p>
-          <a:p>
-            <a:r>
-              <a:rPr lang="en-US" sz="1700" dirty="0">
-                <a:solidFill>
-                  <a:srgbClr val="17364A"/>
-                </a:solidFill>
-                <a:latin typeface="Aptos" pitchFamily="34" charset="0"/>
-                <a:ea typeface="Aptos" pitchFamily="34" charset="-122"/>
-                <a:cs typeface="Aptos" pitchFamily="34" charset="-120"/>
-              </a:rPr>
-              <a:t>Define quality thresholds, review rules, and escalation criteria for a workflow.</a:t>
-            </a:r>
-            <a:endParaRPr lang="en-US" sz="1700" dirty="0"/>
-          </a:p>
-        </p:txBody>
-      </p:sp>
-      <p:sp>
-        <p:nvSpPr>
-          <p:cNvPr id="11" name="Shape 9"/>
+              <a:t>Assess how missingness, timeliness, duplication, coding variation, and representativeness affect AI.</a:t>
+            </a:r>
+            <a:endParaRPr lang="en-US" sz="2100" dirty="0"/>
+          </a:p>
+        </p:txBody>
+      </p:sp>
+      <p:sp>
+        <p:nvSpPr>
+          <p:cNvPr id="12" name="Shape 10"/>
           <p:cNvSpPr/>
           <p:nvPr/>
         </p:nvSpPr>
@@ -12488,14 +13589,14 @@
       </p:sp>
       <p:sp>
         <p:nvSpPr>
-          <p:cNvPr id="12" name="Text 10"/>
+          <p:cNvPr id="13" name="Text 11"/>
           <p:cNvSpPr/>
           <p:nvPr/>
         </p:nvSpPr>
         <p:spPr>
           <a:xfrm>
             <a:off x="8074152" y="1563624"/>
-            <a:ext cx="2825496" cy="201168"/>
+            <a:ext cx="2825496" cy="256032"/>
           </a:xfrm>
           <a:prstGeom prst="rect">
             <a:avLst/>
@@ -12511,7 +13612,7 @@
               <a:buNone/>
             </a:pPr>
             <a:r>
-              <a:rPr lang="en-US" sz="950" b="1" dirty="0">
+              <a:rPr lang="en-US" sz="1300" b="1" dirty="0">
                 <a:solidFill>
                   <a:srgbClr val="0068B7"/>
                 </a:solidFill>
@@ -12521,20 +13622,20 @@
               </a:rPr>
               <a:t>Key idea</a:t>
             </a:r>
-            <a:endParaRPr lang="en-US" sz="950" dirty="0"/>
-          </a:p>
-        </p:txBody>
-      </p:sp>
-      <p:sp>
-        <p:nvSpPr>
-          <p:cNvPr id="13" name="Text 11"/>
-          <p:cNvSpPr/>
-          <p:nvPr/>
-        </p:nvSpPr>
-        <p:spPr>
-          <a:xfrm>
-            <a:off x="8074152" y="1856232"/>
-            <a:ext cx="2825496" cy="1261872"/>
+            <a:endParaRPr lang="en-US" sz="1300" dirty="0"/>
+          </a:p>
+        </p:txBody>
+      </p:sp>
+      <p:sp>
+        <p:nvSpPr>
+          <p:cNvPr id="14" name="Text 12"/>
+          <p:cNvSpPr/>
+          <p:nvPr/>
+        </p:nvSpPr>
+        <p:spPr>
+          <a:xfrm>
+            <a:off x="8074152" y="1920240"/>
+            <a:ext cx="2825496" cy="1188720"/>
           </a:xfrm>
           <a:prstGeom prst="rect">
             <a:avLst/>
@@ -12552,7 +13653,7 @@
               <a:buNone/>
             </a:pPr>
             <a:r>
-              <a:rPr lang="en-US" sz="1250" dirty="0">
+              <a:rPr lang="en-US" sz="1550" dirty="0">
                 <a:solidFill>
                   <a:srgbClr val="17364A"/>
                 </a:solidFill>
@@ -12562,13 +13663,13 @@
               </a:rPr>
               <a:t>Identify major data quality dimensions relevant to public health AI.</a:t>
             </a:r>
-            <a:endParaRPr lang="en-US" sz="1250" dirty="0"/>
-          </a:p>
-        </p:txBody>
-      </p:sp>
-      <p:sp>
-        <p:nvSpPr>
-          <p:cNvPr id="14" name="Shape 12"/>
+            <a:endParaRPr lang="en-US" sz="1550" dirty="0"/>
+          </a:p>
+        </p:txBody>
+      </p:sp>
+      <p:sp>
+        <p:nvSpPr>
+          <p:cNvPr id="15" name="Shape 13"/>
           <p:cNvSpPr/>
           <p:nvPr/>
         </p:nvSpPr>
@@ -12595,14 +13696,14 @@
       </p:sp>
       <p:sp>
         <p:nvSpPr>
-          <p:cNvPr id="15" name="Text 13"/>
+          <p:cNvPr id="16" name="Text 14"/>
           <p:cNvSpPr/>
           <p:nvPr/>
         </p:nvSpPr>
         <p:spPr>
           <a:xfrm>
             <a:off x="8074152" y="3666744"/>
-            <a:ext cx="2825496" cy="201168"/>
+            <a:ext cx="2825496" cy="256032"/>
           </a:xfrm>
           <a:prstGeom prst="rect">
             <a:avLst/>
@@ -12618,7 +13719,7 @@
               <a:buNone/>
             </a:pPr>
             <a:r>
-              <a:rPr lang="en-US" sz="950" b="1" dirty="0">
+              <a:rPr lang="en-US" sz="1300" b="1" dirty="0">
                 <a:solidFill>
                   <a:srgbClr val="0068B7"/>
                 </a:solidFill>
@@ -12628,20 +13729,20 @@
               </a:rPr>
               <a:t>Use this for</a:t>
             </a:r>
-            <a:endParaRPr lang="en-US" sz="950" dirty="0"/>
-          </a:p>
-        </p:txBody>
-      </p:sp>
-      <p:sp>
-        <p:nvSpPr>
-          <p:cNvPr id="16" name="Text 14"/>
-          <p:cNvSpPr/>
-          <p:nvPr/>
-        </p:nvSpPr>
-        <p:spPr>
-          <a:xfrm>
-            <a:off x="8074152" y="3959352"/>
-            <a:ext cx="2825496" cy="1170432"/>
+            <a:endParaRPr lang="en-US" sz="1300" dirty="0"/>
+          </a:p>
+        </p:txBody>
+      </p:sp>
+      <p:sp>
+        <p:nvSpPr>
+          <p:cNvPr id="17" name="Text 15"/>
+          <p:cNvSpPr/>
+          <p:nvPr/>
+        </p:nvSpPr>
+        <p:spPr>
+          <a:xfrm>
+            <a:off x="8074152" y="4023360"/>
+            <a:ext cx="2825496" cy="1097280"/>
           </a:xfrm>
           <a:prstGeom prst="rect">
             <a:avLst/>
@@ -12659,7 +13760,7 @@
               <a:buNone/>
             </a:pPr>
             <a:r>
-              <a:rPr lang="en-US" sz="1250" dirty="0">
+              <a:rPr lang="en-US" sz="1550" dirty="0">
                 <a:solidFill>
                   <a:srgbClr val="17364A"/>
                 </a:solidFill>
@@ -12669,7 +13770,7 @@
               </a:rPr>
               <a:t>Connect the concept to public health decisions, safeguards, documentation, or implementation work.</a:t>
             </a:r>
-            <a:endParaRPr lang="en-US" sz="1250" dirty="0"/>
+            <a:endParaRPr lang="en-US" sz="1550" dirty="0"/>
           </a:p>
         </p:txBody>
       </p:sp>
@@ -12866,7 +13967,7 @@
                 <a:ea typeface="Aptos" pitchFamily="34" charset="-122"/>
                 <a:cs typeface="Aptos" pitchFamily="34" charset="-120"/>
               </a:rPr>
-              <a:t>© Paula Soper</a:t>
+              <a:t>Â© Paula Soper</a:t>
             </a:r>
             <a:endParaRPr lang="en-US" sz="800" dirty="0"/>
           </a:p>
@@ -12874,7 +13975,46 @@
       </p:sp>
       <p:sp>
         <p:nvSpPr>
-          <p:cNvPr id="7" name="Shape 5"/>
+          <p:cNvPr id="7" name="Text 5"/>
+          <p:cNvSpPr/>
+          <p:nvPr/>
+        </p:nvSpPr>
+        <p:spPr>
+          <a:xfrm>
+            <a:off x="11137392" y="6510528"/>
+            <a:ext cx="411480" cy="201168"/>
+          </a:xfrm>
+          <a:prstGeom prst="rect">
+            <a:avLst/>
+          </a:prstGeom>
+          <a:noFill/>
+          <a:ln/>
+        </p:spPr>
+        <p:txBody>
+          <a:bodyPr wrap="square" lIns="0" tIns="0" rIns="0" bIns="0" rtlCol="0" anchor="ctr"/>
+          <a:lstStyle/>
+          <a:p>
+            <a:pPr algn="r" indent="0" marL="0">
+              <a:buNone/>
+            </a:pPr>
+            <a:r>
+              <a:rPr lang="en-US" sz="900" dirty="0">
+                <a:solidFill>
+                  <a:srgbClr val="5F7181"/>
+                </a:solidFill>
+                <a:latin typeface="Aptos" pitchFamily="34" charset="0"/>
+                <a:ea typeface="Aptos" pitchFamily="34" charset="-122"/>
+                <a:cs typeface="Aptos" pitchFamily="34" charset="-120"/>
+              </a:rPr>
+              <a:t>6</a:t>
+            </a:r>
+            <a:endParaRPr lang="en-US" sz="900" dirty="0"/>
+          </a:p>
+        </p:txBody>
+      </p:sp>
+      <p:sp>
+        <p:nvSpPr>
+          <p:cNvPr id="8" name="Shape 6"/>
           <p:cNvSpPr/>
           <p:nvPr/>
         </p:nvSpPr>
@@ -12899,7 +14039,7 @@
       </p:sp>
       <p:sp>
         <p:nvSpPr>
-          <p:cNvPr id="8" name="Text 6"/>
+          <p:cNvPr id="9" name="Text 7"/>
           <p:cNvSpPr/>
           <p:nvPr/>
         </p:nvSpPr>
@@ -12938,14 +14078,14 @@
       </p:sp>
       <p:sp>
         <p:nvSpPr>
-          <p:cNvPr id="9" name="Text 7"/>
+          <p:cNvPr id="10" name="Text 8"/>
           <p:cNvSpPr/>
           <p:nvPr/>
         </p:nvSpPr>
         <p:spPr>
           <a:xfrm>
             <a:off x="640080" y="621792"/>
-            <a:ext cx="10881360" cy="566928"/>
+            <a:ext cx="10881360" cy="713232"/>
           </a:xfrm>
           <a:prstGeom prst="rect">
             <a:avLst/>
@@ -12963,7 +14103,7 @@
               <a:buNone/>
             </a:pPr>
             <a:r>
-              <a:rPr lang="en-US" sz="2700" b="1" dirty="0">
+              <a:rPr lang="en-US" sz="3400" b="1" dirty="0">
                 <a:solidFill>
                   <a:srgbClr val="003A63"/>
                 </a:solidFill>
@@ -12973,20 +14113,20 @@
               </a:rPr>
               <a:t>Module Overview</a:t>
             </a:r>
-            <a:endParaRPr lang="en-US" sz="2700" dirty="0"/>
-          </a:p>
-        </p:txBody>
-      </p:sp>
-      <p:sp>
-        <p:nvSpPr>
-          <p:cNvPr id="10" name="Text 8"/>
-          <p:cNvSpPr/>
-          <p:nvPr/>
-        </p:nvSpPr>
-        <p:spPr>
-          <a:xfrm>
-            <a:off x="868680" y="1417320"/>
-            <a:ext cx="6675120" cy="4434840"/>
+            <a:endParaRPr lang="en-US" sz="3400" dirty="0"/>
+          </a:p>
+        </p:txBody>
+      </p:sp>
+      <p:sp>
+        <p:nvSpPr>
+          <p:cNvPr id="11" name="Text 9"/>
+          <p:cNvSpPr/>
+          <p:nvPr/>
+        </p:nvSpPr>
+        <p:spPr>
+          <a:xfrm>
+            <a:off x="868680" y="1508760"/>
+            <a:ext cx="6537960" cy="4160520"/>
           </a:xfrm>
           <a:prstGeom prst="rect">
             <a:avLst/>
@@ -13001,7 +14141,7 @@
           <a:lstStyle/>
           <a:p>
             <a:r>
-              <a:rPr lang="en-US" sz="1700" dirty="0">
+              <a:rPr lang="en-US" sz="2100" dirty="0">
                 <a:solidFill>
                   <a:srgbClr val="17364A"/>
                 </a:solidFill>
@@ -13009,13 +14149,13 @@
                 <a:ea typeface="Aptos" pitchFamily="34" charset="-122"/>
                 <a:cs typeface="Aptos" pitchFamily="34" charset="-120"/>
               </a:rPr>
-              <a:t>Data quality engineering is the practical work of defining, measuring, improving, and monitoring data quality so that data.</a:t>
-            </a:r>
-            <a:endParaRPr lang="en-US" sz="1700" dirty="0"/>
-          </a:p>
-          <a:p>
-            <a:r>
-              <a:rPr lang="en-US" sz="1700" dirty="0">
+              <a:t>Data quality engineering is the practical work of defining, measuring, improving, and monitoring data.</a:t>
+            </a:r>
+            <a:endParaRPr lang="en-US" sz="2100" dirty="0"/>
+          </a:p>
+          <a:p>
+            <a:r>
+              <a:rPr lang="en-US" sz="2100" dirty="0">
                 <a:solidFill>
                   <a:srgbClr val="17364A"/>
                 </a:solidFill>
@@ -13025,11 +14165,11 @@
               </a:rPr>
               <a:t>In public health AI, data quality is not a background concern.</a:t>
             </a:r>
-            <a:endParaRPr lang="en-US" sz="1700" dirty="0"/>
-          </a:p>
-          <a:p>
-            <a:r>
-              <a:rPr lang="en-US" sz="1700" dirty="0">
+            <a:endParaRPr lang="en-US" sz="2100" dirty="0"/>
+          </a:p>
+          <a:p>
+            <a:r>
+              <a:rPr lang="en-US" sz="2100" dirty="0">
                 <a:solidFill>
                   <a:srgbClr val="17364A"/>
                 </a:solidFill>
@@ -13037,15 +14177,15 @@
                 <a:ea typeface="Aptos" pitchFamily="34" charset="-122"/>
                 <a:cs typeface="Aptos" pitchFamily="34" charset="-120"/>
               </a:rPr>
-              <a:t>It directly affects whether AI outputs are accurate, equitable, timely, and safe enough to support public health work.</a:t>
-            </a:r>
-            <a:endParaRPr lang="en-US" sz="1700" dirty="0"/>
-          </a:p>
-        </p:txBody>
-      </p:sp>
-      <p:sp>
-        <p:nvSpPr>
-          <p:cNvPr id="11" name="Shape 9"/>
+              <a:t>It directly affects whether AI outputs are accurate, equitable, timely, and safe enough to support.</a:t>
+            </a:r>
+            <a:endParaRPr lang="en-US" sz="2100" dirty="0"/>
+          </a:p>
+        </p:txBody>
+      </p:sp>
+      <p:sp>
+        <p:nvSpPr>
+          <p:cNvPr id="12" name="Shape 10"/>
           <p:cNvSpPr/>
           <p:nvPr/>
         </p:nvSpPr>
@@ -13072,14 +14212,14 @@
       </p:sp>
       <p:sp>
         <p:nvSpPr>
-          <p:cNvPr id="12" name="Text 10"/>
+          <p:cNvPr id="13" name="Text 11"/>
           <p:cNvSpPr/>
           <p:nvPr/>
         </p:nvSpPr>
         <p:spPr>
           <a:xfrm>
             <a:off x="8074152" y="1563624"/>
-            <a:ext cx="2825496" cy="201168"/>
+            <a:ext cx="2825496" cy="256032"/>
           </a:xfrm>
           <a:prstGeom prst="rect">
             <a:avLst/>
@@ -13095,7 +14235,7 @@
               <a:buNone/>
             </a:pPr>
             <a:r>
-              <a:rPr lang="en-US" sz="950" b="1" dirty="0">
+              <a:rPr lang="en-US" sz="1300" b="1" dirty="0">
                 <a:solidFill>
                   <a:srgbClr val="0068B7"/>
                 </a:solidFill>
@@ -13105,20 +14245,20 @@
               </a:rPr>
               <a:t>Key idea</a:t>
             </a:r>
-            <a:endParaRPr lang="en-US" sz="950" dirty="0"/>
-          </a:p>
-        </p:txBody>
-      </p:sp>
-      <p:sp>
-        <p:nvSpPr>
-          <p:cNvPr id="13" name="Text 11"/>
-          <p:cNvSpPr/>
-          <p:nvPr/>
-        </p:nvSpPr>
-        <p:spPr>
-          <a:xfrm>
-            <a:off x="8074152" y="1856232"/>
-            <a:ext cx="2825496" cy="1261872"/>
+            <a:endParaRPr lang="en-US" sz="1300" dirty="0"/>
+          </a:p>
+        </p:txBody>
+      </p:sp>
+      <p:sp>
+        <p:nvSpPr>
+          <p:cNvPr id="14" name="Text 12"/>
+          <p:cNvSpPr/>
+          <p:nvPr/>
+        </p:nvSpPr>
+        <p:spPr>
+          <a:xfrm>
+            <a:off x="8074152" y="1920240"/>
+            <a:ext cx="2825496" cy="1188720"/>
           </a:xfrm>
           <a:prstGeom prst="rect">
             <a:avLst/>
@@ -13136,7 +14276,7 @@
               <a:buNone/>
             </a:pPr>
             <a:r>
-              <a:rPr lang="en-US" sz="1250" dirty="0">
+              <a:rPr lang="en-US" sz="1550" dirty="0">
                 <a:solidFill>
                   <a:srgbClr val="17364A"/>
                 </a:solidFill>
@@ -13144,15 +14284,15 @@
                 <a:ea typeface="Aptos" pitchFamily="34" charset="-122"/>
                 <a:cs typeface="Aptos" pitchFamily="34" charset="-120"/>
               </a:rPr>
-              <a:t>Data quality engineering is the practical work of defining, measuring, improving, and monitoring data quality so that data.</a:t>
-            </a:r>
-            <a:endParaRPr lang="en-US" sz="1250" dirty="0"/>
-          </a:p>
-        </p:txBody>
-      </p:sp>
-      <p:sp>
-        <p:nvSpPr>
-          <p:cNvPr id="14" name="Shape 12"/>
+              <a:t>Data quality engineering is the practical work of defining, measuring, improving, and monitoring data.</a:t>
+            </a:r>
+            <a:endParaRPr lang="en-US" sz="1550" dirty="0"/>
+          </a:p>
+        </p:txBody>
+      </p:sp>
+      <p:sp>
+        <p:nvSpPr>
+          <p:cNvPr id="15" name="Shape 13"/>
           <p:cNvSpPr/>
           <p:nvPr/>
         </p:nvSpPr>
@@ -13179,14 +14319,14 @@
       </p:sp>
       <p:sp>
         <p:nvSpPr>
-          <p:cNvPr id="15" name="Text 13"/>
+          <p:cNvPr id="16" name="Text 14"/>
           <p:cNvSpPr/>
           <p:nvPr/>
         </p:nvSpPr>
         <p:spPr>
           <a:xfrm>
             <a:off x="8074152" y="3666744"/>
-            <a:ext cx="2825496" cy="201168"/>
+            <a:ext cx="2825496" cy="256032"/>
           </a:xfrm>
           <a:prstGeom prst="rect">
             <a:avLst/>
@@ -13202,7 +14342,7 @@
               <a:buNone/>
             </a:pPr>
             <a:r>
-              <a:rPr lang="en-US" sz="950" b="1" dirty="0">
+              <a:rPr lang="en-US" sz="1300" b="1" dirty="0">
                 <a:solidFill>
                   <a:srgbClr val="0068B7"/>
                 </a:solidFill>
@@ -13212,20 +14352,20 @@
               </a:rPr>
               <a:t>Use this for</a:t>
             </a:r>
-            <a:endParaRPr lang="en-US" sz="950" dirty="0"/>
-          </a:p>
-        </p:txBody>
-      </p:sp>
-      <p:sp>
-        <p:nvSpPr>
-          <p:cNvPr id="16" name="Text 14"/>
-          <p:cNvSpPr/>
-          <p:nvPr/>
-        </p:nvSpPr>
-        <p:spPr>
-          <a:xfrm>
-            <a:off x="8074152" y="3959352"/>
-            <a:ext cx="2825496" cy="1170432"/>
+            <a:endParaRPr lang="en-US" sz="1300" dirty="0"/>
+          </a:p>
+        </p:txBody>
+      </p:sp>
+      <p:sp>
+        <p:nvSpPr>
+          <p:cNvPr id="17" name="Text 15"/>
+          <p:cNvSpPr/>
+          <p:nvPr/>
+        </p:nvSpPr>
+        <p:spPr>
+          <a:xfrm>
+            <a:off x="8074152" y="4023360"/>
+            <a:ext cx="2825496" cy="1097280"/>
           </a:xfrm>
           <a:prstGeom prst="rect">
             <a:avLst/>
@@ -13243,7 +14383,7 @@
               <a:buNone/>
             </a:pPr>
             <a:r>
-              <a:rPr lang="en-US" sz="1250" dirty="0">
+              <a:rPr lang="en-US" sz="1550" dirty="0">
                 <a:solidFill>
                   <a:srgbClr val="17364A"/>
                 </a:solidFill>
@@ -13253,7 +14393,7 @@
               </a:rPr>
               <a:t>Connect the concept to public health decisions, safeguards, documentation, or implementation work.</a:t>
             </a:r>
-            <a:endParaRPr lang="en-US" sz="1250" dirty="0"/>
+            <a:endParaRPr lang="en-US" sz="1550" dirty="0"/>
           </a:p>
         </p:txBody>
       </p:sp>
@@ -13450,7 +14590,7 @@
                 <a:ea typeface="Aptos" pitchFamily="34" charset="-122"/>
                 <a:cs typeface="Aptos" pitchFamily="34" charset="-120"/>
               </a:rPr>
-              <a:t>© Paula Soper</a:t>
+              <a:t>Â© Paula Soper</a:t>
             </a:r>
             <a:endParaRPr lang="en-US" sz="800" dirty="0"/>
           </a:p>
@@ -13458,7 +14598,46 @@
       </p:sp>
       <p:sp>
         <p:nvSpPr>
-          <p:cNvPr id="7" name="Shape 5"/>
+          <p:cNvPr id="7" name="Text 5"/>
+          <p:cNvSpPr/>
+          <p:nvPr/>
+        </p:nvSpPr>
+        <p:spPr>
+          <a:xfrm>
+            <a:off x="11137392" y="6510528"/>
+            <a:ext cx="411480" cy="201168"/>
+          </a:xfrm>
+          <a:prstGeom prst="rect">
+            <a:avLst/>
+          </a:prstGeom>
+          <a:noFill/>
+          <a:ln/>
+        </p:spPr>
+        <p:txBody>
+          <a:bodyPr wrap="square" lIns="0" tIns="0" rIns="0" bIns="0" rtlCol="0" anchor="ctr"/>
+          <a:lstStyle/>
+          <a:p>
+            <a:pPr algn="r" indent="0" marL="0">
+              <a:buNone/>
+            </a:pPr>
+            <a:r>
+              <a:rPr lang="en-US" sz="900" dirty="0">
+                <a:solidFill>
+                  <a:srgbClr val="5F7181"/>
+                </a:solidFill>
+                <a:latin typeface="Aptos" pitchFamily="34" charset="0"/>
+                <a:ea typeface="Aptos" pitchFamily="34" charset="-122"/>
+                <a:cs typeface="Aptos" pitchFamily="34" charset="-120"/>
+              </a:rPr>
+              <a:t>7</a:t>
+            </a:r>
+            <a:endParaRPr lang="en-US" sz="900" dirty="0"/>
+          </a:p>
+        </p:txBody>
+      </p:sp>
+      <p:sp>
+        <p:nvSpPr>
+          <p:cNvPr id="8" name="Shape 6"/>
           <p:cNvSpPr/>
           <p:nvPr/>
         </p:nvSpPr>
@@ -13483,7 +14662,7 @@
       </p:sp>
       <p:sp>
         <p:nvSpPr>
-          <p:cNvPr id="8" name="Text 6"/>
+          <p:cNvPr id="9" name="Text 7"/>
           <p:cNvSpPr/>
           <p:nvPr/>
         </p:nvSpPr>
@@ -13522,14 +14701,14 @@
       </p:sp>
       <p:sp>
         <p:nvSpPr>
-          <p:cNvPr id="9" name="Text 7"/>
+          <p:cNvPr id="10" name="Text 8"/>
           <p:cNvSpPr/>
           <p:nvPr/>
         </p:nvSpPr>
         <p:spPr>
           <a:xfrm>
             <a:off x="640080" y="621792"/>
-            <a:ext cx="10881360" cy="566928"/>
+            <a:ext cx="10881360" cy="713232"/>
           </a:xfrm>
           <a:prstGeom prst="rect">
             <a:avLst/>
@@ -13547,7 +14726,7 @@
               <a:buNone/>
             </a:pPr>
             <a:r>
-              <a:rPr lang="en-US" sz="2700" b="1" dirty="0">
+              <a:rPr lang="en-US" sz="3400" b="1" dirty="0">
                 <a:solidFill>
                   <a:srgbClr val="003A63"/>
                 </a:solidFill>
@@ -13557,20 +14736,20 @@
               </a:rPr>
               <a:t>Why This Topic Matters for Public Health AI</a:t>
             </a:r>
-            <a:endParaRPr lang="en-US" sz="2700" dirty="0"/>
-          </a:p>
-        </p:txBody>
-      </p:sp>
-      <p:sp>
-        <p:nvSpPr>
-          <p:cNvPr id="10" name="Text 8"/>
-          <p:cNvSpPr/>
-          <p:nvPr/>
-        </p:nvSpPr>
-        <p:spPr>
-          <a:xfrm>
-            <a:off x="868680" y="1417320"/>
-            <a:ext cx="6675120" cy="4434840"/>
+            <a:endParaRPr lang="en-US" sz="3400" dirty="0"/>
+          </a:p>
+        </p:txBody>
+      </p:sp>
+      <p:sp>
+        <p:nvSpPr>
+          <p:cNvPr id="11" name="Text 9"/>
+          <p:cNvSpPr/>
+          <p:nvPr/>
+        </p:nvSpPr>
+        <p:spPr>
+          <a:xfrm>
+            <a:off x="868680" y="1508760"/>
+            <a:ext cx="6537960" cy="4160520"/>
           </a:xfrm>
           <a:prstGeom prst="rect">
             <a:avLst/>
@@ -13585,7 +14764,7 @@
           <a:lstStyle/>
           <a:p>
             <a:r>
-              <a:rPr lang="en-US" sz="1700" dirty="0">
+              <a:rPr lang="en-US" sz="2100" dirty="0">
                 <a:solidFill>
                   <a:srgbClr val="17364A"/>
                 </a:solidFill>
@@ -13595,11 +14774,11 @@
               </a:rPr>
               <a:t>AI systems can create a false sense of precision when they produce polished outputs from weak data.</a:t>
             </a:r>
-            <a:endParaRPr lang="en-US" sz="1700" dirty="0"/>
-          </a:p>
-          <a:p>
-            <a:r>
-              <a:rPr lang="en-US" sz="1700" dirty="0">
+            <a:endParaRPr lang="en-US" sz="2100" dirty="0"/>
+          </a:p>
+          <a:p>
+            <a:r>
+              <a:rPr lang="en-US" sz="2100" dirty="0">
                 <a:solidFill>
                   <a:srgbClr val="17364A"/>
                 </a:solidFill>
@@ -13609,11 +14788,11 @@
               </a:rPr>
               <a:t>A summary may sound authoritative even when key fields are missing.</a:t>
             </a:r>
-            <a:endParaRPr lang="en-US" sz="1700" dirty="0"/>
-          </a:p>
-          <a:p>
-            <a:r>
-              <a:rPr lang="en-US" sz="1700" dirty="0">
+            <a:endParaRPr lang="en-US" sz="2100" dirty="0"/>
+          </a:p>
+          <a:p>
+            <a:r>
+              <a:rPr lang="en-US" sz="2100" dirty="0">
                 <a:solidFill>
                   <a:srgbClr val="17364A"/>
                 </a:solidFill>
@@ -13621,29 +14800,15 @@
                 <a:ea typeface="Aptos" pitchFamily="34" charset="-122"/>
                 <a:cs typeface="Aptos" pitchFamily="34" charset="-120"/>
               </a:rPr>
-              <a:t>A risk score may look objective even when the data underrepresent communities with limited healthcare access.</a:t>
-            </a:r>
-            <a:endParaRPr lang="en-US" sz="1700" dirty="0"/>
-          </a:p>
-          <a:p>
-            <a:r>
-              <a:rPr lang="en-US" sz="1700" dirty="0">
-                <a:solidFill>
-                  <a:srgbClr val="17364A"/>
-                </a:solidFill>
-                <a:latin typeface="Aptos" pitchFamily="34" charset="0"/>
-                <a:ea typeface="Aptos" pitchFamily="34" charset="-122"/>
-                <a:cs typeface="Aptos" pitchFamily="34" charset="-120"/>
-              </a:rPr>
-              <a:t>A classification model may appear efficient while encoding historical reporting patterns.</a:t>
-            </a:r>
-            <a:endParaRPr lang="en-US" sz="1700" dirty="0"/>
-          </a:p>
-        </p:txBody>
-      </p:sp>
-      <p:sp>
-        <p:nvSpPr>
-          <p:cNvPr id="11" name="Shape 9"/>
+              <a:t>A risk score may look objective even when the data underrepresent communities with limited healthcare.</a:t>
+            </a:r>
+            <a:endParaRPr lang="en-US" sz="2100" dirty="0"/>
+          </a:p>
+        </p:txBody>
+      </p:sp>
+      <p:sp>
+        <p:nvSpPr>
+          <p:cNvPr id="12" name="Shape 10"/>
           <p:cNvSpPr/>
           <p:nvPr/>
         </p:nvSpPr>
@@ -13670,14 +14835,14 @@
       </p:sp>
       <p:sp>
         <p:nvSpPr>
-          <p:cNvPr id="12" name="Text 10"/>
+          <p:cNvPr id="13" name="Text 11"/>
           <p:cNvSpPr/>
           <p:nvPr/>
         </p:nvSpPr>
         <p:spPr>
           <a:xfrm>
             <a:off x="8074152" y="1563624"/>
-            <a:ext cx="2825496" cy="201168"/>
+            <a:ext cx="2825496" cy="256032"/>
           </a:xfrm>
           <a:prstGeom prst="rect">
             <a:avLst/>
@@ -13693,7 +14858,7 @@
               <a:buNone/>
             </a:pPr>
             <a:r>
-              <a:rPr lang="en-US" sz="950" b="1" dirty="0">
+              <a:rPr lang="en-US" sz="1300" b="1" dirty="0">
                 <a:solidFill>
                   <a:srgbClr val="0068B7"/>
                 </a:solidFill>
@@ -13703,20 +14868,20 @@
               </a:rPr>
               <a:t>Key idea</a:t>
             </a:r>
-            <a:endParaRPr lang="en-US" sz="950" dirty="0"/>
-          </a:p>
-        </p:txBody>
-      </p:sp>
-      <p:sp>
-        <p:nvSpPr>
-          <p:cNvPr id="13" name="Text 11"/>
-          <p:cNvSpPr/>
-          <p:nvPr/>
-        </p:nvSpPr>
-        <p:spPr>
-          <a:xfrm>
-            <a:off x="8074152" y="1856232"/>
-            <a:ext cx="2825496" cy="1261872"/>
+            <a:endParaRPr lang="en-US" sz="1300" dirty="0"/>
+          </a:p>
+        </p:txBody>
+      </p:sp>
+      <p:sp>
+        <p:nvSpPr>
+          <p:cNvPr id="14" name="Text 12"/>
+          <p:cNvSpPr/>
+          <p:nvPr/>
+        </p:nvSpPr>
+        <p:spPr>
+          <a:xfrm>
+            <a:off x="8074152" y="1920240"/>
+            <a:ext cx="2825496" cy="1188720"/>
           </a:xfrm>
           <a:prstGeom prst="rect">
             <a:avLst/>
@@ -13734,7 +14899,7 @@
               <a:buNone/>
             </a:pPr>
             <a:r>
-              <a:rPr lang="en-US" sz="1250" dirty="0">
+              <a:rPr lang="en-US" sz="1550" dirty="0">
                 <a:solidFill>
                   <a:srgbClr val="17364A"/>
                 </a:solidFill>
@@ -13744,13 +14909,13 @@
               </a:rPr>
               <a:t>AI systems can create a false sense of precision when they produce polished outputs from weak data.</a:t>
             </a:r>
-            <a:endParaRPr lang="en-US" sz="1250" dirty="0"/>
-          </a:p>
-        </p:txBody>
-      </p:sp>
-      <p:sp>
-        <p:nvSpPr>
-          <p:cNvPr id="14" name="Shape 12"/>
+            <a:endParaRPr lang="en-US" sz="1550" dirty="0"/>
+          </a:p>
+        </p:txBody>
+      </p:sp>
+      <p:sp>
+        <p:nvSpPr>
+          <p:cNvPr id="15" name="Shape 13"/>
           <p:cNvSpPr/>
           <p:nvPr/>
         </p:nvSpPr>
@@ -13777,14 +14942,14 @@
       </p:sp>
       <p:sp>
         <p:nvSpPr>
-          <p:cNvPr id="15" name="Text 13"/>
+          <p:cNvPr id="16" name="Text 14"/>
           <p:cNvSpPr/>
           <p:nvPr/>
         </p:nvSpPr>
         <p:spPr>
           <a:xfrm>
             <a:off x="8074152" y="3666744"/>
-            <a:ext cx="2825496" cy="201168"/>
+            <a:ext cx="2825496" cy="256032"/>
           </a:xfrm>
           <a:prstGeom prst="rect">
             <a:avLst/>
@@ -13800,7 +14965,7 @@
               <a:buNone/>
             </a:pPr>
             <a:r>
-              <a:rPr lang="en-US" sz="950" b="1" dirty="0">
+              <a:rPr lang="en-US" sz="1300" b="1" dirty="0">
                 <a:solidFill>
                   <a:srgbClr val="0068B7"/>
                 </a:solidFill>
@@ -13810,20 +14975,20 @@
               </a:rPr>
               <a:t>Use this for</a:t>
             </a:r>
-            <a:endParaRPr lang="en-US" sz="950" dirty="0"/>
-          </a:p>
-        </p:txBody>
-      </p:sp>
-      <p:sp>
-        <p:nvSpPr>
-          <p:cNvPr id="16" name="Text 14"/>
-          <p:cNvSpPr/>
-          <p:nvPr/>
-        </p:nvSpPr>
-        <p:spPr>
-          <a:xfrm>
-            <a:off x="8074152" y="3959352"/>
-            <a:ext cx="2825496" cy="1170432"/>
+            <a:endParaRPr lang="en-US" sz="1300" dirty="0"/>
+          </a:p>
+        </p:txBody>
+      </p:sp>
+      <p:sp>
+        <p:nvSpPr>
+          <p:cNvPr id="17" name="Text 15"/>
+          <p:cNvSpPr/>
+          <p:nvPr/>
+        </p:nvSpPr>
+        <p:spPr>
+          <a:xfrm>
+            <a:off x="8074152" y="4023360"/>
+            <a:ext cx="2825496" cy="1097280"/>
           </a:xfrm>
           <a:prstGeom prst="rect">
             <a:avLst/>
@@ -13841,7 +15006,7 @@
               <a:buNone/>
             </a:pPr>
             <a:r>
-              <a:rPr lang="en-US" sz="1250" dirty="0">
+              <a:rPr lang="en-US" sz="1550" dirty="0">
                 <a:solidFill>
                   <a:srgbClr val="17364A"/>
                 </a:solidFill>
@@ -13851,7 +15016,7 @@
               </a:rPr>
               <a:t>Connect the concept to public health decisions, safeguards, documentation, or implementation work.</a:t>
             </a:r>
-            <a:endParaRPr lang="en-US" sz="1250" dirty="0"/>
+            <a:endParaRPr lang="en-US" sz="1550" dirty="0"/>
           </a:p>
         </p:txBody>
       </p:sp>
@@ -14048,7 +15213,7 @@
                 <a:ea typeface="Aptos" pitchFamily="34" charset="-122"/>
                 <a:cs typeface="Aptos" pitchFamily="34" charset="-120"/>
               </a:rPr>
-              <a:t>© Paula Soper</a:t>
+              <a:t>Â© Paula Soper</a:t>
             </a:r>
             <a:endParaRPr lang="en-US" sz="800" dirty="0"/>
           </a:p>
@@ -14056,7 +15221,46 @@
       </p:sp>
       <p:sp>
         <p:nvSpPr>
-          <p:cNvPr id="7" name="Shape 5"/>
+          <p:cNvPr id="7" name="Text 5"/>
+          <p:cNvSpPr/>
+          <p:nvPr/>
+        </p:nvSpPr>
+        <p:spPr>
+          <a:xfrm>
+            <a:off x="11137392" y="6510528"/>
+            <a:ext cx="411480" cy="201168"/>
+          </a:xfrm>
+          <a:prstGeom prst="rect">
+            <a:avLst/>
+          </a:prstGeom>
+          <a:noFill/>
+          <a:ln/>
+        </p:spPr>
+        <p:txBody>
+          <a:bodyPr wrap="square" lIns="0" tIns="0" rIns="0" bIns="0" rtlCol="0" anchor="ctr"/>
+          <a:lstStyle/>
+          <a:p>
+            <a:pPr algn="r" indent="0" marL="0">
+              <a:buNone/>
+            </a:pPr>
+            <a:r>
+              <a:rPr lang="en-US" sz="900" dirty="0">
+                <a:solidFill>
+                  <a:srgbClr val="5F7181"/>
+                </a:solidFill>
+                <a:latin typeface="Aptos" pitchFamily="34" charset="0"/>
+                <a:ea typeface="Aptos" pitchFamily="34" charset="-122"/>
+                <a:cs typeface="Aptos" pitchFamily="34" charset="-120"/>
+              </a:rPr>
+              <a:t>8</a:t>
+            </a:r>
+            <a:endParaRPr lang="en-US" sz="900" dirty="0"/>
+          </a:p>
+        </p:txBody>
+      </p:sp>
+      <p:sp>
+        <p:nvSpPr>
+          <p:cNvPr id="8" name="Shape 6"/>
           <p:cNvSpPr/>
           <p:nvPr/>
         </p:nvSpPr>
@@ -14081,7 +15285,7 @@
       </p:sp>
       <p:sp>
         <p:nvSpPr>
-          <p:cNvPr id="8" name="Text 6"/>
+          <p:cNvPr id="9" name="Text 7"/>
           <p:cNvSpPr/>
           <p:nvPr/>
         </p:nvSpPr>
@@ -14120,14 +15324,14 @@
       </p:sp>
       <p:sp>
         <p:nvSpPr>
-          <p:cNvPr id="9" name="Text 7"/>
+          <p:cNvPr id="10" name="Text 8"/>
           <p:cNvSpPr/>
           <p:nvPr/>
         </p:nvSpPr>
         <p:spPr>
           <a:xfrm>
             <a:off x="640080" y="621792"/>
-            <a:ext cx="10881360" cy="566928"/>
+            <a:ext cx="10881360" cy="713232"/>
           </a:xfrm>
           <a:prstGeom prst="rect">
             <a:avLst/>
@@ -14145,7 +15349,7 @@
               <a:buNone/>
             </a:pPr>
             <a:r>
-              <a:rPr lang="en-US" sz="2700" b="1" dirty="0">
+              <a:rPr lang="en-US" sz="3400" b="1" dirty="0">
                 <a:solidFill>
                   <a:srgbClr val="003A63"/>
                 </a:solidFill>
@@ -14155,20 +15359,20 @@
               </a:rPr>
               <a:t>Core Concepts</a:t>
             </a:r>
-            <a:endParaRPr lang="en-US" sz="2700" dirty="0"/>
-          </a:p>
-        </p:txBody>
-      </p:sp>
-      <p:sp>
-        <p:nvSpPr>
-          <p:cNvPr id="10" name="Text 8"/>
-          <p:cNvSpPr/>
-          <p:nvPr/>
-        </p:nvSpPr>
-        <p:spPr>
-          <a:xfrm>
-            <a:off x="868680" y="1417320"/>
-            <a:ext cx="6675120" cy="4434840"/>
+            <a:endParaRPr lang="en-US" sz="3400" dirty="0"/>
+          </a:p>
+        </p:txBody>
+      </p:sp>
+      <p:sp>
+        <p:nvSpPr>
+          <p:cNvPr id="11" name="Text 9"/>
+          <p:cNvSpPr/>
+          <p:nvPr/>
+        </p:nvSpPr>
+        <p:spPr>
+          <a:xfrm>
+            <a:off x="868680" y="1508760"/>
+            <a:ext cx="6537960" cy="4160520"/>
           </a:xfrm>
           <a:prstGeom prst="rect">
             <a:avLst/>
@@ -14183,7 +15387,7 @@
           <a:lstStyle/>
           <a:p>
             <a:r>
-              <a:rPr lang="en-US" sz="1700" dirty="0">
+              <a:rPr lang="en-US" sz="2100" dirty="0">
                 <a:solidFill>
                   <a:srgbClr val="17364A"/>
                 </a:solidFill>
@@ -14193,11 +15397,11 @@
               </a:rPr>
               <a:t>Completeness.</a:t>
             </a:r>
-            <a:endParaRPr lang="en-US" sz="1700" dirty="0"/>
-          </a:p>
-          <a:p>
-            <a:r>
-              <a:rPr lang="en-US" sz="1700" dirty="0">
+            <a:endParaRPr lang="en-US" sz="2100" dirty="0"/>
+          </a:p>
+          <a:p>
+            <a:r>
+              <a:rPr lang="en-US" sz="2100" dirty="0">
                 <a:solidFill>
                   <a:srgbClr val="17364A"/>
                 </a:solidFill>
@@ -14207,11 +15411,11 @@
               </a:rPr>
               <a:t>Completeness refers to whether required data fields are present.</a:t>
             </a:r>
-            <a:endParaRPr lang="en-US" sz="1700" dirty="0"/>
-          </a:p>
-          <a:p>
-            <a:r>
-              <a:rPr lang="en-US" sz="1700" dirty="0">
+            <a:endParaRPr lang="en-US" sz="2100" dirty="0"/>
+          </a:p>
+          <a:p>
+            <a:r>
+              <a:rPr lang="en-US" sz="2100" dirty="0">
                 <a:solidFill>
                   <a:srgbClr val="17364A"/>
                 </a:solidFill>
@@ -14221,27 +15425,13 @@
               </a:rPr>
               <a:t>Missing fields may affect case classification, risk prediction, subgroup analysis, and outreach planning.</a:t>
             </a:r>
-            <a:endParaRPr lang="en-US" sz="1700" dirty="0"/>
-          </a:p>
-          <a:p>
-            <a:r>
-              <a:rPr lang="en-US" sz="1700" dirty="0">
-                <a:solidFill>
-                  <a:srgbClr val="17364A"/>
-                </a:solidFill>
-                <a:latin typeface="Aptos" pitchFamily="34" charset="0"/>
-                <a:ea typeface="Aptos" pitchFamily="34" charset="-122"/>
-                <a:cs typeface="Aptos" pitchFamily="34" charset="-120"/>
-              </a:rPr>
-              <a:t>Timeliness.</a:t>
-            </a:r>
-            <a:endParaRPr lang="en-US" sz="1700" dirty="0"/>
-          </a:p>
-        </p:txBody>
-      </p:sp>
-      <p:sp>
-        <p:nvSpPr>
-          <p:cNvPr id="11" name="Shape 9"/>
+            <a:endParaRPr lang="en-US" sz="2100" dirty="0"/>
+          </a:p>
+        </p:txBody>
+      </p:sp>
+      <p:sp>
+        <p:nvSpPr>
+          <p:cNvPr id="12" name="Shape 10"/>
           <p:cNvSpPr/>
           <p:nvPr/>
         </p:nvSpPr>
@@ -14268,14 +15458,14 @@
       </p:sp>
       <p:sp>
         <p:nvSpPr>
-          <p:cNvPr id="12" name="Text 10"/>
+          <p:cNvPr id="13" name="Text 11"/>
           <p:cNvSpPr/>
           <p:nvPr/>
         </p:nvSpPr>
         <p:spPr>
           <a:xfrm>
             <a:off x="8074152" y="1563624"/>
-            <a:ext cx="2825496" cy="201168"/>
+            <a:ext cx="2825496" cy="256032"/>
           </a:xfrm>
           <a:prstGeom prst="rect">
             <a:avLst/>
@@ -14291,7 +15481,7 @@
               <a:buNone/>
             </a:pPr>
             <a:r>
-              <a:rPr lang="en-US" sz="950" b="1" dirty="0">
+              <a:rPr lang="en-US" sz="1300" b="1" dirty="0">
                 <a:solidFill>
                   <a:srgbClr val="0068B7"/>
                 </a:solidFill>
@@ -14301,20 +15491,20 @@
               </a:rPr>
               <a:t>Key idea</a:t>
             </a:r>
-            <a:endParaRPr lang="en-US" sz="950" dirty="0"/>
-          </a:p>
-        </p:txBody>
-      </p:sp>
-      <p:sp>
-        <p:nvSpPr>
-          <p:cNvPr id="13" name="Text 11"/>
-          <p:cNvSpPr/>
-          <p:nvPr/>
-        </p:nvSpPr>
-        <p:spPr>
-          <a:xfrm>
-            <a:off x="8074152" y="1856232"/>
-            <a:ext cx="2825496" cy="1261872"/>
+            <a:endParaRPr lang="en-US" sz="1300" dirty="0"/>
+          </a:p>
+        </p:txBody>
+      </p:sp>
+      <p:sp>
+        <p:nvSpPr>
+          <p:cNvPr id="14" name="Text 12"/>
+          <p:cNvSpPr/>
+          <p:nvPr/>
+        </p:nvSpPr>
+        <p:spPr>
+          <a:xfrm>
+            <a:off x="8074152" y="1920240"/>
+            <a:ext cx="2825496" cy="1188720"/>
           </a:xfrm>
           <a:prstGeom prst="rect">
             <a:avLst/>
@@ -14332,7 +15522,7 @@
               <a:buNone/>
             </a:pPr>
             <a:r>
-              <a:rPr lang="en-US" sz="1250" dirty="0">
+              <a:rPr lang="en-US" sz="1550" dirty="0">
                 <a:solidFill>
                   <a:srgbClr val="17364A"/>
                 </a:solidFill>
@@ -14342,13 +15532,13 @@
               </a:rPr>
               <a:t>Completeness.</a:t>
             </a:r>
-            <a:endParaRPr lang="en-US" sz="1250" dirty="0"/>
-          </a:p>
-        </p:txBody>
-      </p:sp>
-      <p:sp>
-        <p:nvSpPr>
-          <p:cNvPr id="14" name="Shape 12"/>
+            <a:endParaRPr lang="en-US" sz="1550" dirty="0"/>
+          </a:p>
+        </p:txBody>
+      </p:sp>
+      <p:sp>
+        <p:nvSpPr>
+          <p:cNvPr id="15" name="Shape 13"/>
           <p:cNvSpPr/>
           <p:nvPr/>
         </p:nvSpPr>
@@ -14375,14 +15565,14 @@
       </p:sp>
       <p:sp>
         <p:nvSpPr>
-          <p:cNvPr id="15" name="Text 13"/>
+          <p:cNvPr id="16" name="Text 14"/>
           <p:cNvSpPr/>
           <p:nvPr/>
         </p:nvSpPr>
         <p:spPr>
           <a:xfrm>
             <a:off x="8074152" y="3666744"/>
-            <a:ext cx="2825496" cy="201168"/>
+            <a:ext cx="2825496" cy="256032"/>
           </a:xfrm>
           <a:prstGeom prst="rect">
             <a:avLst/>
@@ -14398,7 +15588,7 @@
               <a:buNone/>
             </a:pPr>
             <a:r>
-              <a:rPr lang="en-US" sz="950" b="1" dirty="0">
+              <a:rPr lang="en-US" sz="1300" b="1" dirty="0">
                 <a:solidFill>
                   <a:srgbClr val="0068B7"/>
                 </a:solidFill>
@@ -14408,20 +15598,20 @@
               </a:rPr>
               <a:t>Use this for</a:t>
             </a:r>
-            <a:endParaRPr lang="en-US" sz="950" dirty="0"/>
-          </a:p>
-        </p:txBody>
-      </p:sp>
-      <p:sp>
-        <p:nvSpPr>
-          <p:cNvPr id="16" name="Text 14"/>
-          <p:cNvSpPr/>
-          <p:nvPr/>
-        </p:nvSpPr>
-        <p:spPr>
-          <a:xfrm>
-            <a:off x="8074152" y="3959352"/>
-            <a:ext cx="2825496" cy="1170432"/>
+            <a:endParaRPr lang="en-US" sz="1300" dirty="0"/>
+          </a:p>
+        </p:txBody>
+      </p:sp>
+      <p:sp>
+        <p:nvSpPr>
+          <p:cNvPr id="17" name="Text 15"/>
+          <p:cNvSpPr/>
+          <p:nvPr/>
+        </p:nvSpPr>
+        <p:spPr>
+          <a:xfrm>
+            <a:off x="8074152" y="4023360"/>
+            <a:ext cx="2825496" cy="1097280"/>
           </a:xfrm>
           <a:prstGeom prst="rect">
             <a:avLst/>
@@ -14439,7 +15629,7 @@
               <a:buNone/>
             </a:pPr>
             <a:r>
-              <a:rPr lang="en-US" sz="1250" dirty="0">
+              <a:rPr lang="en-US" sz="1550" dirty="0">
                 <a:solidFill>
                   <a:srgbClr val="17364A"/>
                 </a:solidFill>
@@ -14449,7 +15639,7 @@
               </a:rPr>
               <a:t>Connect the concept to public health decisions, safeguards, documentation, or implementation work.</a:t>
             </a:r>
-            <a:endParaRPr lang="en-US" sz="1250" dirty="0"/>
+            <a:endParaRPr lang="en-US" sz="1550" dirty="0"/>
           </a:p>
         </p:txBody>
       </p:sp>
@@ -14646,7 +15836,7 @@
                 <a:ea typeface="Aptos" pitchFamily="34" charset="-122"/>
                 <a:cs typeface="Aptos" pitchFamily="34" charset="-120"/>
               </a:rPr>
-              <a:t>© Paula Soper</a:t>
+              <a:t>Â© Paula Soper</a:t>
             </a:r>
             <a:endParaRPr lang="en-US" sz="800" dirty="0"/>
           </a:p>
@@ -14660,8 +15850,47 @@
         </p:nvSpPr>
         <p:spPr>
           <a:xfrm>
+            <a:off x="11137392" y="6510528"/>
+            <a:ext cx="411480" cy="201168"/>
+          </a:xfrm>
+          <a:prstGeom prst="rect">
+            <a:avLst/>
+          </a:prstGeom>
+          <a:noFill/>
+          <a:ln/>
+        </p:spPr>
+        <p:txBody>
+          <a:bodyPr wrap="square" lIns="0" tIns="0" rIns="0" bIns="0" rtlCol="0" anchor="ctr"/>
+          <a:lstStyle/>
+          <a:p>
+            <a:pPr algn="r" indent="0" marL="0">
+              <a:buNone/>
+            </a:pPr>
+            <a:r>
+              <a:rPr lang="en-US" sz="900" dirty="0">
+                <a:solidFill>
+                  <a:srgbClr val="5F7181"/>
+                </a:solidFill>
+                <a:latin typeface="Aptos" pitchFamily="34" charset="0"/>
+                <a:ea typeface="Aptos" pitchFamily="34" charset="-122"/>
+                <a:cs typeface="Aptos" pitchFamily="34" charset="-120"/>
+              </a:rPr>
+              <a:t>9</a:t>
+            </a:r>
+            <a:endParaRPr lang="en-US" sz="900" dirty="0"/>
+          </a:p>
+        </p:txBody>
+      </p:sp>
+      <p:sp>
+        <p:nvSpPr>
+          <p:cNvPr id="8" name="Text 6"/>
+          <p:cNvSpPr/>
+          <p:nvPr/>
+        </p:nvSpPr>
+        <p:spPr>
+          <a:xfrm>
             <a:off x="640080" y="658368"/>
-            <a:ext cx="10881360" cy="566928"/>
+            <a:ext cx="10881360" cy="713232"/>
           </a:xfrm>
           <a:prstGeom prst="rect">
             <a:avLst/>
@@ -14679,7 +15908,7 @@
               <a:buNone/>
             </a:pPr>
             <a:r>
-              <a:rPr lang="en-US" sz="2700" b="1" dirty="0">
+              <a:rPr lang="en-US" sz="3400" b="1" dirty="0">
                 <a:solidFill>
                   <a:srgbClr val="003A63"/>
                 </a:solidFill>
@@ -14689,20 +15918,20 @@
               </a:rPr>
               <a:t>Core Concepts Continued</a:t>
             </a:r>
-            <a:endParaRPr lang="en-US" sz="2700" dirty="0"/>
-          </a:p>
-        </p:txBody>
-      </p:sp>
-      <p:sp>
-        <p:nvSpPr>
-          <p:cNvPr id="8" name="Text 6"/>
-          <p:cNvSpPr/>
-          <p:nvPr/>
-        </p:nvSpPr>
-        <p:spPr>
-          <a:xfrm>
-            <a:off x="868680" y="1417320"/>
-            <a:ext cx="6675120" cy="4434840"/>
+            <a:endParaRPr lang="en-US" sz="3400" dirty="0"/>
+          </a:p>
+        </p:txBody>
+      </p:sp>
+      <p:sp>
+        <p:nvSpPr>
+          <p:cNvPr id="9" name="Text 7"/>
+          <p:cNvSpPr/>
+          <p:nvPr/>
+        </p:nvSpPr>
+        <p:spPr>
+          <a:xfrm>
+            <a:off x="868680" y="1508760"/>
+            <a:ext cx="6537960" cy="4160520"/>
           </a:xfrm>
           <a:prstGeom prst="rect">
             <a:avLst/>
@@ -14717,7 +15946,7 @@
           <a:lstStyle/>
           <a:p>
             <a:r>
-              <a:rPr lang="en-US" sz="1700" dirty="0">
+              <a:rPr lang="en-US" sz="2100" dirty="0">
                 <a:solidFill>
                   <a:srgbClr val="17364A"/>
                 </a:solidFill>
@@ -14727,11 +15956,11 @@
               </a:rPr>
               <a:t>Representativeness.</a:t>
             </a:r>
-            <a:endParaRPr lang="en-US" sz="1700" dirty="0"/>
-          </a:p>
-          <a:p>
-            <a:r>
-              <a:rPr lang="en-US" sz="1700" dirty="0">
+            <a:endParaRPr lang="en-US" sz="2100" dirty="0"/>
+          </a:p>
+          <a:p>
+            <a:r>
+              <a:rPr lang="en-US" sz="2100" dirty="0">
                 <a:solidFill>
                   <a:srgbClr val="17364A"/>
                 </a:solidFill>
@@ -14739,13 +15968,13 @@
                 <a:ea typeface="Aptos" pitchFamily="34" charset="-122"/>
                 <a:cs typeface="Aptos" pitchFamily="34" charset="-120"/>
               </a:rPr>
-              <a:t>Representativeness refers to whether data reflect the population, events, or settings relevant to the use case.</a:t>
-            </a:r>
-            <a:endParaRPr lang="en-US" sz="1700" dirty="0"/>
-          </a:p>
-          <a:p>
-            <a:r>
-              <a:rPr lang="en-US" sz="1700" dirty="0">
+              <a:t>Representativeness refers to whether data reflect the population, events, or settings relevant to the.</a:t>
+            </a:r>
+            <a:endParaRPr lang="en-US" sz="2100" dirty="0"/>
+          </a:p>
+          <a:p>
+            <a:r>
+              <a:rPr lang="en-US" sz="2100" dirty="0">
                 <a:solidFill>
                   <a:srgbClr val="17364A"/>
                 </a:solidFill>
@@ -14755,27 +15984,13 @@
               </a:rPr>
               <a:t>Underrepresentation can produce biased or incomplete AI outputs.</a:t>
             </a:r>
-            <a:endParaRPr lang="en-US" sz="1700" dirty="0"/>
-          </a:p>
-          <a:p>
-            <a:r>
-              <a:rPr lang="en-US" sz="1700" dirty="0">
-                <a:solidFill>
-                  <a:srgbClr val="17364A"/>
-                </a:solidFill>
-                <a:latin typeface="Aptos" pitchFamily="34" charset="0"/>
-                <a:ea typeface="Aptos" pitchFamily="34" charset="-122"/>
-                <a:cs typeface="Aptos" pitchFamily="34" charset="-120"/>
-              </a:rPr>
-              <a:t>Data drift.</a:t>
-            </a:r>
-            <a:endParaRPr lang="en-US" sz="1700" dirty="0"/>
-          </a:p>
-        </p:txBody>
-      </p:sp>
-      <p:sp>
-        <p:nvSpPr>
-          <p:cNvPr id="9" name="Shape 7"/>
+            <a:endParaRPr lang="en-US" sz="2100" dirty="0"/>
+          </a:p>
+        </p:txBody>
+      </p:sp>
+      <p:sp>
+        <p:nvSpPr>
+          <p:cNvPr id="10" name="Shape 8"/>
           <p:cNvSpPr/>
           <p:nvPr/>
         </p:nvSpPr>
@@ -14802,14 +16017,14 @@
       </p:sp>
       <p:sp>
         <p:nvSpPr>
-          <p:cNvPr id="10" name="Text 8"/>
+          <p:cNvPr id="11" name="Text 9"/>
           <p:cNvSpPr/>
           <p:nvPr/>
         </p:nvSpPr>
         <p:spPr>
           <a:xfrm>
             <a:off x="8074152" y="1563624"/>
-            <a:ext cx="2825496" cy="201168"/>
+            <a:ext cx="2825496" cy="256032"/>
           </a:xfrm>
           <a:prstGeom prst="rect">
             <a:avLst/>
@@ -14825,7 +16040,7 @@
               <a:buNone/>
             </a:pPr>
             <a:r>
-              <a:rPr lang="en-US" sz="950" b="1" dirty="0">
+              <a:rPr lang="en-US" sz="1300" b="1" dirty="0">
                 <a:solidFill>
                   <a:srgbClr val="0068B7"/>
                 </a:solidFill>
@@ -14835,20 +16050,20 @@
               </a:rPr>
               <a:t>Key idea</a:t>
             </a:r>
-            <a:endParaRPr lang="en-US" sz="950" dirty="0"/>
-          </a:p>
-        </p:txBody>
-      </p:sp>
-      <p:sp>
-        <p:nvSpPr>
-          <p:cNvPr id="11" name="Text 9"/>
-          <p:cNvSpPr/>
-          <p:nvPr/>
-        </p:nvSpPr>
-        <p:spPr>
-          <a:xfrm>
-            <a:off x="8074152" y="1856232"/>
-            <a:ext cx="2825496" cy="1261872"/>
+            <a:endParaRPr lang="en-US" sz="1300" dirty="0"/>
+          </a:p>
+        </p:txBody>
+      </p:sp>
+      <p:sp>
+        <p:nvSpPr>
+          <p:cNvPr id="12" name="Text 10"/>
+          <p:cNvSpPr/>
+          <p:nvPr/>
+        </p:nvSpPr>
+        <p:spPr>
+          <a:xfrm>
+            <a:off x="8074152" y="1920240"/>
+            <a:ext cx="2825496" cy="1188720"/>
           </a:xfrm>
           <a:prstGeom prst="rect">
             <a:avLst/>
@@ -14866,7 +16081,7 @@
               <a:buNone/>
             </a:pPr>
             <a:r>
-              <a:rPr lang="en-US" sz="1250" dirty="0">
+              <a:rPr lang="en-US" sz="1550" dirty="0">
                 <a:solidFill>
                   <a:srgbClr val="17364A"/>
                 </a:solidFill>
@@ -14876,13 +16091,13 @@
               </a:rPr>
               <a:t>Representativeness.</a:t>
             </a:r>
-            <a:endParaRPr lang="en-US" sz="1250" dirty="0"/>
-          </a:p>
-        </p:txBody>
-      </p:sp>
-      <p:sp>
-        <p:nvSpPr>
-          <p:cNvPr id="12" name="Shape 10"/>
+            <a:endParaRPr lang="en-US" sz="1550" dirty="0"/>
+          </a:p>
+        </p:txBody>
+      </p:sp>
+      <p:sp>
+        <p:nvSpPr>
+          <p:cNvPr id="13" name="Shape 11"/>
           <p:cNvSpPr/>
           <p:nvPr/>
         </p:nvSpPr>
@@ -14909,14 +16124,14 @@
       </p:sp>
       <p:sp>
         <p:nvSpPr>
-          <p:cNvPr id="13" name="Text 11"/>
+          <p:cNvPr id="14" name="Text 12"/>
           <p:cNvSpPr/>
           <p:nvPr/>
         </p:nvSpPr>
         <p:spPr>
           <a:xfrm>
             <a:off x="8074152" y="3666744"/>
-            <a:ext cx="2825496" cy="201168"/>
+            <a:ext cx="2825496" cy="256032"/>
           </a:xfrm>
           <a:prstGeom prst="rect">
             <a:avLst/>
@@ -14932,7 +16147,7 @@
               <a:buNone/>
             </a:pPr>
             <a:r>
-              <a:rPr lang="en-US" sz="950" b="1" dirty="0">
+              <a:rPr lang="en-US" sz="1300" b="1" dirty="0">
                 <a:solidFill>
                   <a:srgbClr val="0068B7"/>
                 </a:solidFill>
@@ -14942,20 +16157,20 @@
               </a:rPr>
               <a:t>Use this for</a:t>
             </a:r>
-            <a:endParaRPr lang="en-US" sz="950" dirty="0"/>
-          </a:p>
-        </p:txBody>
-      </p:sp>
-      <p:sp>
-        <p:nvSpPr>
-          <p:cNvPr id="14" name="Text 12"/>
-          <p:cNvSpPr/>
-          <p:nvPr/>
-        </p:nvSpPr>
-        <p:spPr>
-          <a:xfrm>
-            <a:off x="8074152" y="3959352"/>
-            <a:ext cx="2825496" cy="1170432"/>
+            <a:endParaRPr lang="en-US" sz="1300" dirty="0"/>
+          </a:p>
+        </p:txBody>
+      </p:sp>
+      <p:sp>
+        <p:nvSpPr>
+          <p:cNvPr id="15" name="Text 13"/>
+          <p:cNvSpPr/>
+          <p:nvPr/>
+        </p:nvSpPr>
+        <p:spPr>
+          <a:xfrm>
+            <a:off x="8074152" y="4023360"/>
+            <a:ext cx="2825496" cy="1097280"/>
           </a:xfrm>
           <a:prstGeom prst="rect">
             <a:avLst/>
@@ -14973,7 +16188,7 @@
               <a:buNone/>
             </a:pPr>
             <a:r>
-              <a:rPr lang="en-US" sz="1250" dirty="0">
+              <a:rPr lang="en-US" sz="1550" dirty="0">
                 <a:solidFill>
                   <a:srgbClr val="17364A"/>
                 </a:solidFill>
@@ -14983,7 +16198,7 @@
               </a:rPr>
               <a:t>Connect the concept to public health decisions, safeguards, documentation, or implementation work.</a:t>
             </a:r>
-            <a:endParaRPr lang="en-US" sz="1250" dirty="0"/>
+            <a:endParaRPr lang="en-US" sz="1550" dirty="0"/>
           </a:p>
         </p:txBody>
       </p:sp>
